--- a/StuntCare_AI_Presentation.pptx
+++ b/StuntCare_AI_Presentation.pptx
@@ -3382,7 +3382,7 @@
                 </a:solidFill>
                 <a:latin typeface="Calibri"/>
               </a:rPr>
-              <a:t>berbasis Random Forest dengan Inferensi di Peramban</a:t>
+              <a:t>berbasis Random Forest yang berjalan di peramban</a:t>
             </a:r>
           </a:p>
         </p:txBody>
@@ -3556,7 +3556,7 @@
         </p:nvSpPr>
         <p:spPr>
           <a:xfrm>
-            <a:off x="548640" y="502920"/>
+            <a:off x="548640" y="457200"/>
             <a:ext cx="548640" cy="82296"/>
           </a:xfrm>
           <a:prstGeom prst="rect">
@@ -3600,8 +3600,8 @@
         </p:nvSpPr>
         <p:spPr>
           <a:xfrm>
-            <a:off x="548640" y="603504"/>
-            <a:ext cx="10058400" cy="365760"/>
+            <a:off x="548640" y="548640"/>
+            <a:ext cx="10515600" cy="365760"/>
           </a:xfrm>
           <a:prstGeom prst="rect">
             <a:avLst/>
@@ -3626,7 +3626,7 @@
                 </a:solidFill>
                 <a:latin typeface="Calibri"/>
               </a:rPr>
-              <a:t>REKAYASA PERANGKAT LUNAK</a:t>
+              <a:t>ARSITEKTUR</a:t>
             </a:r>
           </a:p>
         </p:txBody>
@@ -3639,8 +3639,8 @@
         </p:nvSpPr>
         <p:spPr>
           <a:xfrm>
-            <a:off x="548640" y="868680"/>
-            <a:ext cx="11064240" cy="914400"/>
+            <a:off x="548640" y="804672"/>
+            <a:ext cx="11155680" cy="914400"/>
           </a:xfrm>
           <a:prstGeom prst="rect">
             <a:avLst/>
@@ -3659,27 +3659,115 @@
               </a:spcAft>
             </a:pPr>
             <a:r>
-              <a:rPr sz="3000" b="1" i="0">
+              <a:rPr sz="2800" b="1" i="0">
                 <a:solidFill>
                   <a:srgbClr val="05312A"/>
                 </a:solidFill>
                 <a:latin typeface="Calibri"/>
               </a:rPr>
-              <a:t>Dari Streamlit ke web modern</a:t>
-            </a:r>
-          </a:p>
-        </p:txBody>
-      </p:sp>
-      <p:sp>
-        <p:nvSpPr>
-          <p:cNvPr id="7" name="TextBox 6"/>
+              <a:t>Arsitektur: cara semua bekerja bersama</a:t>
+            </a:r>
+          </a:p>
+        </p:txBody>
+      </p:sp>
+      <p:sp>
+        <p:nvSpPr>
+          <p:cNvPr id="7" name="Rectangle 6"/>
+          <p:cNvSpPr/>
+          <p:nvPr/>
+        </p:nvSpPr>
+        <p:spPr>
+          <a:xfrm>
+            <a:off x="594360" y="1828800"/>
+            <a:ext cx="2606040" cy="1828800"/>
+          </a:xfrm>
+          <a:prstGeom prst="rect">
+            <a:avLst/>
+          </a:prstGeom>
+          <a:solidFill>
+            <a:srgbClr val="EAF7F0"/>
+          </a:solidFill>
+          <a:ln>
+            <a:noFill/>
+          </a:ln>
+          <a:effectLst/>
+        </p:spPr>
+        <p:style>
+          <a:lnRef idx="1">
+            <a:schemeClr val="accent1"/>
+          </a:lnRef>
+          <a:fillRef idx="3">
+            <a:schemeClr val="accent1"/>
+          </a:fillRef>
+          <a:effectRef idx="2">
+            <a:schemeClr val="accent1"/>
+          </a:effectRef>
+          <a:fontRef idx="minor">
+            <a:schemeClr val="lt1"/>
+          </a:fontRef>
+        </p:style>
+        <p:txBody>
+          <a:bodyPr rtlCol="0" anchor="ctr"/>
+          <a:lstStyle/>
+          <a:p>
+            <a:pPr algn="ctr"/>
+          </a:p>
+        </p:txBody>
+      </p:sp>
+      <p:sp>
+        <p:nvSpPr>
+          <p:cNvPr id="8" name="Rectangle 7"/>
+          <p:cNvSpPr/>
+          <p:nvPr/>
+        </p:nvSpPr>
+        <p:spPr>
+          <a:xfrm>
+            <a:off x="594360" y="1828800"/>
+            <a:ext cx="2606040" cy="82296"/>
+          </a:xfrm>
+          <a:prstGeom prst="rect">
+            <a:avLst/>
+          </a:prstGeom>
+          <a:solidFill>
+            <a:srgbClr val="039855"/>
+          </a:solidFill>
+          <a:ln>
+            <a:noFill/>
+          </a:ln>
+          <a:effectLst/>
+        </p:spPr>
+        <p:style>
+          <a:lnRef idx="1">
+            <a:schemeClr val="accent1"/>
+          </a:lnRef>
+          <a:fillRef idx="3">
+            <a:schemeClr val="accent1"/>
+          </a:fillRef>
+          <a:effectRef idx="2">
+            <a:schemeClr val="accent1"/>
+          </a:effectRef>
+          <a:fontRef idx="minor">
+            <a:schemeClr val="lt1"/>
+          </a:fontRef>
+        </p:style>
+        <p:txBody>
+          <a:bodyPr rtlCol="0" anchor="ctr"/>
+          <a:lstStyle/>
+          <a:p>
+            <a:pPr algn="ctr"/>
+          </a:p>
+        </p:txBody>
+      </p:sp>
+      <p:sp>
+        <p:nvSpPr>
+          <p:cNvPr id="9" name="TextBox 8"/>
           <p:cNvSpPr txBox="1"/>
           <p:nvPr/>
         </p:nvSpPr>
         <p:spPr>
           <a:xfrm>
-            <a:off x="640080" y="1920240"/>
-            <a:ext cx="10881360" cy="4206240"/>
+            <a:off x="731520" y="2057400"/>
+            <a:ext cx="2331720" cy="548640"/>
           </a:xfrm>
           <a:prstGeom prst="rect">
             <a:avLst/>
@@ -3687,236 +3775,743 @@
           <a:noFill/>
         </p:spPr>
         <p:txBody>
-          <a:bodyPr wrap="square">
+          <a:bodyPr wrap="square" anchor="t">
             <a:spAutoFit/>
           </a:bodyPr>
           <a:lstStyle/>
           <a:p>
-            <a:pPr>
-              <a:spcAft>
-                <a:spcPts val="1000"/>
-              </a:spcAft>
-            </a:pPr>
-            <a:r>
-              <a:rPr sz="1800" b="1">
+            <a:pPr algn="l">
+              <a:spcAft>
+                <a:spcPts val="600"/>
+              </a:spcAft>
+            </a:pPr>
+            <a:r>
+              <a:rPr sz="1500" b="1" i="0">
+                <a:solidFill>
+                  <a:srgbClr val="05312A"/>
+                </a:solidFill>
+                <a:latin typeface="Calibri"/>
+              </a:rPr>
+              <a:t>1. Isi 7 faktor</a:t>
+            </a:r>
+          </a:p>
+        </p:txBody>
+      </p:sp>
+      <p:sp>
+        <p:nvSpPr>
+          <p:cNvPr id="10" name="TextBox 9"/>
+          <p:cNvSpPr txBox="1"/>
+          <p:nvPr/>
+        </p:nvSpPr>
+        <p:spPr>
+          <a:xfrm>
+            <a:off x="731520" y="2606040"/>
+            <a:ext cx="2331720" cy="914400"/>
+          </a:xfrm>
+          <a:prstGeom prst="rect">
+            <a:avLst/>
+          </a:prstGeom>
+          <a:noFill/>
+        </p:spPr>
+        <p:txBody>
+          <a:bodyPr wrap="square" anchor="t">
+            <a:spAutoFit/>
+          </a:bodyPr>
+          <a:lstStyle/>
+          <a:p>
+            <a:pPr algn="l">
+              <a:spcAft>
+                <a:spcPts val="600"/>
+              </a:spcAft>
+            </a:pPr>
+            <a:r>
+              <a:rPr sz="1200" b="0" i="0">
+                <a:solidFill>
+                  <a:srgbClr val="4B5563"/>
+                </a:solidFill>
+                <a:latin typeface="Calibri"/>
+              </a:rPr>
+              <a:t>Pengguna mengisi data anak &amp; ibu di form.</a:t>
+            </a:r>
+          </a:p>
+        </p:txBody>
+      </p:sp>
+      <p:sp>
+        <p:nvSpPr>
+          <p:cNvPr id="11" name="Rectangle 10"/>
+          <p:cNvSpPr/>
+          <p:nvPr/>
+        </p:nvSpPr>
+        <p:spPr>
+          <a:xfrm>
+            <a:off x="3355848" y="1828800"/>
+            <a:ext cx="2606040" cy="1828800"/>
+          </a:xfrm>
+          <a:prstGeom prst="rect">
+            <a:avLst/>
+          </a:prstGeom>
+          <a:solidFill>
+            <a:srgbClr val="EAF7F0"/>
+          </a:solidFill>
+          <a:ln>
+            <a:noFill/>
+          </a:ln>
+          <a:effectLst/>
+        </p:spPr>
+        <p:style>
+          <a:lnRef idx="1">
+            <a:schemeClr val="accent1"/>
+          </a:lnRef>
+          <a:fillRef idx="3">
+            <a:schemeClr val="accent1"/>
+          </a:fillRef>
+          <a:effectRef idx="2">
+            <a:schemeClr val="accent1"/>
+          </a:effectRef>
+          <a:fontRef idx="minor">
+            <a:schemeClr val="lt1"/>
+          </a:fontRef>
+        </p:style>
+        <p:txBody>
+          <a:bodyPr rtlCol="0" anchor="ctr"/>
+          <a:lstStyle/>
+          <a:p>
+            <a:pPr algn="ctr"/>
+          </a:p>
+        </p:txBody>
+      </p:sp>
+      <p:sp>
+        <p:nvSpPr>
+          <p:cNvPr id="12" name="Rectangle 11"/>
+          <p:cNvSpPr/>
+          <p:nvPr/>
+        </p:nvSpPr>
+        <p:spPr>
+          <a:xfrm>
+            <a:off x="3355848" y="1828800"/>
+            <a:ext cx="2606040" cy="82296"/>
+          </a:xfrm>
+          <a:prstGeom prst="rect">
+            <a:avLst/>
+          </a:prstGeom>
+          <a:solidFill>
+            <a:srgbClr val="039855"/>
+          </a:solidFill>
+          <a:ln>
+            <a:noFill/>
+          </a:ln>
+          <a:effectLst/>
+        </p:spPr>
+        <p:style>
+          <a:lnRef idx="1">
+            <a:schemeClr val="accent1"/>
+          </a:lnRef>
+          <a:fillRef idx="3">
+            <a:schemeClr val="accent1"/>
+          </a:fillRef>
+          <a:effectRef idx="2">
+            <a:schemeClr val="accent1"/>
+          </a:effectRef>
+          <a:fontRef idx="minor">
+            <a:schemeClr val="lt1"/>
+          </a:fontRef>
+        </p:style>
+        <p:txBody>
+          <a:bodyPr rtlCol="0" anchor="ctr"/>
+          <a:lstStyle/>
+          <a:p>
+            <a:pPr algn="ctr"/>
+          </a:p>
+        </p:txBody>
+      </p:sp>
+      <p:sp>
+        <p:nvSpPr>
+          <p:cNvPr id="13" name="TextBox 12"/>
+          <p:cNvSpPr txBox="1"/>
+          <p:nvPr/>
+        </p:nvSpPr>
+        <p:spPr>
+          <a:xfrm>
+            <a:off x="3493008" y="2057400"/>
+            <a:ext cx="2331720" cy="548640"/>
+          </a:xfrm>
+          <a:prstGeom prst="rect">
+            <a:avLst/>
+          </a:prstGeom>
+          <a:noFill/>
+        </p:spPr>
+        <p:txBody>
+          <a:bodyPr wrap="square" anchor="t">
+            <a:spAutoFit/>
+          </a:bodyPr>
+          <a:lstStyle/>
+          <a:p>
+            <a:pPr algn="l">
+              <a:spcAft>
+                <a:spcPts val="600"/>
+              </a:spcAft>
+            </a:pPr>
+            <a:r>
+              <a:rPr sz="1500" b="1" i="0">
+                <a:solidFill>
+                  <a:srgbClr val="05312A"/>
+                </a:solidFill>
+                <a:latin typeface="Calibri"/>
+              </a:rPr>
+              <a:t>2. Web Worker</a:t>
+            </a:r>
+          </a:p>
+        </p:txBody>
+      </p:sp>
+      <p:sp>
+        <p:nvSpPr>
+          <p:cNvPr id="14" name="TextBox 13"/>
+          <p:cNvSpPr txBox="1"/>
+          <p:nvPr/>
+        </p:nvSpPr>
+        <p:spPr>
+          <a:xfrm>
+            <a:off x="3493008" y="2606040"/>
+            <a:ext cx="2331720" cy="914400"/>
+          </a:xfrm>
+          <a:prstGeom prst="rect">
+            <a:avLst/>
+          </a:prstGeom>
+          <a:noFill/>
+        </p:spPr>
+        <p:txBody>
+          <a:bodyPr wrap="square" anchor="t">
+            <a:spAutoFit/>
+          </a:bodyPr>
+          <a:lstStyle/>
+          <a:p>
+            <a:pPr algn="l">
+              <a:spcAft>
+                <a:spcPts val="600"/>
+              </a:spcAft>
+            </a:pPr>
+            <a:r>
+              <a:rPr sz="1200" b="0" i="0">
+                <a:solidFill>
+                  <a:srgbClr val="4B5563"/>
+                </a:solidFill>
+                <a:latin typeface="Calibri"/>
+              </a:rPr>
+              <a:t>Data diproses di pekerja latar, di perangkat.</a:t>
+            </a:r>
+          </a:p>
+        </p:txBody>
+      </p:sp>
+      <p:sp>
+        <p:nvSpPr>
+          <p:cNvPr id="15" name="Rectangle 14"/>
+          <p:cNvSpPr/>
+          <p:nvPr/>
+        </p:nvSpPr>
+        <p:spPr>
+          <a:xfrm>
+            <a:off x="6117336" y="1828800"/>
+            <a:ext cx="2606040" cy="1828800"/>
+          </a:xfrm>
+          <a:prstGeom prst="rect">
+            <a:avLst/>
+          </a:prstGeom>
+          <a:solidFill>
+            <a:srgbClr val="EAF7F0"/>
+          </a:solidFill>
+          <a:ln>
+            <a:noFill/>
+          </a:ln>
+          <a:effectLst/>
+        </p:spPr>
+        <p:style>
+          <a:lnRef idx="1">
+            <a:schemeClr val="accent1"/>
+          </a:lnRef>
+          <a:fillRef idx="3">
+            <a:schemeClr val="accent1"/>
+          </a:fillRef>
+          <a:effectRef idx="2">
+            <a:schemeClr val="accent1"/>
+          </a:effectRef>
+          <a:fontRef idx="minor">
+            <a:schemeClr val="lt1"/>
+          </a:fontRef>
+        </p:style>
+        <p:txBody>
+          <a:bodyPr rtlCol="0" anchor="ctr"/>
+          <a:lstStyle/>
+          <a:p>
+            <a:pPr algn="ctr"/>
+          </a:p>
+        </p:txBody>
+      </p:sp>
+      <p:sp>
+        <p:nvSpPr>
+          <p:cNvPr id="16" name="Rectangle 15"/>
+          <p:cNvSpPr/>
+          <p:nvPr/>
+        </p:nvSpPr>
+        <p:spPr>
+          <a:xfrm>
+            <a:off x="6117336" y="1828800"/>
+            <a:ext cx="2606040" cy="82296"/>
+          </a:xfrm>
+          <a:prstGeom prst="rect">
+            <a:avLst/>
+          </a:prstGeom>
+          <a:solidFill>
+            <a:srgbClr val="039855"/>
+          </a:solidFill>
+          <a:ln>
+            <a:noFill/>
+          </a:ln>
+          <a:effectLst/>
+        </p:spPr>
+        <p:style>
+          <a:lnRef idx="1">
+            <a:schemeClr val="accent1"/>
+          </a:lnRef>
+          <a:fillRef idx="3">
+            <a:schemeClr val="accent1"/>
+          </a:fillRef>
+          <a:effectRef idx="2">
+            <a:schemeClr val="accent1"/>
+          </a:effectRef>
+          <a:fontRef idx="minor">
+            <a:schemeClr val="lt1"/>
+          </a:fontRef>
+        </p:style>
+        <p:txBody>
+          <a:bodyPr rtlCol="0" anchor="ctr"/>
+          <a:lstStyle/>
+          <a:p>
+            <a:pPr algn="ctr"/>
+          </a:p>
+        </p:txBody>
+      </p:sp>
+      <p:sp>
+        <p:nvSpPr>
+          <p:cNvPr id="17" name="TextBox 16"/>
+          <p:cNvSpPr txBox="1"/>
+          <p:nvPr/>
+        </p:nvSpPr>
+        <p:spPr>
+          <a:xfrm>
+            <a:off x="6254496" y="2057400"/>
+            <a:ext cx="2331720" cy="548640"/>
+          </a:xfrm>
+          <a:prstGeom prst="rect">
+            <a:avLst/>
+          </a:prstGeom>
+          <a:noFill/>
+        </p:spPr>
+        <p:txBody>
+          <a:bodyPr wrap="square" anchor="t">
+            <a:spAutoFit/>
+          </a:bodyPr>
+          <a:lstStyle/>
+          <a:p>
+            <a:pPr algn="l">
+              <a:spcAft>
+                <a:spcPts val="600"/>
+              </a:spcAft>
+            </a:pPr>
+            <a:r>
+              <a:rPr sz="1500" b="1" i="0">
+                <a:solidFill>
+                  <a:srgbClr val="05312A"/>
+                </a:solidFill>
+                <a:latin typeface="Calibri"/>
+              </a:rPr>
+              <a:t>3. Random Forest</a:t>
+            </a:r>
+          </a:p>
+        </p:txBody>
+      </p:sp>
+      <p:sp>
+        <p:nvSpPr>
+          <p:cNvPr id="18" name="TextBox 17"/>
+          <p:cNvSpPr txBox="1"/>
+          <p:nvPr/>
+        </p:nvSpPr>
+        <p:spPr>
+          <a:xfrm>
+            <a:off x="6254496" y="2606040"/>
+            <a:ext cx="2331720" cy="914400"/>
+          </a:xfrm>
+          <a:prstGeom prst="rect">
+            <a:avLst/>
+          </a:prstGeom>
+          <a:noFill/>
+        </p:spPr>
+        <p:txBody>
+          <a:bodyPr wrap="square" anchor="t">
+            <a:spAutoFit/>
+          </a:bodyPr>
+          <a:lstStyle/>
+          <a:p>
+            <a:pPr algn="l">
+              <a:spcAft>
+                <a:spcPts val="600"/>
+              </a:spcAft>
+            </a:pPr>
+            <a:r>
+              <a:rPr sz="1200" b="0" i="0">
+                <a:solidFill>
+                  <a:srgbClr val="4B5563"/>
+                </a:solidFill>
+                <a:latin typeface="Calibri"/>
+              </a:rPr>
+              <a:t>Model (format ONNX) menghitung dalam sekejap.</a:t>
+            </a:r>
+          </a:p>
+        </p:txBody>
+      </p:sp>
+      <p:sp>
+        <p:nvSpPr>
+          <p:cNvPr id="19" name="Rectangle 18"/>
+          <p:cNvSpPr/>
+          <p:nvPr/>
+        </p:nvSpPr>
+        <p:spPr>
+          <a:xfrm>
+            <a:off x="8878824" y="1828800"/>
+            <a:ext cx="2606040" cy="1828800"/>
+          </a:xfrm>
+          <a:prstGeom prst="rect">
+            <a:avLst/>
+          </a:prstGeom>
+          <a:solidFill>
+            <a:srgbClr val="EAF7F0"/>
+          </a:solidFill>
+          <a:ln>
+            <a:noFill/>
+          </a:ln>
+          <a:effectLst/>
+        </p:spPr>
+        <p:style>
+          <a:lnRef idx="1">
+            <a:schemeClr val="accent1"/>
+          </a:lnRef>
+          <a:fillRef idx="3">
+            <a:schemeClr val="accent1"/>
+          </a:fillRef>
+          <a:effectRef idx="2">
+            <a:schemeClr val="accent1"/>
+          </a:effectRef>
+          <a:fontRef idx="minor">
+            <a:schemeClr val="lt1"/>
+          </a:fontRef>
+        </p:style>
+        <p:txBody>
+          <a:bodyPr rtlCol="0" anchor="ctr"/>
+          <a:lstStyle/>
+          <a:p>
+            <a:pPr algn="ctr"/>
+          </a:p>
+        </p:txBody>
+      </p:sp>
+      <p:sp>
+        <p:nvSpPr>
+          <p:cNvPr id="20" name="Rectangle 19"/>
+          <p:cNvSpPr/>
+          <p:nvPr/>
+        </p:nvSpPr>
+        <p:spPr>
+          <a:xfrm>
+            <a:off x="8878824" y="1828800"/>
+            <a:ext cx="2606040" cy="82296"/>
+          </a:xfrm>
+          <a:prstGeom prst="rect">
+            <a:avLst/>
+          </a:prstGeom>
+          <a:solidFill>
+            <a:srgbClr val="039855"/>
+          </a:solidFill>
+          <a:ln>
+            <a:noFill/>
+          </a:ln>
+          <a:effectLst/>
+        </p:spPr>
+        <p:style>
+          <a:lnRef idx="1">
+            <a:schemeClr val="accent1"/>
+          </a:lnRef>
+          <a:fillRef idx="3">
+            <a:schemeClr val="accent1"/>
+          </a:fillRef>
+          <a:effectRef idx="2">
+            <a:schemeClr val="accent1"/>
+          </a:effectRef>
+          <a:fontRef idx="minor">
+            <a:schemeClr val="lt1"/>
+          </a:fontRef>
+        </p:style>
+        <p:txBody>
+          <a:bodyPr rtlCol="0" anchor="ctr"/>
+          <a:lstStyle/>
+          <a:p>
+            <a:pPr algn="ctr"/>
+          </a:p>
+        </p:txBody>
+      </p:sp>
+      <p:sp>
+        <p:nvSpPr>
+          <p:cNvPr id="21" name="TextBox 20"/>
+          <p:cNvSpPr txBox="1"/>
+          <p:nvPr/>
+        </p:nvSpPr>
+        <p:spPr>
+          <a:xfrm>
+            <a:off x="9015984" y="2057400"/>
+            <a:ext cx="2331720" cy="548640"/>
+          </a:xfrm>
+          <a:prstGeom prst="rect">
+            <a:avLst/>
+          </a:prstGeom>
+          <a:noFill/>
+        </p:spPr>
+        <p:txBody>
+          <a:bodyPr wrap="square" anchor="t">
+            <a:spAutoFit/>
+          </a:bodyPr>
+          <a:lstStyle/>
+          <a:p>
+            <a:pPr algn="l">
+              <a:spcAft>
+                <a:spcPts val="600"/>
+              </a:spcAft>
+            </a:pPr>
+            <a:r>
+              <a:rPr sz="1500" b="1" i="0">
+                <a:solidFill>
+                  <a:srgbClr val="05312A"/>
+                </a:solidFill>
+                <a:latin typeface="Calibri"/>
+              </a:rPr>
+              <a:t>4. Hasil</a:t>
+            </a:r>
+          </a:p>
+        </p:txBody>
+      </p:sp>
+      <p:sp>
+        <p:nvSpPr>
+          <p:cNvPr id="22" name="TextBox 21"/>
+          <p:cNvSpPr txBox="1"/>
+          <p:nvPr/>
+        </p:nvSpPr>
+        <p:spPr>
+          <a:xfrm>
+            <a:off x="9015984" y="2606040"/>
+            <a:ext cx="2331720" cy="914400"/>
+          </a:xfrm>
+          <a:prstGeom prst="rect">
+            <a:avLst/>
+          </a:prstGeom>
+          <a:noFill/>
+        </p:spPr>
+        <p:txBody>
+          <a:bodyPr wrap="square" anchor="t">
+            <a:spAutoFit/>
+          </a:bodyPr>
+          <a:lstStyle/>
+          <a:p>
+            <a:pPr algn="l">
+              <a:spcAft>
+                <a:spcPts val="600"/>
+              </a:spcAft>
+            </a:pPr>
+            <a:r>
+              <a:rPr sz="1200" b="0" i="0">
+                <a:solidFill>
+                  <a:srgbClr val="4B5563"/>
+                </a:solidFill>
+                <a:latin typeface="Calibri"/>
+              </a:rPr>
+              <a:t>Status gizi + keyakinan + rekomendasi tampil.</a:t>
+            </a:r>
+          </a:p>
+        </p:txBody>
+      </p:sp>
+      <p:sp>
+        <p:nvSpPr>
+          <p:cNvPr id="23" name="Rectangle 22"/>
+          <p:cNvSpPr/>
+          <p:nvPr/>
+        </p:nvSpPr>
+        <p:spPr>
+          <a:xfrm>
+            <a:off x="594360" y="4069080"/>
+            <a:ext cx="10881360" cy="1371600"/>
+          </a:xfrm>
+          <a:prstGeom prst="rect">
+            <a:avLst/>
+          </a:prstGeom>
+          <a:solidFill>
+            <a:srgbClr val="EAF7F0"/>
+          </a:solidFill>
+          <a:ln>
+            <a:noFill/>
+          </a:ln>
+          <a:effectLst/>
+        </p:spPr>
+        <p:style>
+          <a:lnRef idx="1">
+            <a:schemeClr val="accent1"/>
+          </a:lnRef>
+          <a:fillRef idx="3">
+            <a:schemeClr val="accent1"/>
+          </a:fillRef>
+          <a:effectRef idx="2">
+            <a:schemeClr val="accent1"/>
+          </a:effectRef>
+          <a:fontRef idx="minor">
+            <a:schemeClr val="lt1"/>
+          </a:fontRef>
+        </p:style>
+        <p:txBody>
+          <a:bodyPr rtlCol="0" anchor="ctr"/>
+          <a:lstStyle/>
+          <a:p>
+            <a:pPr algn="ctr"/>
+          </a:p>
+        </p:txBody>
+      </p:sp>
+      <p:sp>
+        <p:nvSpPr>
+          <p:cNvPr id="24" name="Rectangle 23"/>
+          <p:cNvSpPr/>
+          <p:nvPr/>
+        </p:nvSpPr>
+        <p:spPr>
+          <a:xfrm>
+            <a:off x="594360" y="4069080"/>
+            <a:ext cx="82296" cy="1371600"/>
+          </a:xfrm>
+          <a:prstGeom prst="rect">
+            <a:avLst/>
+          </a:prstGeom>
+          <a:solidFill>
+            <a:srgbClr val="039855"/>
+          </a:solidFill>
+          <a:ln>
+            <a:noFill/>
+          </a:ln>
+          <a:effectLst/>
+        </p:spPr>
+        <p:style>
+          <a:lnRef idx="1">
+            <a:schemeClr val="accent1"/>
+          </a:lnRef>
+          <a:fillRef idx="3">
+            <a:schemeClr val="accent1"/>
+          </a:fillRef>
+          <a:effectRef idx="2">
+            <a:schemeClr val="accent1"/>
+          </a:effectRef>
+          <a:fontRef idx="minor">
+            <a:schemeClr val="lt1"/>
+          </a:fontRef>
+        </p:style>
+        <p:txBody>
+          <a:bodyPr rtlCol="0" anchor="ctr"/>
+          <a:lstStyle/>
+          <a:p>
+            <a:pPr algn="ctr"/>
+          </a:p>
+        </p:txBody>
+      </p:sp>
+      <p:sp>
+        <p:nvSpPr>
+          <p:cNvPr id="25" name="TextBox 24"/>
+          <p:cNvSpPr txBox="1"/>
+          <p:nvPr/>
+        </p:nvSpPr>
+        <p:spPr>
+          <a:xfrm>
+            <a:off x="795528" y="4178808"/>
+            <a:ext cx="10515600" cy="1170432"/>
+          </a:xfrm>
+          <a:prstGeom prst="rect">
+            <a:avLst/>
+          </a:prstGeom>
+          <a:noFill/>
+        </p:spPr>
+        <p:txBody>
+          <a:bodyPr wrap="square" anchor="t">
+            <a:spAutoFit/>
+          </a:bodyPr>
+          <a:lstStyle/>
+          <a:p>
+            <a:pPr algn="l">
+              <a:spcAft>
+                <a:spcPts val="300"/>
+              </a:spcAft>
+            </a:pPr>
+            <a:r>
+              <a:rPr sz="1300" b="1" i="0">
                 <a:solidFill>
                   <a:srgbClr val="039855"/>
                 </a:solidFill>
-              </a:rPr>
-              <a:t>▸  </a:t>
-            </a:r>
-            <a:r>
-              <a:rPr sz="1800" b="0">
+                <a:latin typeface="Calibri"/>
+              </a:rPr>
+              <a:t>Istilah teknis (sederhana)</a:t>
+            </a:r>
+          </a:p>
+          <a:p>
+            <a:pPr algn="l">
+              <a:spcAft>
+                <a:spcPts val="300"/>
+              </a:spcAft>
+            </a:pPr>
+            <a:r>
+              <a:rPr sz="1150" b="0" i="0">
                 <a:solidFill>
                   <a:srgbClr val="15241C"/>
                 </a:solidFill>
                 <a:latin typeface="Calibri"/>
               </a:rPr>
-              <a:t>Purwarupa awal: </a:t>
-            </a:r>
-            <a:r>
-              <a:rPr sz="1800" b="1">
-                <a:solidFill>
-                  <a:srgbClr val="15241C"/>
-                </a:solidFill>
-                <a:latin typeface="Calibri"/>
-              </a:rPr>
-              <a:t>Streamlit</a:t>
-            </a:r>
-            <a:r>
-              <a:rPr sz="1800" b="0">
-                <a:solidFill>
-                  <a:srgbClr val="15241C"/>
-                </a:solidFill>
-                <a:latin typeface="Calibri"/>
-              </a:rPr>
-              <a:t> (Python) — UI demo terbatas &amp; butuh </a:t>
-            </a:r>
-            <a:r>
-              <a:rPr sz="1800" b="1">
-                <a:solidFill>
-                  <a:srgbClr val="15241C"/>
-                </a:solidFill>
-                <a:latin typeface="Calibri"/>
-              </a:rPr>
-              <a:t>server</a:t>
-            </a:r>
-            <a:r>
-              <a:rPr sz="1800" b="0">
-                <a:solidFill>
-                  <a:srgbClr val="15241C"/>
-                </a:solidFill>
-                <a:latin typeface="Calibri"/>
-              </a:rPr>
-              <a:t>.</a:t>
-            </a:r>
-          </a:p>
-          <a:p>
-            <a:pPr>
-              <a:spcAft>
-                <a:spcPts val="1000"/>
-              </a:spcAft>
-            </a:pPr>
-            <a:r>
-              <a:rPr sz="1800" b="1">
-                <a:solidFill>
-                  <a:srgbClr val="039855"/>
-                </a:solidFill>
-              </a:rPr>
-              <a:t>▸  </a:t>
-            </a:r>
-            <a:r>
-              <a:rPr sz="1800" b="0">
-                <a:solidFill>
-                  <a:srgbClr val="15241C"/>
-                </a:solidFill>
-                <a:latin typeface="Calibri"/>
-              </a:rPr>
-              <a:t>Streamlit </a:t>
-            </a:r>
-            <a:r>
-              <a:rPr sz="1800" b="1">
-                <a:solidFill>
-                  <a:srgbClr val="15241C"/>
-                </a:solidFill>
-                <a:latin typeface="Calibri"/>
-              </a:rPr>
-              <a:t>tidak bisa</a:t>
-            </a:r>
-            <a:r>
-              <a:rPr sz="1800" b="0">
-                <a:solidFill>
-                  <a:srgbClr val="15241C"/>
-                </a:solidFill>
-                <a:latin typeface="Calibri"/>
-              </a:rPr>
-              <a:t> di Cloudflare Pages (statis) → perlu dibangun ulang.</a:t>
-            </a:r>
-          </a:p>
-          <a:p>
-            <a:pPr>
-              <a:spcAft>
-                <a:spcPts val="1000"/>
-              </a:spcAft>
-            </a:pPr>
-            <a:r>
-              <a:rPr sz="1800" b="1">
-                <a:solidFill>
-                  <a:srgbClr val="039855"/>
-                </a:solidFill>
-              </a:rPr>
-              <a:t>▸  </a:t>
-            </a:r>
-            <a:r>
-              <a:rPr sz="1800" b="0">
-                <a:solidFill>
-                  <a:srgbClr val="15241C"/>
-                </a:solidFill>
-                <a:latin typeface="Calibri"/>
-              </a:rPr>
-              <a:t>Solusi: konversi model </a:t>
-            </a:r>
-            <a:r>
-              <a:rPr sz="1800" b="1">
-                <a:solidFill>
-                  <a:srgbClr val="15241C"/>
-                </a:solidFill>
-                <a:latin typeface="Calibri"/>
-              </a:rPr>
-              <a:t>.pkl → ONNX</a:t>
-            </a:r>
-            <a:r>
-              <a:rPr sz="1800" b="0">
-                <a:solidFill>
-                  <a:srgbClr val="15241C"/>
-                </a:solidFill>
-                <a:latin typeface="Calibri"/>
-              </a:rPr>
-              <a:t> (parity terverifikasi, galat 3,4×10⁻⁷).</a:t>
-            </a:r>
-          </a:p>
-          <a:p>
-            <a:pPr>
-              <a:spcAft>
-                <a:spcPts val="1000"/>
-              </a:spcAft>
-            </a:pPr>
-            <a:r>
-              <a:rPr sz="1800" b="1">
-                <a:solidFill>
-                  <a:srgbClr val="039855"/>
-                </a:solidFill>
-              </a:rPr>
-              <a:t>▸  </a:t>
-            </a:r>
-            <a:r>
-              <a:rPr sz="1800" b="0">
-                <a:solidFill>
-                  <a:srgbClr val="15241C"/>
-                </a:solidFill>
-                <a:latin typeface="Calibri"/>
-              </a:rPr>
-              <a:t>Frontend baru: </a:t>
-            </a:r>
-            <a:r>
-              <a:rPr sz="1800" b="1">
-                <a:solidFill>
-                  <a:srgbClr val="15241C"/>
-                </a:solidFill>
-                <a:latin typeface="Calibri"/>
-              </a:rPr>
-              <a:t>React + Vite + TypeScript + Tailwind</a:t>
-            </a:r>
-            <a:r>
-              <a:rPr sz="1800" b="0">
-                <a:solidFill>
-                  <a:srgbClr val="15241C"/>
-                </a:solidFill>
-                <a:latin typeface="Calibri"/>
-              </a:rPr>
-              <a:t> (komponen shadcn-style).</a:t>
-            </a:r>
-          </a:p>
-          <a:p>
-            <a:pPr>
-              <a:spcAft>
-                <a:spcPts val="1000"/>
-              </a:spcAft>
-            </a:pPr>
-            <a:r>
-              <a:rPr sz="1800" b="1">
-                <a:solidFill>
-                  <a:srgbClr val="039855"/>
-                </a:solidFill>
-              </a:rPr>
-              <a:t>▸  </a:t>
-            </a:r>
-            <a:r>
-              <a:rPr sz="1800" b="0">
-                <a:solidFill>
-                  <a:srgbClr val="15241C"/>
-                </a:solidFill>
-                <a:latin typeface="Calibri"/>
-              </a:rPr>
-              <a:t>Bug “Page Unresponsive” diperbaiki: inferensi dipindah ke </a:t>
-            </a:r>
-            <a:r>
-              <a:rPr sz="1800" b="1">
-                <a:solidFill>
-                  <a:srgbClr val="15241C"/>
-                </a:solidFill>
-                <a:latin typeface="Calibri"/>
-              </a:rPr>
-              <a:t>Web Worker</a:t>
-            </a:r>
-            <a:r>
-              <a:rPr sz="1800" b="0">
-                <a:solidFill>
-                  <a:srgbClr val="15241C"/>
-                </a:solidFill>
-                <a:latin typeface="Calibri"/>
-              </a:rPr>
-              <a:t>.</a:t>
+              <a:t>ONNX = format standar agar model AI bisa dipakai di mana saja. WASM (WebAssembly) = teknologi yang membuat kode berjalan cepat di dalam peramban. Gabungan keduanya membuat model berjalan instan, di perangkat, dan bisa offline.</a:t>
+            </a:r>
+          </a:p>
+        </p:txBody>
+      </p:sp>
+      <p:sp>
+        <p:nvSpPr>
+          <p:cNvPr id="26" name="TextBox 25"/>
+          <p:cNvSpPr txBox="1"/>
+          <p:nvPr/>
+        </p:nvSpPr>
+        <p:spPr>
+          <a:xfrm>
+            <a:off x="594360" y="5623560"/>
+            <a:ext cx="10972800" cy="457200"/>
+          </a:xfrm>
+          <a:prstGeom prst="rect">
+            <a:avLst/>
+          </a:prstGeom>
+          <a:noFill/>
+        </p:spPr>
+        <p:txBody>
+          <a:bodyPr wrap="square" anchor="t">
+            <a:spAutoFit/>
+          </a:bodyPr>
+          <a:lstStyle/>
+          <a:p>
+            <a:pPr algn="l">
+              <a:spcAft>
+                <a:spcPts val="600"/>
+              </a:spcAft>
+            </a:pPr>
+            <a:r>
+              <a:rPr sz="1300" b="0" i="1">
+                <a:solidFill>
+                  <a:srgbClr val="4B5563"/>
+                </a:solidFill>
+                <a:latin typeface="Calibri"/>
+              </a:rPr>
+              <a:t>Tanpa server, tanpa biaya, dan privasi terjaga (data tidak dikirim ke mana pun).</a:t>
             </a:r>
           </a:p>
         </p:txBody>
@@ -4035,7 +4630,7 @@
         </p:nvSpPr>
         <p:spPr>
           <a:xfrm>
-            <a:off x="548640" y="502920"/>
+            <a:off x="548640" y="457200"/>
             <a:ext cx="548640" cy="82296"/>
           </a:xfrm>
           <a:prstGeom prst="rect">
@@ -4079,8 +4674,8 @@
         </p:nvSpPr>
         <p:spPr>
           <a:xfrm>
-            <a:off x="548640" y="603504"/>
-            <a:ext cx="10058400" cy="365760"/>
+            <a:off x="548640" y="548640"/>
+            <a:ext cx="10515600" cy="365760"/>
           </a:xfrm>
           <a:prstGeom prst="rect">
             <a:avLst/>
@@ -4105,7 +4700,7 @@
                 </a:solidFill>
                 <a:latin typeface="Calibri"/>
               </a:rPr>
-              <a:t>ARSITEKTUR</a:t>
+              <a:t>PENGAYAAN</a:t>
             </a:r>
           </a:p>
         </p:txBody>
@@ -4118,8 +4713,8 @@
         </p:nvSpPr>
         <p:spPr>
           <a:xfrm>
-            <a:off x="548640" y="868680"/>
-            <a:ext cx="11064240" cy="914400"/>
+            <a:off x="548640" y="804672"/>
+            <a:ext cx="11155680" cy="914400"/>
           </a:xfrm>
           <a:prstGeom prst="rect">
             <a:avLst/>
@@ -4138,33 +4733,191 @@
               </a:spcAft>
             </a:pPr>
             <a:r>
-              <a:rPr sz="3000" b="1" i="0">
+              <a:rPr sz="2800" b="1" i="0">
                 <a:solidFill>
                   <a:srgbClr val="05312A"/>
                 </a:solidFill>
                 <a:latin typeface="Calibri"/>
               </a:rPr>
-              <a:t>Arsitektur: inferensi di peramban</a:t>
-            </a:r>
-          </a:p>
-        </p:txBody>
-      </p:sp>
-      <p:sp>
-        <p:nvSpPr>
-          <p:cNvPr id="7" name="Rectangle 6"/>
+              <a:t>Fitur opsional: Analisis Foto (eksperimental)</a:t>
+            </a:r>
+          </a:p>
+        </p:txBody>
+      </p:sp>
+      <p:sp>
+        <p:nvSpPr>
+          <p:cNvPr id="7" name="TextBox 6"/>
+          <p:cNvSpPr txBox="1"/>
+          <p:nvPr/>
+        </p:nvSpPr>
+        <p:spPr>
+          <a:xfrm>
+            <a:off x="594360" y="1737360"/>
+            <a:ext cx="6766560" cy="4297680"/>
+          </a:xfrm>
+          <a:prstGeom prst="rect">
+            <a:avLst/>
+          </a:prstGeom>
+          <a:noFill/>
+        </p:spPr>
+        <p:txBody>
+          <a:bodyPr wrap="square">
+            <a:spAutoFit/>
+          </a:bodyPr>
+          <a:lstStyle/>
+          <a:p>
+            <a:pPr>
+              <a:spcAft>
+                <a:spcPts val="1000"/>
+              </a:spcAft>
+            </a:pPr>
+            <a:r>
+              <a:rPr sz="1500" b="1">
+                <a:solidFill>
+                  <a:srgbClr val="039855"/>
+                </a:solidFill>
+              </a:rPr>
+              <a:t>▸  </a:t>
+            </a:r>
+            <a:r>
+              <a:rPr sz="1500" b="0">
+                <a:solidFill>
+                  <a:srgbClr val="15241C"/>
+                </a:solidFill>
+                <a:latin typeface="Calibri"/>
+              </a:rPr>
+              <a:t>Pengguna bisa </a:t>
+            </a:r>
+            <a:r>
+              <a:rPr sz="1500" b="1">
+                <a:solidFill>
+                  <a:srgbClr val="15241C"/>
+                </a:solidFill>
+                <a:latin typeface="Calibri"/>
+              </a:rPr>
+              <a:t>unggah foto</a:t>
+            </a:r>
+            <a:r>
+              <a:rPr sz="1500" b="0">
+                <a:solidFill>
+                  <a:srgbClr val="15241C"/>
+                </a:solidFill>
+                <a:latin typeface="Calibri"/>
+              </a:rPr>
+              <a:t> atau pakai </a:t>
+            </a:r>
+            <a:r>
+              <a:rPr sz="1500" b="1">
+                <a:solidFill>
+                  <a:srgbClr val="15241C"/>
+                </a:solidFill>
+                <a:latin typeface="Calibri"/>
+              </a:rPr>
+              <a:t>kamera</a:t>
+            </a:r>
+            <a:r>
+              <a:rPr sz="1500" b="0">
+                <a:solidFill>
+                  <a:srgbClr val="15241C"/>
+                </a:solidFill>
+                <a:latin typeface="Calibri"/>
+              </a:rPr>
+              <a:t> anak.</a:t>
+            </a:r>
+          </a:p>
+          <a:p>
+            <a:pPr>
+              <a:spcAft>
+                <a:spcPts val="1000"/>
+              </a:spcAft>
+            </a:pPr>
+            <a:r>
+              <a:rPr sz="1500" b="1">
+                <a:solidFill>
+                  <a:srgbClr val="039855"/>
+                </a:solidFill>
+              </a:rPr>
+              <a:t>▸  </a:t>
+            </a:r>
+            <a:r>
+              <a:rPr sz="1500" b="1">
+                <a:solidFill>
+                  <a:srgbClr val="15241C"/>
+                </a:solidFill>
+                <a:latin typeface="Calibri"/>
+              </a:rPr>
+              <a:t>MediaPipe</a:t>
+            </a:r>
+            <a:r>
+              <a:rPr sz="1500" b="0">
+                <a:solidFill>
+                  <a:srgbClr val="15241C"/>
+                </a:solidFill>
+                <a:latin typeface="Calibri"/>
+              </a:rPr>
+              <a:t> (pustaka Google) mendeteksi 33 titik tubuh + siluet badan, langsung di perangkat (foto tidak diunggah ke server).</a:t>
+            </a:r>
+          </a:p>
+          <a:p>
+            <a:pPr>
+              <a:spcAft>
+                <a:spcPts val="1000"/>
+              </a:spcAft>
+            </a:pPr>
+            <a:r>
+              <a:rPr sz="1500" b="1">
+                <a:solidFill>
+                  <a:srgbClr val="039855"/>
+                </a:solidFill>
+              </a:rPr>
+              <a:t>▸  </a:t>
+            </a:r>
+            <a:r>
+              <a:rPr sz="1500" b="0">
+                <a:solidFill>
+                  <a:srgbClr val="15241C"/>
+                </a:solidFill>
+                <a:latin typeface="Calibri"/>
+              </a:rPr>
+              <a:t>Dihitung </a:t>
+            </a:r>
+            <a:r>
+              <a:rPr sz="1500" b="1">
+                <a:solidFill>
+                  <a:srgbClr val="15241C"/>
+                </a:solidFill>
+                <a:latin typeface="Calibri"/>
+              </a:rPr>
+              <a:t>proporsi tubuh</a:t>
+            </a:r>
+            <a:r>
+              <a:rPr sz="1500" b="0">
+                <a:solidFill>
+                  <a:srgbClr val="15241C"/>
+                </a:solidFill>
+                <a:latin typeface="Calibri"/>
+              </a:rPr>
+              <a:t> (kurus/normal/gemuk) dengan mengukur ketebalan lengan/kaki dibanding panjangnya — bekerja saat berdiri, duduk, atau berbaring.</a:t>
+            </a:r>
+          </a:p>
+        </p:txBody>
+      </p:sp>
+      <p:sp>
+        <p:nvSpPr>
+          <p:cNvPr id="8" name="Rectangle 7"/>
           <p:cNvSpPr/>
           <p:nvPr/>
         </p:nvSpPr>
         <p:spPr>
           <a:xfrm>
-            <a:off x="640080" y="2377440"/>
-            <a:ext cx="2606040" cy="1828800"/>
+            <a:off x="7589520" y="1737360"/>
+            <a:ext cx="3886200" cy="4160520"/>
           </a:xfrm>
           <a:prstGeom prst="rect">
             <a:avLst/>
           </a:prstGeom>
           <a:solidFill>
-            <a:srgbClr val="EAF7F0"/>
+            <a:srgbClr val="FEF3C7"/>
           </a:solidFill>
           <a:ln>
             <a:noFill/>
@@ -4195,20 +4948,20 @@
       </p:sp>
       <p:sp>
         <p:nvSpPr>
-          <p:cNvPr id="8" name="Rectangle 7"/>
+          <p:cNvPr id="9" name="Rectangle 8"/>
           <p:cNvSpPr/>
           <p:nvPr/>
         </p:nvSpPr>
         <p:spPr>
           <a:xfrm>
-            <a:off x="640080" y="2377440"/>
-            <a:ext cx="2606040" cy="82296"/>
+            <a:off x="7589520" y="1737360"/>
+            <a:ext cx="82296" cy="4160520"/>
           </a:xfrm>
           <a:prstGeom prst="rect">
             <a:avLst/>
           </a:prstGeom>
           <a:solidFill>
-            <a:srgbClr val="039855"/>
+            <a:srgbClr val="B45409"/>
           </a:solidFill>
           <a:ln>
             <a:noFill/>
@@ -4239,14 +4992,14 @@
       </p:sp>
       <p:sp>
         <p:nvSpPr>
-          <p:cNvPr id="9" name="TextBox 8"/>
+          <p:cNvPr id="10" name="TextBox 9"/>
           <p:cNvSpPr txBox="1"/>
           <p:nvPr/>
         </p:nvSpPr>
         <p:spPr>
           <a:xfrm>
-            <a:off x="777240" y="2606040"/>
-            <a:ext cx="2331720" cy="731520"/>
+            <a:off x="7790688" y="1847088"/>
+            <a:ext cx="3520440" cy="3959352"/>
           </a:xfrm>
           <a:prstGeom prst="rect">
             <a:avLst/>
@@ -4261,643 +5014,33 @@
           <a:p>
             <a:pPr algn="l">
               <a:spcAft>
-                <a:spcPts val="600"/>
-              </a:spcAft>
-            </a:pPr>
-            <a:r>
-              <a:rPr sz="1600" b="1" i="0">
-                <a:solidFill>
-                  <a:srgbClr val="05312A"/>
-                </a:solidFill>
-                <a:latin typeface="Calibri"/>
-              </a:rPr>
-              <a:t>1. Input 7 faktor</a:t>
-            </a:r>
-          </a:p>
-        </p:txBody>
-      </p:sp>
-      <p:sp>
-        <p:nvSpPr>
-          <p:cNvPr id="10" name="TextBox 9"/>
-          <p:cNvSpPr txBox="1"/>
-          <p:nvPr/>
-        </p:nvSpPr>
-        <p:spPr>
-          <a:xfrm>
-            <a:off x="777240" y="3200400"/>
-            <a:ext cx="2331720" cy="914400"/>
-          </a:xfrm>
-          <a:prstGeom prst="rect">
-            <a:avLst/>
-          </a:prstGeom>
-          <a:noFill/>
-        </p:spPr>
-        <p:txBody>
-          <a:bodyPr wrap="square" anchor="t">
-            <a:spAutoFit/>
-          </a:bodyPr>
-          <a:lstStyle/>
+                <a:spcPts val="300"/>
+              </a:spcAft>
+            </a:pPr>
+            <a:r>
+              <a:rPr sz="1300" b="1" i="0">
+                <a:solidFill>
+                  <a:srgbClr val="B45409"/>
+                </a:solidFill>
+                <a:latin typeface="Calibri"/>
+              </a:rPr>
+              <a:t>Kenapa hanya "pendukung"?</a:t>
+            </a:r>
+          </a:p>
           <a:p>
             <a:pPr algn="l">
               <a:spcAft>
-                <a:spcPts val="600"/>
-              </a:spcAft>
-            </a:pPr>
-            <a:r>
-              <a:rPr sz="1300" b="0" i="0">
-                <a:solidFill>
-                  <a:srgbClr val="4B5563"/>
-                </a:solidFill>
-                <a:latin typeface="Calibri"/>
-              </a:rPr>
-              <a:t>Form data anak + ibu</a:t>
-            </a:r>
-          </a:p>
-        </p:txBody>
-      </p:sp>
-      <p:sp>
-        <p:nvSpPr>
-          <p:cNvPr id="11" name="Rectangle 10"/>
-          <p:cNvSpPr/>
-          <p:nvPr/>
-        </p:nvSpPr>
-        <p:spPr>
-          <a:xfrm>
-            <a:off x="3429000" y="2377440"/>
-            <a:ext cx="2606040" cy="1828800"/>
-          </a:xfrm>
-          <a:prstGeom prst="rect">
-            <a:avLst/>
-          </a:prstGeom>
-          <a:solidFill>
-            <a:srgbClr val="EAF7F0"/>
-          </a:solidFill>
-          <a:ln>
-            <a:noFill/>
-          </a:ln>
-          <a:effectLst/>
-        </p:spPr>
-        <p:style>
-          <a:lnRef idx="1">
-            <a:schemeClr val="accent1"/>
-          </a:lnRef>
-          <a:fillRef idx="3">
-            <a:schemeClr val="accent1"/>
-          </a:fillRef>
-          <a:effectRef idx="2">
-            <a:schemeClr val="accent1"/>
-          </a:effectRef>
-          <a:fontRef idx="minor">
-            <a:schemeClr val="lt1"/>
-          </a:fontRef>
-        </p:style>
-        <p:txBody>
-          <a:bodyPr rtlCol="0" anchor="ctr"/>
-          <a:lstStyle/>
-          <a:p>
-            <a:pPr algn="ctr"/>
-          </a:p>
-        </p:txBody>
-      </p:sp>
-      <p:sp>
-        <p:nvSpPr>
-          <p:cNvPr id="12" name="Rectangle 11"/>
-          <p:cNvSpPr/>
-          <p:nvPr/>
-        </p:nvSpPr>
-        <p:spPr>
-          <a:xfrm>
-            <a:off x="3429000" y="2377440"/>
-            <a:ext cx="2606040" cy="82296"/>
-          </a:xfrm>
-          <a:prstGeom prst="rect">
-            <a:avLst/>
-          </a:prstGeom>
-          <a:solidFill>
-            <a:srgbClr val="039855"/>
-          </a:solidFill>
-          <a:ln>
-            <a:noFill/>
-          </a:ln>
-          <a:effectLst/>
-        </p:spPr>
-        <p:style>
-          <a:lnRef idx="1">
-            <a:schemeClr val="accent1"/>
-          </a:lnRef>
-          <a:fillRef idx="3">
-            <a:schemeClr val="accent1"/>
-          </a:fillRef>
-          <a:effectRef idx="2">
-            <a:schemeClr val="accent1"/>
-          </a:effectRef>
-          <a:fontRef idx="minor">
-            <a:schemeClr val="lt1"/>
-          </a:fontRef>
-        </p:style>
-        <p:txBody>
-          <a:bodyPr rtlCol="0" anchor="ctr"/>
-          <a:lstStyle/>
-          <a:p>
-            <a:pPr algn="ctr"/>
-          </a:p>
-        </p:txBody>
-      </p:sp>
-      <p:sp>
-        <p:nvSpPr>
-          <p:cNvPr id="13" name="TextBox 12"/>
-          <p:cNvSpPr txBox="1"/>
-          <p:nvPr/>
-        </p:nvSpPr>
-        <p:spPr>
-          <a:xfrm>
-            <a:off x="3566160" y="2606040"/>
-            <a:ext cx="2331720" cy="731520"/>
-          </a:xfrm>
-          <a:prstGeom prst="rect">
-            <a:avLst/>
-          </a:prstGeom>
-          <a:noFill/>
-        </p:spPr>
-        <p:txBody>
-          <a:bodyPr wrap="square" anchor="t">
-            <a:spAutoFit/>
-          </a:bodyPr>
-          <a:lstStyle/>
-          <a:p>
-            <a:pPr algn="l">
-              <a:spcAft>
-                <a:spcPts val="600"/>
-              </a:spcAft>
-            </a:pPr>
-            <a:r>
-              <a:rPr sz="1600" b="1" i="0">
-                <a:solidFill>
-                  <a:srgbClr val="05312A"/>
-                </a:solidFill>
-                <a:latin typeface="Calibri"/>
-              </a:rPr>
-              <a:t>2. Web Worker</a:t>
-            </a:r>
-          </a:p>
-        </p:txBody>
-      </p:sp>
-      <p:sp>
-        <p:nvSpPr>
-          <p:cNvPr id="14" name="TextBox 13"/>
-          <p:cNvSpPr txBox="1"/>
-          <p:nvPr/>
-        </p:nvSpPr>
-        <p:spPr>
-          <a:xfrm>
-            <a:off x="3566160" y="3200400"/>
-            <a:ext cx="2331720" cy="914400"/>
-          </a:xfrm>
-          <a:prstGeom prst="rect">
-            <a:avLst/>
-          </a:prstGeom>
-          <a:noFill/>
-        </p:spPr>
-        <p:txBody>
-          <a:bodyPr wrap="square" anchor="t">
-            <a:spAutoFit/>
-          </a:bodyPr>
-          <a:lstStyle/>
-          <a:p>
-            <a:pPr algn="l">
-              <a:spcAft>
-                <a:spcPts val="600"/>
-              </a:spcAft>
-            </a:pPr>
-            <a:r>
-              <a:rPr sz="1300" b="0" i="0">
-                <a:solidFill>
-                  <a:srgbClr val="4B5563"/>
-                </a:solidFill>
-                <a:latin typeface="Calibri"/>
-              </a:rPr>
-              <a:t>ONNX Runtime Web (WASM)</a:t>
-            </a:r>
-          </a:p>
-        </p:txBody>
-      </p:sp>
-      <p:sp>
-        <p:nvSpPr>
-          <p:cNvPr id="15" name="Rectangle 14"/>
-          <p:cNvSpPr/>
-          <p:nvPr/>
-        </p:nvSpPr>
-        <p:spPr>
-          <a:xfrm>
-            <a:off x="6217920" y="2377440"/>
-            <a:ext cx="2606040" cy="1828800"/>
-          </a:xfrm>
-          <a:prstGeom prst="rect">
-            <a:avLst/>
-          </a:prstGeom>
-          <a:solidFill>
-            <a:srgbClr val="EAF7F0"/>
-          </a:solidFill>
-          <a:ln>
-            <a:noFill/>
-          </a:ln>
-          <a:effectLst/>
-        </p:spPr>
-        <p:style>
-          <a:lnRef idx="1">
-            <a:schemeClr val="accent1"/>
-          </a:lnRef>
-          <a:fillRef idx="3">
-            <a:schemeClr val="accent1"/>
-          </a:fillRef>
-          <a:effectRef idx="2">
-            <a:schemeClr val="accent1"/>
-          </a:effectRef>
-          <a:fontRef idx="minor">
-            <a:schemeClr val="lt1"/>
-          </a:fontRef>
-        </p:style>
-        <p:txBody>
-          <a:bodyPr rtlCol="0" anchor="ctr"/>
-          <a:lstStyle/>
-          <a:p>
-            <a:pPr algn="ctr"/>
-          </a:p>
-        </p:txBody>
-      </p:sp>
-      <p:sp>
-        <p:nvSpPr>
-          <p:cNvPr id="16" name="Rectangle 15"/>
-          <p:cNvSpPr/>
-          <p:nvPr/>
-        </p:nvSpPr>
-        <p:spPr>
-          <a:xfrm>
-            <a:off x="6217920" y="2377440"/>
-            <a:ext cx="2606040" cy="82296"/>
-          </a:xfrm>
-          <a:prstGeom prst="rect">
-            <a:avLst/>
-          </a:prstGeom>
-          <a:solidFill>
-            <a:srgbClr val="039855"/>
-          </a:solidFill>
-          <a:ln>
-            <a:noFill/>
-          </a:ln>
-          <a:effectLst/>
-        </p:spPr>
-        <p:style>
-          <a:lnRef idx="1">
-            <a:schemeClr val="accent1"/>
-          </a:lnRef>
-          <a:fillRef idx="3">
-            <a:schemeClr val="accent1"/>
-          </a:fillRef>
-          <a:effectRef idx="2">
-            <a:schemeClr val="accent1"/>
-          </a:effectRef>
-          <a:fontRef idx="minor">
-            <a:schemeClr val="lt1"/>
-          </a:fontRef>
-        </p:style>
-        <p:txBody>
-          <a:bodyPr rtlCol="0" anchor="ctr"/>
-          <a:lstStyle/>
-          <a:p>
-            <a:pPr algn="ctr"/>
-          </a:p>
-        </p:txBody>
-      </p:sp>
-      <p:sp>
-        <p:nvSpPr>
-          <p:cNvPr id="17" name="TextBox 16"/>
-          <p:cNvSpPr txBox="1"/>
-          <p:nvPr/>
-        </p:nvSpPr>
-        <p:spPr>
-          <a:xfrm>
-            <a:off x="6355080" y="2606040"/>
-            <a:ext cx="2331720" cy="731520"/>
-          </a:xfrm>
-          <a:prstGeom prst="rect">
-            <a:avLst/>
-          </a:prstGeom>
-          <a:noFill/>
-        </p:spPr>
-        <p:txBody>
-          <a:bodyPr wrap="square" anchor="t">
-            <a:spAutoFit/>
-          </a:bodyPr>
-          <a:lstStyle/>
-          <a:p>
-            <a:pPr algn="l">
-              <a:spcAft>
-                <a:spcPts val="600"/>
-              </a:spcAft>
-            </a:pPr>
-            <a:r>
-              <a:rPr sz="1600" b="1" i="0">
-                <a:solidFill>
-                  <a:srgbClr val="05312A"/>
-                </a:solidFill>
-                <a:latin typeface="Calibri"/>
-              </a:rPr>
-              <a:t>3. Random Forest</a:t>
-            </a:r>
-          </a:p>
-        </p:txBody>
-      </p:sp>
-      <p:sp>
-        <p:nvSpPr>
-          <p:cNvPr id="18" name="TextBox 17"/>
-          <p:cNvSpPr txBox="1"/>
-          <p:nvPr/>
-        </p:nvSpPr>
-        <p:spPr>
-          <a:xfrm>
-            <a:off x="6355080" y="3200400"/>
-            <a:ext cx="2331720" cy="914400"/>
-          </a:xfrm>
-          <a:prstGeom prst="rect">
-            <a:avLst/>
-          </a:prstGeom>
-          <a:noFill/>
-        </p:spPr>
-        <p:txBody>
-          <a:bodyPr wrap="square" anchor="t">
-            <a:spAutoFit/>
-          </a:bodyPr>
-          <a:lstStyle/>
-          <a:p>
-            <a:pPr algn="l">
-              <a:spcAft>
-                <a:spcPts val="600"/>
-              </a:spcAft>
-            </a:pPr>
-            <a:r>
-              <a:rPr sz="1300" b="0" i="0">
-                <a:solidFill>
-                  <a:srgbClr val="4B5563"/>
-                </a:solidFill>
-                <a:latin typeface="Calibri"/>
-              </a:rPr>
-              <a:t>Inferensi mikrodetik di perangkat</a:t>
-            </a:r>
-          </a:p>
-        </p:txBody>
-      </p:sp>
-      <p:sp>
-        <p:nvSpPr>
-          <p:cNvPr id="19" name="Rectangle 18"/>
-          <p:cNvSpPr/>
-          <p:nvPr/>
-        </p:nvSpPr>
-        <p:spPr>
-          <a:xfrm>
-            <a:off x="9006840" y="2377440"/>
-            <a:ext cx="2606040" cy="1828800"/>
-          </a:xfrm>
-          <a:prstGeom prst="rect">
-            <a:avLst/>
-          </a:prstGeom>
-          <a:solidFill>
-            <a:srgbClr val="EAF7F0"/>
-          </a:solidFill>
-          <a:ln>
-            <a:noFill/>
-          </a:ln>
-          <a:effectLst/>
-        </p:spPr>
-        <p:style>
-          <a:lnRef idx="1">
-            <a:schemeClr val="accent1"/>
-          </a:lnRef>
-          <a:fillRef idx="3">
-            <a:schemeClr val="accent1"/>
-          </a:fillRef>
-          <a:effectRef idx="2">
-            <a:schemeClr val="accent1"/>
-          </a:effectRef>
-          <a:fontRef idx="minor">
-            <a:schemeClr val="lt1"/>
-          </a:fontRef>
-        </p:style>
-        <p:txBody>
-          <a:bodyPr rtlCol="0" anchor="ctr"/>
-          <a:lstStyle/>
-          <a:p>
-            <a:pPr algn="ctr"/>
-          </a:p>
-        </p:txBody>
-      </p:sp>
-      <p:sp>
-        <p:nvSpPr>
-          <p:cNvPr id="20" name="Rectangle 19"/>
-          <p:cNvSpPr/>
-          <p:nvPr/>
-        </p:nvSpPr>
-        <p:spPr>
-          <a:xfrm>
-            <a:off x="9006840" y="2377440"/>
-            <a:ext cx="2606040" cy="82296"/>
-          </a:xfrm>
-          <a:prstGeom prst="rect">
-            <a:avLst/>
-          </a:prstGeom>
-          <a:solidFill>
-            <a:srgbClr val="039855"/>
-          </a:solidFill>
-          <a:ln>
-            <a:noFill/>
-          </a:ln>
-          <a:effectLst/>
-        </p:spPr>
-        <p:style>
-          <a:lnRef idx="1">
-            <a:schemeClr val="accent1"/>
-          </a:lnRef>
-          <a:fillRef idx="3">
-            <a:schemeClr val="accent1"/>
-          </a:fillRef>
-          <a:effectRef idx="2">
-            <a:schemeClr val="accent1"/>
-          </a:effectRef>
-          <a:fontRef idx="minor">
-            <a:schemeClr val="lt1"/>
-          </a:fontRef>
-        </p:style>
-        <p:txBody>
-          <a:bodyPr rtlCol="0" anchor="ctr"/>
-          <a:lstStyle/>
-          <a:p>
-            <a:pPr algn="ctr"/>
-          </a:p>
-        </p:txBody>
-      </p:sp>
-      <p:sp>
-        <p:nvSpPr>
-          <p:cNvPr id="21" name="TextBox 20"/>
-          <p:cNvSpPr txBox="1"/>
-          <p:nvPr/>
-        </p:nvSpPr>
-        <p:spPr>
-          <a:xfrm>
-            <a:off x="9144000" y="2606040"/>
-            <a:ext cx="2331720" cy="731520"/>
-          </a:xfrm>
-          <a:prstGeom prst="rect">
-            <a:avLst/>
-          </a:prstGeom>
-          <a:noFill/>
-        </p:spPr>
-        <p:txBody>
-          <a:bodyPr wrap="square" anchor="t">
-            <a:spAutoFit/>
-          </a:bodyPr>
-          <a:lstStyle/>
-          <a:p>
-            <a:pPr algn="l">
-              <a:spcAft>
-                <a:spcPts val="600"/>
-              </a:spcAft>
-            </a:pPr>
-            <a:r>
-              <a:rPr sz="1600" b="1" i="0">
-                <a:solidFill>
-                  <a:srgbClr val="05312A"/>
-                </a:solidFill>
-                <a:latin typeface="Calibri"/>
-              </a:rPr>
-              <a:t>4. Output</a:t>
-            </a:r>
-          </a:p>
-        </p:txBody>
-      </p:sp>
-      <p:sp>
-        <p:nvSpPr>
-          <p:cNvPr id="22" name="TextBox 21"/>
-          <p:cNvSpPr txBox="1"/>
-          <p:nvPr/>
-        </p:nvSpPr>
-        <p:spPr>
-          <a:xfrm>
-            <a:off x="9144000" y="3200400"/>
-            <a:ext cx="2331720" cy="914400"/>
-          </a:xfrm>
-          <a:prstGeom prst="rect">
-            <a:avLst/>
-          </a:prstGeom>
-          <a:noFill/>
-        </p:spPr>
-        <p:txBody>
-          <a:bodyPr wrap="square" anchor="t">
-            <a:spAutoFit/>
-          </a:bodyPr>
-          <a:lstStyle/>
-          <a:p>
-            <a:pPr algn="l">
-              <a:spcAft>
-                <a:spcPts val="600"/>
-              </a:spcAft>
-            </a:pPr>
-            <a:r>
-              <a:rPr sz="1300" b="0" i="0">
-                <a:solidFill>
-                  <a:srgbClr val="4B5563"/>
-                </a:solidFill>
-                <a:latin typeface="Calibri"/>
-              </a:rPr>
-              <a:t>Status + keyakinan + rekomendasi</a:t>
-            </a:r>
-          </a:p>
-        </p:txBody>
-      </p:sp>
-      <p:sp>
-        <p:nvSpPr>
-          <p:cNvPr id="23" name="TextBox 22"/>
-          <p:cNvSpPr txBox="1"/>
-          <p:nvPr/>
-        </p:nvSpPr>
-        <p:spPr>
-          <a:xfrm>
-            <a:off x="640080" y="4572000"/>
-            <a:ext cx="10972800" cy="1645920"/>
-          </a:xfrm>
-          <a:prstGeom prst="rect">
-            <a:avLst/>
-          </a:prstGeom>
-          <a:noFill/>
-        </p:spPr>
-        <p:txBody>
-          <a:bodyPr wrap="square">
-            <a:spAutoFit/>
-          </a:bodyPr>
-          <a:lstStyle/>
-          <a:p>
-            <a:pPr>
-              <a:spcAft>
-                <a:spcPts val="1000"/>
-              </a:spcAft>
-            </a:pPr>
-            <a:r>
-              <a:rPr sz="1600" b="1">
-                <a:solidFill>
-                  <a:srgbClr val="039855"/>
-                </a:solidFill>
-              </a:rPr>
-              <a:t>▸  </a:t>
-            </a:r>
-            <a:r>
-              <a:rPr sz="1600" b="0">
-                <a:solidFill>
-                  <a:srgbClr val="15241C"/>
-                </a:solidFill>
-                <a:latin typeface="Calibri"/>
-              </a:rPr>
-              <a:t>WASM single-thread → tanpa header COOP/COEP, mudah di-deploy &amp; </a:t>
-            </a:r>
-            <a:r>
-              <a:rPr sz="1600" b="1">
-                <a:solidFill>
-                  <a:srgbClr val="15241C"/>
-                </a:solidFill>
-                <a:latin typeface="Calibri"/>
-              </a:rPr>
-              <a:t>luring</a:t>
-            </a:r>
-            <a:r>
-              <a:rPr sz="1600" b="0">
-                <a:solidFill>
-                  <a:srgbClr val="15241C"/>
-                </a:solidFill>
-                <a:latin typeface="Calibri"/>
-              </a:rPr>
-              <a:t>.</a:t>
-            </a:r>
-          </a:p>
-          <a:p>
-            <a:pPr>
-              <a:spcAft>
-                <a:spcPts val="1000"/>
-              </a:spcAft>
-            </a:pPr>
-            <a:r>
-              <a:rPr sz="1600" b="1">
-                <a:solidFill>
-                  <a:srgbClr val="039855"/>
-                </a:solidFill>
-              </a:rPr>
-              <a:t>▸  </a:t>
-            </a:r>
-            <a:r>
-              <a:rPr sz="1600" b="0">
-                <a:solidFill>
-                  <a:srgbClr val="15241C"/>
-                </a:solidFill>
-                <a:latin typeface="Calibri"/>
-              </a:rPr>
-              <a:t>Transfer pertama ±5 MB (model+runtime), lalu di-cache.</a:t>
+                <a:spcPts val="300"/>
+              </a:spcAft>
+            </a:pPr>
+            <a:r>
+              <a:rPr sz="1150" b="0" i="0">
+                <a:solidFill>
+                  <a:srgbClr val="6B4A07"/>
+                </a:solidFill>
+                <a:latin typeface="Calibri"/>
+              </a:rPr>
+              <a:t>JUJUR: foto 2D tidak bisa mengukur tinggi badan, jadi BUKAN penentu stunting. Hasil foto hanya menggeser sedikit probabilitas akhir (maksimum ±10 poin) dan ditampilkan transparan (sebelum → sesudah). Random Forest TIDAK dilatih ulang — jadi tidak ada klaim palsu. Berguna untuk mendeteksi kurus/gemuk.</a:t>
             </a:r>
           </a:p>
         </p:txBody>
@@ -5016,7 +5159,7 @@
         </p:nvSpPr>
         <p:spPr>
           <a:xfrm>
-            <a:off x="548640" y="502920"/>
+            <a:off x="548640" y="457200"/>
             <a:ext cx="548640" cy="82296"/>
           </a:xfrm>
           <a:prstGeom prst="rect">
@@ -5060,8 +5203,8 @@
         </p:nvSpPr>
         <p:spPr>
           <a:xfrm>
-            <a:off x="548640" y="603504"/>
-            <a:ext cx="10058400" cy="365760"/>
+            <a:off x="548640" y="548640"/>
+            <a:ext cx="10515600" cy="365760"/>
           </a:xfrm>
           <a:prstGeom prst="rect">
             <a:avLst/>
@@ -5086,7 +5229,7 @@
                 </a:solidFill>
                 <a:latin typeface="Calibri"/>
               </a:rPr>
-              <a:t>PENGAYAAN</a:t>
+              <a:t>INOVASI TAMBAHAN</a:t>
             </a:r>
           </a:p>
         </p:txBody>
@@ -5099,8 +5242,8 @@
         </p:nvSpPr>
         <p:spPr>
           <a:xfrm>
-            <a:off x="548640" y="868680"/>
-            <a:ext cx="11064240" cy="914400"/>
+            <a:off x="548640" y="804672"/>
+            <a:ext cx="11155680" cy="914400"/>
           </a:xfrm>
           <a:prstGeom prst="rect">
             <a:avLst/>
@@ -5119,13 +5262,13 @@
               </a:spcAft>
             </a:pPr>
             <a:r>
-              <a:rPr sz="3000" b="1" i="0">
+              <a:rPr sz="2800" b="1" i="0">
                 <a:solidFill>
                   <a:srgbClr val="05312A"/>
                 </a:solidFill>
                 <a:latin typeface="Calibri"/>
               </a:rPr>
-              <a:t>Modul opsional: Analisis Foto AI (eksperimental)</a:t>
+              <a:t>Fitur baru: Asisten AI Gizi (chat)</a:t>
             </a:r>
           </a:p>
         </p:txBody>
@@ -5138,8 +5281,8 @@
         </p:nvSpPr>
         <p:spPr>
           <a:xfrm>
-            <a:off x="640080" y="2011680"/>
-            <a:ext cx="10881360" cy="4114800"/>
+            <a:off x="594360" y="1737360"/>
+            <a:ext cx="6766560" cy="4297680"/>
           </a:xfrm>
           <a:prstGeom prst="rect">
             <a:avLst/>
@@ -5158,7 +5301,7 @@
               </a:spcAft>
             </a:pPr>
             <a:r>
-              <a:rPr sz="1700" b="1">
+              <a:rPr sz="1500" b="1">
                 <a:solidFill>
                   <a:srgbClr val="039855"/>
                 </a:solidFill>
@@ -5166,40 +5309,49 @@
               <a:t>▸  </a:t>
             </a:r>
             <a:r>
-              <a:rPr sz="1700" b="1">
+              <a:rPr sz="1500" b="0">
                 <a:solidFill>
                   <a:srgbClr val="15241C"/>
                 </a:solidFill>
                 <a:latin typeface="Calibri"/>
               </a:rPr>
-              <a:t>MediaPipe Pose</a:t>
-            </a:r>
-            <a:r>
-              <a:rPr sz="1700" b="0">
+              <a:t>Di </a:t>
+            </a:r>
+            <a:r>
+              <a:rPr sz="1500" b="1">
                 <a:solidFill>
                   <a:srgbClr val="15241C"/>
                 </a:solidFill>
                 <a:latin typeface="Calibri"/>
               </a:rPr>
-              <a:t> (33 titik) + </a:t>
-            </a:r>
-            <a:r>
-              <a:rPr sz="1700" b="1">
+              <a:t>atas form</a:t>
+            </a:r>
+            <a:r>
+              <a:rPr sz="1500" b="0">
                 <a:solidFill>
                   <a:srgbClr val="15241C"/>
                 </a:solidFill>
                 <a:latin typeface="Calibri"/>
               </a:rPr>
-              <a:t>segmentation mask</a:t>
-            </a:r>
-            <a:r>
-              <a:rPr sz="1700" b="0">
+              <a:t>, pengguna bisa bertanya ke asisten AI tentang </a:t>
+            </a:r>
+            <a:r>
+              <a:rPr sz="1500" b="1">
                 <a:solidFill>
                   <a:srgbClr val="15241C"/>
                 </a:solidFill>
                 <a:latin typeface="Calibri"/>
               </a:rPr>
-              <a:t>, berjalan di perangkat.</a:t>
+              <a:t>cara mencegah stunting &amp; tips gizi</a:t>
+            </a:r>
+            <a:r>
+              <a:rPr sz="1500" b="0">
+                <a:solidFill>
+                  <a:srgbClr val="15241C"/>
+                </a:solidFill>
+                <a:latin typeface="Calibri"/>
+              </a:rPr>
+              <a:t> — agar dapat ilmu, bukan hanya hasil prediksi.</a:t>
             </a:r>
           </a:p>
           <a:p>
@@ -5209,7 +5361,7 @@
               </a:spcAft>
             </a:pPr>
             <a:r>
-              <a:rPr sz="1700" b="1">
+              <a:rPr sz="1500" b="1">
                 <a:solidFill>
                   <a:srgbClr val="039855"/>
                 </a:solidFill>
@@ -5217,31 +5369,31 @@
               <a:t>▸  </a:t>
             </a:r>
             <a:r>
-              <a:rPr sz="1700" b="0">
+              <a:rPr sz="1500" b="0">
                 <a:solidFill>
                   <a:srgbClr val="15241C"/>
                 </a:solidFill>
                 <a:latin typeface="Calibri"/>
               </a:rPr>
-              <a:t>Mengukur </a:t>
-            </a:r>
-            <a:r>
-              <a:rPr sz="1700" b="1">
+              <a:t>Ditenagai </a:t>
+            </a:r>
+            <a:r>
+              <a:rPr sz="1500" b="1">
                 <a:solidFill>
                   <a:srgbClr val="15241C"/>
                 </a:solidFill>
                 <a:latin typeface="Calibri"/>
               </a:rPr>
-              <a:t>ketebalan/panjang</a:t>
-            </a:r>
-            <a:r>
-              <a:rPr sz="1700" b="0">
+              <a:t>Claude (Anthropic)</a:t>
+            </a:r>
+            <a:r>
+              <a:rPr sz="1500" b="0">
                 <a:solidFill>
                   <a:srgbClr val="15241C"/>
                 </a:solidFill>
                 <a:latin typeface="Calibri"/>
               </a:rPr>
-              <a:t> tiap anggota tubuh → estimasi proporsi (kurus/normal/gemuk).</a:t>
+              <a:t>. Jawaban ringkas, berbasis pedoman WHO/Kemenkes, dan menolak memberi diagnosis medis.</a:t>
             </a:r>
           </a:p>
           <a:p>
@@ -5251,7 +5403,7 @@
               </a:spcAft>
             </a:pPr>
             <a:r>
-              <a:rPr sz="1700" b="1">
+              <a:rPr sz="1500" b="1">
                 <a:solidFill>
                   <a:srgbClr val="039855"/>
                 </a:solidFill>
@@ -5259,124 +5411,222 @@
               <a:t>▸  </a:t>
             </a:r>
             <a:r>
-              <a:rPr sz="1700" b="0">
+              <a:rPr sz="1500" b="0">
                 <a:solidFill>
                   <a:srgbClr val="15241C"/>
                 </a:solidFill>
                 <a:latin typeface="Calibri"/>
               </a:rPr>
-              <a:t>Bersifat </a:t>
-            </a:r>
-            <a:r>
-              <a:rPr sz="1700" b="1">
+              <a:t>Pertanyaan dikirim ke layanan AI; </a:t>
+            </a:r>
+            <a:r>
+              <a:rPr sz="1500" b="1">
                 <a:solidFill>
                   <a:srgbClr val="15241C"/>
                 </a:solidFill>
                 <a:latin typeface="Calibri"/>
               </a:rPr>
-              <a:t>scale- &amp; pose-invariant</a:t>
-            </a:r>
-            <a:r>
-              <a:rPr sz="1700" b="0">
+              <a:t>prediksi stunting tetap 100% di perangkat</a:t>
+            </a:r>
+            <a:r>
+              <a:rPr sz="1500" b="0">
                 <a:solidFill>
                   <a:srgbClr val="15241C"/>
                 </a:solidFill>
                 <a:latin typeface="Calibri"/>
               </a:rPr>
-              <a:t> (berdiri, duduk, berbaring).</a:t>
-            </a:r>
-          </a:p>
-          <a:p>
-            <a:pPr>
-              <a:spcAft>
-                <a:spcPts val="1000"/>
-              </a:spcAft>
-            </a:pPr>
-            <a:r>
-              <a:rPr sz="1700" b="1">
+              <a:t>.</a:t>
+            </a:r>
+          </a:p>
+        </p:txBody>
+      </p:sp>
+      <p:sp>
+        <p:nvSpPr>
+          <p:cNvPr id="8" name="Rectangle 7"/>
+          <p:cNvSpPr/>
+          <p:nvPr/>
+        </p:nvSpPr>
+        <p:spPr>
+          <a:xfrm>
+            <a:off x="7589520" y="1737360"/>
+            <a:ext cx="3886200" cy="4297680"/>
+          </a:xfrm>
+          <a:prstGeom prst="rect">
+            <a:avLst/>
+          </a:prstGeom>
+          <a:solidFill>
+            <a:srgbClr val="EAF7F0"/>
+          </a:solidFill>
+          <a:ln>
+            <a:noFill/>
+          </a:ln>
+          <a:effectLst/>
+        </p:spPr>
+        <p:style>
+          <a:lnRef idx="1">
+            <a:schemeClr val="accent1"/>
+          </a:lnRef>
+          <a:fillRef idx="3">
+            <a:schemeClr val="accent1"/>
+          </a:fillRef>
+          <a:effectRef idx="2">
+            <a:schemeClr val="accent1"/>
+          </a:effectRef>
+          <a:fontRef idx="minor">
+            <a:schemeClr val="lt1"/>
+          </a:fontRef>
+        </p:style>
+        <p:txBody>
+          <a:bodyPr rtlCol="0" anchor="ctr"/>
+          <a:lstStyle/>
+          <a:p>
+            <a:pPr algn="ctr"/>
+          </a:p>
+        </p:txBody>
+      </p:sp>
+      <p:sp>
+        <p:nvSpPr>
+          <p:cNvPr id="9" name="Rectangle 8"/>
+          <p:cNvSpPr/>
+          <p:nvPr/>
+        </p:nvSpPr>
+        <p:spPr>
+          <a:xfrm>
+            <a:off x="7589520" y="1737360"/>
+            <a:ext cx="82296" cy="4297680"/>
+          </a:xfrm>
+          <a:prstGeom prst="rect">
+            <a:avLst/>
+          </a:prstGeom>
+          <a:solidFill>
+            <a:srgbClr val="039855"/>
+          </a:solidFill>
+          <a:ln>
+            <a:noFill/>
+          </a:ln>
+          <a:effectLst/>
+        </p:spPr>
+        <p:style>
+          <a:lnRef idx="1">
+            <a:schemeClr val="accent1"/>
+          </a:lnRef>
+          <a:fillRef idx="3">
+            <a:schemeClr val="accent1"/>
+          </a:fillRef>
+          <a:effectRef idx="2">
+            <a:schemeClr val="accent1"/>
+          </a:effectRef>
+          <a:fontRef idx="minor">
+            <a:schemeClr val="lt1"/>
+          </a:fontRef>
+        </p:style>
+        <p:txBody>
+          <a:bodyPr rtlCol="0" anchor="ctr"/>
+          <a:lstStyle/>
+          <a:p>
+            <a:pPr algn="ctr"/>
+          </a:p>
+        </p:txBody>
+      </p:sp>
+      <p:sp>
+        <p:nvSpPr>
+          <p:cNvPr id="10" name="TextBox 9"/>
+          <p:cNvSpPr txBox="1"/>
+          <p:nvPr/>
+        </p:nvSpPr>
+        <p:spPr>
+          <a:xfrm>
+            <a:off x="7790688" y="1847088"/>
+            <a:ext cx="3520440" cy="4096512"/>
+          </a:xfrm>
+          <a:prstGeom prst="rect">
+            <a:avLst/>
+          </a:prstGeom>
+          <a:noFill/>
+        </p:spPr>
+        <p:txBody>
+          <a:bodyPr wrap="square" anchor="t">
+            <a:spAutoFit/>
+          </a:bodyPr>
+          <a:lstStyle/>
+          <a:p>
+            <a:pPr algn="l">
+              <a:spcAft>
+                <a:spcPts val="300"/>
+              </a:spcAft>
+            </a:pPr>
+            <a:r>
+              <a:rPr sz="1300" b="1" i="0">
                 <a:solidFill>
                   <a:srgbClr val="039855"/>
                 </a:solidFill>
-              </a:rPr>
-              <a:t>▸  </a:t>
-            </a:r>
-            <a:r>
-              <a:rPr sz="1700" b="1">
+                <a:latin typeface="Calibri"/>
+              </a:rPr>
+              <a:t>Langkah integrasi (singkat)</a:t>
+            </a:r>
+          </a:p>
+          <a:p>
+            <a:pPr algn="l">
+              <a:spcAft>
+                <a:spcPts val="300"/>
+              </a:spcAft>
+            </a:pPr>
+            <a:r>
+              <a:rPr sz="1150" b="0" i="0">
                 <a:solidFill>
                   <a:srgbClr val="15241C"/>
                 </a:solidFill>
                 <a:latin typeface="Calibri"/>
               </a:rPr>
-              <a:t>Jujur</a:t>
-            </a:r>
-            <a:r>
-              <a:rPr sz="1700" b="0">
+              <a:t>1. Buat API key di console.anthropic.com.</a:t>
+            </a:r>
+          </a:p>
+          <a:p>
+            <a:pPr algn="l">
+              <a:spcAft>
+                <a:spcPts val="300"/>
+              </a:spcAft>
+            </a:pPr>
+            <a:r>
+              <a:rPr sz="1150" b="0" i="0">
                 <a:solidFill>
                   <a:srgbClr val="15241C"/>
                 </a:solidFill>
                 <a:latin typeface="Calibri"/>
               </a:rPr>
-              <a:t>: foto 2D tak bisa ukur tinggi → bukan fitur RF; hanya </a:t>
-            </a:r>
-            <a:r>
-              <a:rPr sz="1700" b="1">
+              <a:t>2. Simpan sebagai secret ANTHROPIC_API_KEY di Cloudflare Pages.</a:t>
+            </a:r>
+          </a:p>
+          <a:p>
+            <a:pPr algn="l">
+              <a:spcAft>
+                <a:spcPts val="300"/>
+              </a:spcAft>
+            </a:pPr>
+            <a:r>
+              <a:rPr sz="1150" b="0" i="0">
                 <a:solidFill>
                   <a:srgbClr val="15241C"/>
                 </a:solidFill>
                 <a:latin typeface="Calibri"/>
               </a:rPr>
-              <a:t>late-fusion</a:t>
-            </a:r>
-            <a:r>
-              <a:rPr sz="1700" b="0">
+              <a:t>3. Permintaan chat lewat fungsi server (Cloudflare Pages Function) agar API key aman — tidak pernah ada di sisi pengguna.</a:t>
+            </a:r>
+          </a:p>
+          <a:p>
+            <a:pPr algn="l">
+              <a:spcAft>
+                <a:spcPts val="300"/>
+              </a:spcAft>
+            </a:pPr>
+            <a:r>
+              <a:rPr sz="1150" b="0" i="0">
                 <a:solidFill>
                   <a:srgbClr val="15241C"/>
                 </a:solidFill>
                 <a:latin typeface="Calibri"/>
               </a:rPr>
-              <a:t> transparan (maks ±10 poin, tampil sebelum→sesudah).</a:t>
-            </a:r>
-          </a:p>
-          <a:p>
-            <a:pPr>
-              <a:spcAft>
-                <a:spcPts val="1000"/>
-              </a:spcAft>
-            </a:pPr>
-            <a:r>
-              <a:rPr sz="1700" b="1">
-                <a:solidFill>
-                  <a:srgbClr val="039855"/>
-                </a:solidFill>
-              </a:rPr>
-              <a:t>▸  </a:t>
-            </a:r>
-            <a:r>
-              <a:rPr sz="1700" b="0">
-                <a:solidFill>
-                  <a:srgbClr val="15241C"/>
-                </a:solidFill>
-                <a:latin typeface="Calibri"/>
-              </a:rPr>
-              <a:t>Random Forest </a:t>
-            </a:r>
-            <a:r>
-              <a:rPr sz="1700" b="1">
-                <a:solidFill>
-                  <a:srgbClr val="15241C"/>
-                </a:solidFill>
-                <a:latin typeface="Calibri"/>
-              </a:rPr>
-              <a:t>tidak dilatih ulang</a:t>
-            </a:r>
-            <a:r>
-              <a:rPr sz="1700" b="0">
-                <a:solidFill>
-                  <a:srgbClr val="15241C"/>
-                </a:solidFill>
-                <a:latin typeface="Calibri"/>
-              </a:rPr>
-              <a:t> — tidak ada klaim palsu.</a:t>
+              <a:t>4. Deploy ulang. Selesai.</a:t>
             </a:r>
           </a:p>
         </p:txBody>
@@ -5495,7 +5745,7 @@
         </p:nvSpPr>
         <p:spPr>
           <a:xfrm>
-            <a:off x="548640" y="502920"/>
+            <a:off x="548640" y="457200"/>
             <a:ext cx="548640" cy="82296"/>
           </a:xfrm>
           <a:prstGeom prst="rect">
@@ -5539,8 +5789,8 @@
         </p:nvSpPr>
         <p:spPr>
           <a:xfrm>
-            <a:off x="548640" y="603504"/>
-            <a:ext cx="10058400" cy="365760"/>
+            <a:off x="548640" y="548640"/>
+            <a:ext cx="10515600" cy="365760"/>
           </a:xfrm>
           <a:prstGeom prst="rect">
             <a:avLst/>
@@ -5578,8 +5828,8 @@
         </p:nvSpPr>
         <p:spPr>
           <a:xfrm>
-            <a:off x="548640" y="868680"/>
-            <a:ext cx="11064240" cy="914400"/>
+            <a:off x="548640" y="804672"/>
+            <a:ext cx="11155680" cy="914400"/>
           </a:xfrm>
           <a:prstGeom prst="rect">
             <a:avLst/>
@@ -5598,7 +5848,7 @@
               </a:spcAft>
             </a:pPr>
             <a:r>
-              <a:rPr sz="3000" b="1" i="0">
+              <a:rPr sz="2800" b="1" i="0">
                 <a:solidFill>
                   <a:srgbClr val="05312A"/>
                 </a:solidFill>
@@ -5617,7 +5867,7 @@
         </p:nvSpPr>
         <p:spPr>
           <a:xfrm>
-            <a:off x="640080" y="2011680"/>
+            <a:off x="594360" y="1828800"/>
             <a:ext cx="10881360" cy="2743200"/>
           </a:xfrm>
           <a:prstGeom prst="rect">
@@ -5637,7 +5887,7 @@
               </a:spcAft>
             </a:pPr>
             <a:r>
-              <a:rPr sz="1800" b="1">
+              <a:rPr sz="1700" b="1">
                 <a:solidFill>
                   <a:srgbClr val="039855"/>
                 </a:solidFill>
@@ -5645,7 +5895,7 @@
               <a:t>▸  </a:t>
             </a:r>
             <a:r>
-              <a:rPr sz="1800" b="0">
+              <a:rPr sz="1700" b="0">
                 <a:solidFill>
                   <a:srgbClr val="15241C"/>
                 </a:solidFill>
@@ -5654,7 +5904,7 @@
               <a:t>Live di </a:t>
             </a:r>
             <a:r>
-              <a:rPr sz="1800" b="1">
+              <a:rPr sz="1700" b="1">
                 <a:solidFill>
                   <a:srgbClr val="15241C"/>
                 </a:solidFill>
@@ -5663,7 +5913,7 @@
               <a:t>Cloudflare Pages</a:t>
             </a:r>
             <a:r>
-              <a:rPr sz="1800" b="0">
+              <a:rPr sz="1700" b="0">
                 <a:solidFill>
                   <a:srgbClr val="15241C"/>
                 </a:solidFill>
@@ -5679,7 +5929,7 @@
               </a:spcAft>
             </a:pPr>
             <a:r>
-              <a:rPr sz="1800" b="1">
+              <a:rPr sz="1700" b="1">
                 <a:solidFill>
                   <a:srgbClr val="039855"/>
                 </a:solidFill>
@@ -5687,7 +5937,7 @@
               <a:t>▸  </a:t>
             </a:r>
             <a:r>
-              <a:rPr sz="1800" b="0">
+              <a:rPr sz="1700" b="0">
                 <a:solidFill>
                   <a:srgbClr val="15241C"/>
                 </a:solidFill>
@@ -5696,7 +5946,7 @@
               <a:t>URL: </a:t>
             </a:r>
             <a:r>
-              <a:rPr sz="1800" b="1">
+              <a:rPr sz="1700" b="1">
                 <a:solidFill>
                   <a:srgbClr val="15241C"/>
                 </a:solidFill>
@@ -5712,7 +5962,7 @@
               </a:spcAft>
             </a:pPr>
             <a:r>
-              <a:rPr sz="1800" b="1">
+              <a:rPr sz="1700" b="1">
                 <a:solidFill>
                   <a:srgbClr val="039855"/>
                 </a:solidFill>
@@ -5720,7 +5970,7 @@
               <a:t>▸  </a:t>
             </a:r>
             <a:r>
-              <a:rPr sz="1800" b="0">
+              <a:rPr sz="1700" b="0">
                 <a:solidFill>
                   <a:srgbClr val="15241C"/>
                 </a:solidFill>
@@ -5736,7 +5986,7 @@
               </a:spcAft>
             </a:pPr>
             <a:r>
-              <a:rPr sz="1800" b="1">
+              <a:rPr sz="1700" b="1">
                 <a:solidFill>
                   <a:srgbClr val="039855"/>
                 </a:solidFill>
@@ -5744,7 +5994,7 @@
               <a:t>▸  </a:t>
             </a:r>
             <a:r>
-              <a:rPr sz="1800" b="0">
+              <a:rPr sz="1700" b="0">
                 <a:solidFill>
                   <a:srgbClr val="15241C"/>
                 </a:solidFill>
@@ -5763,7 +6013,7 @@
         </p:nvSpPr>
         <p:spPr>
           <a:xfrm>
-            <a:off x="640080" y="4937760"/>
+            <a:off x="594360" y="4754880"/>
             <a:ext cx="10881360" cy="1005840"/>
           </a:xfrm>
           <a:prstGeom prst="rect">
@@ -5807,7 +6057,7 @@
         </p:nvSpPr>
         <p:spPr>
           <a:xfrm>
-            <a:off x="822960" y="5120640"/>
+            <a:off x="777240" y="4937760"/>
             <a:ext cx="10515600" cy="731520"/>
           </a:xfrm>
           <a:prstGeom prst="rect">
@@ -5833,7 +6083,7 @@
                 </a:solidFill>
                 <a:latin typeface="Calibri"/>
               </a:rPr>
-              <a:t>Demo langsung: isi 7 faktor → Analisis → hasil tampil seketika (offline).</a:t>
+              <a:t>Demo langsung: isi 7 faktor → tekan Analisis → hasil tampil seketika (offline).</a:t>
             </a:r>
           </a:p>
         </p:txBody>
@@ -5952,7 +6202,7 @@
         </p:nvSpPr>
         <p:spPr>
           <a:xfrm>
-            <a:off x="822960" y="822960"/>
+            <a:off x="822960" y="777240"/>
             <a:ext cx="10515600" cy="548640"/>
           </a:xfrm>
           <a:prstGeom prst="rect">
@@ -5991,7 +6241,7 @@
         </p:nvSpPr>
         <p:spPr>
           <a:xfrm>
-            <a:off x="822960" y="1645920"/>
+            <a:off x="822960" y="1554480"/>
             <a:ext cx="10515600" cy="3291840"/>
           </a:xfrm>
           <a:prstGeom prst="rect">
@@ -6032,7 +6282,7 @@
                   <a:srgbClr val="FFFFFF"/>
                 </a:solidFill>
               </a:rPr>
-              <a:t> (Excellent) menggabungkan 7 faktor penyebab stunting.</a:t>
+              <a:t> menggabungkan 7 faktor penyebab stunting.</a:t>
             </a:r>
           </a:p>
           <a:p>
@@ -6055,7 +6305,7 @@
                   <a:srgbClr val="FFFFFF"/>
                 </a:solidFill>
               </a:rPr>
-              <a:t>Model asli berjalan </a:t>
+              <a:t>Model berjalan </a:t>
             </a:r>
             <a:r>
               <a:rPr sz="1900" b="1">
@@ -6071,7 +6321,7 @@
                   <a:srgbClr val="FFFFFF"/>
                 </a:solidFill>
               </a:rPr>
-              <a:t> via ONNX — gratis, cepat, luring, privat.</a:t>
+              <a:t> — gratis, cepat, offline, dan privat.</a:t>
             </a:r>
           </a:p>
           <a:p>
@@ -6094,7 +6344,39 @@
                   <a:srgbClr val="FFFFFF"/>
                 </a:solidFill>
               </a:rPr>
-              <a:t>Mengatasi keterbatasan Streamlit &amp; bug freeze; transparan dan etis (SDG #3).</a:t>
+              <a:t>Dilengkapi </a:t>
+            </a:r>
+            <a:r>
+              <a:rPr sz="1900" b="1">
+                <a:solidFill>
+                  <a:srgbClr val="FFFFFF"/>
+                </a:solidFill>
+              </a:rPr>
+              <a:t>analisis foto</a:t>
+            </a:r>
+            <a:r>
+              <a:rPr sz="1900" b="0">
+                <a:solidFill>
+                  <a:srgbClr val="FFFFFF"/>
+                </a:solidFill>
+              </a:rPr>
+              <a:t> &amp; </a:t>
+            </a:r>
+            <a:r>
+              <a:rPr sz="1900" b="1">
+                <a:solidFill>
+                  <a:srgbClr val="FFFFFF"/>
+                </a:solidFill>
+              </a:rPr>
+              <a:t>asisten AI gizi</a:t>
+            </a:r>
+            <a:r>
+              <a:rPr sz="1900" b="0">
+                <a:solidFill>
+                  <a:srgbClr val="FFFFFF"/>
+                </a:solidFill>
+              </a:rPr>
+              <a:t> sebagai pengayaan yang jujur.</a:t>
             </a:r>
           </a:p>
           <a:p>
@@ -6133,7 +6415,7 @@
                   <a:srgbClr val="FFFFFF"/>
                 </a:solidFill>
               </a:rPr>
-              <a:t>; lanjutan: validasi klinis modul foto.</a:t>
+              <a:t>; lanjutan: validasi dengan data klinis nyata.</a:t>
             </a:r>
           </a:p>
         </p:txBody>
@@ -6146,7 +6428,7 @@
         </p:nvSpPr>
         <p:spPr>
           <a:xfrm>
-            <a:off x="822960" y="5394960"/>
+            <a:off x="822960" y="5349240"/>
             <a:ext cx="10515600" cy="914400"/>
           </a:xfrm>
           <a:prstGeom prst="rect">
@@ -6307,7 +6589,7 @@
         </p:nvSpPr>
         <p:spPr>
           <a:xfrm>
-            <a:off x="548640" y="502920"/>
+            <a:off x="548640" y="457200"/>
             <a:ext cx="548640" cy="82296"/>
           </a:xfrm>
           <a:prstGeom prst="rect">
@@ -6351,8 +6633,8 @@
         </p:nvSpPr>
         <p:spPr>
           <a:xfrm>
-            <a:off x="548640" y="603504"/>
-            <a:ext cx="10058400" cy="365760"/>
+            <a:off x="548640" y="548640"/>
+            <a:ext cx="10515600" cy="365760"/>
           </a:xfrm>
           <a:prstGeom prst="rect">
             <a:avLst/>
@@ -6390,8 +6672,8 @@
         </p:nvSpPr>
         <p:spPr>
           <a:xfrm>
-            <a:off x="548640" y="868680"/>
-            <a:ext cx="11064240" cy="914400"/>
+            <a:off x="548640" y="804672"/>
+            <a:ext cx="11155680" cy="914400"/>
           </a:xfrm>
           <a:prstGeom prst="rect">
             <a:avLst/>
@@ -6410,13 +6692,13 @@
               </a:spcAft>
             </a:pPr>
             <a:r>
-              <a:rPr sz="3000" b="1" i="0">
+              <a:rPr sz="2800" b="1" i="0">
                 <a:solidFill>
                   <a:srgbClr val="05312A"/>
                 </a:solidFill>
                 <a:latin typeface="Calibri"/>
               </a:rPr>
-              <a:t>Stunting: masalah gizi kronis multi-faktor</a:t>
+              <a:t>Stunting: gagal tumbuh karena banyak faktor</a:t>
             </a:r>
           </a:p>
         </p:txBody>
@@ -6429,8 +6711,8 @@
         </p:nvSpPr>
         <p:spPr>
           <a:xfrm>
-            <a:off x="640080" y="2011680"/>
-            <a:ext cx="6766560" cy="4114800"/>
+            <a:off x="594360" y="1783080"/>
+            <a:ext cx="6675120" cy="2926080"/>
           </a:xfrm>
           <a:prstGeom prst="rect">
             <a:avLst/>
@@ -6449,7 +6731,7 @@
               </a:spcAft>
             </a:pPr>
             <a:r>
-              <a:rPr sz="1800" b="1">
+              <a:rPr sz="1700" b="1">
                 <a:solidFill>
                   <a:srgbClr val="039855"/>
                 </a:solidFill>
@@ -6457,7 +6739,7 @@
               <a:t>▸  </a:t>
             </a:r>
             <a:r>
-              <a:rPr sz="1800" b="0">
+              <a:rPr sz="1700" b="0">
                 <a:solidFill>
                   <a:srgbClr val="15241C"/>
                 </a:solidFill>
@@ -6466,7 +6748,7 @@
               <a:t>Prevalensi stunting Indonesia </a:t>
             </a:r>
             <a:r>
-              <a:rPr sz="1800" b="1">
+              <a:rPr sz="1700" b="1">
                 <a:solidFill>
                   <a:srgbClr val="15241C"/>
                 </a:solidFill>
@@ -6475,7 +6757,7 @@
               <a:t>19,8%</a:t>
             </a:r>
             <a:r>
-              <a:rPr sz="1800" b="0">
+              <a:rPr sz="1700" b="0">
                 <a:solidFill>
                   <a:srgbClr val="15241C"/>
                 </a:solidFill>
@@ -6491,7 +6773,7 @@
               </a:spcAft>
             </a:pPr>
             <a:r>
-              <a:rPr sz="1800" b="1">
+              <a:rPr sz="1700" b="1">
                 <a:solidFill>
                   <a:srgbClr val="039855"/>
                 </a:solidFill>
@@ -6499,31 +6781,31 @@
               <a:t>▸  </a:t>
             </a:r>
             <a:r>
-              <a:rPr sz="1800" b="0">
+              <a:rPr sz="1700" b="0">
                 <a:solidFill>
                   <a:srgbClr val="15241C"/>
                 </a:solidFill>
                 <a:latin typeface="Calibri"/>
               </a:rPr>
-              <a:t>Definisi: tinggi-untuk-umur </a:t>
-            </a:r>
-            <a:r>
-              <a:rPr sz="1800" b="1">
+              <a:t>Stunting = anak </a:t>
+            </a:r>
+            <a:r>
+              <a:rPr sz="1700" b="1">
                 <a:solidFill>
                   <a:srgbClr val="15241C"/>
                 </a:solidFill>
                 <a:latin typeface="Calibri"/>
               </a:rPr>
-              <a:t>(HAZ) &lt; −2 SD</a:t>
-            </a:r>
-            <a:r>
-              <a:rPr sz="1800" b="0">
+              <a:t>lebih pendek</a:t>
+            </a:r>
+            <a:r>
+              <a:rPr sz="1700" b="0">
                 <a:solidFill>
                   <a:srgbClr val="15241C"/>
                 </a:solidFill>
                 <a:latin typeface="Calibri"/>
               </a:rPr>
-              <a:t> (WHO 2006).</a:t>
+              <a:t> dari standar usianya akibat kurang gizi kronis.</a:t>
             </a:r>
           </a:p>
           <a:p>
@@ -6533,7 +6815,7 @@
               </a:spcAft>
             </a:pPr>
             <a:r>
-              <a:rPr sz="1800" b="1">
+              <a:rPr sz="1700" b="1">
                 <a:solidFill>
                   <a:srgbClr val="039855"/>
                 </a:solidFill>
@@ -6541,13 +6823,13 @@
               <a:t>▸  </a:t>
             </a:r>
             <a:r>
-              <a:rPr sz="1800" b="0">
+              <a:rPr sz="1700" b="0">
                 <a:solidFill>
                   <a:srgbClr val="15241C"/>
                 </a:solidFill>
                 <a:latin typeface="Calibri"/>
               </a:rPr>
-              <a:t>Dampak jangka panjang: kognitif, imunitas, produktivitas.</a:t>
+              <a:t>Dampak jangka panjang: kecerdasan, daya tahan tubuh, dan produktivitas.</a:t>
             </a:r>
           </a:p>
           <a:p>
@@ -6557,7 +6839,7 @@
               </a:spcAft>
             </a:pPr>
             <a:r>
-              <a:rPr sz="1800" b="1">
+              <a:rPr sz="1700" b="1">
                 <a:solidFill>
                   <a:srgbClr val="039855"/>
                 </a:solidFill>
@@ -6565,7 +6847,7 @@
               <a:t>▸  </a:t>
             </a:r>
             <a:r>
-              <a:rPr sz="1800" b="0">
+              <a:rPr sz="1700" b="0">
                 <a:solidFill>
                   <a:srgbClr val="15241C"/>
                 </a:solidFill>
@@ -6574,7 +6856,7 @@
               <a:t>Penyebabnya </a:t>
             </a:r>
             <a:r>
-              <a:rPr sz="1800" b="1">
+              <a:rPr sz="1700" b="1">
                 <a:solidFill>
                   <a:srgbClr val="15241C"/>
                 </a:solidFill>
@@ -6583,37 +6865,13 @@
               <a:t>banyak faktor</a:t>
             </a:r>
             <a:r>
-              <a:rPr sz="1800" b="0">
+              <a:rPr sz="1700" b="0">
                 <a:solidFill>
                   <a:srgbClr val="15241C"/>
                 </a:solidFill>
                 <a:latin typeface="Calibri"/>
               </a:rPr>
-              <a:t> — bukan hanya tinggi badan: jarak kehamilan, usia ibu menikah, gizi ibu saat hamil (KEK → BBLR).</a:t>
-            </a:r>
-          </a:p>
-          <a:p>
-            <a:pPr>
-              <a:spcAft>
-                <a:spcPts val="1000"/>
-              </a:spcAft>
-            </a:pPr>
-            <a:r>
-              <a:rPr sz="1800" b="1">
-                <a:solidFill>
-                  <a:srgbClr val="039855"/>
-                </a:solidFill>
-              </a:rPr>
-              <a:t>▸  </a:t>
-            </a:r>
-            <a:r>
-              <a:rPr sz="1800" b="0">
-                <a:solidFill>
-                  <a:srgbClr val="15241C"/>
-                </a:solidFill>
-                <a:latin typeface="Calibri"/>
-              </a:rPr>
-              <a:t>Skrining lapangan masih manual &amp; satu indikator saja.</a:t>
+              <a:t> — bukan hanya tinggi badan anak.</a:t>
             </a:r>
           </a:p>
         </p:txBody>
@@ -6626,8 +6884,8 @@
         </p:nvSpPr>
         <p:spPr>
           <a:xfrm>
-            <a:off x="7772400" y="2194560"/>
-            <a:ext cx="3840480" cy="1554480"/>
+            <a:off x="594360" y="4800600"/>
+            <a:ext cx="10881360" cy="1417320"/>
           </a:xfrm>
           <a:prstGeom prst="rect">
             <a:avLst/>
@@ -6670,8 +6928,8 @@
         </p:nvSpPr>
         <p:spPr>
           <a:xfrm>
-            <a:off x="7772400" y="2194560"/>
-            <a:ext cx="3840480" cy="82296"/>
+            <a:off x="594360" y="4800600"/>
+            <a:ext cx="82296" cy="1417320"/>
           </a:xfrm>
           <a:prstGeom prst="rect">
             <a:avLst/>
@@ -6714,8 +6972,8 @@
         </p:nvSpPr>
         <p:spPr>
           <a:xfrm>
-            <a:off x="7772400" y="2450592"/>
-            <a:ext cx="3840480" cy="731520"/>
+            <a:off x="795528" y="4910328"/>
+            <a:ext cx="10515600" cy="1216152"/>
           </a:xfrm>
           <a:prstGeom prst="rect">
             <a:avLst/>
@@ -6728,72 +6986,49 @@
           </a:bodyPr>
           <a:lstStyle/>
           <a:p>
-            <a:pPr algn="ctr">
-              <a:spcAft>
-                <a:spcPts val="600"/>
-              </a:spcAft>
-            </a:pPr>
-            <a:r>
-              <a:rPr sz="3400" b="1" i="0">
+            <a:pPr algn="l">
+              <a:spcAft>
+                <a:spcPts val="300"/>
+              </a:spcAft>
+            </a:pPr>
+            <a:r>
+              <a:rPr sz="1300" b="1" i="0">
                 <a:solidFill>
                   <a:srgbClr val="039855"/>
                 </a:solidFill>
                 <a:latin typeface="Calibri"/>
               </a:rPr>
-              <a:t>19,8%</a:t>
-            </a:r>
-          </a:p>
-        </p:txBody>
-      </p:sp>
-      <p:sp>
-        <p:nvSpPr>
-          <p:cNvPr id="11" name="TextBox 10"/>
-          <p:cNvSpPr txBox="1"/>
-          <p:nvPr/>
-        </p:nvSpPr>
-        <p:spPr>
-          <a:xfrm>
-            <a:off x="7772400" y="3182112"/>
-            <a:ext cx="3840480" cy="457200"/>
-          </a:xfrm>
-          <a:prstGeom prst="rect">
-            <a:avLst/>
-          </a:prstGeom>
-          <a:noFill/>
-        </p:spPr>
-        <p:txBody>
-          <a:bodyPr wrap="square" anchor="t">
-            <a:spAutoFit/>
-          </a:bodyPr>
-          <a:lstStyle/>
-          <a:p>
-            <a:pPr algn="ctr">
-              <a:spcAft>
-                <a:spcPts val="600"/>
-              </a:spcAft>
-            </a:pPr>
-            <a:r>
-              <a:rPr sz="1300" b="0" i="0">
-                <a:solidFill>
-                  <a:srgbClr val="4B5563"/>
-                </a:solidFill>
-                <a:latin typeface="Calibri"/>
-              </a:rPr>
-              <a:t>Prevalensi nasional (SSGI 2024)</a:t>
-            </a:r>
-          </a:p>
-        </p:txBody>
-      </p:sp>
-      <p:sp>
-        <p:nvSpPr>
-          <p:cNvPr id="12" name="Rectangle 11"/>
+              <a:t>Apa itu "KEK → BBLR"?</a:t>
+            </a:r>
+          </a:p>
+          <a:p>
+            <a:pPr algn="l">
+              <a:spcAft>
+                <a:spcPts val="300"/>
+              </a:spcAft>
+            </a:pPr>
+            <a:r>
+              <a:rPr sz="1150" b="0" i="0">
+                <a:solidFill>
+                  <a:srgbClr val="15241C"/>
+                </a:solidFill>
+                <a:latin typeface="Calibri"/>
+              </a:rPr>
+              <a:t>KEK = Kurang Energi Kronis: ibu kekurangan gizi dalam waktu lama saat hamil. Ini bisa menyebabkan BBLR = Berat Badan Lahir Rendah (bayi lahir &lt; 2,5 kg). Bayi BBLR lebih berisiko mengalami stunting. Karena itu gizi ibu saat hamil ikut dihitung.</a:t>
+            </a:r>
+          </a:p>
+        </p:txBody>
+      </p:sp>
+      <p:sp>
+        <p:nvSpPr>
+          <p:cNvPr id="11" name="Rectangle 10"/>
           <p:cNvSpPr/>
           <p:nvPr/>
         </p:nvSpPr>
         <p:spPr>
           <a:xfrm>
-            <a:off x="7772400" y="4023360"/>
-            <a:ext cx="3840480" cy="1554480"/>
+            <a:off x="7589520" y="1783080"/>
+            <a:ext cx="3886200" cy="1463040"/>
           </a:xfrm>
           <a:prstGeom prst="rect">
             <a:avLst/>
@@ -6830,14 +7065,14 @@
       </p:sp>
       <p:sp>
         <p:nvSpPr>
-          <p:cNvPr id="13" name="Rectangle 12"/>
+          <p:cNvPr id="12" name="Rectangle 11"/>
           <p:cNvSpPr/>
           <p:nvPr/>
         </p:nvSpPr>
         <p:spPr>
           <a:xfrm>
-            <a:off x="7772400" y="4023360"/>
-            <a:ext cx="3840480" cy="82296"/>
+            <a:off x="7589520" y="1783080"/>
+            <a:ext cx="3886200" cy="82296"/>
           </a:xfrm>
           <a:prstGeom prst="rect">
             <a:avLst/>
@@ -6874,14 +7109,14 @@
       </p:sp>
       <p:sp>
         <p:nvSpPr>
-          <p:cNvPr id="14" name="TextBox 13"/>
+          <p:cNvPr id="13" name="TextBox 12"/>
           <p:cNvSpPr txBox="1"/>
           <p:nvPr/>
         </p:nvSpPr>
         <p:spPr>
           <a:xfrm>
-            <a:off x="7772400" y="4279392"/>
-            <a:ext cx="3840480" cy="731520"/>
+            <a:off x="7589520" y="2020824"/>
+            <a:ext cx="3886200" cy="731520"/>
           </a:xfrm>
           <a:prstGeom prst="rect">
             <a:avLst/>
@@ -6900,27 +7135,27 @@
               </a:spcAft>
             </a:pPr>
             <a:r>
-              <a:rPr sz="3400" b="1" i="0">
+              <a:rPr sz="3200" b="1" i="0">
                 <a:solidFill>
                   <a:srgbClr val="039855"/>
                 </a:solidFill>
                 <a:latin typeface="Calibri"/>
               </a:rPr>
-              <a:t>7</a:t>
-            </a:r>
-          </a:p>
-        </p:txBody>
-      </p:sp>
-      <p:sp>
-        <p:nvSpPr>
-          <p:cNvPr id="15" name="TextBox 14"/>
+              <a:t>19,8%</a:t>
+            </a:r>
+          </a:p>
+        </p:txBody>
+      </p:sp>
+      <p:sp>
+        <p:nvSpPr>
+          <p:cNvPr id="14" name="TextBox 13"/>
           <p:cNvSpPr txBox="1"/>
           <p:nvPr/>
         </p:nvSpPr>
         <p:spPr>
           <a:xfrm>
-            <a:off x="7772400" y="5010912"/>
-            <a:ext cx="3840480" cy="457200"/>
+            <a:off x="7589520" y="2697480"/>
+            <a:ext cx="3886200" cy="457200"/>
           </a:xfrm>
           <a:prstGeom prst="rect">
             <a:avLst/>
@@ -6939,7 +7174,173 @@
               </a:spcAft>
             </a:pPr>
             <a:r>
-              <a:rPr sz="1300" b="0" i="0">
+              <a:rPr sz="1200" b="0" i="0">
+                <a:solidFill>
+                  <a:srgbClr val="4B5563"/>
+                </a:solidFill>
+                <a:latin typeface="Calibri"/>
+              </a:rPr>
+              <a:t>Prevalensi nasional (SSGI 2024)</a:t>
+            </a:r>
+          </a:p>
+        </p:txBody>
+      </p:sp>
+      <p:sp>
+        <p:nvSpPr>
+          <p:cNvPr id="15" name="Rectangle 14"/>
+          <p:cNvSpPr/>
+          <p:nvPr/>
+        </p:nvSpPr>
+        <p:spPr>
+          <a:xfrm>
+            <a:off x="7589520" y="3383280"/>
+            <a:ext cx="3886200" cy="1463040"/>
+          </a:xfrm>
+          <a:prstGeom prst="rect">
+            <a:avLst/>
+          </a:prstGeom>
+          <a:solidFill>
+            <a:srgbClr val="EAF7F0"/>
+          </a:solidFill>
+          <a:ln>
+            <a:noFill/>
+          </a:ln>
+          <a:effectLst/>
+        </p:spPr>
+        <p:style>
+          <a:lnRef idx="1">
+            <a:schemeClr val="accent1"/>
+          </a:lnRef>
+          <a:fillRef idx="3">
+            <a:schemeClr val="accent1"/>
+          </a:fillRef>
+          <a:effectRef idx="2">
+            <a:schemeClr val="accent1"/>
+          </a:effectRef>
+          <a:fontRef idx="minor">
+            <a:schemeClr val="lt1"/>
+          </a:fontRef>
+        </p:style>
+        <p:txBody>
+          <a:bodyPr rtlCol="0" anchor="ctr"/>
+          <a:lstStyle/>
+          <a:p>
+            <a:pPr algn="ctr"/>
+          </a:p>
+        </p:txBody>
+      </p:sp>
+      <p:sp>
+        <p:nvSpPr>
+          <p:cNvPr id="16" name="Rectangle 15"/>
+          <p:cNvSpPr/>
+          <p:nvPr/>
+        </p:nvSpPr>
+        <p:spPr>
+          <a:xfrm>
+            <a:off x="7589520" y="3383280"/>
+            <a:ext cx="3886200" cy="82296"/>
+          </a:xfrm>
+          <a:prstGeom prst="rect">
+            <a:avLst/>
+          </a:prstGeom>
+          <a:solidFill>
+            <a:srgbClr val="039855"/>
+          </a:solidFill>
+          <a:ln>
+            <a:noFill/>
+          </a:ln>
+          <a:effectLst/>
+        </p:spPr>
+        <p:style>
+          <a:lnRef idx="1">
+            <a:schemeClr val="accent1"/>
+          </a:lnRef>
+          <a:fillRef idx="3">
+            <a:schemeClr val="accent1"/>
+          </a:fillRef>
+          <a:effectRef idx="2">
+            <a:schemeClr val="accent1"/>
+          </a:effectRef>
+          <a:fontRef idx="minor">
+            <a:schemeClr val="lt1"/>
+          </a:fontRef>
+        </p:style>
+        <p:txBody>
+          <a:bodyPr rtlCol="0" anchor="ctr"/>
+          <a:lstStyle/>
+          <a:p>
+            <a:pPr algn="ctr"/>
+          </a:p>
+        </p:txBody>
+      </p:sp>
+      <p:sp>
+        <p:nvSpPr>
+          <p:cNvPr id="17" name="TextBox 16"/>
+          <p:cNvSpPr txBox="1"/>
+          <p:nvPr/>
+        </p:nvSpPr>
+        <p:spPr>
+          <a:xfrm>
+            <a:off x="7589520" y="3621024"/>
+            <a:ext cx="3886200" cy="731520"/>
+          </a:xfrm>
+          <a:prstGeom prst="rect">
+            <a:avLst/>
+          </a:prstGeom>
+          <a:noFill/>
+        </p:spPr>
+        <p:txBody>
+          <a:bodyPr wrap="square" anchor="t">
+            <a:spAutoFit/>
+          </a:bodyPr>
+          <a:lstStyle/>
+          <a:p>
+            <a:pPr algn="ctr">
+              <a:spcAft>
+                <a:spcPts val="600"/>
+              </a:spcAft>
+            </a:pPr>
+            <a:r>
+              <a:rPr sz="3200" b="1" i="0">
+                <a:solidFill>
+                  <a:srgbClr val="039855"/>
+                </a:solidFill>
+                <a:latin typeface="Calibri"/>
+              </a:rPr>
+              <a:t>7</a:t>
+            </a:r>
+          </a:p>
+        </p:txBody>
+      </p:sp>
+      <p:sp>
+        <p:nvSpPr>
+          <p:cNvPr id="18" name="TextBox 17"/>
+          <p:cNvSpPr txBox="1"/>
+          <p:nvPr/>
+        </p:nvSpPr>
+        <p:spPr>
+          <a:xfrm>
+            <a:off x="7589520" y="4297680"/>
+            <a:ext cx="3886200" cy="457200"/>
+          </a:xfrm>
+          <a:prstGeom prst="rect">
+            <a:avLst/>
+          </a:prstGeom>
+          <a:noFill/>
+        </p:spPr>
+        <p:txBody>
+          <a:bodyPr wrap="square" anchor="t">
+            <a:spAutoFit/>
+          </a:bodyPr>
+          <a:lstStyle/>
+          <a:p>
+            <a:pPr algn="ctr">
+              <a:spcAft>
+                <a:spcPts val="600"/>
+              </a:spcAft>
+            </a:pPr>
+            <a:r>
+              <a:rPr sz="1200" b="0" i="0">
                 <a:solidFill>
                   <a:srgbClr val="4B5563"/>
                 </a:solidFill>
@@ -7064,7 +7465,7 @@
         </p:nvSpPr>
         <p:spPr>
           <a:xfrm>
-            <a:off x="548640" y="502920"/>
+            <a:off x="548640" y="457200"/>
             <a:ext cx="548640" cy="82296"/>
           </a:xfrm>
           <a:prstGeom prst="rect">
@@ -7108,8 +7509,8 @@
         </p:nvSpPr>
         <p:spPr>
           <a:xfrm>
-            <a:off x="548640" y="603504"/>
-            <a:ext cx="10058400" cy="365760"/>
+            <a:off x="548640" y="548640"/>
+            <a:ext cx="10515600" cy="365760"/>
           </a:xfrm>
           <a:prstGeom prst="rect">
             <a:avLst/>
@@ -7147,8 +7548,8 @@
         </p:nvSpPr>
         <p:spPr>
           <a:xfrm>
-            <a:off x="548640" y="868680"/>
-            <a:ext cx="11064240" cy="914400"/>
+            <a:off x="548640" y="804672"/>
+            <a:ext cx="11155680" cy="914400"/>
           </a:xfrm>
           <a:prstGeom prst="rect">
             <a:avLst/>
@@ -7167,7 +7568,7 @@
               </a:spcAft>
             </a:pPr>
             <a:r>
-              <a:rPr sz="3000" b="1" i="0">
+              <a:rPr sz="2800" b="1" i="0">
                 <a:solidFill>
                   <a:srgbClr val="05312A"/>
                 </a:solidFill>
@@ -7186,8 +7587,8 @@
         </p:nvSpPr>
         <p:spPr>
           <a:xfrm>
-            <a:off x="640080" y="2011680"/>
-            <a:ext cx="10881360" cy="4114800"/>
+            <a:off x="594360" y="1737360"/>
+            <a:ext cx="10972800" cy="1828800"/>
           </a:xfrm>
           <a:prstGeom prst="rect">
             <a:avLst/>
@@ -7206,7 +7607,7 @@
               </a:spcAft>
             </a:pPr>
             <a:r>
-              <a:rPr sz="1900" b="1">
+              <a:rPr sz="1700" b="1">
                 <a:solidFill>
                   <a:srgbClr val="039855"/>
                 </a:solidFill>
@@ -7214,7 +7615,7 @@
               <a:t>▸  </a:t>
             </a:r>
             <a:r>
-              <a:rPr sz="1900" b="0">
+              <a:rPr sz="1700" b="0">
                 <a:solidFill>
                   <a:srgbClr val="15241C"/>
                 </a:solidFill>
@@ -7223,7 +7624,7 @@
               <a:t>Aplikasi web yang menggabungkan </a:t>
             </a:r>
             <a:r>
-              <a:rPr sz="1900" b="1">
+              <a:rPr sz="1700" b="1">
                 <a:solidFill>
                   <a:srgbClr val="15241C"/>
                 </a:solidFill>
@@ -7232,13 +7633,13 @@
               <a:t>7 faktor</a:t>
             </a:r>
             <a:r>
-              <a:rPr sz="1900" b="0">
+              <a:rPr sz="1700" b="0">
                 <a:solidFill>
                   <a:srgbClr val="15241C"/>
                 </a:solidFill>
                 <a:latin typeface="Calibri"/>
               </a:rPr>
-              <a:t> menjadi satu prediksi terpadu.</a:t>
+              <a:t> menjadi satu prediksi.</a:t>
             </a:r>
           </a:p>
           <a:p>
@@ -7248,7 +7649,7 @@
               </a:spcAft>
             </a:pPr>
             <a:r>
-              <a:rPr sz="1900" b="1">
+              <a:rPr sz="1700" b="1">
                 <a:solidFill>
                   <a:srgbClr val="039855"/>
                 </a:solidFill>
@@ -7256,7 +7657,7 @@
               <a:t>▸  </a:t>
             </a:r>
             <a:r>
-              <a:rPr sz="1900" b="0">
+              <a:rPr sz="1700" b="0">
                 <a:solidFill>
                   <a:srgbClr val="15241C"/>
                 </a:solidFill>
@@ -7265,7 +7666,7 @@
               <a:t>Mesin prediksi: </a:t>
             </a:r>
             <a:r>
-              <a:rPr sz="1900" b="1">
+              <a:rPr sz="1700" b="1">
                 <a:solidFill>
                   <a:srgbClr val="15241C"/>
                 </a:solidFill>
@@ -7274,13 +7675,13 @@
               <a:t>Random Forest</a:t>
             </a:r>
             <a:r>
-              <a:rPr sz="1900" b="0">
+              <a:rPr sz="1700" b="0">
                 <a:solidFill>
                   <a:srgbClr val="15241C"/>
                 </a:solidFill>
                 <a:latin typeface="Calibri"/>
               </a:rPr>
-              <a:t> (akurasi 88,40%, kategori Excellent).</a:t>
+              <a:t> (akurasi 88,40%).</a:t>
             </a:r>
           </a:p>
           <a:p>
@@ -7290,7 +7691,7 @@
               </a:spcAft>
             </a:pPr>
             <a:r>
-              <a:rPr sz="1900" b="1">
+              <a:rPr sz="1700" b="1">
                 <a:solidFill>
                   <a:srgbClr val="039855"/>
                 </a:solidFill>
@@ -7298,88 +7699,299 @@
               <a:t>▸  </a:t>
             </a:r>
             <a:r>
-              <a:rPr sz="1900" b="0">
+              <a:rPr sz="1700" b="0">
                 <a:solidFill>
                   <a:srgbClr val="15241C"/>
                 </a:solidFill>
                 <a:latin typeface="Calibri"/>
               </a:rPr>
-              <a:t>Berjalan </a:t>
-            </a:r>
-            <a:r>
-              <a:rPr sz="1900" b="1">
+              <a:t>Output: status gizi + tingkat keyakinan + rekomendasi tindak lanjut.</a:t>
+            </a:r>
+          </a:p>
+        </p:txBody>
+      </p:sp>
+      <p:sp>
+        <p:nvSpPr>
+          <p:cNvPr id="8" name="Rectangle 7"/>
+          <p:cNvSpPr/>
+          <p:nvPr/>
+        </p:nvSpPr>
+        <p:spPr>
+          <a:xfrm>
+            <a:off x="594360" y="3703320"/>
+            <a:ext cx="5349240" cy="2514600"/>
+          </a:xfrm>
+          <a:prstGeom prst="rect">
+            <a:avLst/>
+          </a:prstGeom>
+          <a:solidFill>
+            <a:srgbClr val="EAF7F0"/>
+          </a:solidFill>
+          <a:ln>
+            <a:noFill/>
+          </a:ln>
+          <a:effectLst/>
+        </p:spPr>
+        <p:style>
+          <a:lnRef idx="1">
+            <a:schemeClr val="accent1"/>
+          </a:lnRef>
+          <a:fillRef idx="3">
+            <a:schemeClr val="accent1"/>
+          </a:fillRef>
+          <a:effectRef idx="2">
+            <a:schemeClr val="accent1"/>
+          </a:effectRef>
+          <a:fontRef idx="minor">
+            <a:schemeClr val="lt1"/>
+          </a:fontRef>
+        </p:style>
+        <p:txBody>
+          <a:bodyPr rtlCol="0" anchor="ctr"/>
+          <a:lstStyle/>
+          <a:p>
+            <a:pPr algn="ctr"/>
+          </a:p>
+        </p:txBody>
+      </p:sp>
+      <p:sp>
+        <p:nvSpPr>
+          <p:cNvPr id="9" name="Rectangle 8"/>
+          <p:cNvSpPr/>
+          <p:nvPr/>
+        </p:nvSpPr>
+        <p:spPr>
+          <a:xfrm>
+            <a:off x="594360" y="3703320"/>
+            <a:ext cx="82296" cy="2514600"/>
+          </a:xfrm>
+          <a:prstGeom prst="rect">
+            <a:avLst/>
+          </a:prstGeom>
+          <a:solidFill>
+            <a:srgbClr val="039855"/>
+          </a:solidFill>
+          <a:ln>
+            <a:noFill/>
+          </a:ln>
+          <a:effectLst/>
+        </p:spPr>
+        <p:style>
+          <a:lnRef idx="1">
+            <a:schemeClr val="accent1"/>
+          </a:lnRef>
+          <a:fillRef idx="3">
+            <a:schemeClr val="accent1"/>
+          </a:fillRef>
+          <a:effectRef idx="2">
+            <a:schemeClr val="accent1"/>
+          </a:effectRef>
+          <a:fontRef idx="minor">
+            <a:schemeClr val="lt1"/>
+          </a:fontRef>
+        </p:style>
+        <p:txBody>
+          <a:bodyPr rtlCol="0" anchor="ctr"/>
+          <a:lstStyle/>
+          <a:p>
+            <a:pPr algn="ctr"/>
+          </a:p>
+        </p:txBody>
+      </p:sp>
+      <p:sp>
+        <p:nvSpPr>
+          <p:cNvPr id="10" name="TextBox 9"/>
+          <p:cNvSpPr txBox="1"/>
+          <p:nvPr/>
+        </p:nvSpPr>
+        <p:spPr>
+          <a:xfrm>
+            <a:off x="795528" y="3813048"/>
+            <a:ext cx="4983480" cy="2313432"/>
+          </a:xfrm>
+          <a:prstGeom prst="rect">
+            <a:avLst/>
+          </a:prstGeom>
+          <a:noFill/>
+        </p:spPr>
+        <p:txBody>
+          <a:bodyPr wrap="square" anchor="t">
+            <a:spAutoFit/>
+          </a:bodyPr>
+          <a:lstStyle/>
+          <a:p>
+            <a:pPr algn="l">
+              <a:spcAft>
+                <a:spcPts val="300"/>
+              </a:spcAft>
+            </a:pPr>
+            <a:r>
+              <a:rPr sz="1300" b="1" i="0">
+                <a:solidFill>
+                  <a:srgbClr val="039855"/>
+                </a:solidFill>
+                <a:latin typeface="Calibri"/>
+              </a:rPr>
+              <a:t>Apa itu "berjalan 100% di peramban"?</a:t>
+            </a:r>
+          </a:p>
+          <a:p>
+            <a:pPr algn="l">
+              <a:spcAft>
+                <a:spcPts val="300"/>
+              </a:spcAft>
+            </a:pPr>
+            <a:r>
+              <a:rPr sz="1150" b="0" i="0">
                 <a:solidFill>
                   <a:srgbClr val="15241C"/>
                 </a:solidFill>
                 <a:latin typeface="Calibri"/>
               </a:rPr>
-              <a:t>100% di peramban</a:t>
-            </a:r>
-            <a:r>
-              <a:rPr sz="1900" b="0">
+              <a:t>Peramban = aplikasi browser (Chrome, Safari, dll). Artinya semua perhitungan AI terjadi di HP/laptop pengguna sendiri — BUKAN di komputer server kami. Keuntungan: gratis, cepat, bisa tanpa internet, dan data anak tidak dikirim ke mana pun.</a:t>
+            </a:r>
+          </a:p>
+        </p:txBody>
+      </p:sp>
+      <p:sp>
+        <p:nvSpPr>
+          <p:cNvPr id="11" name="Rectangle 10"/>
+          <p:cNvSpPr/>
+          <p:nvPr/>
+        </p:nvSpPr>
+        <p:spPr>
+          <a:xfrm>
+            <a:off x="6126480" y="3703320"/>
+            <a:ext cx="5349240" cy="2514600"/>
+          </a:xfrm>
+          <a:prstGeom prst="rect">
+            <a:avLst/>
+          </a:prstGeom>
+          <a:solidFill>
+            <a:srgbClr val="EAF7F0"/>
+          </a:solidFill>
+          <a:ln>
+            <a:noFill/>
+          </a:ln>
+          <a:effectLst/>
+        </p:spPr>
+        <p:style>
+          <a:lnRef idx="1">
+            <a:schemeClr val="accent1"/>
+          </a:lnRef>
+          <a:fillRef idx="3">
+            <a:schemeClr val="accent1"/>
+          </a:fillRef>
+          <a:effectRef idx="2">
+            <a:schemeClr val="accent1"/>
+          </a:effectRef>
+          <a:fontRef idx="minor">
+            <a:schemeClr val="lt1"/>
+          </a:fontRef>
+        </p:style>
+        <p:txBody>
+          <a:bodyPr rtlCol="0" anchor="ctr"/>
+          <a:lstStyle/>
+          <a:p>
+            <a:pPr algn="ctr"/>
+          </a:p>
+        </p:txBody>
+      </p:sp>
+      <p:sp>
+        <p:nvSpPr>
+          <p:cNvPr id="12" name="Rectangle 11"/>
+          <p:cNvSpPr/>
+          <p:nvPr/>
+        </p:nvSpPr>
+        <p:spPr>
+          <a:xfrm>
+            <a:off x="6126480" y="3703320"/>
+            <a:ext cx="82296" cy="2514600"/>
+          </a:xfrm>
+          <a:prstGeom prst="rect">
+            <a:avLst/>
+          </a:prstGeom>
+          <a:solidFill>
+            <a:srgbClr val="039855"/>
+          </a:solidFill>
+          <a:ln>
+            <a:noFill/>
+          </a:ln>
+          <a:effectLst/>
+        </p:spPr>
+        <p:style>
+          <a:lnRef idx="1">
+            <a:schemeClr val="accent1"/>
+          </a:lnRef>
+          <a:fillRef idx="3">
+            <a:schemeClr val="accent1"/>
+          </a:fillRef>
+          <a:effectRef idx="2">
+            <a:schemeClr val="accent1"/>
+          </a:effectRef>
+          <a:fontRef idx="minor">
+            <a:schemeClr val="lt1"/>
+          </a:fontRef>
+        </p:style>
+        <p:txBody>
+          <a:bodyPr rtlCol="0" anchor="ctr"/>
+          <a:lstStyle/>
+          <a:p>
+            <a:pPr algn="ctr"/>
+          </a:p>
+        </p:txBody>
+      </p:sp>
+      <p:sp>
+        <p:nvSpPr>
+          <p:cNvPr id="13" name="TextBox 12"/>
+          <p:cNvSpPr txBox="1"/>
+          <p:nvPr/>
+        </p:nvSpPr>
+        <p:spPr>
+          <a:xfrm>
+            <a:off x="6327648" y="3813048"/>
+            <a:ext cx="4983480" cy="2313432"/>
+          </a:xfrm>
+          <a:prstGeom prst="rect">
+            <a:avLst/>
+          </a:prstGeom>
+          <a:noFill/>
+        </p:spPr>
+        <p:txBody>
+          <a:bodyPr wrap="square" anchor="t">
+            <a:spAutoFit/>
+          </a:bodyPr>
+          <a:lstStyle/>
+          <a:p>
+            <a:pPr algn="l">
+              <a:spcAft>
+                <a:spcPts val="300"/>
+              </a:spcAft>
+            </a:pPr>
+            <a:r>
+              <a:rPr sz="1300" b="1" i="0">
+                <a:solidFill>
+                  <a:srgbClr val="039855"/>
+                </a:solidFill>
+                <a:latin typeface="Calibri"/>
+              </a:rPr>
+              <a:t>Apa itu "Z-Score WHO (HAZ)"?</a:t>
+            </a:r>
+          </a:p>
+          <a:p>
+            <a:pPr algn="l">
+              <a:spcAft>
+                <a:spcPts val="300"/>
+              </a:spcAft>
+            </a:pPr>
+            <a:r>
+              <a:rPr sz="1150" b="0" i="0">
                 <a:solidFill>
                   <a:srgbClr val="15241C"/>
                 </a:solidFill>
                 <a:latin typeface="Calibri"/>
               </a:rPr>
-              <a:t> pengguna — gratis, cepat, dapat luring.</a:t>
-            </a:r>
-          </a:p>
-          <a:p>
-            <a:pPr>
-              <a:spcAft>
-                <a:spcPts val="1000"/>
-              </a:spcAft>
-            </a:pPr>
-            <a:r>
-              <a:rPr sz="1900" b="1">
-                <a:solidFill>
-                  <a:srgbClr val="039855"/>
-                </a:solidFill>
-              </a:rPr>
-              <a:t>▸  </a:t>
-            </a:r>
-            <a:r>
-              <a:rPr sz="1900" b="1">
-                <a:solidFill>
-                  <a:srgbClr val="15241C"/>
-                </a:solidFill>
-                <a:latin typeface="Calibri"/>
-              </a:rPr>
-              <a:t>Privasi</a:t>
-            </a:r>
-            <a:r>
-              <a:rPr sz="1900" b="0">
-                <a:solidFill>
-                  <a:srgbClr val="15241C"/>
-                </a:solidFill>
-                <a:latin typeface="Calibri"/>
-              </a:rPr>
-              <a:t>: data anak tidak dikirim ke server (penting untuk etika kesehatan).</a:t>
-            </a:r>
-          </a:p>
-          <a:p>
-            <a:pPr>
-              <a:spcAft>
-                <a:spcPts val="1000"/>
-              </a:spcAft>
-            </a:pPr>
-            <a:r>
-              <a:rPr sz="1900" b="1">
-                <a:solidFill>
-                  <a:srgbClr val="039855"/>
-                </a:solidFill>
-              </a:rPr>
-              <a:t>▸  </a:t>
-            </a:r>
-            <a:r>
-              <a:rPr sz="1900" b="0">
-                <a:solidFill>
-                  <a:srgbClr val="15241C"/>
-                </a:solidFill>
-                <a:latin typeface="Calibri"/>
-              </a:rPr>
-              <a:t>Output: status gizi + tingkat keyakinan + Z-Score WHO + rekomendasi tindak lanjut.</a:t>
+              <a:t>Angka yang membandingkan tinggi anak dengan tinggi standar WHO untuk anak seumur &amp; sejenis kelamin. 0 = persis rata-rata; di bawah −2 SD = lebih pendek dari normal (indikasi stunting); di atas +2 = lebih tinggi dari rata-rata.</a:t>
             </a:r>
           </a:p>
         </p:txBody>
@@ -7498,7 +8110,7 @@
         </p:nvSpPr>
         <p:spPr>
           <a:xfrm>
-            <a:off x="548640" y="502920"/>
+            <a:off x="548640" y="457200"/>
             <a:ext cx="548640" cy="82296"/>
           </a:xfrm>
           <a:prstGeom prst="rect">
@@ -7542,8 +8154,8 @@
         </p:nvSpPr>
         <p:spPr>
           <a:xfrm>
-            <a:off x="548640" y="603504"/>
-            <a:ext cx="10058400" cy="365760"/>
+            <a:off x="548640" y="548640"/>
+            <a:ext cx="10515600" cy="365760"/>
           </a:xfrm>
           <a:prstGeom prst="rect">
             <a:avLst/>
@@ -7581,8 +8193,8 @@
         </p:nvSpPr>
         <p:spPr>
           <a:xfrm>
-            <a:off x="548640" y="868680"/>
-            <a:ext cx="11064240" cy="914400"/>
+            <a:off x="548640" y="804672"/>
+            <a:ext cx="11155680" cy="914400"/>
           </a:xfrm>
           <a:prstGeom prst="rect">
             <a:avLst/>
@@ -7601,7 +8213,7 @@
               </a:spcAft>
             </a:pPr>
             <a:r>
-              <a:rPr sz="3000" b="1" i="0">
+              <a:rPr sz="2800" b="1" i="0">
                 <a:solidFill>
                   <a:srgbClr val="05312A"/>
                 </a:solidFill>
@@ -7620,8 +8232,8 @@
         </p:nvSpPr>
         <p:spPr>
           <a:xfrm>
-            <a:off x="640080" y="2103120"/>
-            <a:ext cx="5486400" cy="3840480"/>
+            <a:off x="594360" y="1783080"/>
+            <a:ext cx="5394960" cy="2743200"/>
           </a:xfrm>
           <a:prstGeom prst="rect">
             <a:avLst/>
@@ -7640,7 +8252,7 @@
               </a:spcAft>
             </a:pPr>
             <a:r>
-              <a:rPr sz="1800" b="1">
+              <a:rPr sz="1600" b="1">
                 <a:solidFill>
                   <a:srgbClr val="039855"/>
                 </a:solidFill>
@@ -7648,7 +8260,7 @@
               <a:t>▸  </a:t>
             </a:r>
             <a:r>
-              <a:rPr sz="1800" b="1">
+              <a:rPr sz="1600" b="1">
                 <a:solidFill>
                   <a:srgbClr val="15241C"/>
                 </a:solidFill>
@@ -7657,13 +8269,13 @@
               <a:t>Tinggi badan</a:t>
             </a:r>
             <a:r>
-              <a:rPr sz="1800" b="0">
+              <a:rPr sz="1600" b="0">
                 <a:solidFill>
                   <a:srgbClr val="15241C"/>
                 </a:solidFill>
                 <a:latin typeface="Calibri"/>
               </a:rPr>
-              <a:t> (cm) — indikator utama (HAZ)</a:t>
+              <a:t> (cm) — indikator utama</a:t>
             </a:r>
           </a:p>
           <a:p>
@@ -7673,7 +8285,7 @@
               </a:spcAft>
             </a:pPr>
             <a:r>
-              <a:rPr sz="1800" b="1">
+              <a:rPr sz="1600" b="1">
                 <a:solidFill>
                   <a:srgbClr val="039855"/>
                 </a:solidFill>
@@ -7681,7 +8293,7 @@
               <a:t>▸  </a:t>
             </a:r>
             <a:r>
-              <a:rPr sz="1800" b="1">
+              <a:rPr sz="1600" b="1">
                 <a:solidFill>
                   <a:srgbClr val="15241C"/>
                 </a:solidFill>
@@ -7690,7 +8302,7 @@
               <a:t>Umur</a:t>
             </a:r>
             <a:r>
-              <a:rPr sz="1800" b="0">
+              <a:rPr sz="1600" b="0">
                 <a:solidFill>
                   <a:srgbClr val="15241C"/>
                 </a:solidFill>
@@ -7706,7 +8318,7 @@
               </a:spcAft>
             </a:pPr>
             <a:r>
-              <a:rPr sz="1800" b="1">
+              <a:rPr sz="1600" b="1">
                 <a:solidFill>
                   <a:srgbClr val="039855"/>
                 </a:solidFill>
@@ -7714,7 +8326,7 @@
               <a:t>▸  </a:t>
             </a:r>
             <a:r>
-              <a:rPr sz="1800" b="1">
+              <a:rPr sz="1600" b="1">
                 <a:solidFill>
                   <a:srgbClr val="15241C"/>
                 </a:solidFill>
@@ -7723,13 +8335,13 @@
               <a:t>Berat badan</a:t>
             </a:r>
             <a:r>
-              <a:rPr sz="1800" b="0">
+              <a:rPr sz="1600" b="0">
                 <a:solidFill>
                   <a:srgbClr val="15241C"/>
                 </a:solidFill>
                 <a:latin typeface="Calibri"/>
               </a:rPr>
-              <a:t> (kg) — Weight-for-Age</a:t>
+              <a:t> (kg)</a:t>
             </a:r>
           </a:p>
           <a:p>
@@ -7739,7 +8351,7 @@
               </a:spcAft>
             </a:pPr>
             <a:r>
-              <a:rPr sz="1800" b="1">
+              <a:rPr sz="1600" b="1">
                 <a:solidFill>
                   <a:srgbClr val="039855"/>
                 </a:solidFill>
@@ -7747,7 +8359,7 @@
               <a:t>▸  </a:t>
             </a:r>
             <a:r>
-              <a:rPr sz="1800" b="1">
+              <a:rPr sz="1600" b="1">
                 <a:solidFill>
                   <a:srgbClr val="15241C"/>
                 </a:solidFill>
@@ -7756,13 +8368,13 @@
               <a:t>Jenis kelamin</a:t>
             </a:r>
             <a:r>
-              <a:rPr sz="1800" b="0">
+              <a:rPr sz="1600" b="0">
                 <a:solidFill>
                   <a:srgbClr val="15241C"/>
                 </a:solidFill>
                 <a:latin typeface="Calibri"/>
               </a:rPr>
-              <a:t> — standar L/P berbeda</a:t>
+              <a:t> — standar L/P beda</a:t>
             </a:r>
           </a:p>
         </p:txBody>
@@ -7775,8 +8387,8 @@
         </p:nvSpPr>
         <p:spPr>
           <a:xfrm>
-            <a:off x="6309360" y="2103120"/>
-            <a:ext cx="5486400" cy="3840480"/>
+            <a:off x="6126480" y="1783080"/>
+            <a:ext cx="5394960" cy="2743200"/>
           </a:xfrm>
           <a:prstGeom prst="rect">
             <a:avLst/>
@@ -7795,7 +8407,7 @@
               </a:spcAft>
             </a:pPr>
             <a:r>
-              <a:rPr sz="1800" b="1">
+              <a:rPr sz="1600" b="1">
                 <a:solidFill>
                   <a:srgbClr val="039855"/>
                 </a:solidFill>
@@ -7803,7 +8415,7 @@
               <a:t>▸  </a:t>
             </a:r>
             <a:r>
-              <a:rPr sz="1800" b="1">
+              <a:rPr sz="1600" b="1">
                 <a:solidFill>
                   <a:srgbClr val="15241C"/>
                 </a:solidFill>
@@ -7812,13 +8424,13 @@
               <a:t>Jarak kehamilan</a:t>
             </a:r>
             <a:r>
-              <a:rPr sz="1800" b="0">
+              <a:rPr sz="1600" b="0">
                 <a:solidFill>
                   <a:srgbClr val="15241C"/>
                 </a:solidFill>
                 <a:latin typeface="Calibri"/>
               </a:rPr>
-              <a:t> (bln) — ideal &gt;24 (BKKBN 4T)</a:t>
+              <a:t> (bulan)</a:t>
             </a:r>
           </a:p>
           <a:p>
@@ -7828,7 +8440,7 @@
               </a:spcAft>
             </a:pPr>
             <a:r>
-              <a:rPr sz="1800" b="1">
+              <a:rPr sz="1600" b="1">
                 <a:solidFill>
                   <a:srgbClr val="039855"/>
                 </a:solidFill>
@@ -7836,7 +8448,7 @@
               <a:t>▸  </a:t>
             </a:r>
             <a:r>
-              <a:rPr sz="1800" b="1">
+              <a:rPr sz="1600" b="1">
                 <a:solidFill>
                   <a:srgbClr val="15241C"/>
                 </a:solidFill>
@@ -7845,13 +8457,13 @@
               <a:t>Usia ibu menikah</a:t>
             </a:r>
             <a:r>
-              <a:rPr sz="1800" b="0">
+              <a:rPr sz="1600" b="0">
                 <a:solidFill>
                   <a:srgbClr val="15241C"/>
                 </a:solidFill>
                 <a:latin typeface="Calibri"/>
               </a:rPr>
-              <a:t> (thn) — dini &lt;20 = risiko</a:t>
+              <a:t> (tahun)</a:t>
             </a:r>
           </a:p>
           <a:p>
@@ -7861,7 +8473,7 @@
               </a:spcAft>
             </a:pPr>
             <a:r>
-              <a:rPr sz="1800" b="1">
+              <a:rPr sz="1600" b="1">
                 <a:solidFill>
                   <a:srgbClr val="039855"/>
                 </a:solidFill>
@@ -7869,7 +8481,7 @@
               <a:t>▸  </a:t>
             </a:r>
             <a:r>
-              <a:rPr sz="1800" b="1">
+              <a:rPr sz="1600" b="1">
                 <a:solidFill>
                   <a:srgbClr val="15241C"/>
                 </a:solidFill>
@@ -7878,13 +8490,156 @@
               <a:t>Gizi ibu saat hamil</a:t>
             </a:r>
             <a:r>
-              <a:rPr sz="1800" b="0">
+              <a:rPr sz="1600" b="0">
                 <a:solidFill>
                   <a:srgbClr val="15241C"/>
                 </a:solidFill>
                 <a:latin typeface="Calibri"/>
               </a:rPr>
-              <a:t> — Baik/Sedang/Buruk (KEK)</a:t>
+              <a:t> (Baik/Sedang/Buruk)</a:t>
+            </a:r>
+          </a:p>
+        </p:txBody>
+      </p:sp>
+      <p:sp>
+        <p:nvSpPr>
+          <p:cNvPr id="9" name="Rectangle 8"/>
+          <p:cNvSpPr/>
+          <p:nvPr/>
+        </p:nvSpPr>
+        <p:spPr>
+          <a:xfrm>
+            <a:off x="594360" y="4800600"/>
+            <a:ext cx="10881360" cy="1417320"/>
+          </a:xfrm>
+          <a:prstGeom prst="rect">
+            <a:avLst/>
+          </a:prstGeom>
+          <a:solidFill>
+            <a:srgbClr val="EAF7F0"/>
+          </a:solidFill>
+          <a:ln>
+            <a:noFill/>
+          </a:ln>
+          <a:effectLst/>
+        </p:spPr>
+        <p:style>
+          <a:lnRef idx="1">
+            <a:schemeClr val="accent1"/>
+          </a:lnRef>
+          <a:fillRef idx="3">
+            <a:schemeClr val="accent1"/>
+          </a:fillRef>
+          <a:effectRef idx="2">
+            <a:schemeClr val="accent1"/>
+          </a:effectRef>
+          <a:fontRef idx="minor">
+            <a:schemeClr val="lt1"/>
+          </a:fontRef>
+        </p:style>
+        <p:txBody>
+          <a:bodyPr rtlCol="0" anchor="ctr"/>
+          <a:lstStyle/>
+          <a:p>
+            <a:pPr algn="ctr"/>
+          </a:p>
+        </p:txBody>
+      </p:sp>
+      <p:sp>
+        <p:nvSpPr>
+          <p:cNvPr id="10" name="Rectangle 9"/>
+          <p:cNvSpPr/>
+          <p:nvPr/>
+        </p:nvSpPr>
+        <p:spPr>
+          <a:xfrm>
+            <a:off x="594360" y="4800600"/>
+            <a:ext cx="82296" cy="1417320"/>
+          </a:xfrm>
+          <a:prstGeom prst="rect">
+            <a:avLst/>
+          </a:prstGeom>
+          <a:solidFill>
+            <a:srgbClr val="039855"/>
+          </a:solidFill>
+          <a:ln>
+            <a:noFill/>
+          </a:ln>
+          <a:effectLst/>
+        </p:spPr>
+        <p:style>
+          <a:lnRef idx="1">
+            <a:schemeClr val="accent1"/>
+          </a:lnRef>
+          <a:fillRef idx="3">
+            <a:schemeClr val="accent1"/>
+          </a:fillRef>
+          <a:effectRef idx="2">
+            <a:schemeClr val="accent1"/>
+          </a:effectRef>
+          <a:fontRef idx="minor">
+            <a:schemeClr val="lt1"/>
+          </a:fontRef>
+        </p:style>
+        <p:txBody>
+          <a:bodyPr rtlCol="0" anchor="ctr"/>
+          <a:lstStyle/>
+          <a:p>
+            <a:pPr algn="ctr"/>
+          </a:p>
+        </p:txBody>
+      </p:sp>
+      <p:sp>
+        <p:nvSpPr>
+          <p:cNvPr id="11" name="TextBox 10"/>
+          <p:cNvSpPr txBox="1"/>
+          <p:nvPr/>
+        </p:nvSpPr>
+        <p:spPr>
+          <a:xfrm>
+            <a:off x="795528" y="4910328"/>
+            <a:ext cx="10515600" cy="1216152"/>
+          </a:xfrm>
+          <a:prstGeom prst="rect">
+            <a:avLst/>
+          </a:prstGeom>
+          <a:noFill/>
+        </p:spPr>
+        <p:txBody>
+          <a:bodyPr wrap="square" anchor="t">
+            <a:spAutoFit/>
+          </a:bodyPr>
+          <a:lstStyle/>
+          <a:p>
+            <a:pPr algn="l">
+              <a:spcAft>
+                <a:spcPts val="300"/>
+              </a:spcAft>
+            </a:pPr>
+            <a:r>
+              <a:rPr sz="1300" b="1" i="0">
+                <a:solidFill>
+                  <a:srgbClr val="039855"/>
+                </a:solidFill>
+                <a:latin typeface="Calibri"/>
+              </a:rPr>
+              <a:t>Apa itu "ideal &gt; 24 bulan (BKKBN 4T)"?</a:t>
+            </a:r>
+          </a:p>
+          <a:p>
+            <a:pPr algn="l">
+              <a:spcAft>
+                <a:spcPts val="300"/>
+              </a:spcAft>
+            </a:pPr>
+            <a:r>
+              <a:rPr sz="1150" b="0" i="0">
+                <a:solidFill>
+                  <a:srgbClr val="15241C"/>
+                </a:solidFill>
+                <a:latin typeface="Calibri"/>
+              </a:rPr>
+              <a:t>Program "4 Terlalu" BKKBN: Terlalu muda, Terlalu tua, Terlalu dekat, Terlalu banyak. Jarak kehamilan ideal &gt; 24 bulan agar tubuh ibu pulih dulu. Jarak terlalu dekat menaikkan risiko stunting pada anak berikutnya.</a:t>
             </a:r>
           </a:p>
         </p:txBody>
@@ -8003,7 +8758,7 @@
         </p:nvSpPr>
         <p:spPr>
           <a:xfrm>
-            <a:off x="548640" y="502920"/>
+            <a:off x="548640" y="457200"/>
             <a:ext cx="548640" cy="82296"/>
           </a:xfrm>
           <a:prstGeom prst="rect">
@@ -8047,8 +8802,8 @@
         </p:nvSpPr>
         <p:spPr>
           <a:xfrm>
-            <a:off x="548640" y="603504"/>
-            <a:ext cx="10058400" cy="365760"/>
+            <a:off x="548640" y="548640"/>
+            <a:ext cx="10515600" cy="365760"/>
           </a:xfrm>
           <a:prstGeom prst="rect">
             <a:avLst/>
@@ -8086,8 +8841,8 @@
         </p:nvSpPr>
         <p:spPr>
           <a:xfrm>
-            <a:off x="548640" y="868680"/>
-            <a:ext cx="11064240" cy="914400"/>
+            <a:off x="548640" y="804672"/>
+            <a:ext cx="11155680" cy="914400"/>
           </a:xfrm>
           <a:prstGeom prst="rect">
             <a:avLst/>
@@ -8106,7 +8861,7 @@
               </a:spcAft>
             </a:pPr>
             <a:r>
-              <a:rPr sz="3000" b="1" i="0">
+              <a:rPr sz="2800" b="1" i="0">
                 <a:solidFill>
                   <a:srgbClr val="05312A"/>
                 </a:solidFill>
@@ -8125,7 +8880,7 @@
         </p:nvSpPr>
         <p:spPr>
           <a:xfrm>
-            <a:off x="640080" y="1920240"/>
+            <a:off x="594360" y="1737360"/>
             <a:ext cx="6858000" cy="4206240"/>
           </a:xfrm>
           <a:prstGeom prst="rect">
@@ -8145,7 +8900,7 @@
               </a:spcAft>
             </a:pPr>
             <a:r>
-              <a:rPr sz="1700" b="1">
+              <a:rPr sz="1600" b="1">
                 <a:solidFill>
                   <a:srgbClr val="039855"/>
                 </a:solidFill>
@@ -8153,7 +8908,7 @@
               <a:t>▸  </a:t>
             </a:r>
             <a:r>
-              <a:rPr sz="1700" b="1">
+              <a:rPr sz="1600" b="1">
                 <a:solidFill>
                   <a:srgbClr val="15241C"/>
                 </a:solidFill>
@@ -8162,16 +8917,16 @@
               <a:t>Ensemble</a:t>
             </a:r>
             <a:r>
-              <a:rPr sz="1700" b="0">
+              <a:rPr sz="1600" b="0">
                 <a:solidFill>
                   <a:srgbClr val="15241C"/>
                 </a:solidFill>
                 <a:latin typeface="Calibri"/>
               </a:rPr>
-              <a:t> dari </a:t>
-            </a:r>
-            <a:r>
-              <a:rPr sz="1700" b="1">
+              <a:t> = gabungan </a:t>
+            </a:r>
+            <a:r>
+              <a:rPr sz="1600" b="1">
                 <a:solidFill>
                   <a:srgbClr val="15241C"/>
                 </a:solidFill>
@@ -8180,13 +8935,13 @@
               <a:t>120 pohon keputusan</a:t>
             </a:r>
             <a:r>
-              <a:rPr sz="1700" b="0">
+              <a:rPr sz="1600" b="0">
                 <a:solidFill>
                   <a:srgbClr val="15241C"/>
                 </a:solidFill>
                 <a:latin typeface="Calibri"/>
               </a:rPr>
-              <a:t> (Breiman, 2001).</a:t>
+              <a:t> (decision tree).</a:t>
             </a:r>
           </a:p>
           <a:p>
@@ -8196,7 +8951,7 @@
               </a:spcAft>
             </a:pPr>
             <a:r>
-              <a:rPr sz="1700" b="1">
+              <a:rPr sz="1600" b="1">
                 <a:solidFill>
                   <a:srgbClr val="039855"/>
                 </a:solidFill>
@@ -8204,22 +8959,31 @@
               <a:t>▸  </a:t>
             </a:r>
             <a:r>
-              <a:rPr sz="1700" b="1">
+              <a:rPr sz="1600" b="0">
                 <a:solidFill>
                   <a:srgbClr val="15241C"/>
                 </a:solidFill>
                 <a:latin typeface="Calibri"/>
               </a:rPr>
-              <a:t>Bagging</a:t>
-            </a:r>
-            <a:r>
-              <a:rPr sz="1700" b="0">
+              <a:t>Tiap pohon belajar dari </a:t>
+            </a:r>
+            <a:r>
+              <a:rPr sz="1600" b="1">
                 <a:solidFill>
                   <a:srgbClr val="15241C"/>
                 </a:solidFill>
                 <a:latin typeface="Calibri"/>
               </a:rPr>
-              <a:t>: tiap pohon dilatih pada subsampel acak (bootstrap), tiap percabangan memakai sebagian fitur acak.</a:t>
+              <a:t>sebagian data acak</a:t>
+            </a:r>
+            <a:r>
+              <a:rPr sz="1600" b="0">
+                <a:solidFill>
+                  <a:srgbClr val="15241C"/>
+                </a:solidFill>
+                <a:latin typeface="Calibri"/>
+              </a:rPr>
+              <a:t> (teknik bagging).</a:t>
             </a:r>
           </a:p>
           <a:p>
@@ -8229,7 +8993,7 @@
               </a:spcAft>
             </a:pPr>
             <a:r>
-              <a:rPr sz="1700" b="1">
+              <a:rPr sz="1600" b="1">
                 <a:solidFill>
                   <a:srgbClr val="039855"/>
                 </a:solidFill>
@@ -8237,31 +9001,31 @@
               <a:t>▸  </a:t>
             </a:r>
             <a:r>
-              <a:rPr sz="1700" b="0">
+              <a:rPr sz="1600" b="0">
                 <a:solidFill>
                   <a:srgbClr val="15241C"/>
                 </a:solidFill>
                 <a:latin typeface="Calibri"/>
               </a:rPr>
-              <a:t>Prediksi akhir = </a:t>
-            </a:r>
-            <a:r>
-              <a:rPr sz="1700" b="1">
+              <a:t>Tiap pohon memberi "suara" prediksi; hasil akhir = </a:t>
+            </a:r>
+            <a:r>
+              <a:rPr sz="1600" b="1">
                 <a:solidFill>
                   <a:srgbClr val="15241C"/>
                 </a:solidFill>
                 <a:latin typeface="Calibri"/>
               </a:rPr>
-              <a:t>rata-rata probabilitas</a:t>
-            </a:r>
-            <a:r>
-              <a:rPr sz="1700" b="0">
+              <a:t>rata-rata</a:t>
+            </a:r>
+            <a:r>
+              <a:rPr sz="1600" b="0">
                 <a:solidFill>
                   <a:srgbClr val="15241C"/>
                 </a:solidFill>
                 <a:latin typeface="Calibri"/>
               </a:rPr>
-              <a:t> semua pohon (soft voting).</a:t>
+              <a:t> semua pohon.</a:t>
             </a:r>
           </a:p>
           <a:p>
@@ -8271,7 +9035,7 @@
               </a:spcAft>
             </a:pPr>
             <a:r>
-              <a:rPr sz="1700" b="1">
+              <a:rPr sz="1600" b="1">
                 <a:solidFill>
                   <a:srgbClr val="039855"/>
                 </a:solidFill>
@@ -8279,31 +9043,31 @@
               <a:t>▸  </a:t>
             </a:r>
             <a:r>
-              <a:rPr sz="1700" b="0">
+              <a:rPr sz="1600" b="0">
                 <a:solidFill>
                   <a:srgbClr val="15241C"/>
                 </a:solidFill>
                 <a:latin typeface="Calibri"/>
               </a:rPr>
-              <a:t>Hasil: akurat &amp; </a:t>
-            </a:r>
-            <a:r>
-              <a:rPr sz="1700" b="1">
+              <a:t>Banyak pohon → hasil </a:t>
+            </a:r>
+            <a:r>
+              <a:rPr sz="1600" b="1">
                 <a:solidFill>
                   <a:srgbClr val="15241C"/>
                 </a:solidFill>
                 <a:latin typeface="Calibri"/>
               </a:rPr>
-              <a:t>tahan overfitting</a:t>
-            </a:r>
-            <a:r>
-              <a:rPr sz="1700" b="0">
+              <a:t>lebih akurat &amp; stabil</a:t>
+            </a:r>
+            <a:r>
+              <a:rPr sz="1600" b="0">
                 <a:solidFill>
                   <a:srgbClr val="15241C"/>
                 </a:solidFill>
                 <a:latin typeface="Calibri"/>
               </a:rPr>
-              <a:t>.</a:t>
+              <a:t> (tidak mudah salah/overfit).</a:t>
             </a:r>
           </a:p>
           <a:p>
@@ -8313,7 +9077,7 @@
               </a:spcAft>
             </a:pPr>
             <a:r>
-              <a:rPr sz="1700" b="1">
+              <a:rPr sz="1600" b="1">
                 <a:solidFill>
                   <a:srgbClr val="039855"/>
                 </a:solidFill>
@@ -8321,31 +9085,31 @@
               <a:t>▸  </a:t>
             </a:r>
             <a:r>
-              <a:rPr sz="1700" b="0">
+              <a:rPr sz="1600" b="0">
                 <a:solidFill>
                   <a:srgbClr val="15241C"/>
                 </a:solidFill>
                 <a:latin typeface="Calibri"/>
               </a:rPr>
-              <a:t>Dipilih karena: menangani fitur numerik+kategorikal tanpa scaling, dan memberi </a:t>
-            </a:r>
-            <a:r>
-              <a:rPr sz="1700" b="1">
+              <a:t>Bonus: bisa menunjukkan </a:t>
+            </a:r>
+            <a:r>
+              <a:rPr sz="1600" b="1">
                 <a:solidFill>
                   <a:srgbClr val="15241C"/>
                 </a:solidFill>
                 <a:latin typeface="Calibri"/>
               </a:rPr>
-              <a:t>feature importance</a:t>
-            </a:r>
-            <a:r>
-              <a:rPr sz="1700" b="0">
+              <a:t>faktor mana yang paling penting</a:t>
+            </a:r>
+            <a:r>
+              <a:rPr sz="1600" b="0">
                 <a:solidFill>
                   <a:srgbClr val="15241C"/>
                 </a:solidFill>
                 <a:latin typeface="Calibri"/>
               </a:rPr>
-              <a:t> (dapat ditafsirkan/transparan).</a:t>
+              <a:t> (transparan).</a:t>
             </a:r>
           </a:p>
         </p:txBody>
@@ -8358,8 +9122,8 @@
         </p:nvSpPr>
         <p:spPr>
           <a:xfrm>
-            <a:off x="7863840" y="2468880"/>
-            <a:ext cx="1051560" cy="2377440"/>
+            <a:off x="7955279" y="2286000"/>
+            <a:ext cx="1005840" cy="2286000"/>
           </a:xfrm>
           <a:prstGeom prst="rect">
             <a:avLst/>
@@ -8402,8 +9166,8 @@
         </p:nvSpPr>
         <p:spPr>
           <a:xfrm>
-            <a:off x="7863840" y="2468880"/>
-            <a:ext cx="1051560" cy="73152"/>
+            <a:off x="7955279" y="2286000"/>
+            <a:ext cx="1005840" cy="73152"/>
           </a:xfrm>
           <a:prstGeom prst="rect">
             <a:avLst/>
@@ -8446,8 +9210,8 @@
         </p:nvSpPr>
         <p:spPr>
           <a:xfrm>
-            <a:off x="7863840" y="3200400"/>
-            <a:ext cx="1051560" cy="548640"/>
+            <a:off x="7955279" y="3063240"/>
+            <a:ext cx="1005840" cy="548640"/>
           </a:xfrm>
           <a:prstGeom prst="rect">
             <a:avLst/>
@@ -8466,13 +9230,13 @@
               </a:spcAft>
             </a:pPr>
             <a:r>
-              <a:rPr sz="1500" b="1" i="0">
+              <a:rPr sz="1400" b="1" i="0">
                 <a:solidFill>
                   <a:srgbClr val="039855"/>
                 </a:solidFill>
                 <a:latin typeface="Calibri"/>
               </a:rPr>
-              <a:t>Tree 1</a:t>
+              <a:t>Pohon 1</a:t>
             </a:r>
           </a:p>
         </p:txBody>
@@ -8485,8 +9249,8 @@
         </p:nvSpPr>
         <p:spPr>
           <a:xfrm>
-            <a:off x="9189719" y="2468880"/>
-            <a:ext cx="1051560" cy="2377440"/>
+            <a:off x="9235440" y="2286000"/>
+            <a:ext cx="1005840" cy="2286000"/>
           </a:xfrm>
           <a:prstGeom prst="rect">
             <a:avLst/>
@@ -8529,8 +9293,8 @@
         </p:nvSpPr>
         <p:spPr>
           <a:xfrm>
-            <a:off x="9189719" y="2468880"/>
-            <a:ext cx="1051560" cy="73152"/>
+            <a:off x="9235440" y="2286000"/>
+            <a:ext cx="1005840" cy="73152"/>
           </a:xfrm>
           <a:prstGeom prst="rect">
             <a:avLst/>
@@ -8573,8 +9337,8 @@
         </p:nvSpPr>
         <p:spPr>
           <a:xfrm>
-            <a:off x="9189719" y="3200400"/>
-            <a:ext cx="1051560" cy="548640"/>
+            <a:off x="9235440" y="3063240"/>
+            <a:ext cx="1005840" cy="548640"/>
           </a:xfrm>
           <a:prstGeom prst="rect">
             <a:avLst/>
@@ -8593,13 +9357,13 @@
               </a:spcAft>
             </a:pPr>
             <a:r>
-              <a:rPr sz="1500" b="1" i="0">
+              <a:rPr sz="1400" b="1" i="0">
                 <a:solidFill>
                   <a:srgbClr val="039855"/>
                 </a:solidFill>
                 <a:latin typeface="Calibri"/>
               </a:rPr>
-              <a:t>Tree 2</a:t>
+              <a:t>Pohon 2</a:t>
             </a:r>
           </a:p>
         </p:txBody>
@@ -8612,8 +9376,8 @@
         </p:nvSpPr>
         <p:spPr>
           <a:xfrm>
-            <a:off x="10515600" y="2468880"/>
-            <a:ext cx="1051560" cy="2377440"/>
+            <a:off x="10515600" y="2286000"/>
+            <a:ext cx="1005840" cy="2286000"/>
           </a:xfrm>
           <a:prstGeom prst="rect">
             <a:avLst/>
@@ -8656,8 +9420,8 @@
         </p:nvSpPr>
         <p:spPr>
           <a:xfrm>
-            <a:off x="10515600" y="2468880"/>
-            <a:ext cx="1051560" cy="73152"/>
+            <a:off x="10515600" y="2286000"/>
+            <a:ext cx="1005840" cy="73152"/>
           </a:xfrm>
           <a:prstGeom prst="rect">
             <a:avLst/>
@@ -8700,8 +9464,8 @@
         </p:nvSpPr>
         <p:spPr>
           <a:xfrm>
-            <a:off x="10515600" y="3200400"/>
-            <a:ext cx="1051560" cy="548640"/>
+            <a:off x="10515600" y="3063240"/>
+            <a:ext cx="1005840" cy="548640"/>
           </a:xfrm>
           <a:prstGeom prst="rect">
             <a:avLst/>
@@ -8720,13 +9484,13 @@
               </a:spcAft>
             </a:pPr>
             <a:r>
-              <a:rPr sz="1500" b="1" i="0">
+              <a:rPr sz="1400" b="1" i="0">
                 <a:solidFill>
                   <a:srgbClr val="039855"/>
                 </a:solidFill>
                 <a:latin typeface="Calibri"/>
               </a:rPr>
-              <a:t>Tree 3</a:t>
+              <a:t>Pohon 3</a:t>
             </a:r>
           </a:p>
         </p:txBody>
@@ -8739,8 +9503,8 @@
         </p:nvSpPr>
         <p:spPr>
           <a:xfrm>
-            <a:off x="7863840" y="4983480"/>
-            <a:ext cx="3703320" cy="548640"/>
+            <a:off x="7955279" y="4754880"/>
+            <a:ext cx="3657600" cy="548640"/>
           </a:xfrm>
           <a:prstGeom prst="rect">
             <a:avLst/>
@@ -8884,7 +9648,7 @@
         </p:nvSpPr>
         <p:spPr>
           <a:xfrm>
-            <a:off x="548640" y="502920"/>
+            <a:off x="548640" y="457200"/>
             <a:ext cx="548640" cy="82296"/>
           </a:xfrm>
           <a:prstGeom prst="rect">
@@ -8928,8 +9692,8 @@
         </p:nvSpPr>
         <p:spPr>
           <a:xfrm>
-            <a:off x="548640" y="603504"/>
-            <a:ext cx="10058400" cy="365760"/>
+            <a:off x="548640" y="548640"/>
+            <a:ext cx="10515600" cy="365760"/>
           </a:xfrm>
           <a:prstGeom prst="rect">
             <a:avLst/>
@@ -8967,8 +9731,8 @@
         </p:nvSpPr>
         <p:spPr>
           <a:xfrm>
-            <a:off x="548640" y="868680"/>
-            <a:ext cx="11064240" cy="914400"/>
+            <a:off x="548640" y="804672"/>
+            <a:ext cx="11155680" cy="914400"/>
           </a:xfrm>
           <a:prstGeom prst="rect">
             <a:avLst/>
@@ -8987,13 +9751,13 @@
               </a:spcAft>
             </a:pPr>
             <a:r>
-              <a:rPr sz="3000" b="1" i="0">
+              <a:rPr sz="2800" b="1" i="0">
                 <a:solidFill>
                   <a:srgbClr val="05312A"/>
                 </a:solidFill>
                 <a:latin typeface="Calibri"/>
               </a:rPr>
-              <a:t>Random Forest — pelatihan &amp; konfigurasi</a:t>
+              <a:t>Bagaimana model dilatih — langkah demi langkah</a:t>
             </a:r>
           </a:p>
         </p:txBody>
@@ -9006,8 +9770,8 @@
         </p:nvSpPr>
         <p:spPr>
           <a:xfrm>
-            <a:off x="640080" y="1920240"/>
-            <a:ext cx="5486400" cy="4114800"/>
+            <a:off x="594360" y="1691640"/>
+            <a:ext cx="6675120" cy="4389120"/>
           </a:xfrm>
           <a:prstGeom prst="rect">
             <a:avLst/>
@@ -9026,7 +9790,7 @@
               </a:spcAft>
             </a:pPr>
             <a:r>
-              <a:rPr sz="1800" b="1">
+              <a:rPr sz="1600" b="1">
                 <a:solidFill>
                   <a:srgbClr val="039855"/>
                 </a:solidFill>
@@ -9034,49 +9798,88 @@
               <a:t>▸  </a:t>
             </a:r>
             <a:r>
-              <a:rPr sz="1800" b="0">
+              <a:rPr sz="1600" b="1">
                 <a:solidFill>
                   <a:srgbClr val="15241C"/>
                 </a:solidFill>
                 <a:latin typeface="Calibri"/>
               </a:rPr>
-              <a:t>Dataset </a:t>
-            </a:r>
-            <a:r>
-              <a:rPr sz="1800" b="1">
+              <a:t>1. Kumpulkan data:</a:t>
+            </a:r>
+            <a:r>
+              <a:rPr sz="1600" b="0">
                 <a:solidFill>
                   <a:srgbClr val="15241C"/>
                 </a:solidFill>
                 <a:latin typeface="Calibri"/>
               </a:rPr>
-              <a:t>25.000 sampel</a:t>
-            </a:r>
-            <a:r>
-              <a:rPr sz="1800" b="0">
+              <a:t> 25.000 contoh (7 faktor + status gizinya).</a:t>
+            </a:r>
+          </a:p>
+          <a:p>
+            <a:pPr>
+              <a:spcAft>
+                <a:spcPts val="1000"/>
+              </a:spcAft>
+            </a:pPr>
+            <a:r>
+              <a:rPr sz="1600" b="1">
+                <a:solidFill>
+                  <a:srgbClr val="039855"/>
+                </a:solidFill>
+              </a:rPr>
+              <a:t>▸  </a:t>
+            </a:r>
+            <a:r>
+              <a:rPr sz="1600" b="1">
                 <a:solidFill>
                   <a:srgbClr val="15241C"/>
                 </a:solidFill>
                 <a:latin typeface="Calibri"/>
               </a:rPr>
-              <a:t> · split </a:t>
-            </a:r>
-            <a:r>
-              <a:rPr sz="1800" b="1">
+              <a:t>2. Encoding:</a:t>
+            </a:r>
+            <a:r>
+              <a:rPr sz="1600" b="0">
                 <a:solidFill>
                   <a:srgbClr val="15241C"/>
                 </a:solidFill>
                 <a:latin typeface="Calibri"/>
               </a:rPr>
-              <a:t>80:20</a:t>
-            </a:r>
-            <a:r>
-              <a:rPr sz="1800" b="0">
+              <a:t> ubah teks menjadi angka agar bisa dihitung komputer.</a:t>
+            </a:r>
+          </a:p>
+          <a:p>
+            <a:pPr>
+              <a:spcAft>
+                <a:spcPts val="1000"/>
+              </a:spcAft>
+            </a:pPr>
+            <a:r>
+              <a:rPr sz="1600" b="1">
+                <a:solidFill>
+                  <a:srgbClr val="039855"/>
+                </a:solidFill>
+              </a:rPr>
+              <a:t>▸  </a:t>
+            </a:r>
+            <a:r>
+              <a:rPr sz="1600" b="1">
                 <a:solidFill>
                   <a:srgbClr val="15241C"/>
                 </a:solidFill>
                 <a:latin typeface="Calibri"/>
               </a:rPr>
-              <a:t>.</a:t>
+              <a:t>3. Bagi data:</a:t>
+            </a:r>
+            <a:r>
+              <a:rPr sz="1600" b="0">
+                <a:solidFill>
+                  <a:srgbClr val="15241C"/>
+                </a:solidFill>
+                <a:latin typeface="Calibri"/>
+              </a:rPr>
+              <a:t> 80% untuk belajar (latih), 20% untuk ujian (uji).</a:t>
             </a:r>
           </a:p>
           <a:p>
@@ -9086,7 +9889,7 @@
               </a:spcAft>
             </a:pPr>
             <a:r>
-              <a:rPr sz="1800" b="1">
+              <a:rPr sz="1600" b="1">
                 <a:solidFill>
                   <a:srgbClr val="039855"/>
                 </a:solidFill>
@@ -9094,88 +9897,55 @@
               <a:t>▸  </a:t>
             </a:r>
             <a:r>
-              <a:rPr sz="1800" b="1">
+              <a:rPr sz="1600" b="1">
                 <a:solidFill>
                   <a:srgbClr val="15241C"/>
                 </a:solidFill>
                 <a:latin typeface="Calibri"/>
               </a:rPr>
-              <a:t>120 trees</a:t>
-            </a:r>
-            <a:r>
-              <a:rPr sz="1800" b="0">
+              <a:t>4. Latih:</a:t>
+            </a:r>
+            <a:r>
+              <a:rPr sz="1600" b="0">
                 <a:solidFill>
                   <a:srgbClr val="15241C"/>
                 </a:solidFill>
                 <a:latin typeface="Calibri"/>
               </a:rPr>
-              <a:t>, max depth </a:t>
-            </a:r>
-            <a:r>
-              <a:rPr sz="1800" b="1">
+              <a:t> 120 pohon belajar pola dari data latih.</a:t>
+            </a:r>
+          </a:p>
+          <a:p>
+            <a:pPr>
+              <a:spcAft>
+                <a:spcPts val="1000"/>
+              </a:spcAft>
+            </a:pPr>
+            <a:r>
+              <a:rPr sz="1600" b="1">
+                <a:solidFill>
+                  <a:srgbClr val="039855"/>
+                </a:solidFill>
+              </a:rPr>
+              <a:t>▸  </a:t>
+            </a:r>
+            <a:r>
+              <a:rPr sz="1600" b="1">
                 <a:solidFill>
                   <a:srgbClr val="15241C"/>
                 </a:solidFill>
                 <a:latin typeface="Calibri"/>
               </a:rPr>
-              <a:t>14</a:t>
-            </a:r>
-            <a:r>
-              <a:rPr sz="1800" b="0">
+              <a:t>5. Uji:</a:t>
+            </a:r>
+            <a:r>
+              <a:rPr sz="1600" b="0">
                 <a:solidFill>
                   <a:srgbClr val="15241C"/>
                 </a:solidFill>
                 <a:latin typeface="Calibri"/>
               </a:rPr>
-              <a:t>, scikit-learn.</a:t>
-            </a:r>
-          </a:p>
-          <a:p>
-            <a:pPr>
-              <a:spcAft>
-                <a:spcPts val="1000"/>
-              </a:spcAft>
-            </a:pPr>
-            <a:r>
-              <a:rPr sz="1800" b="1">
-                <a:solidFill>
-                  <a:srgbClr val="039855"/>
-                </a:solidFill>
-              </a:rPr>
-              <a:t>▸  </a:t>
-            </a:r>
-            <a:r>
-              <a:rPr sz="1800" b="0">
-                <a:solidFill>
-                  <a:srgbClr val="15241C"/>
-                </a:solidFill>
-                <a:latin typeface="Calibri"/>
-              </a:rPr>
-              <a:t>Encoding kategorikal (Label Encoding).</a:t>
-            </a:r>
-          </a:p>
-          <a:p>
-            <a:pPr>
-              <a:spcAft>
-                <a:spcPts val="1000"/>
-              </a:spcAft>
-            </a:pPr>
-            <a:r>
-              <a:rPr sz="1800" b="1">
-                <a:solidFill>
-                  <a:srgbClr val="039855"/>
-                </a:solidFill>
-              </a:rPr>
-              <a:t>▸  </a:t>
-            </a:r>
-            <a:r>
-              <a:rPr sz="1800" b="0">
-                <a:solidFill>
-                  <a:srgbClr val="15241C"/>
-                </a:solidFill>
-                <a:latin typeface="Calibri"/>
-              </a:rPr>
-              <a:t>4 kelas: Normal, Stunted, Severely Stunted, Tinggi.</a:t>
+              <a:t> model diuji pada 20% data yang belum pernah dilihat.</a:t>
             </a:r>
           </a:p>
         </p:txBody>
@@ -9188,8 +9958,151 @@
         </p:nvSpPr>
         <p:spPr>
           <a:xfrm>
-            <a:off x="6309360" y="2011680"/>
-            <a:ext cx="5303520" cy="2286000"/>
+            <a:off x="7498079" y="1691640"/>
+            <a:ext cx="4023360" cy="2240280"/>
+          </a:xfrm>
+          <a:prstGeom prst="rect">
+            <a:avLst/>
+          </a:prstGeom>
+          <a:solidFill>
+            <a:srgbClr val="EAF7F0"/>
+          </a:solidFill>
+          <a:ln>
+            <a:noFill/>
+          </a:ln>
+          <a:effectLst/>
+        </p:spPr>
+        <p:style>
+          <a:lnRef idx="1">
+            <a:schemeClr val="accent1"/>
+          </a:lnRef>
+          <a:fillRef idx="3">
+            <a:schemeClr val="accent1"/>
+          </a:fillRef>
+          <a:effectRef idx="2">
+            <a:schemeClr val="accent1"/>
+          </a:effectRef>
+          <a:fontRef idx="minor">
+            <a:schemeClr val="lt1"/>
+          </a:fontRef>
+        </p:style>
+        <p:txBody>
+          <a:bodyPr rtlCol="0" anchor="ctr"/>
+          <a:lstStyle/>
+          <a:p>
+            <a:pPr algn="ctr"/>
+          </a:p>
+        </p:txBody>
+      </p:sp>
+      <p:sp>
+        <p:nvSpPr>
+          <p:cNvPr id="9" name="Rectangle 8"/>
+          <p:cNvSpPr/>
+          <p:nvPr/>
+        </p:nvSpPr>
+        <p:spPr>
+          <a:xfrm>
+            <a:off x="7498079" y="1691640"/>
+            <a:ext cx="82296" cy="2240280"/>
+          </a:xfrm>
+          <a:prstGeom prst="rect">
+            <a:avLst/>
+          </a:prstGeom>
+          <a:solidFill>
+            <a:srgbClr val="039855"/>
+          </a:solidFill>
+          <a:ln>
+            <a:noFill/>
+          </a:ln>
+          <a:effectLst/>
+        </p:spPr>
+        <p:style>
+          <a:lnRef idx="1">
+            <a:schemeClr val="accent1"/>
+          </a:lnRef>
+          <a:fillRef idx="3">
+            <a:schemeClr val="accent1"/>
+          </a:fillRef>
+          <a:effectRef idx="2">
+            <a:schemeClr val="accent1"/>
+          </a:effectRef>
+          <a:fontRef idx="minor">
+            <a:schemeClr val="lt1"/>
+          </a:fontRef>
+        </p:style>
+        <p:txBody>
+          <a:bodyPr rtlCol="0" anchor="ctr"/>
+          <a:lstStyle/>
+          <a:p>
+            <a:pPr algn="ctr"/>
+          </a:p>
+        </p:txBody>
+      </p:sp>
+      <p:sp>
+        <p:nvSpPr>
+          <p:cNvPr id="10" name="TextBox 9"/>
+          <p:cNvSpPr txBox="1"/>
+          <p:nvPr/>
+        </p:nvSpPr>
+        <p:spPr>
+          <a:xfrm>
+            <a:off x="7699247" y="1801368"/>
+            <a:ext cx="3657600" cy="2039112"/>
+          </a:xfrm>
+          <a:prstGeom prst="rect">
+            <a:avLst/>
+          </a:prstGeom>
+          <a:noFill/>
+        </p:spPr>
+        <p:txBody>
+          <a:bodyPr wrap="square" anchor="t">
+            <a:spAutoFit/>
+          </a:bodyPr>
+          <a:lstStyle/>
+          <a:p>
+            <a:pPr algn="l">
+              <a:spcAft>
+                <a:spcPts val="300"/>
+              </a:spcAft>
+            </a:pPr>
+            <a:r>
+              <a:rPr sz="1300" b="1" i="0">
+                <a:solidFill>
+                  <a:srgbClr val="039855"/>
+                </a:solidFill>
+                <a:latin typeface="Calibri"/>
+              </a:rPr>
+              <a:t>Apa itu "Encoding"?</a:t>
+            </a:r>
+          </a:p>
+          <a:p>
+            <a:pPr algn="l">
+              <a:spcAft>
+                <a:spcPts val="300"/>
+              </a:spcAft>
+            </a:pPr>
+            <a:r>
+              <a:rPr sz="1150" b="0" i="0">
+                <a:solidFill>
+                  <a:srgbClr val="15241C"/>
+                </a:solidFill>
+                <a:latin typeface="Calibri"/>
+              </a:rPr>
+              <a:t>Komputer hanya mengerti angka, bukan teks. Encoding = mengubah teks jadi angka. Contoh: Laki-laki→0, Perempuan→1; gizi Baik→0, Buruk→1, Sedang→2. Ini disebut Label Encoding.</a:t>
+            </a:r>
+          </a:p>
+        </p:txBody>
+      </p:sp>
+      <p:sp>
+        <p:nvSpPr>
+          <p:cNvPr id="11" name="Rectangle 10"/>
+          <p:cNvSpPr/>
+          <p:nvPr/>
+        </p:nvSpPr>
+        <p:spPr>
+          <a:xfrm>
+            <a:off x="7498079" y="4114800"/>
+            <a:ext cx="4023360" cy="1828800"/>
           </a:xfrm>
           <a:prstGeom prst="rect">
             <a:avLst/>
@@ -9226,14 +10139,14 @@
       </p:sp>
       <p:sp>
         <p:nvSpPr>
-          <p:cNvPr id="9" name="TextBox 8"/>
+          <p:cNvPr id="12" name="TextBox 11"/>
           <p:cNvSpPr txBox="1"/>
           <p:nvPr/>
         </p:nvSpPr>
         <p:spPr>
           <a:xfrm>
-            <a:off x="6492240" y="2194560"/>
-            <a:ext cx="5029200" cy="2011680"/>
+            <a:off x="7680960" y="4261104"/>
+            <a:ext cx="3703320" cy="1554480"/>
           </a:xfrm>
           <a:prstGeom prst="rect">
             <a:avLst/>
@@ -9248,11 +10161,11 @@
           <a:p>
             <a:pPr algn="l">
               <a:spcAft>
-                <a:spcPts val="600"/>
-              </a:spcAft>
-            </a:pPr>
-            <a:r>
-              <a:rPr sz="1300" b="0" i="0">
+                <a:spcPts val="200"/>
+              </a:spcAft>
+            </a:pPr>
+            <a:r>
+              <a:rPr sz="1200" b="0" i="0">
                 <a:solidFill>
                   <a:srgbClr val="6CE9A6"/>
                 </a:solidFill>
@@ -9264,11 +10177,11 @@
           <a:p>
             <a:pPr algn="l">
               <a:spcAft>
-                <a:spcPts val="600"/>
-              </a:spcAft>
-            </a:pPr>
-            <a:r>
-              <a:rPr sz="1300" b="0" i="0">
+                <a:spcPts val="200"/>
+              </a:spcAft>
+            </a:pPr>
+            <a:r>
+              <a:rPr sz="1200" b="0" i="0">
                 <a:solidFill>
                   <a:srgbClr val="FFFFFF"/>
                 </a:solidFill>
@@ -9280,11 +10193,11 @@
           <a:p>
             <a:pPr algn="l">
               <a:spcAft>
-                <a:spcPts val="600"/>
-              </a:spcAft>
-            </a:pPr>
-            <a:r>
-              <a:rPr sz="1300" b="0" i="0">
+                <a:spcPts val="200"/>
+              </a:spcAft>
+            </a:pPr>
+            <a:r>
+              <a:rPr sz="1200" b="0" i="0">
                 <a:solidFill>
                   <a:srgbClr val="FFFFFF"/>
                 </a:solidFill>
@@ -9296,11 +10209,11 @@
           <a:p>
             <a:pPr algn="l">
               <a:spcAft>
-                <a:spcPts val="600"/>
-              </a:spcAft>
-            </a:pPr>
-            <a:r>
-              <a:rPr sz="1300" b="0" i="0">
+                <a:spcPts val="200"/>
+              </a:spcAft>
+            </a:pPr>
+            <a:r>
+              <a:rPr sz="1200" b="0" i="0">
                 <a:solidFill>
                   <a:srgbClr val="FFFFFF"/>
                 </a:solidFill>
@@ -9309,34 +10222,18 @@
               <a:t>rf.fit(X_train, y_train)</a:t>
             </a:r>
           </a:p>
-          <a:p>
-            <a:pPr algn="l">
-              <a:spcAft>
-                <a:spcPts val="600"/>
-              </a:spcAft>
-            </a:pPr>
-            <a:r>
-              <a:rPr sz="1300" b="0" i="0">
-                <a:solidFill>
-                  <a:srgbClr val="6CE9A6"/>
-                </a:solidFill>
-                <a:latin typeface="Calibri"/>
-              </a:rPr>
-              <a:t>rf.predict_proba(X_test)</a:t>
-            </a:r>
-          </a:p>
-        </p:txBody>
-      </p:sp>
-      <p:sp>
-        <p:nvSpPr>
-          <p:cNvPr id="10" name="TextBox 9"/>
+        </p:txBody>
+      </p:sp>
+      <p:sp>
+        <p:nvSpPr>
+          <p:cNvPr id="13" name="TextBox 12"/>
           <p:cNvSpPr txBox="1"/>
           <p:nvPr/>
         </p:nvSpPr>
         <p:spPr>
           <a:xfrm>
-            <a:off x="6309360" y="4526280"/>
-            <a:ext cx="5303520" cy="457200"/>
+            <a:off x="7498079" y="5989320"/>
+            <a:ext cx="4023360" cy="365760"/>
           </a:xfrm>
           <a:prstGeom prst="rect">
             <a:avLst/>
@@ -9355,13 +10252,13 @@
               </a:spcAft>
             </a:pPr>
             <a:r>
-              <a:rPr sz="1200" b="0" i="1">
+              <a:rPr sz="1100" b="0" i="1">
                 <a:solidFill>
                   <a:srgbClr val="4B5563"/>
                 </a:solidFill>
                 <a:latin typeface="Calibri"/>
               </a:rPr>
-              <a:t>Kode inti pelatihan (Python / scikit-learn)</a:t>
+              <a:t>Kode inti pelatihan (scikit-learn)</a:t>
             </a:r>
           </a:p>
         </p:txBody>
@@ -9480,7 +10377,7 @@
         </p:nvSpPr>
         <p:spPr>
           <a:xfrm>
-            <a:off x="548640" y="502920"/>
+            <a:off x="548640" y="457200"/>
             <a:ext cx="548640" cy="82296"/>
           </a:xfrm>
           <a:prstGeom prst="rect">
@@ -9524,8 +10421,8 @@
         </p:nvSpPr>
         <p:spPr>
           <a:xfrm>
-            <a:off x="548640" y="603504"/>
-            <a:ext cx="10058400" cy="365760"/>
+            <a:off x="548640" y="548640"/>
+            <a:ext cx="10515600" cy="365760"/>
           </a:xfrm>
           <a:prstGeom prst="rect">
             <a:avLst/>
@@ -9563,8 +10460,8 @@
         </p:nvSpPr>
         <p:spPr>
           <a:xfrm>
-            <a:off x="548640" y="868680"/>
-            <a:ext cx="11064240" cy="914400"/>
+            <a:off x="548640" y="804672"/>
+            <a:ext cx="11155680" cy="914400"/>
           </a:xfrm>
           <a:prstGeom prst="rect">
             <a:avLst/>
@@ -9583,27 +10480,176 @@
               </a:spcAft>
             </a:pPr>
             <a:r>
-              <a:rPr sz="3000" b="1" i="0">
+              <a:rPr sz="2800" b="1" i="0">
                 <a:solidFill>
                   <a:srgbClr val="05312A"/>
                 </a:solidFill>
                 <a:latin typeface="Calibri"/>
               </a:rPr>
-              <a:t>Performa model (data uji 5.000 sampel)</a:t>
-            </a:r>
-          </a:p>
-        </p:txBody>
-      </p:sp>
-      <p:sp>
-        <p:nvSpPr>
-          <p:cNvPr id="7" name="Rectangle 6"/>
+              <a:t>Bagaimana kami menguji akurasinya</a:t>
+            </a:r>
+          </a:p>
+        </p:txBody>
+      </p:sp>
+      <p:sp>
+        <p:nvSpPr>
+          <p:cNvPr id="7" name="TextBox 6"/>
+          <p:cNvSpPr txBox="1"/>
+          <p:nvPr/>
+        </p:nvSpPr>
+        <p:spPr>
+          <a:xfrm>
+            <a:off x="594360" y="1737360"/>
+            <a:ext cx="10972800" cy="2011680"/>
+          </a:xfrm>
+          <a:prstGeom prst="rect">
+            <a:avLst/>
+          </a:prstGeom>
+          <a:noFill/>
+        </p:spPr>
+        <p:txBody>
+          <a:bodyPr wrap="square">
+            <a:spAutoFit/>
+          </a:bodyPr>
+          <a:lstStyle/>
+          <a:p>
+            <a:pPr>
+              <a:spcAft>
+                <a:spcPts val="1000"/>
+              </a:spcAft>
+            </a:pPr>
+            <a:r>
+              <a:rPr sz="1500" b="1">
+                <a:solidFill>
+                  <a:srgbClr val="039855"/>
+                </a:solidFill>
+              </a:rPr>
+              <a:t>▸  </a:t>
+            </a:r>
+            <a:r>
+              <a:rPr sz="1500" b="0">
+                <a:solidFill>
+                  <a:srgbClr val="15241C"/>
+                </a:solidFill>
+                <a:latin typeface="Calibri"/>
+              </a:rPr>
+              <a:t>Model diuji pada </a:t>
+            </a:r>
+            <a:r>
+              <a:rPr sz="1500" b="1">
+                <a:solidFill>
+                  <a:srgbClr val="15241C"/>
+                </a:solidFill>
+                <a:latin typeface="Calibri"/>
+              </a:rPr>
+              <a:t>5.000 data ujian</a:t>
+            </a:r>
+            <a:r>
+              <a:rPr sz="1500" b="0">
+                <a:solidFill>
+                  <a:srgbClr val="15241C"/>
+                </a:solidFill>
+                <a:latin typeface="Calibri"/>
+              </a:rPr>
+              <a:t> yang TIDAK dipakai saat latihan — seperti soal ujian baru, supaya penilaian jujur.</a:t>
+            </a:r>
+          </a:p>
+          <a:p>
+            <a:pPr>
+              <a:spcAft>
+                <a:spcPts val="1000"/>
+              </a:spcAft>
+            </a:pPr>
+            <a:r>
+              <a:rPr sz="1500" b="1">
+                <a:solidFill>
+                  <a:srgbClr val="039855"/>
+                </a:solidFill>
+              </a:rPr>
+              <a:t>▸  </a:t>
+            </a:r>
+            <a:r>
+              <a:rPr sz="1500" b="1">
+                <a:solidFill>
+                  <a:srgbClr val="15241C"/>
+                </a:solidFill>
+                <a:latin typeface="Calibri"/>
+              </a:rPr>
+              <a:t>Akurasi 88,40%</a:t>
+            </a:r>
+            <a:r>
+              <a:rPr sz="1500" b="0">
+                <a:solidFill>
+                  <a:srgbClr val="15241C"/>
+                </a:solidFill>
+                <a:latin typeface="Calibri"/>
+              </a:rPr>
+              <a:t> artinya: dari 100 anak, sekitar </a:t>
+            </a:r>
+            <a:r>
+              <a:rPr sz="1500" b="1">
+                <a:solidFill>
+                  <a:srgbClr val="15241C"/>
+                </a:solidFill>
+                <a:latin typeface="Calibri"/>
+              </a:rPr>
+              <a:t>88 diprediksi benar</a:t>
+            </a:r>
+            <a:r>
+              <a:rPr sz="1500" b="0">
+                <a:solidFill>
+                  <a:srgbClr val="15241C"/>
+                </a:solidFill>
+                <a:latin typeface="Calibri"/>
+              </a:rPr>
+              <a:t>.</a:t>
+            </a:r>
+          </a:p>
+          <a:p>
+            <a:pPr>
+              <a:spcAft>
+                <a:spcPts val="1000"/>
+              </a:spcAft>
+            </a:pPr>
+            <a:r>
+              <a:rPr sz="1500" b="1">
+                <a:solidFill>
+                  <a:srgbClr val="039855"/>
+                </a:solidFill>
+              </a:rPr>
+              <a:t>▸  </a:t>
+            </a:r>
+            <a:r>
+              <a:rPr sz="1500" b="1">
+                <a:solidFill>
+                  <a:srgbClr val="15241C"/>
+                </a:solidFill>
+                <a:latin typeface="Calibri"/>
+              </a:rPr>
+              <a:t>Cross-validation:</a:t>
+            </a:r>
+            <a:r>
+              <a:rPr sz="1500" b="0">
+                <a:solidFill>
+                  <a:srgbClr val="15241C"/>
+                </a:solidFill>
+                <a:latin typeface="Calibri"/>
+              </a:rPr>
+              <a:t> uji berulang 5 kali dengan pembagian berbeda; hasil stabil (±0,42%) → model benar-benar belajar pola, bukan sekadar menghafal.</a:t>
+            </a:r>
+          </a:p>
+        </p:txBody>
+      </p:sp>
+      <p:sp>
+        <p:nvSpPr>
+          <p:cNvPr id="8" name="Rectangle 7"/>
           <p:cNvSpPr/>
           <p:nvPr/>
         </p:nvSpPr>
         <p:spPr>
           <a:xfrm>
-            <a:off x="640080" y="2103120"/>
-            <a:ext cx="2606040" cy="1554480"/>
+            <a:off x="594360" y="4160520"/>
+            <a:ext cx="3520440" cy="1463040"/>
           </a:xfrm>
           <a:prstGeom prst="rect">
             <a:avLst/>
@@ -9640,14 +10686,14 @@
       </p:sp>
       <p:sp>
         <p:nvSpPr>
-          <p:cNvPr id="8" name="Rectangle 7"/>
+          <p:cNvPr id="9" name="Rectangle 8"/>
           <p:cNvSpPr/>
           <p:nvPr/>
         </p:nvSpPr>
         <p:spPr>
           <a:xfrm>
-            <a:off x="640080" y="2103120"/>
-            <a:ext cx="2606040" cy="82296"/>
+            <a:off x="594360" y="4160520"/>
+            <a:ext cx="3520440" cy="82296"/>
           </a:xfrm>
           <a:prstGeom prst="rect">
             <a:avLst/>
@@ -9684,14 +10730,14 @@
       </p:sp>
       <p:sp>
         <p:nvSpPr>
-          <p:cNvPr id="9" name="TextBox 8"/>
+          <p:cNvPr id="10" name="TextBox 9"/>
           <p:cNvSpPr txBox="1"/>
           <p:nvPr/>
         </p:nvSpPr>
         <p:spPr>
           <a:xfrm>
-            <a:off x="640080" y="2359152"/>
-            <a:ext cx="2606040" cy="731520"/>
+            <a:off x="594360" y="4398264"/>
+            <a:ext cx="3520440" cy="731520"/>
           </a:xfrm>
           <a:prstGeom prst="rect">
             <a:avLst/>
@@ -9710,7 +10756,7 @@
               </a:spcAft>
             </a:pPr>
             <a:r>
-              <a:rPr sz="3400" b="1" i="0">
+              <a:rPr sz="3200" b="1" i="0">
                 <a:solidFill>
                   <a:srgbClr val="039855"/>
                 </a:solidFill>
@@ -9723,14 +10769,14 @@
       </p:sp>
       <p:sp>
         <p:nvSpPr>
-          <p:cNvPr id="10" name="TextBox 9"/>
+          <p:cNvPr id="11" name="TextBox 10"/>
           <p:cNvSpPr txBox="1"/>
           <p:nvPr/>
         </p:nvSpPr>
         <p:spPr>
           <a:xfrm>
-            <a:off x="640080" y="3090672"/>
-            <a:ext cx="2606040" cy="457200"/>
+            <a:off x="594360" y="5074920"/>
+            <a:ext cx="3520440" cy="457200"/>
           </a:xfrm>
           <a:prstGeom prst="rect">
             <a:avLst/>
@@ -9749,27 +10795,27 @@
               </a:spcAft>
             </a:pPr>
             <a:r>
-              <a:rPr sz="1300" b="0" i="0">
+              <a:rPr sz="1200" b="0" i="0">
                 <a:solidFill>
                   <a:srgbClr val="4B5563"/>
                 </a:solidFill>
                 <a:latin typeface="Calibri"/>
               </a:rPr>
-              <a:t>Accuracy (Excellent ≥85%)</a:t>
-            </a:r>
-          </a:p>
-        </p:txBody>
-      </p:sp>
-      <p:sp>
-        <p:nvSpPr>
-          <p:cNvPr id="11" name="Rectangle 10"/>
+              <a:t>Akurasi (Excellent ≥85%)</a:t>
+            </a:r>
+          </a:p>
+        </p:txBody>
+      </p:sp>
+      <p:sp>
+        <p:nvSpPr>
+          <p:cNvPr id="12" name="Rectangle 11"/>
           <p:cNvSpPr/>
           <p:nvPr/>
         </p:nvSpPr>
         <p:spPr>
           <a:xfrm>
-            <a:off x="3429000" y="2103120"/>
-            <a:ext cx="2606040" cy="1554480"/>
+            <a:off x="4343400" y="4160520"/>
+            <a:ext cx="3520440" cy="1463040"/>
           </a:xfrm>
           <a:prstGeom prst="rect">
             <a:avLst/>
@@ -9806,14 +10852,14 @@
       </p:sp>
       <p:sp>
         <p:nvSpPr>
-          <p:cNvPr id="12" name="Rectangle 11"/>
+          <p:cNvPr id="13" name="Rectangle 12"/>
           <p:cNvSpPr/>
           <p:nvPr/>
         </p:nvSpPr>
         <p:spPr>
           <a:xfrm>
-            <a:off x="3429000" y="2103120"/>
-            <a:ext cx="2606040" cy="82296"/>
+            <a:off x="4343400" y="4160520"/>
+            <a:ext cx="3520440" cy="82296"/>
           </a:xfrm>
           <a:prstGeom prst="rect">
             <a:avLst/>
@@ -9850,14 +10896,14 @@
       </p:sp>
       <p:sp>
         <p:nvSpPr>
-          <p:cNvPr id="13" name="TextBox 12"/>
+          <p:cNvPr id="14" name="TextBox 13"/>
           <p:cNvSpPr txBox="1"/>
           <p:nvPr/>
         </p:nvSpPr>
         <p:spPr>
           <a:xfrm>
-            <a:off x="3429000" y="2359152"/>
-            <a:ext cx="2606040" cy="731520"/>
+            <a:off x="4343400" y="4398264"/>
+            <a:ext cx="3520440" cy="731520"/>
           </a:xfrm>
           <a:prstGeom prst="rect">
             <a:avLst/>
@@ -9876,7 +10922,7 @@
               </a:spcAft>
             </a:pPr>
             <a:r>
-              <a:rPr sz="3400" b="1" i="0">
+              <a:rPr sz="3200" b="1" i="0">
                 <a:solidFill>
                   <a:srgbClr val="039855"/>
                 </a:solidFill>
@@ -9889,14 +10935,14 @@
       </p:sp>
       <p:sp>
         <p:nvSpPr>
-          <p:cNvPr id="14" name="TextBox 13"/>
+          <p:cNvPr id="15" name="TextBox 14"/>
           <p:cNvSpPr txBox="1"/>
           <p:nvPr/>
         </p:nvSpPr>
         <p:spPr>
           <a:xfrm>
-            <a:off x="3429000" y="3090672"/>
-            <a:ext cx="2606040" cy="457200"/>
+            <a:off x="4343400" y="5074920"/>
+            <a:ext cx="3520440" cy="457200"/>
           </a:xfrm>
           <a:prstGeom prst="rect">
             <a:avLst/>
@@ -9915,27 +10961,27 @@
               </a:spcAft>
             </a:pPr>
             <a:r>
-              <a:rPr sz="1300" b="0" i="0">
+              <a:rPr sz="1200" b="0" i="0">
                 <a:solidFill>
                   <a:srgbClr val="4B5563"/>
                 </a:solidFill>
                 <a:latin typeface="Calibri"/>
               </a:rPr>
-              <a:t>F1-Score (macro)</a:t>
-            </a:r>
-          </a:p>
-        </p:txBody>
-      </p:sp>
-      <p:sp>
-        <p:nvSpPr>
-          <p:cNvPr id="15" name="Rectangle 14"/>
+              <a:t>F1-Score (lihat catatan)</a:t>
+            </a:r>
+          </a:p>
+        </p:txBody>
+      </p:sp>
+      <p:sp>
+        <p:nvSpPr>
+          <p:cNvPr id="16" name="Rectangle 15"/>
           <p:cNvSpPr/>
           <p:nvPr/>
         </p:nvSpPr>
         <p:spPr>
           <a:xfrm>
-            <a:off x="6217920" y="2103120"/>
-            <a:ext cx="2606040" cy="1554480"/>
+            <a:off x="8092440" y="4160520"/>
+            <a:ext cx="3383280" cy="1463040"/>
           </a:xfrm>
           <a:prstGeom prst="rect">
             <a:avLst/>
@@ -9972,14 +11018,14 @@
       </p:sp>
       <p:sp>
         <p:nvSpPr>
-          <p:cNvPr id="16" name="Rectangle 15"/>
+          <p:cNvPr id="17" name="Rectangle 16"/>
           <p:cNvSpPr/>
           <p:nvPr/>
         </p:nvSpPr>
         <p:spPr>
           <a:xfrm>
-            <a:off x="6217920" y="2103120"/>
-            <a:ext cx="2606040" cy="82296"/>
+            <a:off x="8092440" y="4160520"/>
+            <a:ext cx="3383280" cy="82296"/>
           </a:xfrm>
           <a:prstGeom prst="rect">
             <a:avLst/>
@@ -10016,14 +11062,14 @@
       </p:sp>
       <p:sp>
         <p:nvSpPr>
-          <p:cNvPr id="17" name="TextBox 16"/>
+          <p:cNvPr id="18" name="TextBox 17"/>
           <p:cNvSpPr txBox="1"/>
           <p:nvPr/>
         </p:nvSpPr>
         <p:spPr>
           <a:xfrm>
-            <a:off x="6217920" y="2359152"/>
-            <a:ext cx="2606040" cy="731520"/>
+            <a:off x="8092440" y="4398264"/>
+            <a:ext cx="3383280" cy="731520"/>
           </a:xfrm>
           <a:prstGeom prst="rect">
             <a:avLst/>
@@ -10042,7 +11088,7 @@
               </a:spcAft>
             </a:pPr>
             <a:r>
-              <a:rPr sz="3400" b="1" i="0">
+              <a:rPr sz="3200" b="1" i="0">
                 <a:solidFill>
                   <a:srgbClr val="039855"/>
                 </a:solidFill>
@@ -10055,14 +11101,14 @@
       </p:sp>
       <p:sp>
         <p:nvSpPr>
-          <p:cNvPr id="18" name="TextBox 17"/>
+          <p:cNvPr id="19" name="TextBox 18"/>
           <p:cNvSpPr txBox="1"/>
           <p:nvPr/>
         </p:nvSpPr>
         <p:spPr>
           <a:xfrm>
-            <a:off x="6217920" y="3090672"/>
-            <a:ext cx="2606040" cy="457200"/>
+            <a:off x="8092440" y="5074920"/>
+            <a:ext cx="3383280" cy="457200"/>
           </a:xfrm>
           <a:prstGeom prst="rect">
             <a:avLst/>
@@ -10081,115 +11127,27 @@
               </a:spcAft>
             </a:pPr>
             <a:r>
-              <a:rPr sz="1300" b="0" i="0">
+              <a:rPr sz="1200" b="0" i="0">
                 <a:solidFill>
                   <a:srgbClr val="4B5563"/>
                 </a:solidFill>
                 <a:latin typeface="Calibri"/>
               </a:rPr>
-              <a:t>Cross-Validation (5-fold)</a:t>
-            </a:r>
-          </a:p>
-        </p:txBody>
-      </p:sp>
-      <p:sp>
-        <p:nvSpPr>
-          <p:cNvPr id="19" name="Rectangle 18"/>
-          <p:cNvSpPr/>
-          <p:nvPr/>
-        </p:nvSpPr>
-        <p:spPr>
-          <a:xfrm>
-            <a:off x="9006840" y="2103120"/>
-            <a:ext cx="2606040" cy="1554480"/>
-          </a:xfrm>
-          <a:prstGeom prst="rect">
-            <a:avLst/>
-          </a:prstGeom>
-          <a:solidFill>
-            <a:srgbClr val="EAF7F0"/>
-          </a:solidFill>
-          <a:ln>
-            <a:noFill/>
-          </a:ln>
-          <a:effectLst/>
-        </p:spPr>
-        <p:style>
-          <a:lnRef idx="1">
-            <a:schemeClr val="accent1"/>
-          </a:lnRef>
-          <a:fillRef idx="3">
-            <a:schemeClr val="accent1"/>
-          </a:fillRef>
-          <a:effectRef idx="2">
-            <a:schemeClr val="accent1"/>
-          </a:effectRef>
-          <a:fontRef idx="minor">
-            <a:schemeClr val="lt1"/>
-          </a:fontRef>
-        </p:style>
-        <p:txBody>
-          <a:bodyPr rtlCol="0" anchor="ctr"/>
-          <a:lstStyle/>
-          <a:p>
-            <a:pPr algn="ctr"/>
-          </a:p>
-        </p:txBody>
-      </p:sp>
-      <p:sp>
-        <p:nvSpPr>
-          <p:cNvPr id="20" name="Rectangle 19"/>
-          <p:cNvSpPr/>
-          <p:nvPr/>
-        </p:nvSpPr>
-        <p:spPr>
-          <a:xfrm>
-            <a:off x="9006840" y="2103120"/>
-            <a:ext cx="2606040" cy="82296"/>
-          </a:xfrm>
-          <a:prstGeom prst="rect">
-            <a:avLst/>
-          </a:prstGeom>
-          <a:solidFill>
-            <a:srgbClr val="039855"/>
-          </a:solidFill>
-          <a:ln>
-            <a:noFill/>
-          </a:ln>
-          <a:effectLst/>
-        </p:spPr>
-        <p:style>
-          <a:lnRef idx="1">
-            <a:schemeClr val="accent1"/>
-          </a:lnRef>
-          <a:fillRef idx="3">
-            <a:schemeClr val="accent1"/>
-          </a:fillRef>
-          <a:effectRef idx="2">
-            <a:schemeClr val="accent1"/>
-          </a:effectRef>
-          <a:fontRef idx="minor">
-            <a:schemeClr val="lt1"/>
-          </a:fontRef>
-        </p:style>
-        <p:txBody>
-          <a:bodyPr rtlCol="0" anchor="ctr"/>
-          <a:lstStyle/>
-          <a:p>
-            <a:pPr algn="ctr"/>
-          </a:p>
-        </p:txBody>
-      </p:sp>
-      <p:sp>
-        <p:nvSpPr>
-          <p:cNvPr id="21" name="TextBox 20"/>
+              <a:t>Cross-Validation (5x)</a:t>
+            </a:r>
+          </a:p>
+        </p:txBody>
+      </p:sp>
+      <p:sp>
+        <p:nvSpPr>
+          <p:cNvPr id="20" name="TextBox 19"/>
           <p:cNvSpPr txBox="1"/>
           <p:nvPr/>
         </p:nvSpPr>
         <p:spPr>
           <a:xfrm>
-            <a:off x="9006840" y="2359152"/>
-            <a:ext cx="2606040" cy="731520"/>
+            <a:off x="594360" y="5806440"/>
+            <a:ext cx="10972800" cy="548640"/>
           </a:xfrm>
           <a:prstGeom prst="rect">
             <a:avLst/>
@@ -10202,147 +11160,19 @@
           </a:bodyPr>
           <a:lstStyle/>
           <a:p>
-            <a:pPr algn="ctr">
+            <a:pPr algn="l">
               <a:spcAft>
                 <a:spcPts val="600"/>
               </a:spcAft>
             </a:pPr>
             <a:r>
-              <a:rPr sz="3400" b="1" i="0">
-                <a:solidFill>
-                  <a:srgbClr val="039855"/>
-                </a:solidFill>
-                <a:latin typeface="Calibri"/>
-              </a:rPr>
-              <a:t>1,83%</a:t>
-            </a:r>
-          </a:p>
-        </p:txBody>
-      </p:sp>
-      <p:sp>
-        <p:nvSpPr>
-          <p:cNvPr id="22" name="TextBox 21"/>
-          <p:cNvSpPr txBox="1"/>
-          <p:nvPr/>
-        </p:nvSpPr>
-        <p:spPr>
-          <a:xfrm>
-            <a:off x="9006840" y="3090672"/>
-            <a:ext cx="2606040" cy="457200"/>
-          </a:xfrm>
-          <a:prstGeom prst="rect">
-            <a:avLst/>
-          </a:prstGeom>
-          <a:noFill/>
-        </p:spPr>
-        <p:txBody>
-          <a:bodyPr wrap="square" anchor="t">
-            <a:spAutoFit/>
-          </a:bodyPr>
-          <a:lstStyle/>
-          <a:p>
-            <a:pPr algn="ctr">
-              <a:spcAft>
-                <a:spcPts val="600"/>
-              </a:spcAft>
-            </a:pPr>
-            <a:r>
-              <a:rPr sz="1300" b="0" i="0">
+              <a:rPr sz="1300" b="0" i="1">
                 <a:solidFill>
                   <a:srgbClr val="4B5563"/>
                 </a:solidFill>
                 <a:latin typeface="Calibri"/>
               </a:rPr>
-              <a:t>Disparitas gender (&lt;5%)</a:t>
-            </a:r>
-          </a:p>
-        </p:txBody>
-      </p:sp>
-      <p:sp>
-        <p:nvSpPr>
-          <p:cNvPr id="23" name="TextBox 22"/>
-          <p:cNvSpPr txBox="1"/>
-          <p:nvPr/>
-        </p:nvSpPr>
-        <p:spPr>
-          <a:xfrm>
-            <a:off x="640080" y="4206240"/>
-            <a:ext cx="10972800" cy="1828800"/>
-          </a:xfrm>
-          <a:prstGeom prst="rect">
-            <a:avLst/>
-          </a:prstGeom>
-          <a:noFill/>
-        </p:spPr>
-        <p:txBody>
-          <a:bodyPr wrap="square">
-            <a:spAutoFit/>
-          </a:bodyPr>
-          <a:lstStyle/>
-          <a:p>
-            <a:pPr>
-              <a:spcAft>
-                <a:spcPts val="1000"/>
-              </a:spcAft>
-            </a:pPr>
-            <a:r>
-              <a:rPr sz="1700" b="1">
-                <a:solidFill>
-                  <a:srgbClr val="039855"/>
-                </a:solidFill>
-              </a:rPr>
-              <a:t>▸  </a:t>
-            </a:r>
-            <a:r>
-              <a:rPr sz="1700" b="0">
-                <a:solidFill>
-                  <a:srgbClr val="15241C"/>
-                </a:solidFill>
-                <a:latin typeface="Calibri"/>
-              </a:rPr>
-              <a:t>Precision 81,59% · Recall 85,93% (macro).</a:t>
-            </a:r>
-          </a:p>
-          <a:p>
-            <a:pPr>
-              <a:spcAft>
-                <a:spcPts val="1000"/>
-              </a:spcAft>
-            </a:pPr>
-            <a:r>
-              <a:rPr sz="1700" b="1">
-                <a:solidFill>
-                  <a:srgbClr val="039855"/>
-                </a:solidFill>
-              </a:rPr>
-              <a:t>▸  </a:t>
-            </a:r>
-            <a:r>
-              <a:rPr sz="1700" b="0">
-                <a:solidFill>
-                  <a:srgbClr val="15241C"/>
-                </a:solidFill>
-                <a:latin typeface="Calibri"/>
-              </a:rPr>
-              <a:t>Kesalahan utama antar kelas </a:t>
-            </a:r>
-            <a:r>
-              <a:rPr sz="1700" b="1">
-                <a:solidFill>
-                  <a:srgbClr val="15241C"/>
-                </a:solidFill>
-                <a:latin typeface="Calibri"/>
-              </a:rPr>
-              <a:t>bertetangga</a:t>
-            </a:r>
-            <a:r>
-              <a:rPr sz="1700" b="0">
-                <a:solidFill>
-                  <a:srgbClr val="15241C"/>
-                </a:solidFill>
-                <a:latin typeface="Calibri"/>
-              </a:rPr>
-              <a:t> (Stunted ↔ Severely Stunted) — wajar, batas kontinu.</a:t>
+              <a:t>F1-Score = ukuran yang adil saat jumlah tiap kelas tidak seimbang (kelas Normal jauh lebih banyak).</a:t>
             </a:r>
           </a:p>
         </p:txBody>
@@ -10461,7 +11291,7 @@
         </p:nvSpPr>
         <p:spPr>
           <a:xfrm>
-            <a:off x="548640" y="502920"/>
+            <a:off x="548640" y="457200"/>
             <a:ext cx="548640" cy="82296"/>
           </a:xfrm>
           <a:prstGeom prst="rect">
@@ -10505,8 +11335,8 @@
         </p:nvSpPr>
         <p:spPr>
           <a:xfrm>
-            <a:off x="548640" y="603504"/>
-            <a:ext cx="10058400" cy="365760"/>
+            <a:off x="548640" y="548640"/>
+            <a:ext cx="10515600" cy="365760"/>
           </a:xfrm>
           <a:prstGeom prst="rect">
             <a:avLst/>
@@ -10544,8 +11374,8 @@
         </p:nvSpPr>
         <p:spPr>
           <a:xfrm>
-            <a:off x="548640" y="868680"/>
-            <a:ext cx="11064240" cy="914400"/>
+            <a:off x="548640" y="804672"/>
+            <a:ext cx="11155680" cy="914400"/>
           </a:xfrm>
           <a:prstGeom prst="rect">
             <a:avLst/>
@@ -10564,13 +11394,13 @@
               </a:spcAft>
             </a:pPr>
             <a:r>
-              <a:rPr sz="3000" b="1" i="0">
+              <a:rPr sz="2800" b="1" i="0">
                 <a:solidFill>
                   <a:srgbClr val="05312A"/>
                 </a:solidFill>
                 <a:latin typeface="Calibri"/>
               </a:rPr>
-              <a:t>Faktor paling berpengaruh (feature importance)</a:t>
+              <a:t>Faktor paling berpengaruh — siapa yang menentukan?</a:t>
             </a:r>
           </a:p>
         </p:txBody>
@@ -10583,8 +11413,8 @@
         </p:nvSpPr>
         <p:spPr>
           <a:xfrm>
-            <a:off x="640080" y="2057400"/>
-            <a:ext cx="2743200" cy="320040"/>
+            <a:off x="594360" y="1783080"/>
+            <a:ext cx="2377440" cy="310896"/>
           </a:xfrm>
           <a:prstGeom prst="rect">
             <a:avLst/>
@@ -10603,7 +11433,7 @@
               </a:spcAft>
             </a:pPr>
             <a:r>
-              <a:rPr sz="1400" b="0" i="0">
+              <a:rPr sz="1300" b="0" i="0">
                 <a:solidFill>
                   <a:srgbClr val="15241C"/>
                 </a:solidFill>
@@ -10622,8 +11452,8 @@
         </p:nvSpPr>
         <p:spPr>
           <a:xfrm>
-            <a:off x="3474720" y="2103120"/>
-            <a:ext cx="7772400" cy="256032"/>
+            <a:off x="3063240" y="1819656"/>
+            <a:ext cx="4754880" cy="237744"/>
           </a:xfrm>
           <a:prstGeom prst="rect">
             <a:avLst/>
@@ -10666,8 +11496,8 @@
         </p:nvSpPr>
         <p:spPr>
           <a:xfrm>
-            <a:off x="11338560" y="2057400"/>
-            <a:ext cx="1097280" cy="320040"/>
+            <a:off x="7909560" y="1783080"/>
+            <a:ext cx="914400" cy="310896"/>
           </a:xfrm>
           <a:prstGeom prst="rect">
             <a:avLst/>
@@ -10686,7 +11516,7 @@
               </a:spcAft>
             </a:pPr>
             <a:r>
-              <a:rPr sz="1300" b="1" i="0">
+              <a:rPr sz="1200" b="1" i="0">
                 <a:solidFill>
                   <a:srgbClr val="4B5563"/>
                 </a:solidFill>
@@ -10705,8 +11535,8 @@
         </p:nvSpPr>
         <p:spPr>
           <a:xfrm>
-            <a:off x="640080" y="2624328"/>
-            <a:ext cx="2743200" cy="320040"/>
+            <a:off x="594360" y="2286000"/>
+            <a:ext cx="2377440" cy="310896"/>
           </a:xfrm>
           <a:prstGeom prst="rect">
             <a:avLst/>
@@ -10725,7 +11555,7 @@
               </a:spcAft>
             </a:pPr>
             <a:r>
-              <a:rPr sz="1400" b="0" i="0">
+              <a:rPr sz="1300" b="0" i="0">
                 <a:solidFill>
                   <a:srgbClr val="15241C"/>
                 </a:solidFill>
@@ -10744,8 +11574,8 @@
         </p:nvSpPr>
         <p:spPr>
           <a:xfrm>
-            <a:off x="3474720" y="2670048"/>
-            <a:ext cx="4408456" cy="256032"/>
+            <a:off x="3063240" y="2322576"/>
+            <a:ext cx="2696937" cy="237744"/>
           </a:xfrm>
           <a:prstGeom prst="rect">
             <a:avLst/>
@@ -10788,8 +11618,8 @@
         </p:nvSpPr>
         <p:spPr>
           <a:xfrm>
-            <a:off x="7974616" y="2624328"/>
-            <a:ext cx="1097280" cy="320040"/>
+            <a:off x="5851617" y="2286000"/>
+            <a:ext cx="914400" cy="310896"/>
           </a:xfrm>
           <a:prstGeom prst="rect">
             <a:avLst/>
@@ -10808,7 +11638,7 @@
               </a:spcAft>
             </a:pPr>
             <a:r>
-              <a:rPr sz="1300" b="1" i="0">
+              <a:rPr sz="1200" b="1" i="0">
                 <a:solidFill>
                   <a:srgbClr val="4B5563"/>
                 </a:solidFill>
@@ -10827,8 +11657,8 @@
         </p:nvSpPr>
         <p:spPr>
           <a:xfrm>
-            <a:off x="640080" y="3191256"/>
-            <a:ext cx="2743200" cy="320040"/>
+            <a:off x="594360" y="2788920"/>
+            <a:ext cx="2377440" cy="310896"/>
           </a:xfrm>
           <a:prstGeom prst="rect">
             <a:avLst/>
@@ -10847,7 +11677,7 @@
               </a:spcAft>
             </a:pPr>
             <a:r>
-              <a:rPr sz="1400" b="0" i="0">
+              <a:rPr sz="1300" b="0" i="0">
                 <a:solidFill>
                   <a:srgbClr val="15241C"/>
                 </a:solidFill>
@@ -10866,8 +11696,8 @@
         </p:nvSpPr>
         <p:spPr>
           <a:xfrm>
-            <a:off x="3474720" y="3236976"/>
-            <a:ext cx="1459245" cy="256032"/>
+            <a:off x="3063240" y="2825496"/>
+            <a:ext cx="892714" cy="237744"/>
           </a:xfrm>
           <a:prstGeom prst="rect">
             <a:avLst/>
@@ -10910,8 +11740,8 @@
         </p:nvSpPr>
         <p:spPr>
           <a:xfrm>
-            <a:off x="5025405" y="3191256"/>
-            <a:ext cx="1097280" cy="320040"/>
+            <a:off x="4047394" y="2788920"/>
+            <a:ext cx="914400" cy="310896"/>
           </a:xfrm>
           <a:prstGeom prst="rect">
             <a:avLst/>
@@ -10930,7 +11760,7 @@
               </a:spcAft>
             </a:pPr>
             <a:r>
-              <a:rPr sz="1300" b="1" i="0">
+              <a:rPr sz="1200" b="1" i="0">
                 <a:solidFill>
                   <a:srgbClr val="4B5563"/>
                 </a:solidFill>
@@ -10949,8 +11779,8 @@
         </p:nvSpPr>
         <p:spPr>
           <a:xfrm>
-            <a:off x="640080" y="3758184"/>
-            <a:ext cx="2743200" cy="320040"/>
+            <a:off x="594360" y="3291840"/>
+            <a:ext cx="2377440" cy="310896"/>
           </a:xfrm>
           <a:prstGeom prst="rect">
             <a:avLst/>
@@ -10969,7 +11799,7 @@
               </a:spcAft>
             </a:pPr>
             <a:r>
-              <a:rPr sz="1400" b="0" i="0">
+              <a:rPr sz="1300" b="0" i="0">
                 <a:solidFill>
                   <a:srgbClr val="15241C"/>
                 </a:solidFill>
@@ -10988,8 +11818,8 @@
         </p:nvSpPr>
         <p:spPr>
           <a:xfrm>
-            <a:off x="3474720" y="3803904"/>
-            <a:ext cx="660500" cy="256032"/>
+            <a:off x="3063240" y="3328416"/>
+            <a:ext cx="404070" cy="237744"/>
           </a:xfrm>
           <a:prstGeom prst="rect">
             <a:avLst/>
@@ -11032,8 +11862,8 @@
         </p:nvSpPr>
         <p:spPr>
           <a:xfrm>
-            <a:off x="4226660" y="3758184"/>
-            <a:ext cx="1097280" cy="320040"/>
+            <a:off x="3558750" y="3291840"/>
+            <a:ext cx="914400" cy="310896"/>
           </a:xfrm>
           <a:prstGeom prst="rect">
             <a:avLst/>
@@ -11052,7 +11882,7 @@
               </a:spcAft>
             </a:pPr>
             <a:r>
-              <a:rPr sz="1300" b="1" i="0">
+              <a:rPr sz="1200" b="1" i="0">
                 <a:solidFill>
                   <a:srgbClr val="4B5563"/>
                 </a:solidFill>
@@ -11071,8 +11901,8 @@
         </p:nvSpPr>
         <p:spPr>
           <a:xfrm>
-            <a:off x="640080" y="4325112"/>
-            <a:ext cx="2743200" cy="320040"/>
+            <a:off x="594360" y="3794760"/>
+            <a:ext cx="2377440" cy="310896"/>
           </a:xfrm>
           <a:prstGeom prst="rect">
             <a:avLst/>
@@ -11091,7 +11921,7 @@
               </a:spcAft>
             </a:pPr>
             <a:r>
-              <a:rPr sz="1400" b="0" i="0">
+              <a:rPr sz="1300" b="0" i="0">
                 <a:solidFill>
                   <a:srgbClr val="15241C"/>
                 </a:solidFill>
@@ -11110,8 +11940,8 @@
         </p:nvSpPr>
         <p:spPr>
           <a:xfrm>
-            <a:off x="3474720" y="4370832"/>
-            <a:ext cx="645139" cy="256032"/>
+            <a:off x="3063240" y="3831336"/>
+            <a:ext cx="394673" cy="237744"/>
           </a:xfrm>
           <a:prstGeom prst="rect">
             <a:avLst/>
@@ -11154,8 +11984,8 @@
         </p:nvSpPr>
         <p:spPr>
           <a:xfrm>
-            <a:off x="4211299" y="4325112"/>
-            <a:ext cx="1097280" cy="320040"/>
+            <a:off x="3549353" y="3794760"/>
+            <a:ext cx="914400" cy="310896"/>
           </a:xfrm>
           <a:prstGeom prst="rect">
             <a:avLst/>
@@ -11174,7 +12004,7 @@
               </a:spcAft>
             </a:pPr>
             <a:r>
-              <a:rPr sz="1300" b="1" i="0">
+              <a:rPr sz="1200" b="1" i="0">
                 <a:solidFill>
                   <a:srgbClr val="4B5563"/>
                 </a:solidFill>
@@ -11193,8 +12023,8 @@
         </p:nvSpPr>
         <p:spPr>
           <a:xfrm>
-            <a:off x="640080" y="4892040"/>
-            <a:ext cx="2743200" cy="320040"/>
+            <a:off x="594360" y="4297680"/>
+            <a:ext cx="2377440" cy="310896"/>
           </a:xfrm>
           <a:prstGeom prst="rect">
             <a:avLst/>
@@ -11213,7 +12043,7 @@
               </a:spcAft>
             </a:pPr>
             <a:r>
-              <a:rPr sz="1400" b="0" i="0">
+              <a:rPr sz="1300" b="0" i="0">
                 <a:solidFill>
                   <a:srgbClr val="15241C"/>
                 </a:solidFill>
@@ -11232,8 +12062,8 @@
         </p:nvSpPr>
         <p:spPr>
           <a:xfrm>
-            <a:off x="3474720" y="4937760"/>
-            <a:ext cx="230407" cy="256032"/>
+            <a:off x="3063240" y="4334256"/>
+            <a:ext cx="140954" cy="237744"/>
           </a:xfrm>
           <a:prstGeom prst="rect">
             <a:avLst/>
@@ -11276,8 +12106,8 @@
         </p:nvSpPr>
         <p:spPr>
           <a:xfrm>
-            <a:off x="3796567" y="4892040"/>
-            <a:ext cx="1097280" cy="320040"/>
+            <a:off x="3295634" y="4297680"/>
+            <a:ext cx="914400" cy="310896"/>
           </a:xfrm>
           <a:prstGeom prst="rect">
             <a:avLst/>
@@ -11296,7 +12126,7 @@
               </a:spcAft>
             </a:pPr>
             <a:r>
-              <a:rPr sz="1300" b="1" i="0">
+              <a:rPr sz="1200" b="1" i="0">
                 <a:solidFill>
                   <a:srgbClr val="4B5563"/>
                 </a:solidFill>
@@ -11315,8 +12145,8 @@
         </p:nvSpPr>
         <p:spPr>
           <a:xfrm>
-            <a:off x="640080" y="5458968"/>
-            <a:ext cx="2743200" cy="320040"/>
+            <a:off x="594360" y="4800600"/>
+            <a:ext cx="2377440" cy="310896"/>
           </a:xfrm>
           <a:prstGeom prst="rect">
             <a:avLst/>
@@ -11335,7 +12165,7 @@
               </a:spcAft>
             </a:pPr>
             <a:r>
-              <a:rPr sz="1400" b="0" i="0">
+              <a:rPr sz="1300" b="0" i="0">
                 <a:solidFill>
                   <a:srgbClr val="15241C"/>
                 </a:solidFill>
@@ -11354,8 +12184,8 @@
         </p:nvSpPr>
         <p:spPr>
           <a:xfrm>
-            <a:off x="3474720" y="5504688"/>
-            <a:ext cx="199686" cy="256032"/>
+            <a:off x="3063240" y="4837176"/>
+            <a:ext cx="122160" cy="237744"/>
           </a:xfrm>
           <a:prstGeom prst="rect">
             <a:avLst/>
@@ -11398,8 +12228,8 @@
         </p:nvSpPr>
         <p:spPr>
           <a:xfrm>
-            <a:off x="3765846" y="5458968"/>
-            <a:ext cx="1097280" cy="320040"/>
+            <a:off x="3276840" y="4800600"/>
+            <a:ext cx="914400" cy="310896"/>
           </a:xfrm>
           <a:prstGeom prst="rect">
             <a:avLst/>
@@ -11418,7 +12248,7 @@
               </a:spcAft>
             </a:pPr>
             <a:r>
-              <a:rPr sz="1300" b="1" i="0">
+              <a:rPr sz="1200" b="1" i="0">
                 <a:solidFill>
                   <a:srgbClr val="4B5563"/>
                 </a:solidFill>
@@ -11431,14 +12261,102 @@
       </p:sp>
       <p:sp>
         <p:nvSpPr>
-          <p:cNvPr id="28" name="TextBox 27"/>
+          <p:cNvPr id="28" name="Rectangle 27"/>
+          <p:cNvSpPr/>
+          <p:nvPr/>
+        </p:nvSpPr>
+        <p:spPr>
+          <a:xfrm>
+            <a:off x="8229600" y="1783080"/>
+            <a:ext cx="3246120" cy="3703320"/>
+          </a:xfrm>
+          <a:prstGeom prst="rect">
+            <a:avLst/>
+          </a:prstGeom>
+          <a:solidFill>
+            <a:srgbClr val="EAF7F0"/>
+          </a:solidFill>
+          <a:ln>
+            <a:noFill/>
+          </a:ln>
+          <a:effectLst/>
+        </p:spPr>
+        <p:style>
+          <a:lnRef idx="1">
+            <a:schemeClr val="accent1"/>
+          </a:lnRef>
+          <a:fillRef idx="3">
+            <a:schemeClr val="accent1"/>
+          </a:fillRef>
+          <a:effectRef idx="2">
+            <a:schemeClr val="accent1"/>
+          </a:effectRef>
+          <a:fontRef idx="minor">
+            <a:schemeClr val="lt1"/>
+          </a:fontRef>
+        </p:style>
+        <p:txBody>
+          <a:bodyPr rtlCol="0" anchor="ctr"/>
+          <a:lstStyle/>
+          <a:p>
+            <a:pPr algn="ctr"/>
+          </a:p>
+        </p:txBody>
+      </p:sp>
+      <p:sp>
+        <p:nvSpPr>
+          <p:cNvPr id="29" name="Rectangle 28"/>
+          <p:cNvSpPr/>
+          <p:nvPr/>
+        </p:nvSpPr>
+        <p:spPr>
+          <a:xfrm>
+            <a:off x="8229600" y="1783080"/>
+            <a:ext cx="82296" cy="3703320"/>
+          </a:xfrm>
+          <a:prstGeom prst="rect">
+            <a:avLst/>
+          </a:prstGeom>
+          <a:solidFill>
+            <a:srgbClr val="039855"/>
+          </a:solidFill>
+          <a:ln>
+            <a:noFill/>
+          </a:ln>
+          <a:effectLst/>
+        </p:spPr>
+        <p:style>
+          <a:lnRef idx="1">
+            <a:schemeClr val="accent1"/>
+          </a:lnRef>
+          <a:fillRef idx="3">
+            <a:schemeClr val="accent1"/>
+          </a:fillRef>
+          <a:effectRef idx="2">
+            <a:schemeClr val="accent1"/>
+          </a:effectRef>
+          <a:fontRef idx="minor">
+            <a:schemeClr val="lt1"/>
+          </a:fontRef>
+        </p:style>
+        <p:txBody>
+          <a:bodyPr rtlCol="0" anchor="ctr"/>
+          <a:lstStyle/>
+          <a:p>
+            <a:pPr algn="ctr"/>
+          </a:p>
+        </p:txBody>
+      </p:sp>
+      <p:sp>
+        <p:nvSpPr>
+          <p:cNvPr id="30" name="TextBox 29"/>
           <p:cNvSpPr txBox="1"/>
           <p:nvPr/>
         </p:nvSpPr>
         <p:spPr>
           <a:xfrm>
-            <a:off x="640080" y="6126480"/>
-            <a:ext cx="10972800" cy="457200"/>
+            <a:off x="8430768" y="1892808"/>
+            <a:ext cx="2880360" cy="3502152"/>
           </a:xfrm>
           <a:prstGeom prst="rect">
             <a:avLst/>
@@ -11453,17 +12371,33 @@
           <a:p>
             <a:pPr algn="l">
               <a:spcAft>
-                <a:spcPts val="600"/>
-              </a:spcAft>
-            </a:pPr>
-            <a:r>
-              <a:rPr sz="1400" b="0" i="1">
-                <a:solidFill>
-                  <a:srgbClr val="4B5563"/>
-                </a:solidFill>
-                <a:latin typeface="Calibri"/>
-              </a:rPr>
-              <a:t>Tinggi badan &amp; umur mendominasi — konsisten dengan definisi HAZ.</a:t>
+                <a:spcPts val="300"/>
+              </a:spcAft>
+            </a:pPr>
+            <a:r>
+              <a:rPr sz="1300" b="1" i="0">
+                <a:solidFill>
+                  <a:srgbClr val="039855"/>
+                </a:solidFill>
+                <a:latin typeface="Calibri"/>
+              </a:rPr>
+              <a:t>Siapa yang menentukan?</a:t>
+            </a:r>
+          </a:p>
+          <a:p>
+            <a:pPr algn="l">
+              <a:spcAft>
+                <a:spcPts val="300"/>
+              </a:spcAft>
+            </a:pPr>
+            <a:r>
+              <a:rPr sz="1150" b="0" i="0">
+                <a:solidFill>
+                  <a:srgbClr val="15241C"/>
+                </a:solidFill>
+                <a:latin typeface="Calibri"/>
+              </a:rPr>
+              <a:t>BUKAN kami. Random Forest MENGHITUNG SENDIRI dari data: seberapa sering &amp; seberapa besar tiap faktor membantu menebak status gizi dengan benar. Hasilnya disebut "feature importance". Tinggi &amp; umur paling besar karena definisi stunting memang soal tinggi-menurut-umur.</a:t>
             </a:r>
           </a:p>
         </p:txBody>
@@ -11582,7 +12516,7 @@
         </p:nvSpPr>
         <p:spPr>
           <a:xfrm>
-            <a:off x="548640" y="502920"/>
+            <a:off x="548640" y="457200"/>
             <a:ext cx="548640" cy="82296"/>
           </a:xfrm>
           <a:prstGeom prst="rect">
@@ -11626,8 +12560,8 @@
         </p:nvSpPr>
         <p:spPr>
           <a:xfrm>
-            <a:off x="548640" y="603504"/>
-            <a:ext cx="10058400" cy="365760"/>
+            <a:off x="548640" y="548640"/>
+            <a:ext cx="10515600" cy="365760"/>
           </a:xfrm>
           <a:prstGeom prst="rect">
             <a:avLst/>
@@ -11652,7 +12586,7 @@
                 </a:solidFill>
                 <a:latin typeface="Calibri"/>
               </a:rPr>
-              <a:t>ETIKA</a:t>
+              <a:t>REKAYASA PERANGKAT LUNAK</a:t>
             </a:r>
           </a:p>
         </p:txBody>
@@ -11665,8 +12599,8 @@
         </p:nvSpPr>
         <p:spPr>
           <a:xfrm>
-            <a:off x="548640" y="868680"/>
-            <a:ext cx="11064240" cy="914400"/>
+            <a:off x="548640" y="804672"/>
+            <a:ext cx="11155680" cy="914400"/>
           </a:xfrm>
           <a:prstGeom prst="rect">
             <a:avLst/>
@@ -11685,13 +12619,13 @@
               </a:spcAft>
             </a:pPr>
             <a:r>
-              <a:rPr sz="3000" b="1" i="0">
+              <a:rPr sz="2800" b="1" i="0">
                 <a:solidFill>
                   <a:srgbClr val="05312A"/>
                 </a:solidFill>
                 <a:latin typeface="Calibri"/>
               </a:rPr>
-              <a:t>Keadilan, transparansi &amp; privasi (LO6)</a:t>
+              <a:t>Teknologi yang kami bangun</a:t>
             </a:r>
           </a:p>
         </p:txBody>
@@ -11704,8 +12638,8 @@
         </p:nvSpPr>
         <p:spPr>
           <a:xfrm>
-            <a:off x="640080" y="2011680"/>
-            <a:ext cx="10881360" cy="4114800"/>
+            <a:off x="594360" y="1783080"/>
+            <a:ext cx="10881360" cy="4206240"/>
           </a:xfrm>
           <a:prstGeom prst="rect">
             <a:avLst/>
@@ -11724,7 +12658,7 @@
               </a:spcAft>
             </a:pPr>
             <a:r>
-              <a:rPr sz="1800" b="1">
+              <a:rPr sz="1700" b="1">
                 <a:solidFill>
                   <a:srgbClr val="039855"/>
                 </a:solidFill>
@@ -11732,22 +12666,22 @@
               <a:t>▸  </a:t>
             </a:r>
             <a:r>
-              <a:rPr sz="1800" b="1">
+              <a:rPr sz="1700" b="1">
                 <a:solidFill>
                   <a:srgbClr val="15241C"/>
                 </a:solidFill>
                 <a:latin typeface="Calibri"/>
               </a:rPr>
-              <a:t>Fairness</a:t>
-            </a:r>
-            <a:r>
-              <a:rPr sz="1800" b="0">
+              <a:t>React + Vite + Tailwind</a:t>
+            </a:r>
+            <a:r>
+              <a:rPr sz="1700" b="0">
                 <a:solidFill>
                   <a:srgbClr val="15241C"/>
                 </a:solidFill>
                 <a:latin typeface="Calibri"/>
               </a:rPr>
-              <a:t>: disparitas akurasi gender 1,83% (&lt; ambang 5%).</a:t>
+              <a:t> — kerangka modern untuk membuat tampilan website yang cepat dan rapi.</a:t>
             </a:r>
           </a:p>
           <a:p>
@@ -11757,7 +12691,7 @@
               </a:spcAft>
             </a:pPr>
             <a:r>
-              <a:rPr sz="1800" b="1">
+              <a:rPr sz="1700" b="1">
                 <a:solidFill>
                   <a:srgbClr val="039855"/>
                 </a:solidFill>
@@ -11765,22 +12699,22 @@
               <a:t>▸  </a:t>
             </a:r>
             <a:r>
-              <a:rPr sz="1800" b="1">
+              <a:rPr sz="1700" b="1">
                 <a:solidFill>
                   <a:srgbClr val="15241C"/>
                 </a:solidFill>
                 <a:latin typeface="Calibri"/>
               </a:rPr>
-              <a:t>Transparansi</a:t>
-            </a:r>
-            <a:r>
-              <a:rPr sz="1800" b="0">
+              <a:t>ONNX Runtime Web</a:t>
+            </a:r>
+            <a:r>
+              <a:rPr sz="1700" b="0">
                 <a:solidFill>
                   <a:srgbClr val="15241C"/>
                 </a:solidFill>
                 <a:latin typeface="Calibri"/>
               </a:rPr>
-              <a:t>: confidence, probabilitas tiap kelas, Z-Score, catatan risiko — bukan kotak hitam.</a:t>
+              <a:t> — pustaka yang bisa menjalankan model machine learning langsung di dalam peramban (browser), tanpa server.</a:t>
             </a:r>
           </a:p>
           <a:p>
@@ -11790,7 +12724,7 @@
               </a:spcAft>
             </a:pPr>
             <a:r>
-              <a:rPr sz="1800" b="1">
+              <a:rPr sz="1700" b="1">
                 <a:solidFill>
                   <a:srgbClr val="039855"/>
                 </a:solidFill>
@@ -11798,22 +12732,22 @@
               <a:t>▸  </a:t>
             </a:r>
             <a:r>
-              <a:rPr sz="1800" b="1">
+              <a:rPr sz="1700" b="1">
                 <a:solidFill>
                   <a:srgbClr val="15241C"/>
                 </a:solidFill>
                 <a:latin typeface="Calibri"/>
               </a:rPr>
-              <a:t>Privasi</a:t>
-            </a:r>
-            <a:r>
-              <a:rPr sz="1800" b="0">
+              <a:t>Web Worker</a:t>
+            </a:r>
+            <a:r>
+              <a:rPr sz="1700" b="0">
                 <a:solidFill>
                   <a:srgbClr val="15241C"/>
                 </a:solidFill>
                 <a:latin typeface="Calibri"/>
               </a:rPr>
-              <a:t>: inferensi di perangkat; data tidak dikirim ke server.</a:t>
+              <a:t> — "pekerja latar belakang"; proses menebak dijalankan terpisah agar tampilan tidak macet/hang saat menghitung.</a:t>
             </a:r>
           </a:p>
           <a:p>
@@ -11823,7 +12757,7 @@
               </a:spcAft>
             </a:pPr>
             <a:r>
-              <a:rPr sz="1800" b="1">
+              <a:rPr sz="1700" b="1">
                 <a:solidFill>
                   <a:srgbClr val="039855"/>
                 </a:solidFill>
@@ -11831,55 +12765,22 @@
               <a:t>▸  </a:t>
             </a:r>
             <a:r>
-              <a:rPr sz="1800" b="1">
+              <a:rPr sz="1700" b="1">
                 <a:solidFill>
                   <a:srgbClr val="15241C"/>
                 </a:solidFill>
                 <a:latin typeface="Calibri"/>
               </a:rPr>
-              <a:t>Keamanan</a:t>
-            </a:r>
-            <a:r>
-              <a:rPr sz="1800" b="0">
+              <a:t>Hasil:</a:t>
+            </a:r>
+            <a:r>
+              <a:rPr sz="1700" b="0">
                 <a:solidFill>
                   <a:srgbClr val="15241C"/>
                 </a:solidFill>
                 <a:latin typeface="Calibri"/>
               </a:rPr>
-              <a:t>: disclaimer jelas — skrining awal, BUKAN diagnosis medis.</a:t>
-            </a:r>
-          </a:p>
-          <a:p>
-            <a:pPr>
-              <a:spcAft>
-                <a:spcPts val="1000"/>
-              </a:spcAft>
-            </a:pPr>
-            <a:r>
-              <a:rPr sz="1800" b="1">
-                <a:solidFill>
-                  <a:srgbClr val="039855"/>
-                </a:solidFill>
-              </a:rPr>
-              <a:t>▸  </a:t>
-            </a:r>
-            <a:r>
-              <a:rPr sz="1800" b="1">
-                <a:solidFill>
-                  <a:srgbClr val="15241C"/>
-                </a:solidFill>
-                <a:latin typeface="Calibri"/>
-              </a:rPr>
-              <a:t>Jujur</a:t>
-            </a:r>
-            <a:r>
-              <a:rPr sz="1800" b="0">
-                <a:solidFill>
-                  <a:srgbClr val="15241C"/>
-                </a:solidFill>
-                <a:latin typeface="Calibri"/>
-              </a:rPr>
-              <a:t>: modul foto diberi label eksperimental &amp; pengaruhnya dibatasi.</a:t>
+              <a:t> aplikasi gratis, cepat, bisa offline, dan data anak tidak keluar dari perangkat.</a:t>
             </a:r>
           </a:p>
         </p:txBody>

--- a/StuntCare_AI_Presentation.pptx
+++ b/StuntCare_AI_Presentation.pptx
@@ -5268,7 +5268,7 @@
                 </a:solidFill>
                 <a:latin typeface="Calibri"/>
               </a:rPr>
-              <a:t>Fitur baru: Asisten AI Gizi (chat)</a:t>
+              <a:t>Fitur baru: Asisten Edukasi Stunting</a:t>
             </a:r>
           </a:p>
         </p:txBody>
@@ -5333,7 +5333,7 @@
                 </a:solidFill>
                 <a:latin typeface="Calibri"/>
               </a:rPr>
-              <a:t>, pengguna bisa bertanya ke asisten AI tentang </a:t>
+              <a:t>, pengguna bisa bertanya tips </a:t>
             </a:r>
             <a:r>
               <a:rPr sz="1500" b="1">
@@ -5342,7 +5342,7 @@
                 </a:solidFill>
                 <a:latin typeface="Calibri"/>
               </a:rPr>
-              <a:t>cara mencegah stunting &amp; tips gizi</a:t>
+              <a:t>mencegah stunting &amp; gizi balita</a:t>
             </a:r>
             <a:r>
               <a:rPr sz="1500" b="0">
@@ -5375,7 +5375,7 @@
                 </a:solidFill>
                 <a:latin typeface="Calibri"/>
               </a:rPr>
-              <a:t>Ditenagai </a:t>
+              <a:t>Berjalan </a:t>
             </a:r>
             <a:r>
               <a:rPr sz="1500" b="1">
@@ -5384,7 +5384,7 @@
                 </a:solidFill>
                 <a:latin typeface="Calibri"/>
               </a:rPr>
-              <a:t>Claude (Anthropic)</a:t>
+              <a:t>100% di perangkat</a:t>
             </a:r>
             <a:r>
               <a:rPr sz="1500" b="0">
@@ -5393,7 +5393,25 @@
                 </a:solidFill>
                 <a:latin typeface="Calibri"/>
               </a:rPr>
-              <a:t>. Jawaban ringkas, berbasis pedoman WHO/Kemenkes, dan menolak memberi diagnosis medis.</a:t>
+              <a:t> memakai basis pengetahuan terkurasi dari pedoman </a:t>
+            </a:r>
+            <a:r>
+              <a:rPr sz="1500" b="1">
+                <a:solidFill>
+                  <a:srgbClr val="15241C"/>
+                </a:solidFill>
+                <a:latin typeface="Calibri"/>
+              </a:rPr>
+              <a:t>WHO &amp; Kemenkes</a:t>
+            </a:r>
+            <a:r>
+              <a:rPr sz="1500" b="0">
+                <a:solidFill>
+                  <a:srgbClr val="15241C"/>
+                </a:solidFill>
+                <a:latin typeface="Calibri"/>
+              </a:rPr>
+              <a:t> — gratis, tanpa internet, tanpa biaya.</a:t>
             </a:r>
           </a:p>
           <a:p>
@@ -5417,7 +5435,7 @@
                 </a:solidFill>
                 <a:latin typeface="Calibri"/>
               </a:rPr>
-              <a:t>Pertanyaan dikirim ke layanan AI; </a:t>
+              <a:t>Bersifat </a:t>
             </a:r>
             <a:r>
               <a:rPr sz="1500" b="1">
@@ -5426,7 +5444,7 @@
                 </a:solidFill>
                 <a:latin typeface="Calibri"/>
               </a:rPr>
-              <a:t>prediksi stunting tetap 100% di perangkat</a:t>
+              <a:t>edukasi, bukan diagnosis</a:t>
             </a:r>
             <a:r>
               <a:rPr sz="1500" b="0">
@@ -5435,7 +5453,7 @@
                 </a:solidFill>
                 <a:latin typeface="Calibri"/>
               </a:rPr>
-              <a:t>.</a:t>
+              <a:t>; kondisi khusus diarahkan ke posyandu/dokter.</a:t>
             </a:r>
           </a:p>
         </p:txBody>
@@ -5562,7 +5580,7 @@
                 </a:solidFill>
                 <a:latin typeface="Calibri"/>
               </a:rPr>
-              <a:t>Langkah integrasi (singkat)</a:t>
+              <a:t>Kenapa pendekatan ini?</a:t>
             </a:r>
           </a:p>
           <a:p>
@@ -5578,7 +5596,7 @@
                 </a:solidFill>
                 <a:latin typeface="Calibri"/>
               </a:rPr>
-              <a:t>1. Buat API key di console.anthropic.com.</a:t>
+              <a:t>• Gratis &amp; tanpa API key (tidak perlu token berbayar).</a:t>
             </a:r>
           </a:p>
           <a:p>
@@ -5594,7 +5612,7 @@
                 </a:solidFill>
                 <a:latin typeface="Calibri"/>
               </a:rPr>
-              <a:t>2. Simpan sebagai secret ANTHROPIC_API_KEY di Cloudflare Pages.</a:t>
+              <a:t>• Privat — pertanyaan tidak dikirim ke server mana pun.</a:t>
             </a:r>
           </a:p>
           <a:p>
@@ -5610,7 +5628,7 @@
                 </a:solidFill>
                 <a:latin typeface="Calibri"/>
               </a:rPr>
-              <a:t>3. Permintaan chat lewat fungsi server (Cloudflare Pages Function) agar API key aman — tidak pernah ada di sisi pengguna.</a:t>
+              <a:t>• Tidak mengarang — jawaban berasal dari materi yang sudah disusun.</a:t>
             </a:r>
           </a:p>
           <a:p>
@@ -5626,7 +5644,7 @@
                 </a:solidFill>
                 <a:latin typeface="Calibri"/>
               </a:rPr>
-              <a:t>4. Deploy ulang. Selesai.</a:t>
+              <a:t>• Mudah ditambah: cukup edit daftar topik di kode (±19 topik).</a:t>
             </a:r>
           </a:p>
         </p:txBody>

--- a/StuntCare_AI_Presentation.pptx
+++ b/StuntCare_AI_Presentation.pptx
@@ -19,6 +19,9 @@
     <p:sldId id="267" r:id="rId18"/>
     <p:sldId id="268" r:id="rId19"/>
     <p:sldId id="269" r:id="rId20"/>
+    <p:sldId id="270" r:id="rId21"/>
+    <p:sldId id="271" r:id="rId22"/>
+    <p:sldId id="272" r:id="rId23"/>
   </p:sldIdLst>
   <p:sldSz cx="12191695" cy="6858000" type="screen4x3"/>
   <p:notesSz cx="6858000" cy="9144000"/>
@@ -3325,7 +3328,7 @@
         <p:spPr>
           <a:xfrm>
             <a:off x="822960" y="2103120"/>
-            <a:ext cx="10607040" cy="2011680"/>
+            <a:ext cx="10607040" cy="2194560"/>
           </a:xfrm>
           <a:prstGeom prst="rect">
             <a:avLst/>
@@ -3344,7 +3347,7 @@
               </a:spcAft>
             </a:pPr>
             <a:r>
-              <a:rPr sz="5400" b="1" i="0">
+              <a:rPr sz="5200" b="1" i="0">
                 <a:solidFill>
                   <a:srgbClr val="FFFFFF"/>
                 </a:solidFill>
@@ -3360,13 +3363,13 @@
               </a:spcAft>
             </a:pPr>
             <a:r>
-              <a:rPr sz="2600" b="0" i="0">
+              <a:rPr sz="2400" b="0" i="0">
                 <a:solidFill>
                   <a:srgbClr val="EAF7F0"/>
                 </a:solidFill>
                 <a:latin typeface="Calibri"/>
               </a:rPr>
-              <a:t>Deteksi Dini Risiko Stunting Balita Multi-Faktor</a:t>
+              <a:t>Deteksi Dini Risiko Stunting Balita Berbasis Random Forest</a:t>
             </a:r>
           </a:p>
           <a:p>
@@ -3376,13 +3379,13 @@
               </a:spcAft>
             </a:pPr>
             <a:r>
-              <a:rPr sz="2600" b="0" i="0">
+              <a:rPr sz="2200" b="0" i="0">
                 <a:solidFill>
                   <a:srgbClr val="EAF7F0"/>
                 </a:solidFill>
                 <a:latin typeface="Calibri"/>
               </a:rPr>
-              <a:t>berbasis Random Forest yang berjalan di peramban</a:t>
+              <a:t>divalidasi pada dataset nyata Indonesia · berjalan di peramban</a:t>
             </a:r>
           </a:p>
         </p:txBody>
@@ -3395,8 +3398,8 @@
         </p:nvSpPr>
         <p:spPr>
           <a:xfrm>
-            <a:off x="822960" y="5029200"/>
-            <a:ext cx="10515600" cy="1188720"/>
+            <a:off x="822960" y="5120640"/>
+            <a:ext cx="10515600" cy="1097280"/>
           </a:xfrm>
           <a:prstGeom prst="rect">
             <a:avLst/>
@@ -3626,7 +3629,7 @@
                 </a:solidFill>
                 <a:latin typeface="Calibri"/>
               </a:rPr>
-              <a:t>ARSITEKTUR</a:t>
+              <a:t>HASIL</a:t>
             </a:r>
           </a:p>
         </p:txBody>
@@ -3659,115 +3662,51 @@
               </a:spcAft>
             </a:pPr>
             <a:r>
-              <a:rPr sz="2800" b="1" i="0">
+              <a:rPr sz="2700" b="1" i="0">
                 <a:solidFill>
                   <a:srgbClr val="05312A"/>
                 </a:solidFill>
                 <a:latin typeface="Calibri"/>
               </a:rPr>
-              <a:t>Arsitektur: cara semua bekerja bersama</a:t>
-            </a:r>
-          </a:p>
-        </p:txBody>
-      </p:sp>
-      <p:sp>
-        <p:nvSpPr>
-          <p:cNvPr id="7" name="Rectangle 6"/>
-          <p:cNvSpPr/>
-          <p:nvPr/>
-        </p:nvSpPr>
-        <p:spPr>
-          <a:xfrm>
-            <a:off x="594360" y="1828800"/>
-            <a:ext cx="2606040" cy="1828800"/>
-          </a:xfrm>
-          <a:prstGeom prst="rect">
-            <a:avLst/>
-          </a:prstGeom>
-          <a:solidFill>
-            <a:srgbClr val="EAF7F0"/>
-          </a:solidFill>
-          <a:ln>
-            <a:noFill/>
-          </a:ln>
-          <a:effectLst/>
-        </p:spPr>
-        <p:style>
-          <a:lnRef idx="1">
-            <a:schemeClr val="accent1"/>
-          </a:lnRef>
-          <a:fillRef idx="3">
-            <a:schemeClr val="accent1"/>
-          </a:fillRef>
-          <a:effectRef idx="2">
-            <a:schemeClr val="accent1"/>
-          </a:effectRef>
-          <a:fontRef idx="minor">
-            <a:schemeClr val="lt1"/>
-          </a:fontRef>
-        </p:style>
-        <p:txBody>
-          <a:bodyPr rtlCol="0" anchor="ctr"/>
-          <a:lstStyle/>
-          <a:p>
-            <a:pPr algn="ctr"/>
-          </a:p>
-        </p:txBody>
-      </p:sp>
-      <p:sp>
-        <p:nvSpPr>
-          <p:cNvPr id="8" name="Rectangle 7"/>
-          <p:cNvSpPr/>
-          <p:nvPr/>
-        </p:nvSpPr>
-        <p:spPr>
-          <a:xfrm>
-            <a:off x="594360" y="1828800"/>
-            <a:ext cx="2606040" cy="82296"/>
-          </a:xfrm>
-          <a:prstGeom prst="rect">
-            <a:avLst/>
-          </a:prstGeom>
-          <a:solidFill>
-            <a:srgbClr val="039855"/>
-          </a:solidFill>
-          <a:ln>
-            <a:noFill/>
-          </a:ln>
-          <a:effectLst/>
-        </p:spPr>
-        <p:style>
-          <a:lnRef idx="1">
-            <a:schemeClr val="accent1"/>
-          </a:lnRef>
-          <a:fillRef idx="3">
-            <a:schemeClr val="accent1"/>
-          </a:fillRef>
-          <a:effectRef idx="2">
-            <a:schemeClr val="accent1"/>
-          </a:effectRef>
-          <a:fontRef idx="minor">
-            <a:schemeClr val="lt1"/>
-          </a:fontRef>
-        </p:style>
-        <p:txBody>
-          <a:bodyPr rtlCol="0" anchor="ctr"/>
-          <a:lstStyle/>
-          <a:p>
-            <a:pPr algn="ctr"/>
-          </a:p>
-        </p:txBody>
-      </p:sp>
-      <p:sp>
-        <p:nvSpPr>
-          <p:cNvPr id="9" name="TextBox 8"/>
+              <a:t>Hasil validasi pada dataset nyata</a:t>
+            </a:r>
+          </a:p>
+        </p:txBody>
+      </p:sp>
+      <p:pic>
+        <p:nvPicPr>
+          <p:cNvPr id="7" name="Picture 6" descr="real_confusion_matrix.png"/>
+          <p:cNvPicPr>
+            <a:picLocks noChangeAspect="1"/>
+          </p:cNvPicPr>
+          <p:nvPr/>
+        </p:nvPicPr>
+        <p:blipFill>
+          <a:blip r:embed="rId2"/>
+          <a:stretch>
+            <a:fillRect/>
+          </a:stretch>
+        </p:blipFill>
+        <p:spPr>
+          <a:xfrm>
+            <a:off x="3549654" y="1554480"/>
+            <a:ext cx="5092386" cy="4206240"/>
+          </a:xfrm>
+          <a:prstGeom prst="rect">
+            <a:avLst/>
+          </a:prstGeom>
+        </p:spPr>
+      </p:pic>
+      <p:sp>
+        <p:nvSpPr>
+          <p:cNvPr id="8" name="TextBox 7"/>
           <p:cNvSpPr txBox="1"/>
           <p:nvPr/>
         </p:nvSpPr>
         <p:spPr>
           <a:xfrm>
-            <a:off x="731520" y="2057400"/>
-            <a:ext cx="2331720" cy="548640"/>
+            <a:off x="548640" y="5897880"/>
+            <a:ext cx="11064240" cy="457200"/>
           </a:xfrm>
           <a:prstGeom prst="rect">
             <a:avLst/>
@@ -3780,738 +3719,19 @@
           </a:bodyPr>
           <a:lstStyle/>
           <a:p>
-            <a:pPr algn="l">
+            <a:pPr algn="ctr">
               <a:spcAft>
                 <a:spcPts val="600"/>
               </a:spcAft>
             </a:pPr>
             <a:r>
-              <a:rPr sz="1500" b="1" i="0">
-                <a:solidFill>
-                  <a:srgbClr val="05312A"/>
-                </a:solidFill>
-                <a:latin typeface="Calibri"/>
-              </a:rPr>
-              <a:t>1. Isi 7 faktor</a:t>
-            </a:r>
-          </a:p>
-        </p:txBody>
-      </p:sp>
-      <p:sp>
-        <p:nvSpPr>
-          <p:cNvPr id="10" name="TextBox 9"/>
-          <p:cNvSpPr txBox="1"/>
-          <p:nvPr/>
-        </p:nvSpPr>
-        <p:spPr>
-          <a:xfrm>
-            <a:off x="731520" y="2606040"/>
-            <a:ext cx="2331720" cy="914400"/>
-          </a:xfrm>
-          <a:prstGeom prst="rect">
-            <a:avLst/>
-          </a:prstGeom>
-          <a:noFill/>
-        </p:spPr>
-        <p:txBody>
-          <a:bodyPr wrap="square" anchor="t">
-            <a:spAutoFit/>
-          </a:bodyPr>
-          <a:lstStyle/>
-          <a:p>
-            <a:pPr algn="l">
-              <a:spcAft>
-                <a:spcPts val="600"/>
-              </a:spcAft>
-            </a:pPr>
-            <a:r>
-              <a:rPr sz="1200" b="0" i="0">
+              <a:rPr sz="1300" b="0" i="1">
                 <a:solidFill>
                   <a:srgbClr val="4B5563"/>
                 </a:solidFill>
                 <a:latin typeface="Calibri"/>
               </a:rPr>
-              <a:t>Pengguna mengisi data anak &amp; ibu di form.</a:t>
-            </a:r>
-          </a:p>
-        </p:txBody>
-      </p:sp>
-      <p:sp>
-        <p:nvSpPr>
-          <p:cNvPr id="11" name="Rectangle 10"/>
-          <p:cNvSpPr/>
-          <p:nvPr/>
-        </p:nvSpPr>
-        <p:spPr>
-          <a:xfrm>
-            <a:off x="3355848" y="1828800"/>
-            <a:ext cx="2606040" cy="1828800"/>
-          </a:xfrm>
-          <a:prstGeom prst="rect">
-            <a:avLst/>
-          </a:prstGeom>
-          <a:solidFill>
-            <a:srgbClr val="EAF7F0"/>
-          </a:solidFill>
-          <a:ln>
-            <a:noFill/>
-          </a:ln>
-          <a:effectLst/>
-        </p:spPr>
-        <p:style>
-          <a:lnRef idx="1">
-            <a:schemeClr val="accent1"/>
-          </a:lnRef>
-          <a:fillRef idx="3">
-            <a:schemeClr val="accent1"/>
-          </a:fillRef>
-          <a:effectRef idx="2">
-            <a:schemeClr val="accent1"/>
-          </a:effectRef>
-          <a:fontRef idx="minor">
-            <a:schemeClr val="lt1"/>
-          </a:fontRef>
-        </p:style>
-        <p:txBody>
-          <a:bodyPr rtlCol="0" anchor="ctr"/>
-          <a:lstStyle/>
-          <a:p>
-            <a:pPr algn="ctr"/>
-          </a:p>
-        </p:txBody>
-      </p:sp>
-      <p:sp>
-        <p:nvSpPr>
-          <p:cNvPr id="12" name="Rectangle 11"/>
-          <p:cNvSpPr/>
-          <p:nvPr/>
-        </p:nvSpPr>
-        <p:spPr>
-          <a:xfrm>
-            <a:off x="3355848" y="1828800"/>
-            <a:ext cx="2606040" cy="82296"/>
-          </a:xfrm>
-          <a:prstGeom prst="rect">
-            <a:avLst/>
-          </a:prstGeom>
-          <a:solidFill>
-            <a:srgbClr val="039855"/>
-          </a:solidFill>
-          <a:ln>
-            <a:noFill/>
-          </a:ln>
-          <a:effectLst/>
-        </p:spPr>
-        <p:style>
-          <a:lnRef idx="1">
-            <a:schemeClr val="accent1"/>
-          </a:lnRef>
-          <a:fillRef idx="3">
-            <a:schemeClr val="accent1"/>
-          </a:fillRef>
-          <a:effectRef idx="2">
-            <a:schemeClr val="accent1"/>
-          </a:effectRef>
-          <a:fontRef idx="minor">
-            <a:schemeClr val="lt1"/>
-          </a:fontRef>
-        </p:style>
-        <p:txBody>
-          <a:bodyPr rtlCol="0" anchor="ctr"/>
-          <a:lstStyle/>
-          <a:p>
-            <a:pPr algn="ctr"/>
-          </a:p>
-        </p:txBody>
-      </p:sp>
-      <p:sp>
-        <p:nvSpPr>
-          <p:cNvPr id="13" name="TextBox 12"/>
-          <p:cNvSpPr txBox="1"/>
-          <p:nvPr/>
-        </p:nvSpPr>
-        <p:spPr>
-          <a:xfrm>
-            <a:off x="3493008" y="2057400"/>
-            <a:ext cx="2331720" cy="548640"/>
-          </a:xfrm>
-          <a:prstGeom prst="rect">
-            <a:avLst/>
-          </a:prstGeom>
-          <a:noFill/>
-        </p:spPr>
-        <p:txBody>
-          <a:bodyPr wrap="square" anchor="t">
-            <a:spAutoFit/>
-          </a:bodyPr>
-          <a:lstStyle/>
-          <a:p>
-            <a:pPr algn="l">
-              <a:spcAft>
-                <a:spcPts val="600"/>
-              </a:spcAft>
-            </a:pPr>
-            <a:r>
-              <a:rPr sz="1500" b="1" i="0">
-                <a:solidFill>
-                  <a:srgbClr val="05312A"/>
-                </a:solidFill>
-                <a:latin typeface="Calibri"/>
-              </a:rPr>
-              <a:t>2. Web Worker</a:t>
-            </a:r>
-          </a:p>
-        </p:txBody>
-      </p:sp>
-      <p:sp>
-        <p:nvSpPr>
-          <p:cNvPr id="14" name="TextBox 13"/>
-          <p:cNvSpPr txBox="1"/>
-          <p:nvPr/>
-        </p:nvSpPr>
-        <p:spPr>
-          <a:xfrm>
-            <a:off x="3493008" y="2606040"/>
-            <a:ext cx="2331720" cy="914400"/>
-          </a:xfrm>
-          <a:prstGeom prst="rect">
-            <a:avLst/>
-          </a:prstGeom>
-          <a:noFill/>
-        </p:spPr>
-        <p:txBody>
-          <a:bodyPr wrap="square" anchor="t">
-            <a:spAutoFit/>
-          </a:bodyPr>
-          <a:lstStyle/>
-          <a:p>
-            <a:pPr algn="l">
-              <a:spcAft>
-                <a:spcPts val="600"/>
-              </a:spcAft>
-            </a:pPr>
-            <a:r>
-              <a:rPr sz="1200" b="0" i="0">
-                <a:solidFill>
-                  <a:srgbClr val="4B5563"/>
-                </a:solidFill>
-                <a:latin typeface="Calibri"/>
-              </a:rPr>
-              <a:t>Data diproses di pekerja latar, di perangkat.</a:t>
-            </a:r>
-          </a:p>
-        </p:txBody>
-      </p:sp>
-      <p:sp>
-        <p:nvSpPr>
-          <p:cNvPr id="15" name="Rectangle 14"/>
-          <p:cNvSpPr/>
-          <p:nvPr/>
-        </p:nvSpPr>
-        <p:spPr>
-          <a:xfrm>
-            <a:off x="6117336" y="1828800"/>
-            <a:ext cx="2606040" cy="1828800"/>
-          </a:xfrm>
-          <a:prstGeom prst="rect">
-            <a:avLst/>
-          </a:prstGeom>
-          <a:solidFill>
-            <a:srgbClr val="EAF7F0"/>
-          </a:solidFill>
-          <a:ln>
-            <a:noFill/>
-          </a:ln>
-          <a:effectLst/>
-        </p:spPr>
-        <p:style>
-          <a:lnRef idx="1">
-            <a:schemeClr val="accent1"/>
-          </a:lnRef>
-          <a:fillRef idx="3">
-            <a:schemeClr val="accent1"/>
-          </a:fillRef>
-          <a:effectRef idx="2">
-            <a:schemeClr val="accent1"/>
-          </a:effectRef>
-          <a:fontRef idx="minor">
-            <a:schemeClr val="lt1"/>
-          </a:fontRef>
-        </p:style>
-        <p:txBody>
-          <a:bodyPr rtlCol="0" anchor="ctr"/>
-          <a:lstStyle/>
-          <a:p>
-            <a:pPr algn="ctr"/>
-          </a:p>
-        </p:txBody>
-      </p:sp>
-      <p:sp>
-        <p:nvSpPr>
-          <p:cNvPr id="16" name="Rectangle 15"/>
-          <p:cNvSpPr/>
-          <p:nvPr/>
-        </p:nvSpPr>
-        <p:spPr>
-          <a:xfrm>
-            <a:off x="6117336" y="1828800"/>
-            <a:ext cx="2606040" cy="82296"/>
-          </a:xfrm>
-          <a:prstGeom prst="rect">
-            <a:avLst/>
-          </a:prstGeom>
-          <a:solidFill>
-            <a:srgbClr val="039855"/>
-          </a:solidFill>
-          <a:ln>
-            <a:noFill/>
-          </a:ln>
-          <a:effectLst/>
-        </p:spPr>
-        <p:style>
-          <a:lnRef idx="1">
-            <a:schemeClr val="accent1"/>
-          </a:lnRef>
-          <a:fillRef idx="3">
-            <a:schemeClr val="accent1"/>
-          </a:fillRef>
-          <a:effectRef idx="2">
-            <a:schemeClr val="accent1"/>
-          </a:effectRef>
-          <a:fontRef idx="minor">
-            <a:schemeClr val="lt1"/>
-          </a:fontRef>
-        </p:style>
-        <p:txBody>
-          <a:bodyPr rtlCol="0" anchor="ctr"/>
-          <a:lstStyle/>
-          <a:p>
-            <a:pPr algn="ctr"/>
-          </a:p>
-        </p:txBody>
-      </p:sp>
-      <p:sp>
-        <p:nvSpPr>
-          <p:cNvPr id="17" name="TextBox 16"/>
-          <p:cNvSpPr txBox="1"/>
-          <p:nvPr/>
-        </p:nvSpPr>
-        <p:spPr>
-          <a:xfrm>
-            <a:off x="6254496" y="2057400"/>
-            <a:ext cx="2331720" cy="548640"/>
-          </a:xfrm>
-          <a:prstGeom prst="rect">
-            <a:avLst/>
-          </a:prstGeom>
-          <a:noFill/>
-        </p:spPr>
-        <p:txBody>
-          <a:bodyPr wrap="square" anchor="t">
-            <a:spAutoFit/>
-          </a:bodyPr>
-          <a:lstStyle/>
-          <a:p>
-            <a:pPr algn="l">
-              <a:spcAft>
-                <a:spcPts val="600"/>
-              </a:spcAft>
-            </a:pPr>
-            <a:r>
-              <a:rPr sz="1500" b="1" i="0">
-                <a:solidFill>
-                  <a:srgbClr val="05312A"/>
-                </a:solidFill>
-                <a:latin typeface="Calibri"/>
-              </a:rPr>
-              <a:t>3. Random Forest</a:t>
-            </a:r>
-          </a:p>
-        </p:txBody>
-      </p:sp>
-      <p:sp>
-        <p:nvSpPr>
-          <p:cNvPr id="18" name="TextBox 17"/>
-          <p:cNvSpPr txBox="1"/>
-          <p:nvPr/>
-        </p:nvSpPr>
-        <p:spPr>
-          <a:xfrm>
-            <a:off x="6254496" y="2606040"/>
-            <a:ext cx="2331720" cy="914400"/>
-          </a:xfrm>
-          <a:prstGeom prst="rect">
-            <a:avLst/>
-          </a:prstGeom>
-          <a:noFill/>
-        </p:spPr>
-        <p:txBody>
-          <a:bodyPr wrap="square" anchor="t">
-            <a:spAutoFit/>
-          </a:bodyPr>
-          <a:lstStyle/>
-          <a:p>
-            <a:pPr algn="l">
-              <a:spcAft>
-                <a:spcPts val="600"/>
-              </a:spcAft>
-            </a:pPr>
-            <a:r>
-              <a:rPr sz="1200" b="0" i="0">
-                <a:solidFill>
-                  <a:srgbClr val="4B5563"/>
-                </a:solidFill>
-                <a:latin typeface="Calibri"/>
-              </a:rPr>
-              <a:t>Model (format ONNX) menghitung dalam sekejap.</a:t>
-            </a:r>
-          </a:p>
-        </p:txBody>
-      </p:sp>
-      <p:sp>
-        <p:nvSpPr>
-          <p:cNvPr id="19" name="Rectangle 18"/>
-          <p:cNvSpPr/>
-          <p:nvPr/>
-        </p:nvSpPr>
-        <p:spPr>
-          <a:xfrm>
-            <a:off x="8878824" y="1828800"/>
-            <a:ext cx="2606040" cy="1828800"/>
-          </a:xfrm>
-          <a:prstGeom prst="rect">
-            <a:avLst/>
-          </a:prstGeom>
-          <a:solidFill>
-            <a:srgbClr val="EAF7F0"/>
-          </a:solidFill>
-          <a:ln>
-            <a:noFill/>
-          </a:ln>
-          <a:effectLst/>
-        </p:spPr>
-        <p:style>
-          <a:lnRef idx="1">
-            <a:schemeClr val="accent1"/>
-          </a:lnRef>
-          <a:fillRef idx="3">
-            <a:schemeClr val="accent1"/>
-          </a:fillRef>
-          <a:effectRef idx="2">
-            <a:schemeClr val="accent1"/>
-          </a:effectRef>
-          <a:fontRef idx="minor">
-            <a:schemeClr val="lt1"/>
-          </a:fontRef>
-        </p:style>
-        <p:txBody>
-          <a:bodyPr rtlCol="0" anchor="ctr"/>
-          <a:lstStyle/>
-          <a:p>
-            <a:pPr algn="ctr"/>
-          </a:p>
-        </p:txBody>
-      </p:sp>
-      <p:sp>
-        <p:nvSpPr>
-          <p:cNvPr id="20" name="Rectangle 19"/>
-          <p:cNvSpPr/>
-          <p:nvPr/>
-        </p:nvSpPr>
-        <p:spPr>
-          <a:xfrm>
-            <a:off x="8878824" y="1828800"/>
-            <a:ext cx="2606040" cy="82296"/>
-          </a:xfrm>
-          <a:prstGeom prst="rect">
-            <a:avLst/>
-          </a:prstGeom>
-          <a:solidFill>
-            <a:srgbClr val="039855"/>
-          </a:solidFill>
-          <a:ln>
-            <a:noFill/>
-          </a:ln>
-          <a:effectLst/>
-        </p:spPr>
-        <p:style>
-          <a:lnRef idx="1">
-            <a:schemeClr val="accent1"/>
-          </a:lnRef>
-          <a:fillRef idx="3">
-            <a:schemeClr val="accent1"/>
-          </a:fillRef>
-          <a:effectRef idx="2">
-            <a:schemeClr val="accent1"/>
-          </a:effectRef>
-          <a:fontRef idx="minor">
-            <a:schemeClr val="lt1"/>
-          </a:fontRef>
-        </p:style>
-        <p:txBody>
-          <a:bodyPr rtlCol="0" anchor="ctr"/>
-          <a:lstStyle/>
-          <a:p>
-            <a:pPr algn="ctr"/>
-          </a:p>
-        </p:txBody>
-      </p:sp>
-      <p:sp>
-        <p:nvSpPr>
-          <p:cNvPr id="21" name="TextBox 20"/>
-          <p:cNvSpPr txBox="1"/>
-          <p:nvPr/>
-        </p:nvSpPr>
-        <p:spPr>
-          <a:xfrm>
-            <a:off x="9015984" y="2057400"/>
-            <a:ext cx="2331720" cy="548640"/>
-          </a:xfrm>
-          <a:prstGeom prst="rect">
-            <a:avLst/>
-          </a:prstGeom>
-          <a:noFill/>
-        </p:spPr>
-        <p:txBody>
-          <a:bodyPr wrap="square" anchor="t">
-            <a:spAutoFit/>
-          </a:bodyPr>
-          <a:lstStyle/>
-          <a:p>
-            <a:pPr algn="l">
-              <a:spcAft>
-                <a:spcPts val="600"/>
-              </a:spcAft>
-            </a:pPr>
-            <a:r>
-              <a:rPr sz="1500" b="1" i="0">
-                <a:solidFill>
-                  <a:srgbClr val="05312A"/>
-                </a:solidFill>
-                <a:latin typeface="Calibri"/>
-              </a:rPr>
-              <a:t>4. Hasil</a:t>
-            </a:r>
-          </a:p>
-        </p:txBody>
-      </p:sp>
-      <p:sp>
-        <p:nvSpPr>
-          <p:cNvPr id="22" name="TextBox 21"/>
-          <p:cNvSpPr txBox="1"/>
-          <p:nvPr/>
-        </p:nvSpPr>
-        <p:spPr>
-          <a:xfrm>
-            <a:off x="9015984" y="2606040"/>
-            <a:ext cx="2331720" cy="914400"/>
-          </a:xfrm>
-          <a:prstGeom prst="rect">
-            <a:avLst/>
-          </a:prstGeom>
-          <a:noFill/>
-        </p:spPr>
-        <p:txBody>
-          <a:bodyPr wrap="square" anchor="t">
-            <a:spAutoFit/>
-          </a:bodyPr>
-          <a:lstStyle/>
-          <a:p>
-            <a:pPr algn="l">
-              <a:spcAft>
-                <a:spcPts val="600"/>
-              </a:spcAft>
-            </a:pPr>
-            <a:r>
-              <a:rPr sz="1200" b="0" i="0">
-                <a:solidFill>
-                  <a:srgbClr val="4B5563"/>
-                </a:solidFill>
-                <a:latin typeface="Calibri"/>
-              </a:rPr>
-              <a:t>Status gizi + keyakinan + rekomendasi tampil.</a:t>
-            </a:r>
-          </a:p>
-        </p:txBody>
-      </p:sp>
-      <p:sp>
-        <p:nvSpPr>
-          <p:cNvPr id="23" name="Rectangle 22"/>
-          <p:cNvSpPr/>
-          <p:nvPr/>
-        </p:nvSpPr>
-        <p:spPr>
-          <a:xfrm>
-            <a:off x="594360" y="4069080"/>
-            <a:ext cx="10881360" cy="1371600"/>
-          </a:xfrm>
-          <a:prstGeom prst="rect">
-            <a:avLst/>
-          </a:prstGeom>
-          <a:solidFill>
-            <a:srgbClr val="EAF7F0"/>
-          </a:solidFill>
-          <a:ln>
-            <a:noFill/>
-          </a:ln>
-          <a:effectLst/>
-        </p:spPr>
-        <p:style>
-          <a:lnRef idx="1">
-            <a:schemeClr val="accent1"/>
-          </a:lnRef>
-          <a:fillRef idx="3">
-            <a:schemeClr val="accent1"/>
-          </a:fillRef>
-          <a:effectRef idx="2">
-            <a:schemeClr val="accent1"/>
-          </a:effectRef>
-          <a:fontRef idx="minor">
-            <a:schemeClr val="lt1"/>
-          </a:fontRef>
-        </p:style>
-        <p:txBody>
-          <a:bodyPr rtlCol="0" anchor="ctr"/>
-          <a:lstStyle/>
-          <a:p>
-            <a:pPr algn="ctr"/>
-          </a:p>
-        </p:txBody>
-      </p:sp>
-      <p:sp>
-        <p:nvSpPr>
-          <p:cNvPr id="24" name="Rectangle 23"/>
-          <p:cNvSpPr/>
-          <p:nvPr/>
-        </p:nvSpPr>
-        <p:spPr>
-          <a:xfrm>
-            <a:off x="594360" y="4069080"/>
-            <a:ext cx="82296" cy="1371600"/>
-          </a:xfrm>
-          <a:prstGeom prst="rect">
-            <a:avLst/>
-          </a:prstGeom>
-          <a:solidFill>
-            <a:srgbClr val="039855"/>
-          </a:solidFill>
-          <a:ln>
-            <a:noFill/>
-          </a:ln>
-          <a:effectLst/>
-        </p:spPr>
-        <p:style>
-          <a:lnRef idx="1">
-            <a:schemeClr val="accent1"/>
-          </a:lnRef>
-          <a:fillRef idx="3">
-            <a:schemeClr val="accent1"/>
-          </a:fillRef>
-          <a:effectRef idx="2">
-            <a:schemeClr val="accent1"/>
-          </a:effectRef>
-          <a:fontRef idx="minor">
-            <a:schemeClr val="lt1"/>
-          </a:fontRef>
-        </p:style>
-        <p:txBody>
-          <a:bodyPr rtlCol="0" anchor="ctr"/>
-          <a:lstStyle/>
-          <a:p>
-            <a:pPr algn="ctr"/>
-          </a:p>
-        </p:txBody>
-      </p:sp>
-      <p:sp>
-        <p:nvSpPr>
-          <p:cNvPr id="25" name="TextBox 24"/>
-          <p:cNvSpPr txBox="1"/>
-          <p:nvPr/>
-        </p:nvSpPr>
-        <p:spPr>
-          <a:xfrm>
-            <a:off x="795528" y="4178808"/>
-            <a:ext cx="10515600" cy="1170432"/>
-          </a:xfrm>
-          <a:prstGeom prst="rect">
-            <a:avLst/>
-          </a:prstGeom>
-          <a:noFill/>
-        </p:spPr>
-        <p:txBody>
-          <a:bodyPr wrap="square" anchor="t">
-            <a:spAutoFit/>
-          </a:bodyPr>
-          <a:lstStyle/>
-          <a:p>
-            <a:pPr algn="l">
-              <a:spcAft>
-                <a:spcPts val="300"/>
-              </a:spcAft>
-            </a:pPr>
-            <a:r>
-              <a:rPr sz="1300" b="1" i="0">
-                <a:solidFill>
-                  <a:srgbClr val="039855"/>
-                </a:solidFill>
-                <a:latin typeface="Calibri"/>
-              </a:rPr>
-              <a:t>Istilah teknis (sederhana)</a:t>
-            </a:r>
-          </a:p>
-          <a:p>
-            <a:pPr algn="l">
-              <a:spcAft>
-                <a:spcPts val="300"/>
-              </a:spcAft>
-            </a:pPr>
-            <a:r>
-              <a:rPr sz="1150" b="0" i="0">
-                <a:solidFill>
-                  <a:srgbClr val="15241C"/>
-                </a:solidFill>
-                <a:latin typeface="Calibri"/>
-              </a:rPr>
-              <a:t>ONNX = format standar agar model AI bisa dipakai di mana saja. WASM (WebAssembly) = teknologi yang membuat kode berjalan cepat di dalam peramban. Gabungan keduanya membuat model berjalan instan, di perangkat, dan bisa offline.</a:t>
-            </a:r>
-          </a:p>
-        </p:txBody>
-      </p:sp>
-      <p:sp>
-        <p:nvSpPr>
-          <p:cNvPr id="26" name="TextBox 25"/>
-          <p:cNvSpPr txBox="1"/>
-          <p:nvPr/>
-        </p:nvSpPr>
-        <p:spPr>
-          <a:xfrm>
-            <a:off x="594360" y="5623560"/>
-            <a:ext cx="10972800" cy="457200"/>
-          </a:xfrm>
-          <a:prstGeom prst="rect">
-            <a:avLst/>
-          </a:prstGeom>
-          <a:noFill/>
-        </p:spPr>
-        <p:txBody>
-          <a:bodyPr wrap="square" anchor="t">
-            <a:spAutoFit/>
-          </a:bodyPr>
-          <a:lstStyle/>
-          <a:p>
-            <a:pPr algn="l">
-              <a:spcAft>
-                <a:spcPts val="600"/>
-              </a:spcAft>
-            </a:pPr>
-            <a:r>
-              <a:rPr sz="1300" b="0" i="1">
-                <a:solidFill>
-                  <a:srgbClr val="4B5563"/>
-                </a:solidFill>
-                <a:latin typeface="Calibri"/>
-              </a:rPr>
-              <a:t>Tanpa server, tanpa biaya, dan privasi terjaga (data tidak dikirim ke mana pun).</a:t>
+              <a:t>Confusion matrix — akurasi 99.39%, F1 99.4%, CV 99.18% ± 0.12%.</a:t>
             </a:r>
           </a:p>
         </p:txBody>
@@ -4700,7 +3920,7 @@
                 </a:solidFill>
                 <a:latin typeface="Calibri"/>
               </a:rPr>
-              <a:t>PENGAYAAN</a:t>
+              <a:t>HASIL</a:t>
             </a:r>
           </a:p>
         </p:txBody>
@@ -4733,273 +3953,75 @@
               </a:spcAft>
             </a:pPr>
             <a:r>
-              <a:rPr sz="2800" b="1" i="0">
+              <a:rPr sz="2700" b="1" i="0">
                 <a:solidFill>
                   <a:srgbClr val="05312A"/>
                 </a:solidFill>
                 <a:latin typeface="Calibri"/>
               </a:rPr>
-              <a:t>Fitur opsional: Analisis Foto (eksperimental)</a:t>
-            </a:r>
-          </a:p>
-        </p:txBody>
-      </p:sp>
-      <p:sp>
-        <p:nvSpPr>
-          <p:cNvPr id="7" name="TextBox 6"/>
+              <a:t>Kepentingan fitur &amp; distribusi data</a:t>
+            </a:r>
+          </a:p>
+        </p:txBody>
+      </p:sp>
+      <p:pic>
+        <p:nvPicPr>
+          <p:cNvPr id="7" name="Picture 6" descr="real_feature_importance.png"/>
+          <p:cNvPicPr>
+            <a:picLocks noChangeAspect="1"/>
+          </p:cNvPicPr>
+          <p:nvPr/>
+        </p:nvPicPr>
+        <p:blipFill>
+          <a:blip r:embed="rId2"/>
+          <a:stretch>
+            <a:fillRect/>
+          </a:stretch>
+        </p:blipFill>
+        <p:spPr>
+          <a:xfrm>
+            <a:off x="502920" y="1920240"/>
+            <a:ext cx="5486400" cy="2874371"/>
+          </a:xfrm>
+          <a:prstGeom prst="rect">
+            <a:avLst/>
+          </a:prstGeom>
+        </p:spPr>
+      </p:pic>
+      <p:pic>
+        <p:nvPicPr>
+          <p:cNvPr id="8" name="Picture 7" descr="real_class_distribution.png"/>
+          <p:cNvPicPr>
+            <a:picLocks noChangeAspect="1"/>
+          </p:cNvPicPr>
+          <p:nvPr/>
+        </p:nvPicPr>
+        <p:blipFill>
+          <a:blip r:embed="rId3"/>
+          <a:stretch>
+            <a:fillRect/>
+          </a:stretch>
+        </p:blipFill>
+        <p:spPr>
+          <a:xfrm>
+            <a:off x="6172200" y="1920240"/>
+            <a:ext cx="5486400" cy="2877362"/>
+          </a:xfrm>
+          <a:prstGeom prst="rect">
+            <a:avLst/>
+          </a:prstGeom>
+        </p:spPr>
+      </p:pic>
+      <p:sp>
+        <p:nvSpPr>
+          <p:cNvPr id="9" name="TextBox 8"/>
           <p:cNvSpPr txBox="1"/>
           <p:nvPr/>
         </p:nvSpPr>
         <p:spPr>
           <a:xfrm>
-            <a:off x="594360" y="1737360"/>
-            <a:ext cx="6766560" cy="4297680"/>
-          </a:xfrm>
-          <a:prstGeom prst="rect">
-            <a:avLst/>
-          </a:prstGeom>
-          <a:noFill/>
-        </p:spPr>
-        <p:txBody>
-          <a:bodyPr wrap="square">
-            <a:spAutoFit/>
-          </a:bodyPr>
-          <a:lstStyle/>
-          <a:p>
-            <a:pPr>
-              <a:spcAft>
-                <a:spcPts val="1000"/>
-              </a:spcAft>
-            </a:pPr>
-            <a:r>
-              <a:rPr sz="1500" b="1">
-                <a:solidFill>
-                  <a:srgbClr val="039855"/>
-                </a:solidFill>
-              </a:rPr>
-              <a:t>▸  </a:t>
-            </a:r>
-            <a:r>
-              <a:rPr sz="1500" b="0">
-                <a:solidFill>
-                  <a:srgbClr val="15241C"/>
-                </a:solidFill>
-                <a:latin typeface="Calibri"/>
-              </a:rPr>
-              <a:t>Pengguna bisa </a:t>
-            </a:r>
-            <a:r>
-              <a:rPr sz="1500" b="1">
-                <a:solidFill>
-                  <a:srgbClr val="15241C"/>
-                </a:solidFill>
-                <a:latin typeface="Calibri"/>
-              </a:rPr>
-              <a:t>unggah foto</a:t>
-            </a:r>
-            <a:r>
-              <a:rPr sz="1500" b="0">
-                <a:solidFill>
-                  <a:srgbClr val="15241C"/>
-                </a:solidFill>
-                <a:latin typeface="Calibri"/>
-              </a:rPr>
-              <a:t> atau pakai </a:t>
-            </a:r>
-            <a:r>
-              <a:rPr sz="1500" b="1">
-                <a:solidFill>
-                  <a:srgbClr val="15241C"/>
-                </a:solidFill>
-                <a:latin typeface="Calibri"/>
-              </a:rPr>
-              <a:t>kamera</a:t>
-            </a:r>
-            <a:r>
-              <a:rPr sz="1500" b="0">
-                <a:solidFill>
-                  <a:srgbClr val="15241C"/>
-                </a:solidFill>
-                <a:latin typeface="Calibri"/>
-              </a:rPr>
-              <a:t> anak.</a:t>
-            </a:r>
-          </a:p>
-          <a:p>
-            <a:pPr>
-              <a:spcAft>
-                <a:spcPts val="1000"/>
-              </a:spcAft>
-            </a:pPr>
-            <a:r>
-              <a:rPr sz="1500" b="1">
-                <a:solidFill>
-                  <a:srgbClr val="039855"/>
-                </a:solidFill>
-              </a:rPr>
-              <a:t>▸  </a:t>
-            </a:r>
-            <a:r>
-              <a:rPr sz="1500" b="1">
-                <a:solidFill>
-                  <a:srgbClr val="15241C"/>
-                </a:solidFill>
-                <a:latin typeface="Calibri"/>
-              </a:rPr>
-              <a:t>MediaPipe</a:t>
-            </a:r>
-            <a:r>
-              <a:rPr sz="1500" b="0">
-                <a:solidFill>
-                  <a:srgbClr val="15241C"/>
-                </a:solidFill>
-                <a:latin typeface="Calibri"/>
-              </a:rPr>
-              <a:t> (pustaka Google) mendeteksi 33 titik tubuh + siluet badan, langsung di perangkat (foto tidak diunggah ke server).</a:t>
-            </a:r>
-          </a:p>
-          <a:p>
-            <a:pPr>
-              <a:spcAft>
-                <a:spcPts val="1000"/>
-              </a:spcAft>
-            </a:pPr>
-            <a:r>
-              <a:rPr sz="1500" b="1">
-                <a:solidFill>
-                  <a:srgbClr val="039855"/>
-                </a:solidFill>
-              </a:rPr>
-              <a:t>▸  </a:t>
-            </a:r>
-            <a:r>
-              <a:rPr sz="1500" b="0">
-                <a:solidFill>
-                  <a:srgbClr val="15241C"/>
-                </a:solidFill>
-                <a:latin typeface="Calibri"/>
-              </a:rPr>
-              <a:t>Dihitung </a:t>
-            </a:r>
-            <a:r>
-              <a:rPr sz="1500" b="1">
-                <a:solidFill>
-                  <a:srgbClr val="15241C"/>
-                </a:solidFill>
-                <a:latin typeface="Calibri"/>
-              </a:rPr>
-              <a:t>proporsi tubuh</a:t>
-            </a:r>
-            <a:r>
-              <a:rPr sz="1500" b="0">
-                <a:solidFill>
-                  <a:srgbClr val="15241C"/>
-                </a:solidFill>
-                <a:latin typeface="Calibri"/>
-              </a:rPr>
-              <a:t> (kurus/normal/gemuk) dengan mengukur ketebalan lengan/kaki dibanding panjangnya — bekerja saat berdiri, duduk, atau berbaring.</a:t>
-            </a:r>
-          </a:p>
-        </p:txBody>
-      </p:sp>
-      <p:sp>
-        <p:nvSpPr>
-          <p:cNvPr id="8" name="Rectangle 7"/>
-          <p:cNvSpPr/>
-          <p:nvPr/>
-        </p:nvSpPr>
-        <p:spPr>
-          <a:xfrm>
-            <a:off x="7589520" y="1737360"/>
-            <a:ext cx="3886200" cy="4160520"/>
-          </a:xfrm>
-          <a:prstGeom prst="rect">
-            <a:avLst/>
-          </a:prstGeom>
-          <a:solidFill>
-            <a:srgbClr val="FEF3C7"/>
-          </a:solidFill>
-          <a:ln>
-            <a:noFill/>
-          </a:ln>
-          <a:effectLst/>
-        </p:spPr>
-        <p:style>
-          <a:lnRef idx="1">
-            <a:schemeClr val="accent1"/>
-          </a:lnRef>
-          <a:fillRef idx="3">
-            <a:schemeClr val="accent1"/>
-          </a:fillRef>
-          <a:effectRef idx="2">
-            <a:schemeClr val="accent1"/>
-          </a:effectRef>
-          <a:fontRef idx="minor">
-            <a:schemeClr val="lt1"/>
-          </a:fontRef>
-        </p:style>
-        <p:txBody>
-          <a:bodyPr rtlCol="0" anchor="ctr"/>
-          <a:lstStyle/>
-          <a:p>
-            <a:pPr algn="ctr"/>
-          </a:p>
-        </p:txBody>
-      </p:sp>
-      <p:sp>
-        <p:nvSpPr>
-          <p:cNvPr id="9" name="Rectangle 8"/>
-          <p:cNvSpPr/>
-          <p:nvPr/>
-        </p:nvSpPr>
-        <p:spPr>
-          <a:xfrm>
-            <a:off x="7589520" y="1737360"/>
-            <a:ext cx="82296" cy="4160520"/>
-          </a:xfrm>
-          <a:prstGeom prst="rect">
-            <a:avLst/>
-          </a:prstGeom>
-          <a:solidFill>
-            <a:srgbClr val="B45409"/>
-          </a:solidFill>
-          <a:ln>
-            <a:noFill/>
-          </a:ln>
-          <a:effectLst/>
-        </p:spPr>
-        <p:style>
-          <a:lnRef idx="1">
-            <a:schemeClr val="accent1"/>
-          </a:lnRef>
-          <a:fillRef idx="3">
-            <a:schemeClr val="accent1"/>
-          </a:fillRef>
-          <a:effectRef idx="2">
-            <a:schemeClr val="accent1"/>
-          </a:effectRef>
-          <a:fontRef idx="minor">
-            <a:schemeClr val="lt1"/>
-          </a:fontRef>
-        </p:style>
-        <p:txBody>
-          <a:bodyPr rtlCol="0" anchor="ctr"/>
-          <a:lstStyle/>
-          <a:p>
-            <a:pPr algn="ctr"/>
-          </a:p>
-        </p:txBody>
-      </p:sp>
-      <p:sp>
-        <p:nvSpPr>
-          <p:cNvPr id="10" name="TextBox 9"/>
-          <p:cNvSpPr txBox="1"/>
-          <p:nvPr/>
-        </p:nvSpPr>
-        <p:spPr>
-          <a:xfrm>
-            <a:off x="7790688" y="1847088"/>
-            <a:ext cx="3520440" cy="3959352"/>
+            <a:off x="548640" y="5486400"/>
+            <a:ext cx="11064240" cy="457200"/>
           </a:xfrm>
           <a:prstGeom prst="rect">
             <a:avLst/>
@@ -5012,35 +4034,19 @@
           </a:bodyPr>
           <a:lstStyle/>
           <a:p>
-            <a:pPr algn="l">
-              <a:spcAft>
-                <a:spcPts val="300"/>
-              </a:spcAft>
-            </a:pPr>
-            <a:r>
-              <a:rPr sz="1300" b="1" i="0">
-                <a:solidFill>
-                  <a:srgbClr val="B45409"/>
-                </a:solidFill>
-                <a:latin typeface="Calibri"/>
-              </a:rPr>
-              <a:t>Kenapa hanya "pendukung"?</a:t>
-            </a:r>
-          </a:p>
-          <a:p>
-            <a:pPr algn="l">
-              <a:spcAft>
-                <a:spcPts val="300"/>
-              </a:spcAft>
-            </a:pPr>
-            <a:r>
-              <a:rPr sz="1150" b="0" i="0">
-                <a:solidFill>
-                  <a:srgbClr val="6B4A07"/>
-                </a:solidFill>
-                <a:latin typeface="Calibri"/>
-              </a:rPr>
-              <a:t>JUJUR: foto 2D tidak bisa mengukur tinggi badan, jadi BUKAN penentu stunting. Hasil foto hanya menggeser sedikit probabilitas akhir (maksimum ±10 poin) dan ditampilkan transparan (sebelum → sesudah). Random Forest TIDAK dilatih ulang — jadi tidak ada klaim palsu. Berguna untuk mendeteksi kurus/gemuk.</a:t>
+            <a:pPr algn="ctr">
+              <a:spcAft>
+                <a:spcPts val="600"/>
+              </a:spcAft>
+            </a:pPr>
+            <a:r>
+              <a:rPr sz="1300" b="0" i="1">
+                <a:solidFill>
+                  <a:srgbClr val="4B5563"/>
+                </a:solidFill>
+                <a:latin typeface="Calibri"/>
+              </a:rPr>
+              <a:t>Tinggi badan &amp; umur paling berpengaruh (dihitung sendiri oleh model). Distribusi kelas seimbang.</a:t>
             </a:r>
           </a:p>
         </p:txBody>
@@ -5229,7 +4235,7 @@
                 </a:solidFill>
                 <a:latin typeface="Calibri"/>
               </a:rPr>
-              <a:t>INOVASI TAMBAHAN</a:t>
+              <a:t>PENGUJIAN</a:t>
             </a:r>
           </a:p>
         </p:txBody>
@@ -5262,300 +4268,51 @@
               </a:spcAft>
             </a:pPr>
             <a:r>
-              <a:rPr sz="2800" b="1" i="0">
+              <a:rPr sz="2700" b="1" i="0">
                 <a:solidFill>
                   <a:srgbClr val="05312A"/>
                 </a:solidFill>
                 <a:latin typeface="Calibri"/>
               </a:rPr>
-              <a:t>Fitur baru: Asisten Edukasi Stunting</a:t>
-            </a:r>
-          </a:p>
-        </p:txBody>
-      </p:sp>
-      <p:sp>
-        <p:nvSpPr>
-          <p:cNvPr id="7" name="TextBox 6"/>
+              <a:t>Grafik pengujian alat (per kelas)</a:t>
+            </a:r>
+          </a:p>
+        </p:txBody>
+      </p:sp>
+      <p:pic>
+        <p:nvPicPr>
+          <p:cNvPr id="7" name="Picture 6" descr="real_per_class_metrics.png"/>
+          <p:cNvPicPr>
+            <a:picLocks noChangeAspect="1"/>
+          </p:cNvPicPr>
+          <p:nvPr/>
+        </p:nvPicPr>
+        <p:blipFill>
+          <a:blip r:embed="rId2"/>
+          <a:stretch>
+            <a:fillRect/>
+          </a:stretch>
+        </p:blipFill>
+        <p:spPr>
+          <a:xfrm>
+            <a:off x="2067695" y="1554480"/>
+            <a:ext cx="8056305" cy="4297680"/>
+          </a:xfrm>
+          <a:prstGeom prst="rect">
+            <a:avLst/>
+          </a:prstGeom>
+        </p:spPr>
+      </p:pic>
+      <p:sp>
+        <p:nvSpPr>
+          <p:cNvPr id="8" name="TextBox 7"/>
           <p:cNvSpPr txBox="1"/>
           <p:nvPr/>
         </p:nvSpPr>
         <p:spPr>
           <a:xfrm>
-            <a:off x="594360" y="1737360"/>
-            <a:ext cx="6766560" cy="4297680"/>
-          </a:xfrm>
-          <a:prstGeom prst="rect">
-            <a:avLst/>
-          </a:prstGeom>
-          <a:noFill/>
-        </p:spPr>
-        <p:txBody>
-          <a:bodyPr wrap="square">
-            <a:spAutoFit/>
-          </a:bodyPr>
-          <a:lstStyle/>
-          <a:p>
-            <a:pPr>
-              <a:spcAft>
-                <a:spcPts val="1000"/>
-              </a:spcAft>
-            </a:pPr>
-            <a:r>
-              <a:rPr sz="1500" b="1">
-                <a:solidFill>
-                  <a:srgbClr val="039855"/>
-                </a:solidFill>
-              </a:rPr>
-              <a:t>▸  </a:t>
-            </a:r>
-            <a:r>
-              <a:rPr sz="1500" b="0">
-                <a:solidFill>
-                  <a:srgbClr val="15241C"/>
-                </a:solidFill>
-                <a:latin typeface="Calibri"/>
-              </a:rPr>
-              <a:t>Di </a:t>
-            </a:r>
-            <a:r>
-              <a:rPr sz="1500" b="1">
-                <a:solidFill>
-                  <a:srgbClr val="15241C"/>
-                </a:solidFill>
-                <a:latin typeface="Calibri"/>
-              </a:rPr>
-              <a:t>atas form</a:t>
-            </a:r>
-            <a:r>
-              <a:rPr sz="1500" b="0">
-                <a:solidFill>
-                  <a:srgbClr val="15241C"/>
-                </a:solidFill>
-                <a:latin typeface="Calibri"/>
-              </a:rPr>
-              <a:t>, pengguna bisa bertanya tips </a:t>
-            </a:r>
-            <a:r>
-              <a:rPr sz="1500" b="1">
-                <a:solidFill>
-                  <a:srgbClr val="15241C"/>
-                </a:solidFill>
-                <a:latin typeface="Calibri"/>
-              </a:rPr>
-              <a:t>mencegah stunting &amp; gizi balita</a:t>
-            </a:r>
-            <a:r>
-              <a:rPr sz="1500" b="0">
-                <a:solidFill>
-                  <a:srgbClr val="15241C"/>
-                </a:solidFill>
-                <a:latin typeface="Calibri"/>
-              </a:rPr>
-              <a:t> — agar dapat ilmu, bukan hanya hasil prediksi.</a:t>
-            </a:r>
-          </a:p>
-          <a:p>
-            <a:pPr>
-              <a:spcAft>
-                <a:spcPts val="1000"/>
-              </a:spcAft>
-            </a:pPr>
-            <a:r>
-              <a:rPr sz="1500" b="1">
-                <a:solidFill>
-                  <a:srgbClr val="039855"/>
-                </a:solidFill>
-              </a:rPr>
-              <a:t>▸  </a:t>
-            </a:r>
-            <a:r>
-              <a:rPr sz="1500" b="0">
-                <a:solidFill>
-                  <a:srgbClr val="15241C"/>
-                </a:solidFill>
-                <a:latin typeface="Calibri"/>
-              </a:rPr>
-              <a:t>Berjalan </a:t>
-            </a:r>
-            <a:r>
-              <a:rPr sz="1500" b="1">
-                <a:solidFill>
-                  <a:srgbClr val="15241C"/>
-                </a:solidFill>
-                <a:latin typeface="Calibri"/>
-              </a:rPr>
-              <a:t>100% di perangkat</a:t>
-            </a:r>
-            <a:r>
-              <a:rPr sz="1500" b="0">
-                <a:solidFill>
-                  <a:srgbClr val="15241C"/>
-                </a:solidFill>
-                <a:latin typeface="Calibri"/>
-              </a:rPr>
-              <a:t> memakai basis pengetahuan terkurasi dari pedoman </a:t>
-            </a:r>
-            <a:r>
-              <a:rPr sz="1500" b="1">
-                <a:solidFill>
-                  <a:srgbClr val="15241C"/>
-                </a:solidFill>
-                <a:latin typeface="Calibri"/>
-              </a:rPr>
-              <a:t>WHO &amp; Kemenkes</a:t>
-            </a:r>
-            <a:r>
-              <a:rPr sz="1500" b="0">
-                <a:solidFill>
-                  <a:srgbClr val="15241C"/>
-                </a:solidFill>
-                <a:latin typeface="Calibri"/>
-              </a:rPr>
-              <a:t> — gratis, tanpa internet, tanpa biaya.</a:t>
-            </a:r>
-          </a:p>
-          <a:p>
-            <a:pPr>
-              <a:spcAft>
-                <a:spcPts val="1000"/>
-              </a:spcAft>
-            </a:pPr>
-            <a:r>
-              <a:rPr sz="1500" b="1">
-                <a:solidFill>
-                  <a:srgbClr val="039855"/>
-                </a:solidFill>
-              </a:rPr>
-              <a:t>▸  </a:t>
-            </a:r>
-            <a:r>
-              <a:rPr sz="1500" b="0">
-                <a:solidFill>
-                  <a:srgbClr val="15241C"/>
-                </a:solidFill>
-                <a:latin typeface="Calibri"/>
-              </a:rPr>
-              <a:t>Bersifat </a:t>
-            </a:r>
-            <a:r>
-              <a:rPr sz="1500" b="1">
-                <a:solidFill>
-                  <a:srgbClr val="15241C"/>
-                </a:solidFill>
-                <a:latin typeface="Calibri"/>
-              </a:rPr>
-              <a:t>edukasi, bukan diagnosis</a:t>
-            </a:r>
-            <a:r>
-              <a:rPr sz="1500" b="0">
-                <a:solidFill>
-                  <a:srgbClr val="15241C"/>
-                </a:solidFill>
-                <a:latin typeface="Calibri"/>
-              </a:rPr>
-              <a:t>; kondisi khusus diarahkan ke posyandu/dokter.</a:t>
-            </a:r>
-          </a:p>
-        </p:txBody>
-      </p:sp>
-      <p:sp>
-        <p:nvSpPr>
-          <p:cNvPr id="8" name="Rectangle 7"/>
-          <p:cNvSpPr/>
-          <p:nvPr/>
-        </p:nvSpPr>
-        <p:spPr>
-          <a:xfrm>
-            <a:off x="7589520" y="1737360"/>
-            <a:ext cx="3886200" cy="4297680"/>
-          </a:xfrm>
-          <a:prstGeom prst="rect">
-            <a:avLst/>
-          </a:prstGeom>
-          <a:solidFill>
-            <a:srgbClr val="EAF7F0"/>
-          </a:solidFill>
-          <a:ln>
-            <a:noFill/>
-          </a:ln>
-          <a:effectLst/>
-        </p:spPr>
-        <p:style>
-          <a:lnRef idx="1">
-            <a:schemeClr val="accent1"/>
-          </a:lnRef>
-          <a:fillRef idx="3">
-            <a:schemeClr val="accent1"/>
-          </a:fillRef>
-          <a:effectRef idx="2">
-            <a:schemeClr val="accent1"/>
-          </a:effectRef>
-          <a:fontRef idx="minor">
-            <a:schemeClr val="lt1"/>
-          </a:fontRef>
-        </p:style>
-        <p:txBody>
-          <a:bodyPr rtlCol="0" anchor="ctr"/>
-          <a:lstStyle/>
-          <a:p>
-            <a:pPr algn="ctr"/>
-          </a:p>
-        </p:txBody>
-      </p:sp>
-      <p:sp>
-        <p:nvSpPr>
-          <p:cNvPr id="9" name="Rectangle 8"/>
-          <p:cNvSpPr/>
-          <p:nvPr/>
-        </p:nvSpPr>
-        <p:spPr>
-          <a:xfrm>
-            <a:off x="7589520" y="1737360"/>
-            <a:ext cx="82296" cy="4297680"/>
-          </a:xfrm>
-          <a:prstGeom prst="rect">
-            <a:avLst/>
-          </a:prstGeom>
-          <a:solidFill>
-            <a:srgbClr val="039855"/>
-          </a:solidFill>
-          <a:ln>
-            <a:noFill/>
-          </a:ln>
-          <a:effectLst/>
-        </p:spPr>
-        <p:style>
-          <a:lnRef idx="1">
-            <a:schemeClr val="accent1"/>
-          </a:lnRef>
-          <a:fillRef idx="3">
-            <a:schemeClr val="accent1"/>
-          </a:fillRef>
-          <a:effectRef idx="2">
-            <a:schemeClr val="accent1"/>
-          </a:effectRef>
-          <a:fontRef idx="minor">
-            <a:schemeClr val="lt1"/>
-          </a:fontRef>
-        </p:style>
-        <p:txBody>
-          <a:bodyPr rtlCol="0" anchor="ctr"/>
-          <a:lstStyle/>
-          <a:p>
-            <a:pPr algn="ctr"/>
-          </a:p>
-        </p:txBody>
-      </p:sp>
-      <p:sp>
-        <p:nvSpPr>
-          <p:cNvPr id="10" name="TextBox 9"/>
-          <p:cNvSpPr txBox="1"/>
-          <p:nvPr/>
-        </p:nvSpPr>
-        <p:spPr>
-          <a:xfrm>
-            <a:off x="7790688" y="1847088"/>
-            <a:ext cx="3520440" cy="4096512"/>
+            <a:off x="548640" y="5989320"/>
+            <a:ext cx="11064240" cy="457200"/>
           </a:xfrm>
           <a:prstGeom prst="rect">
             <a:avLst/>
@@ -5568,83 +4325,19 @@
           </a:bodyPr>
           <a:lstStyle/>
           <a:p>
-            <a:pPr algn="l">
-              <a:spcAft>
-                <a:spcPts val="300"/>
-              </a:spcAft>
-            </a:pPr>
-            <a:r>
-              <a:rPr sz="1300" b="1" i="0">
-                <a:solidFill>
-                  <a:srgbClr val="039855"/>
-                </a:solidFill>
-                <a:latin typeface="Calibri"/>
-              </a:rPr>
-              <a:t>Kenapa pendekatan ini?</a:t>
-            </a:r>
-          </a:p>
-          <a:p>
-            <a:pPr algn="l">
-              <a:spcAft>
-                <a:spcPts val="300"/>
-              </a:spcAft>
-            </a:pPr>
-            <a:r>
-              <a:rPr sz="1150" b="0" i="0">
-                <a:solidFill>
-                  <a:srgbClr val="15241C"/>
-                </a:solidFill>
-                <a:latin typeface="Calibri"/>
-              </a:rPr>
-              <a:t>• Gratis &amp; tanpa API key (tidak perlu token berbayar).</a:t>
-            </a:r>
-          </a:p>
-          <a:p>
-            <a:pPr algn="l">
-              <a:spcAft>
-                <a:spcPts val="300"/>
-              </a:spcAft>
-            </a:pPr>
-            <a:r>
-              <a:rPr sz="1150" b="0" i="0">
-                <a:solidFill>
-                  <a:srgbClr val="15241C"/>
-                </a:solidFill>
-                <a:latin typeface="Calibri"/>
-              </a:rPr>
-              <a:t>• Privat — pertanyaan tidak dikirim ke server mana pun.</a:t>
-            </a:r>
-          </a:p>
-          <a:p>
-            <a:pPr algn="l">
-              <a:spcAft>
-                <a:spcPts val="300"/>
-              </a:spcAft>
-            </a:pPr>
-            <a:r>
-              <a:rPr sz="1150" b="0" i="0">
-                <a:solidFill>
-                  <a:srgbClr val="15241C"/>
-                </a:solidFill>
-                <a:latin typeface="Calibri"/>
-              </a:rPr>
-              <a:t>• Tidak mengarang — jawaban berasal dari materi yang sudah disusun.</a:t>
-            </a:r>
-          </a:p>
-          <a:p>
-            <a:pPr algn="l">
-              <a:spcAft>
-                <a:spcPts val="300"/>
-              </a:spcAft>
-            </a:pPr>
-            <a:r>
-              <a:rPr sz="1150" b="0" i="0">
-                <a:solidFill>
-                  <a:srgbClr val="15241C"/>
-                </a:solidFill>
-                <a:latin typeface="Calibri"/>
-              </a:rPr>
-              <a:t>• Mudah ditambah: cukup edit daftar topik di kode (±19 topik).</a:t>
+            <a:pPr algn="ctr">
+              <a:spcAft>
+                <a:spcPts val="600"/>
+              </a:spcAft>
+            </a:pPr>
+            <a:r>
+              <a:rPr sz="1300" b="0" i="1">
+                <a:solidFill>
+                  <a:srgbClr val="4B5563"/>
+                </a:solidFill>
+                <a:latin typeface="Calibri"/>
+              </a:rPr>
+              <a:t>Precision, recall, dan F1-score tiap kelas saat pengujian pada data uji nyata.</a:t>
             </a:r>
           </a:p>
         </p:txBody>
@@ -5833,7 +4526,7 @@
                 </a:solidFill>
                 <a:latin typeface="Calibri"/>
               </a:rPr>
-              <a:t>IMPLEMENTASI</a:t>
+              <a:t>HASIL</a:t>
             </a:r>
           </a:p>
         </p:txBody>
@@ -5866,27 +4559,51 @@
               </a:spcAft>
             </a:pPr>
             <a:r>
-              <a:rPr sz="2800" b="1" i="0">
+              <a:rPr sz="2700" b="1" i="0">
                 <a:solidFill>
                   <a:srgbClr val="05312A"/>
                 </a:solidFill>
                 <a:latin typeface="Calibri"/>
               </a:rPr>
-              <a:t>Demo &amp; deployment</a:t>
-            </a:r>
-          </a:p>
-        </p:txBody>
-      </p:sp>
-      <p:sp>
-        <p:nvSpPr>
-          <p:cNvPr id="7" name="TextBox 6"/>
+              <a:t>Benchmarking algoritma</a:t>
+            </a:r>
+          </a:p>
+        </p:txBody>
+      </p:sp>
+      <p:pic>
+        <p:nvPicPr>
+          <p:cNvPr id="7" name="Picture 6" descr="real_benchmark.png"/>
+          <p:cNvPicPr>
+            <a:picLocks noChangeAspect="1"/>
+          </p:cNvPicPr>
+          <p:nvPr/>
+        </p:nvPicPr>
+        <p:blipFill>
+          <a:blip r:embed="rId2"/>
+          <a:stretch>
+            <a:fillRect/>
+          </a:stretch>
+        </p:blipFill>
+        <p:spPr>
+          <a:xfrm>
+            <a:off x="2067695" y="1554480"/>
+            <a:ext cx="8056305" cy="4297680"/>
+          </a:xfrm>
+          <a:prstGeom prst="rect">
+            <a:avLst/>
+          </a:prstGeom>
+        </p:spPr>
+      </p:pic>
+      <p:sp>
+        <p:nvSpPr>
+          <p:cNvPr id="8" name="TextBox 7"/>
           <p:cNvSpPr txBox="1"/>
           <p:nvPr/>
         </p:nvSpPr>
         <p:spPr>
           <a:xfrm>
-            <a:off x="594360" y="1828800"/>
-            <a:ext cx="10881360" cy="2743200"/>
+            <a:off x="548640" y="5989320"/>
+            <a:ext cx="11064240" cy="457200"/>
           </a:xfrm>
           <a:prstGeom prst="rect">
             <a:avLst/>
@@ -5894,214 +4611,24 @@
           <a:noFill/>
         </p:spPr>
         <p:txBody>
-          <a:bodyPr wrap="square">
+          <a:bodyPr wrap="square" anchor="t">
             <a:spAutoFit/>
           </a:bodyPr>
           <a:lstStyle/>
           <a:p>
-            <a:pPr>
-              <a:spcAft>
-                <a:spcPts val="1000"/>
-              </a:spcAft>
-            </a:pPr>
-            <a:r>
-              <a:rPr sz="1700" b="1">
-                <a:solidFill>
-                  <a:srgbClr val="039855"/>
-                </a:solidFill>
-              </a:rPr>
-              <a:t>▸  </a:t>
-            </a:r>
-            <a:r>
-              <a:rPr sz="1700" b="0">
-                <a:solidFill>
-                  <a:srgbClr val="15241C"/>
-                </a:solidFill>
-                <a:latin typeface="Calibri"/>
-              </a:rPr>
-              <a:t>Live di </a:t>
-            </a:r>
-            <a:r>
-              <a:rPr sz="1700" b="1">
-                <a:solidFill>
-                  <a:srgbClr val="15241C"/>
-                </a:solidFill>
-                <a:latin typeface="Calibri"/>
-              </a:rPr>
-              <a:t>Cloudflare Pages</a:t>
-            </a:r>
-            <a:r>
-              <a:rPr sz="1700" b="0">
-                <a:solidFill>
-                  <a:srgbClr val="15241C"/>
-                </a:solidFill>
-                <a:latin typeface="Calibri"/>
-              </a:rPr>
-              <a:t> (statis, gratis, HTTPS otomatis).</a:t>
-            </a:r>
-          </a:p>
-          <a:p>
-            <a:pPr>
-              <a:spcAft>
-                <a:spcPts val="1000"/>
-              </a:spcAft>
-            </a:pPr>
-            <a:r>
-              <a:rPr sz="1700" b="1">
-                <a:solidFill>
-                  <a:srgbClr val="039855"/>
-                </a:solidFill>
-              </a:rPr>
-              <a:t>▸  </a:t>
-            </a:r>
-            <a:r>
-              <a:rPr sz="1700" b="0">
-                <a:solidFill>
-                  <a:srgbClr val="15241C"/>
-                </a:solidFill>
-                <a:latin typeface="Calibri"/>
-              </a:rPr>
-              <a:t>URL: </a:t>
-            </a:r>
-            <a:r>
-              <a:rPr sz="1700" b="1">
-                <a:solidFill>
-                  <a:srgbClr val="15241C"/>
-                </a:solidFill>
-                <a:latin typeface="Calibri"/>
-              </a:rPr>
-              <a:t>machinelearning-ai.pages.dev</a:t>
-            </a:r>
-          </a:p>
-          <a:p>
-            <a:pPr>
-              <a:spcAft>
-                <a:spcPts val="1000"/>
-              </a:spcAft>
-            </a:pPr>
-            <a:r>
-              <a:rPr sz="1700" b="1">
-                <a:solidFill>
-                  <a:srgbClr val="039855"/>
-                </a:solidFill>
-              </a:rPr>
-              <a:t>▸  </a:t>
-            </a:r>
-            <a:r>
-              <a:rPr sz="1700" b="0">
-                <a:solidFill>
-                  <a:srgbClr val="15241C"/>
-                </a:solidFill>
-                <a:latin typeface="Calibri"/>
-              </a:rPr>
-              <a:t>Build: Root = web · Build command = npm run build · Output = dist.</a:t>
-            </a:r>
-          </a:p>
-          <a:p>
-            <a:pPr>
-              <a:spcAft>
-                <a:spcPts val="1000"/>
-              </a:spcAft>
-            </a:pPr>
-            <a:r>
-              <a:rPr sz="1700" b="1">
-                <a:solidFill>
-                  <a:srgbClr val="039855"/>
-                </a:solidFill>
-              </a:rPr>
-              <a:t>▸  </a:t>
-            </a:r>
-            <a:r>
-              <a:rPr sz="1700" b="0">
-                <a:solidFill>
-                  <a:srgbClr val="15241C"/>
-                </a:solidFill>
-                <a:latin typeface="Calibri"/>
-              </a:rPr>
-              <a:t>Repositori: github.com/steffenkwik/machinelearning-ai</a:t>
-            </a:r>
-          </a:p>
-        </p:txBody>
-      </p:sp>
-      <p:sp>
-        <p:nvSpPr>
-          <p:cNvPr id="8" name="Rectangle 7"/>
-          <p:cNvSpPr/>
-          <p:nvPr/>
-        </p:nvSpPr>
-        <p:spPr>
-          <a:xfrm>
-            <a:off x="594360" y="4754880"/>
-            <a:ext cx="10881360" cy="1005840"/>
-          </a:xfrm>
-          <a:prstGeom prst="rect">
-            <a:avLst/>
-          </a:prstGeom>
-          <a:solidFill>
-            <a:srgbClr val="EAF7F0"/>
-          </a:solidFill>
-          <a:ln>
-            <a:noFill/>
-          </a:ln>
-          <a:effectLst/>
-        </p:spPr>
-        <p:style>
-          <a:lnRef idx="1">
-            <a:schemeClr val="accent1"/>
-          </a:lnRef>
-          <a:fillRef idx="3">
-            <a:schemeClr val="accent1"/>
-          </a:fillRef>
-          <a:effectRef idx="2">
-            <a:schemeClr val="accent1"/>
-          </a:effectRef>
-          <a:fontRef idx="minor">
-            <a:schemeClr val="lt1"/>
-          </a:fontRef>
-        </p:style>
-        <p:txBody>
-          <a:bodyPr rtlCol="0" anchor="ctr"/>
-          <a:lstStyle/>
-          <a:p>
-            <a:pPr algn="ctr"/>
-          </a:p>
-        </p:txBody>
-      </p:sp>
-      <p:sp>
-        <p:nvSpPr>
-          <p:cNvPr id="9" name="TextBox 8"/>
-          <p:cNvSpPr txBox="1"/>
-          <p:nvPr/>
-        </p:nvSpPr>
-        <p:spPr>
-          <a:xfrm>
-            <a:off x="777240" y="4937760"/>
-            <a:ext cx="10515600" cy="731520"/>
-          </a:xfrm>
-          <a:prstGeom prst="rect">
-            <a:avLst/>
-          </a:prstGeom>
-          <a:noFill/>
-        </p:spPr>
-        <p:txBody>
-          <a:bodyPr wrap="square" anchor="ctr">
-            <a:spAutoFit/>
-          </a:bodyPr>
-          <a:lstStyle/>
-          <a:p>
-            <a:pPr algn="l">
+            <a:pPr algn="ctr">
               <a:spcAft>
                 <a:spcPts val="600"/>
               </a:spcAft>
             </a:pPr>
             <a:r>
-              <a:rPr sz="1600" b="1" i="0">
-                <a:solidFill>
-                  <a:srgbClr val="05312A"/>
-                </a:solidFill>
-                <a:latin typeface="Calibri"/>
-              </a:rPr>
-              <a:t>Demo langsung: isi 7 faktor → tekan Analisis → hasil tampil seketika (offline).</a:t>
+              <a:rPr sz="1300" b="0" i="1">
+                <a:solidFill>
+                  <a:srgbClr val="4B5563"/>
+                </a:solidFill>
+                <a:latin typeface="Calibri"/>
+              </a:rPr>
+              <a:t>Random Forest (99,4%) mengungguli KNN, Decision Tree, Regresi Logistik, dan Naive Bayes.</a:t>
             </a:r>
           </a:p>
         </p:txBody>
@@ -6139,7 +4666,7 @@
             <a:avLst/>
           </a:prstGeom>
           <a:solidFill>
-            <a:srgbClr val="05312A"/>
+            <a:srgbClr val="FFFFFF"/>
           </a:solidFill>
           <a:ln>
             <a:noFill/>
@@ -6177,7 +4704,7 @@
         <p:spPr>
           <a:xfrm>
             <a:off x="0" y="0"/>
-            <a:ext cx="12191695" cy="164592"/>
+            <a:ext cx="201168" cy="6858000"/>
           </a:xfrm>
           <a:prstGeom prst="rect">
             <a:avLst/>
@@ -6214,14 +4741,58 @@
       </p:sp>
       <p:sp>
         <p:nvSpPr>
-          <p:cNvPr id="4" name="TextBox 3"/>
+          <p:cNvPr id="4" name="Rectangle 3"/>
+          <p:cNvSpPr/>
+          <p:nvPr/>
+        </p:nvSpPr>
+        <p:spPr>
+          <a:xfrm>
+            <a:off x="548640" y="457200"/>
+            <a:ext cx="548640" cy="82296"/>
+          </a:xfrm>
+          <a:prstGeom prst="rect">
+            <a:avLst/>
+          </a:prstGeom>
+          <a:solidFill>
+            <a:srgbClr val="6CE9A6"/>
+          </a:solidFill>
+          <a:ln>
+            <a:noFill/>
+          </a:ln>
+          <a:effectLst/>
+        </p:spPr>
+        <p:style>
+          <a:lnRef idx="1">
+            <a:schemeClr val="accent1"/>
+          </a:lnRef>
+          <a:fillRef idx="3">
+            <a:schemeClr val="accent1"/>
+          </a:fillRef>
+          <a:effectRef idx="2">
+            <a:schemeClr val="accent1"/>
+          </a:effectRef>
+          <a:fontRef idx="minor">
+            <a:schemeClr val="lt1"/>
+          </a:fontRef>
+        </p:style>
+        <p:txBody>
+          <a:bodyPr rtlCol="0" anchor="ctr"/>
+          <a:lstStyle/>
+          <a:p>
+            <a:pPr algn="ctr"/>
+          </a:p>
+        </p:txBody>
+      </p:sp>
+      <p:sp>
+        <p:nvSpPr>
+          <p:cNvPr id="5" name="TextBox 4"/>
           <p:cNvSpPr txBox="1"/>
           <p:nvPr/>
         </p:nvSpPr>
         <p:spPr>
           <a:xfrm>
-            <a:off x="822960" y="777240"/>
-            <a:ext cx="10515600" cy="548640"/>
+            <a:off x="548640" y="548640"/>
+            <a:ext cx="10515600" cy="365760"/>
           </a:xfrm>
           <a:prstGeom prst="rect">
             <a:avLst/>
@@ -6240,14 +4811,1049 @@
               </a:spcAft>
             </a:pPr>
             <a:r>
-              <a:rPr sz="1600" b="1" i="0">
-                <a:solidFill>
-                  <a:srgbClr val="6CE9A6"/>
-                </a:solidFill>
-                <a:latin typeface="Calibri"/>
-              </a:rPr>
-              <a:t>KESIMPULAN</a:t>
-            </a:r>
+              <a:rPr sz="1200" b="1" i="0">
+                <a:solidFill>
+                  <a:srgbClr val="039855"/>
+                </a:solidFill>
+                <a:latin typeface="Calibri"/>
+              </a:rPr>
+              <a:t>ARSITEKTUR</a:t>
+            </a:r>
+          </a:p>
+        </p:txBody>
+      </p:sp>
+      <p:sp>
+        <p:nvSpPr>
+          <p:cNvPr id="6" name="TextBox 5"/>
+          <p:cNvSpPr txBox="1"/>
+          <p:nvPr/>
+        </p:nvSpPr>
+        <p:spPr>
+          <a:xfrm>
+            <a:off x="548640" y="804672"/>
+            <a:ext cx="11155680" cy="914400"/>
+          </a:xfrm>
+          <a:prstGeom prst="rect">
+            <a:avLst/>
+          </a:prstGeom>
+          <a:noFill/>
+        </p:spPr>
+        <p:txBody>
+          <a:bodyPr wrap="square" anchor="t">
+            <a:spAutoFit/>
+          </a:bodyPr>
+          <a:lstStyle/>
+          <a:p>
+            <a:pPr algn="l">
+              <a:spcAft>
+                <a:spcPts val="600"/>
+              </a:spcAft>
+            </a:pPr>
+            <a:r>
+              <a:rPr sz="2700" b="1" i="0">
+                <a:solidFill>
+                  <a:srgbClr val="05312A"/>
+                </a:solidFill>
+                <a:latin typeface="Calibri"/>
+              </a:rPr>
+              <a:t>Arsitektur: inferensi di peramban</a:t>
+            </a:r>
+          </a:p>
+        </p:txBody>
+      </p:sp>
+      <p:sp>
+        <p:nvSpPr>
+          <p:cNvPr id="7" name="Rectangle 6"/>
+          <p:cNvSpPr/>
+          <p:nvPr/>
+        </p:nvSpPr>
+        <p:spPr>
+          <a:xfrm>
+            <a:off x="594360" y="1828800"/>
+            <a:ext cx="2606040" cy="1828800"/>
+          </a:xfrm>
+          <a:prstGeom prst="rect">
+            <a:avLst/>
+          </a:prstGeom>
+          <a:solidFill>
+            <a:srgbClr val="EAF7F0"/>
+          </a:solidFill>
+          <a:ln>
+            <a:noFill/>
+          </a:ln>
+          <a:effectLst/>
+        </p:spPr>
+        <p:style>
+          <a:lnRef idx="1">
+            <a:schemeClr val="accent1"/>
+          </a:lnRef>
+          <a:fillRef idx="3">
+            <a:schemeClr val="accent1"/>
+          </a:fillRef>
+          <a:effectRef idx="2">
+            <a:schemeClr val="accent1"/>
+          </a:effectRef>
+          <a:fontRef idx="minor">
+            <a:schemeClr val="lt1"/>
+          </a:fontRef>
+        </p:style>
+        <p:txBody>
+          <a:bodyPr rtlCol="0" anchor="ctr"/>
+          <a:lstStyle/>
+          <a:p>
+            <a:pPr algn="ctr"/>
+          </a:p>
+        </p:txBody>
+      </p:sp>
+      <p:sp>
+        <p:nvSpPr>
+          <p:cNvPr id="8" name="Rectangle 7"/>
+          <p:cNvSpPr/>
+          <p:nvPr/>
+        </p:nvSpPr>
+        <p:spPr>
+          <a:xfrm>
+            <a:off x="594360" y="1828800"/>
+            <a:ext cx="2606040" cy="82296"/>
+          </a:xfrm>
+          <a:prstGeom prst="rect">
+            <a:avLst/>
+          </a:prstGeom>
+          <a:solidFill>
+            <a:srgbClr val="039855"/>
+          </a:solidFill>
+          <a:ln>
+            <a:noFill/>
+          </a:ln>
+          <a:effectLst/>
+        </p:spPr>
+        <p:style>
+          <a:lnRef idx="1">
+            <a:schemeClr val="accent1"/>
+          </a:lnRef>
+          <a:fillRef idx="3">
+            <a:schemeClr val="accent1"/>
+          </a:fillRef>
+          <a:effectRef idx="2">
+            <a:schemeClr val="accent1"/>
+          </a:effectRef>
+          <a:fontRef idx="minor">
+            <a:schemeClr val="lt1"/>
+          </a:fontRef>
+        </p:style>
+        <p:txBody>
+          <a:bodyPr rtlCol="0" anchor="ctr"/>
+          <a:lstStyle/>
+          <a:p>
+            <a:pPr algn="ctr"/>
+          </a:p>
+        </p:txBody>
+      </p:sp>
+      <p:sp>
+        <p:nvSpPr>
+          <p:cNvPr id="9" name="TextBox 8"/>
+          <p:cNvSpPr txBox="1"/>
+          <p:nvPr/>
+        </p:nvSpPr>
+        <p:spPr>
+          <a:xfrm>
+            <a:off x="731520" y="2057400"/>
+            <a:ext cx="2331720" cy="548640"/>
+          </a:xfrm>
+          <a:prstGeom prst="rect">
+            <a:avLst/>
+          </a:prstGeom>
+          <a:noFill/>
+        </p:spPr>
+        <p:txBody>
+          <a:bodyPr wrap="square" anchor="t">
+            <a:spAutoFit/>
+          </a:bodyPr>
+          <a:lstStyle/>
+          <a:p>
+            <a:pPr algn="l">
+              <a:spcAft>
+                <a:spcPts val="600"/>
+              </a:spcAft>
+            </a:pPr>
+            <a:r>
+              <a:rPr sz="1500" b="1" i="0">
+                <a:solidFill>
+                  <a:srgbClr val="05312A"/>
+                </a:solidFill>
+                <a:latin typeface="Calibri"/>
+              </a:rPr>
+              <a:t>1. Isi data</a:t>
+            </a:r>
+          </a:p>
+        </p:txBody>
+      </p:sp>
+      <p:sp>
+        <p:nvSpPr>
+          <p:cNvPr id="10" name="TextBox 9"/>
+          <p:cNvSpPr txBox="1"/>
+          <p:nvPr/>
+        </p:nvSpPr>
+        <p:spPr>
+          <a:xfrm>
+            <a:off x="731520" y="2606040"/>
+            <a:ext cx="2331720" cy="914400"/>
+          </a:xfrm>
+          <a:prstGeom prst="rect">
+            <a:avLst/>
+          </a:prstGeom>
+          <a:noFill/>
+        </p:spPr>
+        <p:txBody>
+          <a:bodyPr wrap="square" anchor="t">
+            <a:spAutoFit/>
+          </a:bodyPr>
+          <a:lstStyle/>
+          <a:p>
+            <a:pPr algn="l">
+              <a:spcAft>
+                <a:spcPts val="600"/>
+              </a:spcAft>
+            </a:pPr>
+            <a:r>
+              <a:rPr sz="1200" b="0" i="0">
+                <a:solidFill>
+                  <a:srgbClr val="4B5563"/>
+                </a:solidFill>
+                <a:latin typeface="Calibri"/>
+              </a:rPr>
+              <a:t>Pengguna mengisi form di web.</a:t>
+            </a:r>
+          </a:p>
+        </p:txBody>
+      </p:sp>
+      <p:sp>
+        <p:nvSpPr>
+          <p:cNvPr id="11" name="Rectangle 10"/>
+          <p:cNvSpPr/>
+          <p:nvPr/>
+        </p:nvSpPr>
+        <p:spPr>
+          <a:xfrm>
+            <a:off x="3355848" y="1828800"/>
+            <a:ext cx="2606040" cy="1828800"/>
+          </a:xfrm>
+          <a:prstGeom prst="rect">
+            <a:avLst/>
+          </a:prstGeom>
+          <a:solidFill>
+            <a:srgbClr val="EAF7F0"/>
+          </a:solidFill>
+          <a:ln>
+            <a:noFill/>
+          </a:ln>
+          <a:effectLst/>
+        </p:spPr>
+        <p:style>
+          <a:lnRef idx="1">
+            <a:schemeClr val="accent1"/>
+          </a:lnRef>
+          <a:fillRef idx="3">
+            <a:schemeClr val="accent1"/>
+          </a:fillRef>
+          <a:effectRef idx="2">
+            <a:schemeClr val="accent1"/>
+          </a:effectRef>
+          <a:fontRef idx="minor">
+            <a:schemeClr val="lt1"/>
+          </a:fontRef>
+        </p:style>
+        <p:txBody>
+          <a:bodyPr rtlCol="0" anchor="ctr"/>
+          <a:lstStyle/>
+          <a:p>
+            <a:pPr algn="ctr"/>
+          </a:p>
+        </p:txBody>
+      </p:sp>
+      <p:sp>
+        <p:nvSpPr>
+          <p:cNvPr id="12" name="Rectangle 11"/>
+          <p:cNvSpPr/>
+          <p:nvPr/>
+        </p:nvSpPr>
+        <p:spPr>
+          <a:xfrm>
+            <a:off x="3355848" y="1828800"/>
+            <a:ext cx="2606040" cy="82296"/>
+          </a:xfrm>
+          <a:prstGeom prst="rect">
+            <a:avLst/>
+          </a:prstGeom>
+          <a:solidFill>
+            <a:srgbClr val="039855"/>
+          </a:solidFill>
+          <a:ln>
+            <a:noFill/>
+          </a:ln>
+          <a:effectLst/>
+        </p:spPr>
+        <p:style>
+          <a:lnRef idx="1">
+            <a:schemeClr val="accent1"/>
+          </a:lnRef>
+          <a:fillRef idx="3">
+            <a:schemeClr val="accent1"/>
+          </a:fillRef>
+          <a:effectRef idx="2">
+            <a:schemeClr val="accent1"/>
+          </a:effectRef>
+          <a:fontRef idx="minor">
+            <a:schemeClr val="lt1"/>
+          </a:fontRef>
+        </p:style>
+        <p:txBody>
+          <a:bodyPr rtlCol="0" anchor="ctr"/>
+          <a:lstStyle/>
+          <a:p>
+            <a:pPr algn="ctr"/>
+          </a:p>
+        </p:txBody>
+      </p:sp>
+      <p:sp>
+        <p:nvSpPr>
+          <p:cNvPr id="13" name="TextBox 12"/>
+          <p:cNvSpPr txBox="1"/>
+          <p:nvPr/>
+        </p:nvSpPr>
+        <p:spPr>
+          <a:xfrm>
+            <a:off x="3493008" y="2057400"/>
+            <a:ext cx="2331720" cy="548640"/>
+          </a:xfrm>
+          <a:prstGeom prst="rect">
+            <a:avLst/>
+          </a:prstGeom>
+          <a:noFill/>
+        </p:spPr>
+        <p:txBody>
+          <a:bodyPr wrap="square" anchor="t">
+            <a:spAutoFit/>
+          </a:bodyPr>
+          <a:lstStyle/>
+          <a:p>
+            <a:pPr algn="l">
+              <a:spcAft>
+                <a:spcPts val="600"/>
+              </a:spcAft>
+            </a:pPr>
+            <a:r>
+              <a:rPr sz="1500" b="1" i="0">
+                <a:solidFill>
+                  <a:srgbClr val="05312A"/>
+                </a:solidFill>
+                <a:latin typeface="Calibri"/>
+              </a:rPr>
+              <a:t>2. Web Worker</a:t>
+            </a:r>
+          </a:p>
+        </p:txBody>
+      </p:sp>
+      <p:sp>
+        <p:nvSpPr>
+          <p:cNvPr id="14" name="TextBox 13"/>
+          <p:cNvSpPr txBox="1"/>
+          <p:nvPr/>
+        </p:nvSpPr>
+        <p:spPr>
+          <a:xfrm>
+            <a:off x="3493008" y="2606040"/>
+            <a:ext cx="2331720" cy="914400"/>
+          </a:xfrm>
+          <a:prstGeom prst="rect">
+            <a:avLst/>
+          </a:prstGeom>
+          <a:noFill/>
+        </p:spPr>
+        <p:txBody>
+          <a:bodyPr wrap="square" anchor="t">
+            <a:spAutoFit/>
+          </a:bodyPr>
+          <a:lstStyle/>
+          <a:p>
+            <a:pPr algn="l">
+              <a:spcAft>
+                <a:spcPts val="600"/>
+              </a:spcAft>
+            </a:pPr>
+            <a:r>
+              <a:rPr sz="1200" b="0" i="0">
+                <a:solidFill>
+                  <a:srgbClr val="4B5563"/>
+                </a:solidFill>
+                <a:latin typeface="Calibri"/>
+              </a:rPr>
+              <a:t>Proses di pekerja latar (di perangkat).</a:t>
+            </a:r>
+          </a:p>
+        </p:txBody>
+      </p:sp>
+      <p:sp>
+        <p:nvSpPr>
+          <p:cNvPr id="15" name="Rectangle 14"/>
+          <p:cNvSpPr/>
+          <p:nvPr/>
+        </p:nvSpPr>
+        <p:spPr>
+          <a:xfrm>
+            <a:off x="6117336" y="1828800"/>
+            <a:ext cx="2606040" cy="1828800"/>
+          </a:xfrm>
+          <a:prstGeom prst="rect">
+            <a:avLst/>
+          </a:prstGeom>
+          <a:solidFill>
+            <a:srgbClr val="EAF7F0"/>
+          </a:solidFill>
+          <a:ln>
+            <a:noFill/>
+          </a:ln>
+          <a:effectLst/>
+        </p:spPr>
+        <p:style>
+          <a:lnRef idx="1">
+            <a:schemeClr val="accent1"/>
+          </a:lnRef>
+          <a:fillRef idx="3">
+            <a:schemeClr val="accent1"/>
+          </a:fillRef>
+          <a:effectRef idx="2">
+            <a:schemeClr val="accent1"/>
+          </a:effectRef>
+          <a:fontRef idx="minor">
+            <a:schemeClr val="lt1"/>
+          </a:fontRef>
+        </p:style>
+        <p:txBody>
+          <a:bodyPr rtlCol="0" anchor="ctr"/>
+          <a:lstStyle/>
+          <a:p>
+            <a:pPr algn="ctr"/>
+          </a:p>
+        </p:txBody>
+      </p:sp>
+      <p:sp>
+        <p:nvSpPr>
+          <p:cNvPr id="16" name="Rectangle 15"/>
+          <p:cNvSpPr/>
+          <p:nvPr/>
+        </p:nvSpPr>
+        <p:spPr>
+          <a:xfrm>
+            <a:off x="6117336" y="1828800"/>
+            <a:ext cx="2606040" cy="82296"/>
+          </a:xfrm>
+          <a:prstGeom prst="rect">
+            <a:avLst/>
+          </a:prstGeom>
+          <a:solidFill>
+            <a:srgbClr val="039855"/>
+          </a:solidFill>
+          <a:ln>
+            <a:noFill/>
+          </a:ln>
+          <a:effectLst/>
+        </p:spPr>
+        <p:style>
+          <a:lnRef idx="1">
+            <a:schemeClr val="accent1"/>
+          </a:lnRef>
+          <a:fillRef idx="3">
+            <a:schemeClr val="accent1"/>
+          </a:fillRef>
+          <a:effectRef idx="2">
+            <a:schemeClr val="accent1"/>
+          </a:effectRef>
+          <a:fontRef idx="minor">
+            <a:schemeClr val="lt1"/>
+          </a:fontRef>
+        </p:style>
+        <p:txBody>
+          <a:bodyPr rtlCol="0" anchor="ctr"/>
+          <a:lstStyle/>
+          <a:p>
+            <a:pPr algn="ctr"/>
+          </a:p>
+        </p:txBody>
+      </p:sp>
+      <p:sp>
+        <p:nvSpPr>
+          <p:cNvPr id="17" name="TextBox 16"/>
+          <p:cNvSpPr txBox="1"/>
+          <p:nvPr/>
+        </p:nvSpPr>
+        <p:spPr>
+          <a:xfrm>
+            <a:off x="6254496" y="2057400"/>
+            <a:ext cx="2331720" cy="548640"/>
+          </a:xfrm>
+          <a:prstGeom prst="rect">
+            <a:avLst/>
+          </a:prstGeom>
+          <a:noFill/>
+        </p:spPr>
+        <p:txBody>
+          <a:bodyPr wrap="square" anchor="t">
+            <a:spAutoFit/>
+          </a:bodyPr>
+          <a:lstStyle/>
+          <a:p>
+            <a:pPr algn="l">
+              <a:spcAft>
+                <a:spcPts val="600"/>
+              </a:spcAft>
+            </a:pPr>
+            <a:r>
+              <a:rPr sz="1500" b="1" i="0">
+                <a:solidFill>
+                  <a:srgbClr val="05312A"/>
+                </a:solidFill>
+                <a:latin typeface="Calibri"/>
+              </a:rPr>
+              <a:t>3. Random Forest</a:t>
+            </a:r>
+          </a:p>
+        </p:txBody>
+      </p:sp>
+      <p:sp>
+        <p:nvSpPr>
+          <p:cNvPr id="18" name="TextBox 17"/>
+          <p:cNvSpPr txBox="1"/>
+          <p:nvPr/>
+        </p:nvSpPr>
+        <p:spPr>
+          <a:xfrm>
+            <a:off x="6254496" y="2606040"/>
+            <a:ext cx="2331720" cy="914400"/>
+          </a:xfrm>
+          <a:prstGeom prst="rect">
+            <a:avLst/>
+          </a:prstGeom>
+          <a:noFill/>
+        </p:spPr>
+        <p:txBody>
+          <a:bodyPr wrap="square" anchor="t">
+            <a:spAutoFit/>
+          </a:bodyPr>
+          <a:lstStyle/>
+          <a:p>
+            <a:pPr algn="l">
+              <a:spcAft>
+                <a:spcPts val="600"/>
+              </a:spcAft>
+            </a:pPr>
+            <a:r>
+              <a:rPr sz="1200" b="0" i="0">
+                <a:solidFill>
+                  <a:srgbClr val="4B5563"/>
+                </a:solidFill>
+                <a:latin typeface="Calibri"/>
+              </a:rPr>
+              <a:t>Model ONNX menghitung dalam mikrodetik.</a:t>
+            </a:r>
+          </a:p>
+        </p:txBody>
+      </p:sp>
+      <p:sp>
+        <p:nvSpPr>
+          <p:cNvPr id="19" name="Rectangle 18"/>
+          <p:cNvSpPr/>
+          <p:nvPr/>
+        </p:nvSpPr>
+        <p:spPr>
+          <a:xfrm>
+            <a:off x="8878824" y="1828800"/>
+            <a:ext cx="2606040" cy="1828800"/>
+          </a:xfrm>
+          <a:prstGeom prst="rect">
+            <a:avLst/>
+          </a:prstGeom>
+          <a:solidFill>
+            <a:srgbClr val="EAF7F0"/>
+          </a:solidFill>
+          <a:ln>
+            <a:noFill/>
+          </a:ln>
+          <a:effectLst/>
+        </p:spPr>
+        <p:style>
+          <a:lnRef idx="1">
+            <a:schemeClr val="accent1"/>
+          </a:lnRef>
+          <a:fillRef idx="3">
+            <a:schemeClr val="accent1"/>
+          </a:fillRef>
+          <a:effectRef idx="2">
+            <a:schemeClr val="accent1"/>
+          </a:effectRef>
+          <a:fontRef idx="minor">
+            <a:schemeClr val="lt1"/>
+          </a:fontRef>
+        </p:style>
+        <p:txBody>
+          <a:bodyPr rtlCol="0" anchor="ctr"/>
+          <a:lstStyle/>
+          <a:p>
+            <a:pPr algn="ctr"/>
+          </a:p>
+        </p:txBody>
+      </p:sp>
+      <p:sp>
+        <p:nvSpPr>
+          <p:cNvPr id="20" name="Rectangle 19"/>
+          <p:cNvSpPr/>
+          <p:nvPr/>
+        </p:nvSpPr>
+        <p:spPr>
+          <a:xfrm>
+            <a:off x="8878824" y="1828800"/>
+            <a:ext cx="2606040" cy="82296"/>
+          </a:xfrm>
+          <a:prstGeom prst="rect">
+            <a:avLst/>
+          </a:prstGeom>
+          <a:solidFill>
+            <a:srgbClr val="039855"/>
+          </a:solidFill>
+          <a:ln>
+            <a:noFill/>
+          </a:ln>
+          <a:effectLst/>
+        </p:spPr>
+        <p:style>
+          <a:lnRef idx="1">
+            <a:schemeClr val="accent1"/>
+          </a:lnRef>
+          <a:fillRef idx="3">
+            <a:schemeClr val="accent1"/>
+          </a:fillRef>
+          <a:effectRef idx="2">
+            <a:schemeClr val="accent1"/>
+          </a:effectRef>
+          <a:fontRef idx="minor">
+            <a:schemeClr val="lt1"/>
+          </a:fontRef>
+        </p:style>
+        <p:txBody>
+          <a:bodyPr rtlCol="0" anchor="ctr"/>
+          <a:lstStyle/>
+          <a:p>
+            <a:pPr algn="ctr"/>
+          </a:p>
+        </p:txBody>
+      </p:sp>
+      <p:sp>
+        <p:nvSpPr>
+          <p:cNvPr id="21" name="TextBox 20"/>
+          <p:cNvSpPr txBox="1"/>
+          <p:nvPr/>
+        </p:nvSpPr>
+        <p:spPr>
+          <a:xfrm>
+            <a:off x="9015984" y="2057400"/>
+            <a:ext cx="2331720" cy="548640"/>
+          </a:xfrm>
+          <a:prstGeom prst="rect">
+            <a:avLst/>
+          </a:prstGeom>
+          <a:noFill/>
+        </p:spPr>
+        <p:txBody>
+          <a:bodyPr wrap="square" anchor="t">
+            <a:spAutoFit/>
+          </a:bodyPr>
+          <a:lstStyle/>
+          <a:p>
+            <a:pPr algn="l">
+              <a:spcAft>
+                <a:spcPts val="600"/>
+              </a:spcAft>
+            </a:pPr>
+            <a:r>
+              <a:rPr sz="1500" b="1" i="0">
+                <a:solidFill>
+                  <a:srgbClr val="05312A"/>
+                </a:solidFill>
+                <a:latin typeface="Calibri"/>
+              </a:rPr>
+              <a:t>4. Hasil</a:t>
+            </a:r>
+          </a:p>
+        </p:txBody>
+      </p:sp>
+      <p:sp>
+        <p:nvSpPr>
+          <p:cNvPr id="22" name="TextBox 21"/>
+          <p:cNvSpPr txBox="1"/>
+          <p:nvPr/>
+        </p:nvSpPr>
+        <p:spPr>
+          <a:xfrm>
+            <a:off x="9015984" y="2606040"/>
+            <a:ext cx="2331720" cy="914400"/>
+          </a:xfrm>
+          <a:prstGeom prst="rect">
+            <a:avLst/>
+          </a:prstGeom>
+          <a:noFill/>
+        </p:spPr>
+        <p:txBody>
+          <a:bodyPr wrap="square" anchor="t">
+            <a:spAutoFit/>
+          </a:bodyPr>
+          <a:lstStyle/>
+          <a:p>
+            <a:pPr algn="l">
+              <a:spcAft>
+                <a:spcPts val="600"/>
+              </a:spcAft>
+            </a:pPr>
+            <a:r>
+              <a:rPr sz="1200" b="0" i="0">
+                <a:solidFill>
+                  <a:srgbClr val="4B5563"/>
+                </a:solidFill>
+                <a:latin typeface="Calibri"/>
+              </a:rPr>
+              <a:t>Status + keyakinan + rekomendasi.</a:t>
+            </a:r>
+          </a:p>
+        </p:txBody>
+      </p:sp>
+      <p:sp>
+        <p:nvSpPr>
+          <p:cNvPr id="23" name="Rectangle 22"/>
+          <p:cNvSpPr/>
+          <p:nvPr/>
+        </p:nvSpPr>
+        <p:spPr>
+          <a:xfrm>
+            <a:off x="594360" y="4069080"/>
+            <a:ext cx="10881360" cy="1371600"/>
+          </a:xfrm>
+          <a:prstGeom prst="rect">
+            <a:avLst/>
+          </a:prstGeom>
+          <a:solidFill>
+            <a:srgbClr val="EAF7F0"/>
+          </a:solidFill>
+          <a:ln>
+            <a:noFill/>
+          </a:ln>
+          <a:effectLst/>
+        </p:spPr>
+        <p:style>
+          <a:lnRef idx="1">
+            <a:schemeClr val="accent1"/>
+          </a:lnRef>
+          <a:fillRef idx="3">
+            <a:schemeClr val="accent1"/>
+          </a:fillRef>
+          <a:effectRef idx="2">
+            <a:schemeClr val="accent1"/>
+          </a:effectRef>
+          <a:fontRef idx="minor">
+            <a:schemeClr val="lt1"/>
+          </a:fontRef>
+        </p:style>
+        <p:txBody>
+          <a:bodyPr rtlCol="0" anchor="ctr"/>
+          <a:lstStyle/>
+          <a:p>
+            <a:pPr algn="ctr"/>
+          </a:p>
+        </p:txBody>
+      </p:sp>
+      <p:sp>
+        <p:nvSpPr>
+          <p:cNvPr id="24" name="Rectangle 23"/>
+          <p:cNvSpPr/>
+          <p:nvPr/>
+        </p:nvSpPr>
+        <p:spPr>
+          <a:xfrm>
+            <a:off x="594360" y="4069080"/>
+            <a:ext cx="82296" cy="1371600"/>
+          </a:xfrm>
+          <a:prstGeom prst="rect">
+            <a:avLst/>
+          </a:prstGeom>
+          <a:solidFill>
+            <a:srgbClr val="039855"/>
+          </a:solidFill>
+          <a:ln>
+            <a:noFill/>
+          </a:ln>
+          <a:effectLst/>
+        </p:spPr>
+        <p:style>
+          <a:lnRef idx="1">
+            <a:schemeClr val="accent1"/>
+          </a:lnRef>
+          <a:fillRef idx="3">
+            <a:schemeClr val="accent1"/>
+          </a:fillRef>
+          <a:effectRef idx="2">
+            <a:schemeClr val="accent1"/>
+          </a:effectRef>
+          <a:fontRef idx="minor">
+            <a:schemeClr val="lt1"/>
+          </a:fontRef>
+        </p:style>
+        <p:txBody>
+          <a:bodyPr rtlCol="0" anchor="ctr"/>
+          <a:lstStyle/>
+          <a:p>
+            <a:pPr algn="ctr"/>
+          </a:p>
+        </p:txBody>
+      </p:sp>
+      <p:sp>
+        <p:nvSpPr>
+          <p:cNvPr id="25" name="TextBox 24"/>
+          <p:cNvSpPr txBox="1"/>
+          <p:nvPr/>
+        </p:nvSpPr>
+        <p:spPr>
+          <a:xfrm>
+            <a:off x="795528" y="4178808"/>
+            <a:ext cx="10515600" cy="1170432"/>
+          </a:xfrm>
+          <a:prstGeom prst="rect">
+            <a:avLst/>
+          </a:prstGeom>
+          <a:noFill/>
+        </p:spPr>
+        <p:txBody>
+          <a:bodyPr wrap="square" anchor="t">
+            <a:spAutoFit/>
+          </a:bodyPr>
+          <a:lstStyle/>
+          <a:p>
+            <a:pPr algn="l">
+              <a:spcAft>
+                <a:spcPts val="300"/>
+              </a:spcAft>
+            </a:pPr>
+            <a:r>
+              <a:rPr sz="1300" b="1" i="0">
+                <a:solidFill>
+                  <a:srgbClr val="039855"/>
+                </a:solidFill>
+                <a:latin typeface="Calibri"/>
+              </a:rPr>
+              <a:t>Teknologi</a:t>
+            </a:r>
+          </a:p>
+          <a:p>
+            <a:pPr algn="l">
+              <a:spcAft>
+                <a:spcPts val="300"/>
+              </a:spcAft>
+            </a:pPr>
+            <a:r>
+              <a:rPr sz="1150" b="0" i="0">
+                <a:solidFill>
+                  <a:srgbClr val="15241C"/>
+                </a:solidFill>
+                <a:latin typeface="Calibri"/>
+              </a:rPr>
+              <a:t>React + Vite + Tailwind (tampilan) · model dikonversi ke ONNX · ONNX Runtime Web (WASM) menjalankan model di peramban · Web Worker agar UI tidak macet.</a:t>
+            </a:r>
+          </a:p>
+        </p:txBody>
+      </p:sp>
+      <p:sp>
+        <p:nvSpPr>
+          <p:cNvPr id="26" name="TextBox 25"/>
+          <p:cNvSpPr txBox="1"/>
+          <p:nvPr/>
+        </p:nvSpPr>
+        <p:spPr>
+          <a:xfrm>
+            <a:off x="594360" y="5623560"/>
+            <a:ext cx="10972800" cy="457200"/>
+          </a:xfrm>
+          <a:prstGeom prst="rect">
+            <a:avLst/>
+          </a:prstGeom>
+          <a:noFill/>
+        </p:spPr>
+        <p:txBody>
+          <a:bodyPr wrap="square" anchor="t">
+            <a:spAutoFit/>
+          </a:bodyPr>
+          <a:lstStyle/>
+          <a:p>
+            <a:pPr algn="l">
+              <a:spcAft>
+                <a:spcPts val="600"/>
+              </a:spcAft>
+            </a:pPr>
+            <a:r>
+              <a:rPr sz="1300" b="0" i="1">
+                <a:solidFill>
+                  <a:srgbClr val="4B5563"/>
+                </a:solidFill>
+                <a:latin typeface="Calibri"/>
+              </a:rPr>
+              <a:t>Tanpa server, gratis, bisa offline, dan data tidak dikirim ke mana pun.</a:t>
+            </a:r>
+          </a:p>
+        </p:txBody>
+      </p:sp>
+    </p:spTree>
+  </p:cSld>
+  <p:clrMapOvr>
+    <a:masterClrMapping/>
+  </p:clrMapOvr>
+</p:sld>
+</file>
+
+<file path=ppt/slides/slide15.xml><?xml version="1.0" encoding="utf-8"?>
+<p:sld xmlns:a="http://schemas.openxmlformats.org/drawingml/2006/main" xmlns:p="http://schemas.openxmlformats.org/presentationml/2006/main" xmlns:r="http://schemas.openxmlformats.org/officeDocument/2006/relationships">
+  <p:cSld>
+    <p:spTree>
+      <p:nvGrpSpPr>
+        <p:cNvPr id="1" name=""/>
+        <p:cNvGrpSpPr/>
+        <p:nvPr/>
+      </p:nvGrpSpPr>
+      <p:grpSpPr/>
+      <p:sp>
+        <p:nvSpPr>
+          <p:cNvPr id="2" name="Rectangle 1"/>
+          <p:cNvSpPr/>
+          <p:nvPr/>
+        </p:nvSpPr>
+        <p:spPr>
+          <a:xfrm>
+            <a:off x="0" y="0"/>
+            <a:ext cx="12191695" cy="6858000"/>
+          </a:xfrm>
+          <a:prstGeom prst="rect">
+            <a:avLst/>
+          </a:prstGeom>
+          <a:solidFill>
+            <a:srgbClr val="FFFFFF"/>
+          </a:solidFill>
+          <a:ln>
+            <a:noFill/>
+          </a:ln>
+          <a:effectLst/>
+        </p:spPr>
+        <p:style>
+          <a:lnRef idx="1">
+            <a:schemeClr val="accent1"/>
+          </a:lnRef>
+          <a:fillRef idx="3">
+            <a:schemeClr val="accent1"/>
+          </a:fillRef>
+          <a:effectRef idx="2">
+            <a:schemeClr val="accent1"/>
+          </a:effectRef>
+          <a:fontRef idx="minor">
+            <a:schemeClr val="lt1"/>
+          </a:fontRef>
+        </p:style>
+        <p:txBody>
+          <a:bodyPr rtlCol="0" anchor="ctr"/>
+          <a:lstStyle/>
+          <a:p>
+            <a:pPr algn="ctr"/>
+          </a:p>
+        </p:txBody>
+      </p:sp>
+      <p:sp>
+        <p:nvSpPr>
+          <p:cNvPr id="3" name="Rectangle 2"/>
+          <p:cNvSpPr/>
+          <p:nvPr/>
+        </p:nvSpPr>
+        <p:spPr>
+          <a:xfrm>
+            <a:off x="0" y="0"/>
+            <a:ext cx="201168" cy="6858000"/>
+          </a:xfrm>
+          <a:prstGeom prst="rect">
+            <a:avLst/>
+          </a:prstGeom>
+          <a:solidFill>
+            <a:srgbClr val="039855"/>
+          </a:solidFill>
+          <a:ln>
+            <a:noFill/>
+          </a:ln>
+          <a:effectLst/>
+        </p:spPr>
+        <p:style>
+          <a:lnRef idx="1">
+            <a:schemeClr val="accent1"/>
+          </a:lnRef>
+          <a:fillRef idx="3">
+            <a:schemeClr val="accent1"/>
+          </a:fillRef>
+          <a:effectRef idx="2">
+            <a:schemeClr val="accent1"/>
+          </a:effectRef>
+          <a:fontRef idx="minor">
+            <a:schemeClr val="lt1"/>
+          </a:fontRef>
+        </p:style>
+        <p:txBody>
+          <a:bodyPr rtlCol="0" anchor="ctr"/>
+          <a:lstStyle/>
+          <a:p>
+            <a:pPr algn="ctr"/>
+          </a:p>
+        </p:txBody>
+      </p:sp>
+      <p:sp>
+        <p:nvSpPr>
+          <p:cNvPr id="4" name="Rectangle 3"/>
+          <p:cNvSpPr/>
+          <p:nvPr/>
+        </p:nvSpPr>
+        <p:spPr>
+          <a:xfrm>
+            <a:off x="548640" y="457200"/>
+            <a:ext cx="548640" cy="82296"/>
+          </a:xfrm>
+          <a:prstGeom prst="rect">
+            <a:avLst/>
+          </a:prstGeom>
+          <a:solidFill>
+            <a:srgbClr val="6CE9A6"/>
+          </a:solidFill>
+          <a:ln>
+            <a:noFill/>
+          </a:ln>
+          <a:effectLst/>
+        </p:spPr>
+        <p:style>
+          <a:lnRef idx="1">
+            <a:schemeClr val="accent1"/>
+          </a:lnRef>
+          <a:fillRef idx="3">
+            <a:schemeClr val="accent1"/>
+          </a:fillRef>
+          <a:effectRef idx="2">
+            <a:schemeClr val="accent1"/>
+          </a:effectRef>
+          <a:fontRef idx="minor">
+            <a:schemeClr val="lt1"/>
+          </a:fontRef>
+        </p:style>
+        <p:txBody>
+          <a:bodyPr rtlCol="0" anchor="ctr"/>
+          <a:lstStyle/>
+          <a:p>
+            <a:pPr algn="ctr"/>
           </a:p>
         </p:txBody>
       </p:sp>
@@ -6259,8 +5865,86 @@
         </p:nvSpPr>
         <p:spPr>
           <a:xfrm>
-            <a:off x="822960" y="1554480"/>
-            <a:ext cx="10515600" cy="3291840"/>
+            <a:off x="548640" y="548640"/>
+            <a:ext cx="10515600" cy="365760"/>
+          </a:xfrm>
+          <a:prstGeom prst="rect">
+            <a:avLst/>
+          </a:prstGeom>
+          <a:noFill/>
+        </p:spPr>
+        <p:txBody>
+          <a:bodyPr wrap="square" anchor="t">
+            <a:spAutoFit/>
+          </a:bodyPr>
+          <a:lstStyle/>
+          <a:p>
+            <a:pPr algn="l">
+              <a:spcAft>
+                <a:spcPts val="600"/>
+              </a:spcAft>
+            </a:pPr>
+            <a:r>
+              <a:rPr sz="1200" b="1" i="0">
+                <a:solidFill>
+                  <a:srgbClr val="039855"/>
+                </a:solidFill>
+                <a:latin typeface="Calibri"/>
+              </a:rPr>
+              <a:t>FITUR TAMBAHAN</a:t>
+            </a:r>
+          </a:p>
+        </p:txBody>
+      </p:sp>
+      <p:sp>
+        <p:nvSpPr>
+          <p:cNvPr id="6" name="TextBox 5"/>
+          <p:cNvSpPr txBox="1"/>
+          <p:nvPr/>
+        </p:nvSpPr>
+        <p:spPr>
+          <a:xfrm>
+            <a:off x="548640" y="804672"/>
+            <a:ext cx="11155680" cy="914400"/>
+          </a:xfrm>
+          <a:prstGeom prst="rect">
+            <a:avLst/>
+          </a:prstGeom>
+          <a:noFill/>
+        </p:spPr>
+        <p:txBody>
+          <a:bodyPr wrap="square" anchor="t">
+            <a:spAutoFit/>
+          </a:bodyPr>
+          <a:lstStyle/>
+          <a:p>
+            <a:pPr algn="l">
+              <a:spcAft>
+                <a:spcPts val="600"/>
+              </a:spcAft>
+            </a:pPr>
+            <a:r>
+              <a:rPr sz="2700" b="1" i="0">
+                <a:solidFill>
+                  <a:srgbClr val="05312A"/>
+                </a:solidFill>
+                <a:latin typeface="Calibri"/>
+              </a:rPr>
+              <a:t>Asisten edukasi stunting (chat)</a:t>
+            </a:r>
+          </a:p>
+        </p:txBody>
+      </p:sp>
+      <p:sp>
+        <p:nvSpPr>
+          <p:cNvPr id="7" name="TextBox 6"/>
+          <p:cNvSpPr txBox="1"/>
+          <p:nvPr/>
+        </p:nvSpPr>
+        <p:spPr>
+          <a:xfrm>
+            <a:off x="594360" y="1828800"/>
+            <a:ext cx="10881360" cy="3200400"/>
           </a:xfrm>
           <a:prstGeom prst="rect">
             <a:avLst/>
@@ -6275,11 +5959,762 @@
           <a:p>
             <a:pPr>
               <a:spcAft>
+                <a:spcPts val="1000"/>
+              </a:spcAft>
+            </a:pPr>
+            <a:r>
+              <a:rPr sz="1800" b="1">
+                <a:solidFill>
+                  <a:srgbClr val="039855"/>
+                </a:solidFill>
+              </a:rPr>
+              <a:t>▸  </a:t>
+            </a:r>
+            <a:r>
+              <a:rPr sz="1800" b="0">
+                <a:solidFill>
+                  <a:srgbClr val="15241C"/>
+                </a:solidFill>
+                <a:latin typeface="Calibri"/>
+              </a:rPr>
+              <a:t>Pengguna bisa bertanya tips </a:t>
+            </a:r>
+            <a:r>
+              <a:rPr sz="1800" b="1">
+                <a:solidFill>
+                  <a:srgbClr val="15241C"/>
+                </a:solidFill>
+                <a:latin typeface="Calibri"/>
+              </a:rPr>
+              <a:t>mencegah stunting &amp; gizi balita</a:t>
+            </a:r>
+            <a:r>
+              <a:rPr sz="1800" b="0">
+                <a:solidFill>
+                  <a:srgbClr val="15241C"/>
+                </a:solidFill>
+                <a:latin typeface="Calibri"/>
+              </a:rPr>
+              <a:t>.</a:t>
+            </a:r>
+          </a:p>
+          <a:p>
+            <a:pPr>
+              <a:spcAft>
+                <a:spcPts val="1000"/>
+              </a:spcAft>
+            </a:pPr>
+            <a:r>
+              <a:rPr sz="1800" b="1">
+                <a:solidFill>
+                  <a:srgbClr val="039855"/>
+                </a:solidFill>
+              </a:rPr>
+              <a:t>▸  </a:t>
+            </a:r>
+            <a:r>
+              <a:rPr sz="1800" b="0">
+                <a:solidFill>
+                  <a:srgbClr val="15241C"/>
+                </a:solidFill>
+                <a:latin typeface="Calibri"/>
+              </a:rPr>
+              <a:t>Ditenagai </a:t>
+            </a:r>
+            <a:r>
+              <a:rPr sz="1800" b="1">
+                <a:solidFill>
+                  <a:srgbClr val="15241C"/>
+                </a:solidFill>
+                <a:latin typeface="Calibri"/>
+              </a:rPr>
+              <a:t>LLM gratis</a:t>
+            </a:r>
+            <a:r>
+              <a:rPr sz="1800" b="0">
+                <a:solidFill>
+                  <a:srgbClr val="15241C"/>
+                </a:solidFill>
+                <a:latin typeface="Calibri"/>
+              </a:rPr>
+              <a:t> (tanpa biaya/token), dengan cadangan basis pengetahuan lokal.</a:t>
+            </a:r>
+          </a:p>
+          <a:p>
+            <a:pPr>
+              <a:spcAft>
+                <a:spcPts val="1000"/>
+              </a:spcAft>
+            </a:pPr>
+            <a:r>
+              <a:rPr sz="1800" b="1">
+                <a:solidFill>
+                  <a:srgbClr val="039855"/>
+                </a:solidFill>
+              </a:rPr>
+              <a:t>▸  </a:t>
+            </a:r>
+            <a:r>
+              <a:rPr sz="1800" b="0">
+                <a:solidFill>
+                  <a:srgbClr val="15241C"/>
+                </a:solidFill>
+                <a:latin typeface="Calibri"/>
+              </a:rPr>
+              <a:t>Bersifat </a:t>
+            </a:r>
+            <a:r>
+              <a:rPr sz="1800" b="1">
+                <a:solidFill>
+                  <a:srgbClr val="15241C"/>
+                </a:solidFill>
+                <a:latin typeface="Calibri"/>
+              </a:rPr>
+              <a:t>edukasi, bukan diagnosis</a:t>
+            </a:r>
+            <a:r>
+              <a:rPr sz="1800" b="0">
+                <a:solidFill>
+                  <a:srgbClr val="15241C"/>
+                </a:solidFill>
+                <a:latin typeface="Calibri"/>
+              </a:rPr>
+              <a:t>; kondisi khusus diarahkan ke posyandu/dokter.</a:t>
+            </a:r>
+          </a:p>
+        </p:txBody>
+      </p:sp>
+    </p:spTree>
+  </p:cSld>
+  <p:clrMapOvr>
+    <a:masterClrMapping/>
+  </p:clrMapOvr>
+</p:sld>
+</file>
+
+<file path=ppt/slides/slide16.xml><?xml version="1.0" encoding="utf-8"?>
+<p:sld xmlns:a="http://schemas.openxmlformats.org/drawingml/2006/main" xmlns:p="http://schemas.openxmlformats.org/presentationml/2006/main" xmlns:r="http://schemas.openxmlformats.org/officeDocument/2006/relationships">
+  <p:cSld>
+    <p:spTree>
+      <p:nvGrpSpPr>
+        <p:cNvPr id="1" name=""/>
+        <p:cNvGrpSpPr/>
+        <p:nvPr/>
+      </p:nvGrpSpPr>
+      <p:grpSpPr/>
+      <p:sp>
+        <p:nvSpPr>
+          <p:cNvPr id="2" name="Rectangle 1"/>
+          <p:cNvSpPr/>
+          <p:nvPr/>
+        </p:nvSpPr>
+        <p:spPr>
+          <a:xfrm>
+            <a:off x="0" y="0"/>
+            <a:ext cx="12191695" cy="6858000"/>
+          </a:xfrm>
+          <a:prstGeom prst="rect">
+            <a:avLst/>
+          </a:prstGeom>
+          <a:solidFill>
+            <a:srgbClr val="FFFFFF"/>
+          </a:solidFill>
+          <a:ln>
+            <a:noFill/>
+          </a:ln>
+          <a:effectLst/>
+        </p:spPr>
+        <p:style>
+          <a:lnRef idx="1">
+            <a:schemeClr val="accent1"/>
+          </a:lnRef>
+          <a:fillRef idx="3">
+            <a:schemeClr val="accent1"/>
+          </a:fillRef>
+          <a:effectRef idx="2">
+            <a:schemeClr val="accent1"/>
+          </a:effectRef>
+          <a:fontRef idx="minor">
+            <a:schemeClr val="lt1"/>
+          </a:fontRef>
+        </p:style>
+        <p:txBody>
+          <a:bodyPr rtlCol="0" anchor="ctr"/>
+          <a:lstStyle/>
+          <a:p>
+            <a:pPr algn="ctr"/>
+          </a:p>
+        </p:txBody>
+      </p:sp>
+      <p:sp>
+        <p:nvSpPr>
+          <p:cNvPr id="3" name="Rectangle 2"/>
+          <p:cNvSpPr/>
+          <p:nvPr/>
+        </p:nvSpPr>
+        <p:spPr>
+          <a:xfrm>
+            <a:off x="0" y="0"/>
+            <a:ext cx="201168" cy="6858000"/>
+          </a:xfrm>
+          <a:prstGeom prst="rect">
+            <a:avLst/>
+          </a:prstGeom>
+          <a:solidFill>
+            <a:srgbClr val="039855"/>
+          </a:solidFill>
+          <a:ln>
+            <a:noFill/>
+          </a:ln>
+          <a:effectLst/>
+        </p:spPr>
+        <p:style>
+          <a:lnRef idx="1">
+            <a:schemeClr val="accent1"/>
+          </a:lnRef>
+          <a:fillRef idx="3">
+            <a:schemeClr val="accent1"/>
+          </a:fillRef>
+          <a:effectRef idx="2">
+            <a:schemeClr val="accent1"/>
+          </a:effectRef>
+          <a:fontRef idx="minor">
+            <a:schemeClr val="lt1"/>
+          </a:fontRef>
+        </p:style>
+        <p:txBody>
+          <a:bodyPr rtlCol="0" anchor="ctr"/>
+          <a:lstStyle/>
+          <a:p>
+            <a:pPr algn="ctr"/>
+          </a:p>
+        </p:txBody>
+      </p:sp>
+      <p:sp>
+        <p:nvSpPr>
+          <p:cNvPr id="4" name="Rectangle 3"/>
+          <p:cNvSpPr/>
+          <p:nvPr/>
+        </p:nvSpPr>
+        <p:spPr>
+          <a:xfrm>
+            <a:off x="548640" y="457200"/>
+            <a:ext cx="548640" cy="82296"/>
+          </a:xfrm>
+          <a:prstGeom prst="rect">
+            <a:avLst/>
+          </a:prstGeom>
+          <a:solidFill>
+            <a:srgbClr val="6CE9A6"/>
+          </a:solidFill>
+          <a:ln>
+            <a:noFill/>
+          </a:ln>
+          <a:effectLst/>
+        </p:spPr>
+        <p:style>
+          <a:lnRef idx="1">
+            <a:schemeClr val="accent1"/>
+          </a:lnRef>
+          <a:fillRef idx="3">
+            <a:schemeClr val="accent1"/>
+          </a:fillRef>
+          <a:effectRef idx="2">
+            <a:schemeClr val="accent1"/>
+          </a:effectRef>
+          <a:fontRef idx="minor">
+            <a:schemeClr val="lt1"/>
+          </a:fontRef>
+        </p:style>
+        <p:txBody>
+          <a:bodyPr rtlCol="0" anchor="ctr"/>
+          <a:lstStyle/>
+          <a:p>
+            <a:pPr algn="ctr"/>
+          </a:p>
+        </p:txBody>
+      </p:sp>
+      <p:sp>
+        <p:nvSpPr>
+          <p:cNvPr id="5" name="TextBox 4"/>
+          <p:cNvSpPr txBox="1"/>
+          <p:nvPr/>
+        </p:nvSpPr>
+        <p:spPr>
+          <a:xfrm>
+            <a:off x="548640" y="548640"/>
+            <a:ext cx="10515600" cy="365760"/>
+          </a:xfrm>
+          <a:prstGeom prst="rect">
+            <a:avLst/>
+          </a:prstGeom>
+          <a:noFill/>
+        </p:spPr>
+        <p:txBody>
+          <a:bodyPr wrap="square" anchor="t">
+            <a:spAutoFit/>
+          </a:bodyPr>
+          <a:lstStyle/>
+          <a:p>
+            <a:pPr algn="l">
+              <a:spcAft>
+                <a:spcPts val="600"/>
+              </a:spcAft>
+            </a:pPr>
+            <a:r>
+              <a:rPr sz="1200" b="1" i="0">
+                <a:solidFill>
+                  <a:srgbClr val="039855"/>
+                </a:solidFill>
+                <a:latin typeface="Calibri"/>
+              </a:rPr>
+              <a:t>IMPLEMENTASI</a:t>
+            </a:r>
+          </a:p>
+        </p:txBody>
+      </p:sp>
+      <p:sp>
+        <p:nvSpPr>
+          <p:cNvPr id="6" name="TextBox 5"/>
+          <p:cNvSpPr txBox="1"/>
+          <p:nvPr/>
+        </p:nvSpPr>
+        <p:spPr>
+          <a:xfrm>
+            <a:off x="548640" y="804672"/>
+            <a:ext cx="11155680" cy="914400"/>
+          </a:xfrm>
+          <a:prstGeom prst="rect">
+            <a:avLst/>
+          </a:prstGeom>
+          <a:noFill/>
+        </p:spPr>
+        <p:txBody>
+          <a:bodyPr wrap="square" anchor="t">
+            <a:spAutoFit/>
+          </a:bodyPr>
+          <a:lstStyle/>
+          <a:p>
+            <a:pPr algn="l">
+              <a:spcAft>
+                <a:spcPts val="600"/>
+              </a:spcAft>
+            </a:pPr>
+            <a:r>
+              <a:rPr sz="2700" b="1" i="0">
+                <a:solidFill>
+                  <a:srgbClr val="05312A"/>
+                </a:solidFill>
+                <a:latin typeface="Calibri"/>
+              </a:rPr>
+              <a:t>Demo &amp; deployment</a:t>
+            </a:r>
+          </a:p>
+        </p:txBody>
+      </p:sp>
+      <p:sp>
+        <p:nvSpPr>
+          <p:cNvPr id="7" name="TextBox 6"/>
+          <p:cNvSpPr txBox="1"/>
+          <p:nvPr/>
+        </p:nvSpPr>
+        <p:spPr>
+          <a:xfrm>
+            <a:off x="594360" y="1828800"/>
+            <a:ext cx="10881360" cy="2743200"/>
+          </a:xfrm>
+          <a:prstGeom prst="rect">
+            <a:avLst/>
+          </a:prstGeom>
+          <a:noFill/>
+        </p:spPr>
+        <p:txBody>
+          <a:bodyPr wrap="square">
+            <a:spAutoFit/>
+          </a:bodyPr>
+          <a:lstStyle/>
+          <a:p>
+            <a:pPr>
+              <a:spcAft>
+                <a:spcPts val="1000"/>
+              </a:spcAft>
+            </a:pPr>
+            <a:r>
+              <a:rPr sz="1800" b="1">
+                <a:solidFill>
+                  <a:srgbClr val="039855"/>
+                </a:solidFill>
+              </a:rPr>
+              <a:t>▸  </a:t>
+            </a:r>
+            <a:r>
+              <a:rPr sz="1800" b="0">
+                <a:solidFill>
+                  <a:srgbClr val="15241C"/>
+                </a:solidFill>
+                <a:latin typeface="Calibri"/>
+              </a:rPr>
+              <a:t>Live di </a:t>
+            </a:r>
+            <a:r>
+              <a:rPr sz="1800" b="1">
+                <a:solidFill>
+                  <a:srgbClr val="15241C"/>
+                </a:solidFill>
+                <a:latin typeface="Calibri"/>
+              </a:rPr>
+              <a:t>Cloudflare Pages</a:t>
+            </a:r>
+            <a:r>
+              <a:rPr sz="1800" b="0">
+                <a:solidFill>
+                  <a:srgbClr val="15241C"/>
+                </a:solidFill>
+                <a:latin typeface="Calibri"/>
+              </a:rPr>
+              <a:t> (statis, gratis, HTTPS otomatis).</a:t>
+            </a:r>
+          </a:p>
+          <a:p>
+            <a:pPr>
+              <a:spcAft>
+                <a:spcPts val="1000"/>
+              </a:spcAft>
+            </a:pPr>
+            <a:r>
+              <a:rPr sz="1800" b="1">
+                <a:solidFill>
+                  <a:srgbClr val="039855"/>
+                </a:solidFill>
+              </a:rPr>
+              <a:t>▸  </a:t>
+            </a:r>
+            <a:r>
+              <a:rPr sz="1800" b="0">
+                <a:solidFill>
+                  <a:srgbClr val="15241C"/>
+                </a:solidFill>
+                <a:latin typeface="Calibri"/>
+              </a:rPr>
+              <a:t>URL: </a:t>
+            </a:r>
+            <a:r>
+              <a:rPr sz="1800" b="1">
+                <a:solidFill>
+                  <a:srgbClr val="15241C"/>
+                </a:solidFill>
+                <a:latin typeface="Calibri"/>
+              </a:rPr>
+              <a:t>machinelearning-ai.pages.dev</a:t>
+            </a:r>
+          </a:p>
+          <a:p>
+            <a:pPr>
+              <a:spcAft>
+                <a:spcPts val="1000"/>
+              </a:spcAft>
+            </a:pPr>
+            <a:r>
+              <a:rPr sz="1800" b="1">
+                <a:solidFill>
+                  <a:srgbClr val="039855"/>
+                </a:solidFill>
+              </a:rPr>
+              <a:t>▸  </a:t>
+            </a:r>
+            <a:r>
+              <a:rPr sz="1800" b="0">
+                <a:solidFill>
+                  <a:srgbClr val="15241C"/>
+                </a:solidFill>
+                <a:latin typeface="Calibri"/>
+              </a:rPr>
+              <a:t>Build: Root = web · Build command = npm run build · Output = dist.</a:t>
+            </a:r>
+          </a:p>
+          <a:p>
+            <a:pPr>
+              <a:spcAft>
+                <a:spcPts val="1000"/>
+              </a:spcAft>
+            </a:pPr>
+            <a:r>
+              <a:rPr sz="1800" b="1">
+                <a:solidFill>
+                  <a:srgbClr val="039855"/>
+                </a:solidFill>
+              </a:rPr>
+              <a:t>▸  </a:t>
+            </a:r>
+            <a:r>
+              <a:rPr sz="1800" b="0">
+                <a:solidFill>
+                  <a:srgbClr val="15241C"/>
+                </a:solidFill>
+                <a:latin typeface="Calibri"/>
+              </a:rPr>
+              <a:t>Repositori: github.com/steffenkwik/machinelearning-ai</a:t>
+            </a:r>
+          </a:p>
+        </p:txBody>
+      </p:sp>
+      <p:sp>
+        <p:nvSpPr>
+          <p:cNvPr id="8" name="Rectangle 7"/>
+          <p:cNvSpPr/>
+          <p:nvPr/>
+        </p:nvSpPr>
+        <p:spPr>
+          <a:xfrm>
+            <a:off x="594360" y="4846320"/>
+            <a:ext cx="10881360" cy="914400"/>
+          </a:xfrm>
+          <a:prstGeom prst="rect">
+            <a:avLst/>
+          </a:prstGeom>
+          <a:solidFill>
+            <a:srgbClr val="EAF7F0"/>
+          </a:solidFill>
+          <a:ln>
+            <a:noFill/>
+          </a:ln>
+          <a:effectLst/>
+        </p:spPr>
+        <p:style>
+          <a:lnRef idx="1">
+            <a:schemeClr val="accent1"/>
+          </a:lnRef>
+          <a:fillRef idx="3">
+            <a:schemeClr val="accent1"/>
+          </a:fillRef>
+          <a:effectRef idx="2">
+            <a:schemeClr val="accent1"/>
+          </a:effectRef>
+          <a:fontRef idx="minor">
+            <a:schemeClr val="lt1"/>
+          </a:fontRef>
+        </p:style>
+        <p:txBody>
+          <a:bodyPr rtlCol="0" anchor="ctr"/>
+          <a:lstStyle/>
+          <a:p>
+            <a:pPr algn="ctr"/>
+          </a:p>
+        </p:txBody>
+      </p:sp>
+      <p:sp>
+        <p:nvSpPr>
+          <p:cNvPr id="9" name="TextBox 8"/>
+          <p:cNvSpPr txBox="1"/>
+          <p:nvPr/>
+        </p:nvSpPr>
+        <p:spPr>
+          <a:xfrm>
+            <a:off x="777240" y="5029200"/>
+            <a:ext cx="10515600" cy="548640"/>
+          </a:xfrm>
+          <a:prstGeom prst="rect">
+            <a:avLst/>
+          </a:prstGeom>
+          <a:noFill/>
+        </p:spPr>
+        <p:txBody>
+          <a:bodyPr wrap="square" anchor="ctr">
+            <a:spAutoFit/>
+          </a:bodyPr>
+          <a:lstStyle/>
+          <a:p>
+            <a:pPr algn="l">
+              <a:spcAft>
+                <a:spcPts val="600"/>
+              </a:spcAft>
+            </a:pPr>
+            <a:r>
+              <a:rPr sz="1600" b="1" i="0">
+                <a:solidFill>
+                  <a:srgbClr val="05312A"/>
+                </a:solidFill>
+                <a:latin typeface="Calibri"/>
+              </a:rPr>
+              <a:t>Demo: isi data → Analisis → hasil tampil seketika (offline).</a:t>
+            </a:r>
+          </a:p>
+        </p:txBody>
+      </p:sp>
+    </p:spTree>
+  </p:cSld>
+  <p:clrMapOvr>
+    <a:masterClrMapping/>
+  </p:clrMapOvr>
+</p:sld>
+</file>
+
+<file path=ppt/slides/slide17.xml><?xml version="1.0" encoding="utf-8"?>
+<p:sld xmlns:a="http://schemas.openxmlformats.org/drawingml/2006/main" xmlns:p="http://schemas.openxmlformats.org/presentationml/2006/main" xmlns:r="http://schemas.openxmlformats.org/officeDocument/2006/relationships">
+  <p:cSld>
+    <p:spTree>
+      <p:nvGrpSpPr>
+        <p:cNvPr id="1" name=""/>
+        <p:cNvGrpSpPr/>
+        <p:nvPr/>
+      </p:nvGrpSpPr>
+      <p:grpSpPr/>
+      <p:sp>
+        <p:nvSpPr>
+          <p:cNvPr id="2" name="Rectangle 1"/>
+          <p:cNvSpPr/>
+          <p:nvPr/>
+        </p:nvSpPr>
+        <p:spPr>
+          <a:xfrm>
+            <a:off x="0" y="0"/>
+            <a:ext cx="12191695" cy="6858000"/>
+          </a:xfrm>
+          <a:prstGeom prst="rect">
+            <a:avLst/>
+          </a:prstGeom>
+          <a:solidFill>
+            <a:srgbClr val="05312A"/>
+          </a:solidFill>
+          <a:ln>
+            <a:noFill/>
+          </a:ln>
+          <a:effectLst/>
+        </p:spPr>
+        <p:style>
+          <a:lnRef idx="1">
+            <a:schemeClr val="accent1"/>
+          </a:lnRef>
+          <a:fillRef idx="3">
+            <a:schemeClr val="accent1"/>
+          </a:fillRef>
+          <a:effectRef idx="2">
+            <a:schemeClr val="accent1"/>
+          </a:effectRef>
+          <a:fontRef idx="minor">
+            <a:schemeClr val="lt1"/>
+          </a:fontRef>
+        </p:style>
+        <p:txBody>
+          <a:bodyPr rtlCol="0" anchor="ctr"/>
+          <a:lstStyle/>
+          <a:p>
+            <a:pPr algn="ctr"/>
+          </a:p>
+        </p:txBody>
+      </p:sp>
+      <p:sp>
+        <p:nvSpPr>
+          <p:cNvPr id="3" name="Rectangle 2"/>
+          <p:cNvSpPr/>
+          <p:nvPr/>
+        </p:nvSpPr>
+        <p:spPr>
+          <a:xfrm>
+            <a:off x="0" y="0"/>
+            <a:ext cx="12191695" cy="164592"/>
+          </a:xfrm>
+          <a:prstGeom prst="rect">
+            <a:avLst/>
+          </a:prstGeom>
+          <a:solidFill>
+            <a:srgbClr val="039855"/>
+          </a:solidFill>
+          <a:ln>
+            <a:noFill/>
+          </a:ln>
+          <a:effectLst/>
+        </p:spPr>
+        <p:style>
+          <a:lnRef idx="1">
+            <a:schemeClr val="accent1"/>
+          </a:lnRef>
+          <a:fillRef idx="3">
+            <a:schemeClr val="accent1"/>
+          </a:fillRef>
+          <a:effectRef idx="2">
+            <a:schemeClr val="accent1"/>
+          </a:effectRef>
+          <a:fontRef idx="minor">
+            <a:schemeClr val="lt1"/>
+          </a:fontRef>
+        </p:style>
+        <p:txBody>
+          <a:bodyPr rtlCol="0" anchor="ctr"/>
+          <a:lstStyle/>
+          <a:p>
+            <a:pPr algn="ctr"/>
+          </a:p>
+        </p:txBody>
+      </p:sp>
+      <p:sp>
+        <p:nvSpPr>
+          <p:cNvPr id="4" name="TextBox 3"/>
+          <p:cNvSpPr txBox="1"/>
+          <p:nvPr/>
+        </p:nvSpPr>
+        <p:spPr>
+          <a:xfrm>
+            <a:off x="822960" y="777240"/>
+            <a:ext cx="10515600" cy="548640"/>
+          </a:xfrm>
+          <a:prstGeom prst="rect">
+            <a:avLst/>
+          </a:prstGeom>
+          <a:noFill/>
+        </p:spPr>
+        <p:txBody>
+          <a:bodyPr wrap="square" anchor="t">
+            <a:spAutoFit/>
+          </a:bodyPr>
+          <a:lstStyle/>
+          <a:p>
+            <a:pPr algn="l">
+              <a:spcAft>
+                <a:spcPts val="600"/>
+              </a:spcAft>
+            </a:pPr>
+            <a:r>
+              <a:rPr sz="1600" b="1" i="0">
+                <a:solidFill>
+                  <a:srgbClr val="6CE9A6"/>
+                </a:solidFill>
+                <a:latin typeface="Calibri"/>
+              </a:rPr>
+              <a:t>KESIMPULAN</a:t>
+            </a:r>
+          </a:p>
+        </p:txBody>
+      </p:sp>
+      <p:sp>
+        <p:nvSpPr>
+          <p:cNvPr id="5" name="TextBox 4"/>
+          <p:cNvSpPr txBox="1"/>
+          <p:nvPr/>
+        </p:nvSpPr>
+        <p:spPr>
+          <a:xfrm>
+            <a:off x="822960" y="1554480"/>
+            <a:ext cx="10515600" cy="3291840"/>
+          </a:xfrm>
+          <a:prstGeom prst="rect">
+            <a:avLst/>
+          </a:prstGeom>
+          <a:noFill/>
+        </p:spPr>
+        <p:txBody>
+          <a:bodyPr wrap="square">
+            <a:spAutoFit/>
+          </a:bodyPr>
+          <a:lstStyle/>
+          <a:p>
+            <a:pPr>
+              <a:spcAft>
                 <a:spcPts val="1400"/>
               </a:spcAft>
             </a:pPr>
             <a:r>
-              <a:rPr sz="1900" b="1">
+              <a:rPr sz="1800" b="1">
                 <a:solidFill>
                   <a:srgbClr val="6CE9A6"/>
                 </a:solidFill>
@@ -6287,20 +6722,20 @@
               <a:t>▸  </a:t>
             </a:r>
             <a:r>
-              <a:rPr sz="1900" b="1">
+              <a:rPr sz="1800" b="1">
                 <a:solidFill>
                   <a:srgbClr val="FFFFFF"/>
                 </a:solidFill>
               </a:rPr>
-              <a:t>Random Forest 88,40%</a:t>
-            </a:r>
-            <a:r>
-              <a:rPr sz="1900" b="0">
+              <a:t>Random Forest divalidasi pada dataset NYATA Indonesia</a:t>
+            </a:r>
+            <a:r>
+              <a:rPr sz="1800" b="0">
                 <a:solidFill>
                   <a:srgbClr val="FFFFFF"/>
                 </a:solidFill>
               </a:rPr>
-              <a:t> menggabungkan 7 faktor penyebab stunting.</a:t>
+              <a:t> (55.367 sampel) → akurasi 99.39%.</a:t>
             </a:r>
           </a:p>
           <a:p>
@@ -6310,7 +6745,7 @@
               </a:spcAft>
             </a:pPr>
             <a:r>
-              <a:rPr sz="1900" b="1">
+              <a:rPr sz="1800" b="1">
                 <a:solidFill>
                   <a:srgbClr val="6CE9A6"/>
                 </a:solidFill>
@@ -6318,28 +6753,51 @@
               <a:t>▸  </a:t>
             </a:r>
             <a:r>
-              <a:rPr sz="1900" b="0">
+              <a:rPr sz="1800" b="0">
                 <a:solidFill>
                   <a:srgbClr val="FFFFFF"/>
                 </a:solidFill>
               </a:rPr>
-              <a:t>Model berjalan </a:t>
-            </a:r>
-            <a:r>
-              <a:rPr sz="1900" b="1">
+              <a:t>Mengungguli KNN, Decision Tree, Regresi Logistik, Naive Bayes pada benchmark.</a:t>
+            </a:r>
+          </a:p>
+          <a:p>
+            <a:pPr>
+              <a:spcAft>
+                <a:spcPts val="1400"/>
+              </a:spcAft>
+            </a:pPr>
+            <a:r>
+              <a:rPr sz="1800" b="1">
+                <a:solidFill>
+                  <a:srgbClr val="6CE9A6"/>
+                </a:solidFill>
+              </a:rPr>
+              <a:t>▸  </a:t>
+            </a:r>
+            <a:r>
+              <a:rPr sz="1800" b="0">
                 <a:solidFill>
                   <a:srgbClr val="FFFFFF"/>
                 </a:solidFill>
               </a:rPr>
+              <a:t>Berjalan </a:t>
+            </a:r>
+            <a:r>
+              <a:rPr sz="1800" b="1">
+                <a:solidFill>
+                  <a:srgbClr val="FFFFFF"/>
+                </a:solidFill>
+              </a:rPr>
               <a:t>100% di peramban</a:t>
             </a:r>
             <a:r>
-              <a:rPr sz="1900" b="0">
+              <a:rPr sz="1800" b="0">
                 <a:solidFill>
                   <a:srgbClr val="FFFFFF"/>
                 </a:solidFill>
               </a:rPr>
-              <a:t> — gratis, cepat, offline, dan privat.</a:t>
+              <a:t> (ONNX) — gratis, cepat, offline, privat.</a:t>
             </a:r>
           </a:p>
           <a:p>
@@ -6349,7 +6807,7 @@
               </a:spcAft>
             </a:pPr>
             <a:r>
-              <a:rPr sz="1900" b="1">
+              <a:rPr sz="1800" b="1">
                 <a:solidFill>
                   <a:srgbClr val="6CE9A6"/>
                 </a:solidFill>
@@ -6357,83 +6815,12 @@
               <a:t>▸  </a:t>
             </a:r>
             <a:r>
-              <a:rPr sz="1900" b="0">
+              <a:rPr sz="1800" b="0">
                 <a:solidFill>
                   <a:srgbClr val="FFFFFF"/>
                 </a:solidFill>
               </a:rPr>
-              <a:t>Dilengkapi </a:t>
-            </a:r>
-            <a:r>
-              <a:rPr sz="1900" b="1">
-                <a:solidFill>
-                  <a:srgbClr val="FFFFFF"/>
-                </a:solidFill>
-              </a:rPr>
-              <a:t>analisis foto</a:t>
-            </a:r>
-            <a:r>
-              <a:rPr sz="1900" b="0">
-                <a:solidFill>
-                  <a:srgbClr val="FFFFFF"/>
-                </a:solidFill>
-              </a:rPr>
-              <a:t> &amp; </a:t>
-            </a:r>
-            <a:r>
-              <a:rPr sz="1900" b="1">
-                <a:solidFill>
-                  <a:srgbClr val="FFFFFF"/>
-                </a:solidFill>
-              </a:rPr>
-              <a:t>asisten AI gizi</a:t>
-            </a:r>
-            <a:r>
-              <a:rPr sz="1900" b="0">
-                <a:solidFill>
-                  <a:srgbClr val="FFFFFF"/>
-                </a:solidFill>
-              </a:rPr>
-              <a:t> sebagai pengayaan yang jujur.</a:t>
-            </a:r>
-          </a:p>
-          <a:p>
-            <a:pPr>
-              <a:spcAft>
-                <a:spcPts val="1400"/>
-              </a:spcAft>
-            </a:pPr>
-            <a:r>
-              <a:rPr sz="1900" b="1">
-                <a:solidFill>
-                  <a:srgbClr val="6CE9A6"/>
-                </a:solidFill>
-              </a:rPr>
-              <a:t>▸  </a:t>
-            </a:r>
-            <a:r>
-              <a:rPr sz="1900" b="0">
-                <a:solidFill>
-                  <a:srgbClr val="FFFFFF"/>
-                </a:solidFill>
-              </a:rPr>
-              <a:t>Layak sebagai </a:t>
-            </a:r>
-            <a:r>
-              <a:rPr sz="1900" b="1">
-                <a:solidFill>
-                  <a:srgbClr val="FFFFFF"/>
-                </a:solidFill>
-              </a:rPr>
-              <a:t>alat skrining awal</a:t>
-            </a:r>
-            <a:r>
-              <a:rPr sz="1900" b="0">
-                <a:solidFill>
-                  <a:srgbClr val="FFFFFF"/>
-                </a:solidFill>
-              </a:rPr>
-              <a:t>; lanjutan: validasi dengan data klinis nyata.</a:t>
+              <a:t>Menjawab kebutuhan nyata (prevalensi 21,5%, target 14%) — layak sebagai skrining awal (SDG #3).</a:t>
             </a:r>
           </a:p>
         </p:txBody>
@@ -6677,7 +7064,7 @@
                 </a:solidFill>
                 <a:latin typeface="Calibri"/>
               </a:rPr>
-              <a:t>LATAR BELAKANG</a:t>
+              <a:t>LATAR BELAKANG &amp; KEBUTUHAN</a:t>
             </a:r>
           </a:p>
         </p:txBody>
@@ -6710,13 +7097,13 @@
               </a:spcAft>
             </a:pPr>
             <a:r>
-              <a:rPr sz="2800" b="1" i="0">
+              <a:rPr sz="2700" b="1" i="0">
                 <a:solidFill>
                   <a:srgbClr val="05312A"/>
                 </a:solidFill>
                 <a:latin typeface="Calibri"/>
               </a:rPr>
-              <a:t>Stunting: gagal tumbuh karena banyak faktor</a:t>
+              <a:t>Stunting: masalah nyata &amp; mendesak</a:t>
             </a:r>
           </a:p>
         </p:txBody>
@@ -6729,8 +7116,8 @@
         </p:nvSpPr>
         <p:spPr>
           <a:xfrm>
-            <a:off x="594360" y="1783080"/>
-            <a:ext cx="6675120" cy="2926080"/>
+            <a:off x="594360" y="1691640"/>
+            <a:ext cx="6675120" cy="3291840"/>
           </a:xfrm>
           <a:prstGeom prst="rect">
             <a:avLst/>
@@ -6749,7 +7136,7 @@
               </a:spcAft>
             </a:pPr>
             <a:r>
-              <a:rPr sz="1700" b="1">
+              <a:rPr sz="1500" b="1">
                 <a:solidFill>
                   <a:srgbClr val="039855"/>
                 </a:solidFill>
@@ -6757,7 +7144,7 @@
               <a:t>▸  </a:t>
             </a:r>
             <a:r>
-              <a:rPr sz="1700" b="0">
+              <a:rPr sz="1500" b="0">
                 <a:solidFill>
                   <a:srgbClr val="15241C"/>
                 </a:solidFill>
@@ -6766,22 +7153,40 @@
               <a:t>Prevalensi stunting Indonesia </a:t>
             </a:r>
             <a:r>
-              <a:rPr sz="1700" b="1">
+              <a:rPr sz="1500" b="1">
                 <a:solidFill>
                   <a:srgbClr val="15241C"/>
                 </a:solidFill>
                 <a:latin typeface="Calibri"/>
               </a:rPr>
-              <a:t>19,8%</a:t>
-            </a:r>
-            <a:r>
-              <a:rPr sz="1700" b="0">
+              <a:t>21,5%</a:t>
+            </a:r>
+            <a:r>
+              <a:rPr sz="1500" b="0">
                 <a:solidFill>
                   <a:srgbClr val="15241C"/>
                 </a:solidFill>
                 <a:latin typeface="Calibri"/>
               </a:rPr>
-              <a:t> (SSGI 2024) — ±4,4 juta balita.</a:t>
+              <a:t> (SKI/SSGI 2023) — </a:t>
+            </a:r>
+            <a:r>
+              <a:rPr sz="1500" b="1">
+                <a:solidFill>
+                  <a:srgbClr val="15241C"/>
+                </a:solidFill>
+                <a:latin typeface="Calibri"/>
+              </a:rPr>
+              <a:t>1 dari 5 balita</a:t>
+            </a:r>
+            <a:r>
+              <a:rPr sz="1500" b="0">
+                <a:solidFill>
+                  <a:srgbClr val="15241C"/>
+                </a:solidFill>
+                <a:latin typeface="Calibri"/>
+              </a:rPr>
+              <a:t>.</a:t>
             </a:r>
           </a:p>
           <a:p>
@@ -6791,7 +7196,7 @@
               </a:spcAft>
             </a:pPr>
             <a:r>
-              <a:rPr sz="1700" b="1">
+              <a:rPr sz="1500" b="1">
                 <a:solidFill>
                   <a:srgbClr val="039855"/>
                 </a:solidFill>
@@ -6799,31 +7204,31 @@
               <a:t>▸  </a:t>
             </a:r>
             <a:r>
-              <a:rPr sz="1700" b="0">
+              <a:rPr sz="1500" b="0">
                 <a:solidFill>
                   <a:srgbClr val="15241C"/>
                 </a:solidFill>
                 <a:latin typeface="Calibri"/>
               </a:rPr>
-              <a:t>Stunting = anak </a:t>
-            </a:r>
-            <a:r>
-              <a:rPr sz="1700" b="1">
+              <a:t>Masih jauh dari </a:t>
+            </a:r>
+            <a:r>
+              <a:rPr sz="1500" b="1">
                 <a:solidFill>
                   <a:srgbClr val="15241C"/>
                 </a:solidFill>
                 <a:latin typeface="Calibri"/>
               </a:rPr>
-              <a:t>lebih pendek</a:t>
-            </a:r>
-            <a:r>
-              <a:rPr sz="1700" b="0">
+              <a:t>target nasional 14%</a:t>
+            </a:r>
+            <a:r>
+              <a:rPr sz="1500" b="0">
                 <a:solidFill>
                   <a:srgbClr val="15241C"/>
                 </a:solidFill>
                 <a:latin typeface="Calibri"/>
               </a:rPr>
-              <a:t> dari standar usianya akibat kurang gizi kronis.</a:t>
+              <a:t> (Perpres 72/2021); Riskesdas 2018: 30,8%.</a:t>
             </a:r>
           </a:p>
           <a:p>
@@ -6833,7 +7238,7 @@
               </a:spcAft>
             </a:pPr>
             <a:r>
-              <a:rPr sz="1700" b="1">
+              <a:rPr sz="1500" b="1">
                 <a:solidFill>
                   <a:srgbClr val="039855"/>
                 </a:solidFill>
@@ -6841,13 +7246,13 @@
               <a:t>▸  </a:t>
             </a:r>
             <a:r>
-              <a:rPr sz="1700" b="0">
+              <a:rPr sz="1500" b="0">
                 <a:solidFill>
                   <a:srgbClr val="15241C"/>
                 </a:solidFill>
                 <a:latin typeface="Calibri"/>
               </a:rPr>
-              <a:t>Dampak jangka panjang: kecerdasan, daya tahan tubuh, dan produktivitas.</a:t>
+              <a:t>Dampak permanen: kecerdasan (IQ), imunitas, prestasi, produktivitas dewasa.</a:t>
             </a:r>
           </a:p>
           <a:p>
@@ -6857,7 +7262,7 @@
               </a:spcAft>
             </a:pPr>
             <a:r>
-              <a:rPr sz="1700" b="1">
+              <a:rPr sz="1500" b="1">
                 <a:solidFill>
                   <a:srgbClr val="039855"/>
                 </a:solidFill>
@@ -6865,31 +7270,73 @@
               <a:t>▸  </a:t>
             </a:r>
             <a:r>
-              <a:rPr sz="1700" b="0">
+              <a:rPr sz="1500" b="0">
                 <a:solidFill>
                   <a:srgbClr val="15241C"/>
                 </a:solidFill>
                 <a:latin typeface="Calibri"/>
               </a:rPr>
-              <a:t>Penyebabnya </a:t>
-            </a:r>
-            <a:r>
-              <a:rPr sz="1700" b="1">
+              <a:t>Kerugian ekonomi </a:t>
+            </a:r>
+            <a:r>
+              <a:rPr sz="1500" b="1">
                 <a:solidFill>
                   <a:srgbClr val="15241C"/>
                 </a:solidFill>
                 <a:latin typeface="Calibri"/>
               </a:rPr>
-              <a:t>banyak faktor</a:t>
-            </a:r>
-            <a:r>
-              <a:rPr sz="1700" b="0">
+              <a:t>2–3% PDB/tahun</a:t>
+            </a:r>
+            <a:r>
+              <a:rPr sz="1500" b="0">
                 <a:solidFill>
                   <a:srgbClr val="15241C"/>
                 </a:solidFill>
                 <a:latin typeface="Calibri"/>
               </a:rPr>
-              <a:t> — bukan hanya tinggi badan anak.</a:t>
+              <a:t> (Bank Dunia/Bappenas).</a:t>
+            </a:r>
+          </a:p>
+          <a:p>
+            <a:pPr>
+              <a:spcAft>
+                <a:spcPts val="1000"/>
+              </a:spcAft>
+            </a:pPr>
+            <a:r>
+              <a:rPr sz="1500" b="1">
+                <a:solidFill>
+                  <a:srgbClr val="039855"/>
+                </a:solidFill>
+              </a:rPr>
+              <a:t>▸  </a:t>
+            </a:r>
+            <a:r>
+              <a:rPr sz="1500" b="0">
+                <a:solidFill>
+                  <a:srgbClr val="15241C"/>
+                </a:solidFill>
+                <a:latin typeface="Calibri"/>
+              </a:rPr>
+              <a:t>Periode kritis hanya </a:t>
+            </a:r>
+            <a:r>
+              <a:rPr sz="1500" b="1">
+                <a:solidFill>
+                  <a:srgbClr val="15241C"/>
+                </a:solidFill>
+                <a:latin typeface="Calibri"/>
+              </a:rPr>
+              <a:t>1000 Hari Pertama Kehidupan</a:t>
+            </a:r>
+            <a:r>
+              <a:rPr sz="1500" b="0">
+                <a:solidFill>
+                  <a:srgbClr val="15241C"/>
+                </a:solidFill>
+                <a:latin typeface="Calibri"/>
+              </a:rPr>
+              <a:t> → telat deteksi = rugi besar.</a:t>
             </a:r>
           </a:p>
         </p:txBody>
@@ -6902,8 +7349,8 @@
         </p:nvSpPr>
         <p:spPr>
           <a:xfrm>
-            <a:off x="594360" y="4800600"/>
-            <a:ext cx="10881360" cy="1417320"/>
+            <a:off x="7635240" y="1691640"/>
+            <a:ext cx="3840480" cy="1417320"/>
           </a:xfrm>
           <a:prstGeom prst="rect">
             <a:avLst/>
@@ -6946,8 +7393,8 @@
         </p:nvSpPr>
         <p:spPr>
           <a:xfrm>
-            <a:off x="594360" y="4800600"/>
-            <a:ext cx="82296" cy="1417320"/>
+            <a:off x="7635240" y="1691640"/>
+            <a:ext cx="3840480" cy="82296"/>
           </a:xfrm>
           <a:prstGeom prst="rect">
             <a:avLst/>
@@ -6990,8 +7437,8 @@
         </p:nvSpPr>
         <p:spPr>
           <a:xfrm>
-            <a:off x="795528" y="4910328"/>
-            <a:ext cx="10515600" cy="1216152"/>
+            <a:off x="7635240" y="1911096"/>
+            <a:ext cx="3840480" cy="731520"/>
           </a:xfrm>
           <a:prstGeom prst="rect">
             <a:avLst/>
@@ -7004,49 +7451,72 @@
           </a:bodyPr>
           <a:lstStyle/>
           <a:p>
-            <a:pPr algn="l">
-              <a:spcAft>
-                <a:spcPts val="300"/>
-              </a:spcAft>
-            </a:pPr>
-            <a:r>
-              <a:rPr sz="1300" b="1" i="0">
+            <a:pPr algn="ctr">
+              <a:spcAft>
+                <a:spcPts val="600"/>
+              </a:spcAft>
+            </a:pPr>
+            <a:r>
+              <a:rPr sz="3000" b="1" i="0">
                 <a:solidFill>
                   <a:srgbClr val="039855"/>
                 </a:solidFill>
                 <a:latin typeface="Calibri"/>
               </a:rPr>
-              <a:t>Apa itu "KEK → BBLR"?</a:t>
-            </a:r>
-          </a:p>
-          <a:p>
-            <a:pPr algn="l">
-              <a:spcAft>
-                <a:spcPts val="300"/>
-              </a:spcAft>
-            </a:pPr>
-            <a:r>
-              <a:rPr sz="1150" b="0" i="0">
-                <a:solidFill>
-                  <a:srgbClr val="15241C"/>
-                </a:solidFill>
-                <a:latin typeface="Calibri"/>
-              </a:rPr>
-              <a:t>KEK = Kurang Energi Kronis: ibu kekurangan gizi dalam waktu lama saat hamil. Ini bisa menyebabkan BBLR = Berat Badan Lahir Rendah (bayi lahir &lt; 2,5 kg). Bayi BBLR lebih berisiko mengalami stunting. Karena itu gizi ibu saat hamil ikut dihitung.</a:t>
-            </a:r>
-          </a:p>
-        </p:txBody>
-      </p:sp>
-      <p:sp>
-        <p:nvSpPr>
-          <p:cNvPr id="11" name="Rectangle 10"/>
+              <a:t>21,5%</a:t>
+            </a:r>
+          </a:p>
+        </p:txBody>
+      </p:sp>
+      <p:sp>
+        <p:nvSpPr>
+          <p:cNvPr id="11" name="TextBox 10"/>
+          <p:cNvSpPr txBox="1"/>
+          <p:nvPr/>
+        </p:nvSpPr>
+        <p:spPr>
+          <a:xfrm>
+            <a:off x="7635240" y="2587752"/>
+            <a:ext cx="3840480" cy="457200"/>
+          </a:xfrm>
+          <a:prstGeom prst="rect">
+            <a:avLst/>
+          </a:prstGeom>
+          <a:noFill/>
+        </p:spPr>
+        <p:txBody>
+          <a:bodyPr wrap="square" anchor="t">
+            <a:spAutoFit/>
+          </a:bodyPr>
+          <a:lstStyle/>
+          <a:p>
+            <a:pPr algn="ctr">
+              <a:spcAft>
+                <a:spcPts val="600"/>
+              </a:spcAft>
+            </a:pPr>
+            <a:r>
+              <a:rPr sz="1200" b="0" i="0">
+                <a:solidFill>
+                  <a:srgbClr val="4B5563"/>
+                </a:solidFill>
+                <a:latin typeface="Calibri"/>
+              </a:rPr>
+              <a:t>Prevalensi (SKI 2023)</a:t>
+            </a:r>
+          </a:p>
+        </p:txBody>
+      </p:sp>
+      <p:sp>
+        <p:nvSpPr>
+          <p:cNvPr id="12" name="Rectangle 11"/>
           <p:cNvSpPr/>
           <p:nvPr/>
         </p:nvSpPr>
         <p:spPr>
           <a:xfrm>
-            <a:off x="7589520" y="1783080"/>
-            <a:ext cx="3886200" cy="1463040"/>
+            <a:off x="7635240" y="3246120"/>
+            <a:ext cx="3840480" cy="1417320"/>
           </a:xfrm>
           <a:prstGeom prst="rect">
             <a:avLst/>
@@ -7083,14 +7553,14 @@
       </p:sp>
       <p:sp>
         <p:nvSpPr>
-          <p:cNvPr id="12" name="Rectangle 11"/>
+          <p:cNvPr id="13" name="Rectangle 12"/>
           <p:cNvSpPr/>
           <p:nvPr/>
         </p:nvSpPr>
         <p:spPr>
           <a:xfrm>
-            <a:off x="7589520" y="1783080"/>
-            <a:ext cx="3886200" cy="82296"/>
+            <a:off x="7635240" y="3246120"/>
+            <a:ext cx="3840480" cy="82296"/>
           </a:xfrm>
           <a:prstGeom prst="rect">
             <a:avLst/>
@@ -7127,14 +7597,14 @@
       </p:sp>
       <p:sp>
         <p:nvSpPr>
-          <p:cNvPr id="13" name="TextBox 12"/>
+          <p:cNvPr id="14" name="TextBox 13"/>
           <p:cNvSpPr txBox="1"/>
           <p:nvPr/>
         </p:nvSpPr>
         <p:spPr>
           <a:xfrm>
-            <a:off x="7589520" y="2020824"/>
-            <a:ext cx="3886200" cy="731520"/>
+            <a:off x="7635240" y="3465576"/>
+            <a:ext cx="3840480" cy="731520"/>
           </a:xfrm>
           <a:prstGeom prst="rect">
             <a:avLst/>
@@ -7153,27 +7623,27 @@
               </a:spcAft>
             </a:pPr>
             <a:r>
-              <a:rPr sz="3200" b="1" i="0">
+              <a:rPr sz="3000" b="1" i="0">
                 <a:solidFill>
                   <a:srgbClr val="039855"/>
                 </a:solidFill>
                 <a:latin typeface="Calibri"/>
               </a:rPr>
-              <a:t>19,8%</a:t>
-            </a:r>
-          </a:p>
-        </p:txBody>
-      </p:sp>
-      <p:sp>
-        <p:nvSpPr>
-          <p:cNvPr id="14" name="TextBox 13"/>
+              <a:t>14%</a:t>
+            </a:r>
+          </a:p>
+        </p:txBody>
+      </p:sp>
+      <p:sp>
+        <p:nvSpPr>
+          <p:cNvPr id="15" name="TextBox 14"/>
           <p:cNvSpPr txBox="1"/>
           <p:nvPr/>
         </p:nvSpPr>
         <p:spPr>
           <a:xfrm>
-            <a:off x="7589520" y="2697480"/>
-            <a:ext cx="3886200" cy="457200"/>
+            <a:off x="7635240" y="4142232"/>
+            <a:ext cx="3840480" cy="457200"/>
           </a:xfrm>
           <a:prstGeom prst="rect">
             <a:avLst/>
@@ -7198,21 +7668,21 @@
                 </a:solidFill>
                 <a:latin typeface="Calibri"/>
               </a:rPr>
-              <a:t>Prevalensi nasional (SSGI 2024)</a:t>
-            </a:r>
-          </a:p>
-        </p:txBody>
-      </p:sp>
-      <p:sp>
-        <p:nvSpPr>
-          <p:cNvPr id="15" name="Rectangle 14"/>
+              <a:t>Target nasional 2024</a:t>
+            </a:r>
+          </a:p>
+        </p:txBody>
+      </p:sp>
+      <p:sp>
+        <p:nvSpPr>
+          <p:cNvPr id="16" name="Rectangle 15"/>
           <p:cNvSpPr/>
           <p:nvPr/>
         </p:nvSpPr>
         <p:spPr>
           <a:xfrm>
-            <a:off x="7589520" y="3383280"/>
-            <a:ext cx="3886200" cy="1463040"/>
+            <a:off x="7635240" y="4800600"/>
+            <a:ext cx="3840480" cy="1417320"/>
           </a:xfrm>
           <a:prstGeom prst="rect">
             <a:avLst/>
@@ -7249,14 +7719,14 @@
       </p:sp>
       <p:sp>
         <p:nvSpPr>
-          <p:cNvPr id="16" name="Rectangle 15"/>
+          <p:cNvPr id="17" name="Rectangle 16"/>
           <p:cNvSpPr/>
           <p:nvPr/>
         </p:nvSpPr>
         <p:spPr>
           <a:xfrm>
-            <a:off x="7589520" y="3383280"/>
-            <a:ext cx="3886200" cy="82296"/>
+            <a:off x="7635240" y="4800600"/>
+            <a:ext cx="3840480" cy="82296"/>
           </a:xfrm>
           <a:prstGeom prst="rect">
             <a:avLst/>
@@ -7293,14 +7763,14 @@
       </p:sp>
       <p:sp>
         <p:nvSpPr>
-          <p:cNvPr id="17" name="TextBox 16"/>
+          <p:cNvPr id="18" name="TextBox 17"/>
           <p:cNvSpPr txBox="1"/>
           <p:nvPr/>
         </p:nvSpPr>
         <p:spPr>
           <a:xfrm>
-            <a:off x="7589520" y="3621024"/>
-            <a:ext cx="3886200" cy="731520"/>
+            <a:off x="7635240" y="5020056"/>
+            <a:ext cx="3840480" cy="731520"/>
           </a:xfrm>
           <a:prstGeom prst="rect">
             <a:avLst/>
@@ -7319,27 +7789,27 @@
               </a:spcAft>
             </a:pPr>
             <a:r>
-              <a:rPr sz="3200" b="1" i="0">
+              <a:rPr sz="3000" b="1" i="0">
                 <a:solidFill>
                   <a:srgbClr val="039855"/>
                 </a:solidFill>
                 <a:latin typeface="Calibri"/>
               </a:rPr>
-              <a:t>7</a:t>
-            </a:r>
-          </a:p>
-        </p:txBody>
-      </p:sp>
-      <p:sp>
-        <p:nvSpPr>
-          <p:cNvPr id="18" name="TextBox 17"/>
+              <a:t>2–3%</a:t>
+            </a:r>
+          </a:p>
+        </p:txBody>
+      </p:sp>
+      <p:sp>
+        <p:nvSpPr>
+          <p:cNvPr id="19" name="TextBox 18"/>
           <p:cNvSpPr txBox="1"/>
           <p:nvPr/>
         </p:nvSpPr>
         <p:spPr>
           <a:xfrm>
-            <a:off x="7589520" y="4297680"/>
-            <a:ext cx="3886200" cy="457200"/>
+            <a:off x="7635240" y="5696712"/>
+            <a:ext cx="3840480" cy="457200"/>
           </a:xfrm>
           <a:prstGeom prst="rect">
             <a:avLst/>
@@ -7364,7 +7834,7 @@
                 </a:solidFill>
                 <a:latin typeface="Calibri"/>
               </a:rPr>
-              <a:t>Faktor penyebab dianalisis</a:t>
+              <a:t>Kerugian PDB/tahun</a:t>
             </a:r>
           </a:p>
         </p:txBody>
@@ -7553,7 +8023,7 @@
                 </a:solidFill>
                 <a:latin typeface="Calibri"/>
               </a:rPr>
-              <a:t>GAGASAN</a:t>
+              <a:t>IDENTIFIKASI MASALAH</a:t>
             </a:r>
           </a:p>
         </p:txBody>
@@ -7586,13 +8056,13 @@
               </a:spcAft>
             </a:pPr>
             <a:r>
-              <a:rPr sz="2800" b="1" i="0">
+              <a:rPr sz="2700" b="1" i="0">
                 <a:solidFill>
                   <a:srgbClr val="05312A"/>
                 </a:solidFill>
                 <a:latin typeface="Calibri"/>
               </a:rPr>
-              <a:t>Solusi: prediksi 7 faktor, langsung di perangkat</a:t>
+              <a:t>Kebutuhan &amp; pengaplikasian yang nyata</a:t>
             </a:r>
           </a:p>
         </p:txBody>
@@ -7606,7 +8076,7 @@
         <p:spPr>
           <a:xfrm>
             <a:off x="594360" y="1737360"/>
-            <a:ext cx="10972800" cy="1828800"/>
+            <a:ext cx="5486400" cy="4114800"/>
           </a:xfrm>
           <a:prstGeom prst="rect">
             <a:avLst/>
@@ -7625,7 +8095,7 @@
               </a:spcAft>
             </a:pPr>
             <a:r>
-              <a:rPr sz="1700" b="1">
+              <a:rPr sz="1500" b="1">
                 <a:solidFill>
                   <a:srgbClr val="039855"/>
                 </a:solidFill>
@@ -7633,31 +8103,64 @@
               <a:t>▸  </a:t>
             </a:r>
             <a:r>
-              <a:rPr sz="1700" b="0">
+              <a:rPr sz="1500" b="1">
                 <a:solidFill>
                   <a:srgbClr val="15241C"/>
                 </a:solidFill>
                 <a:latin typeface="Calibri"/>
               </a:rPr>
-              <a:t>Aplikasi web yang menggabungkan </a:t>
-            </a:r>
-            <a:r>
-              <a:rPr sz="1700" b="1">
+              <a:t>Kesenjangan:</a:t>
+            </a:r>
+            <a:r>
+              <a:rPr sz="1500" b="0">
                 <a:solidFill>
                   <a:srgbClr val="15241C"/>
                 </a:solidFill>
                 <a:latin typeface="Calibri"/>
               </a:rPr>
-              <a:t>7 faktor</a:t>
-            </a:r>
-            <a:r>
-              <a:rPr sz="1700" b="0">
+              <a:t> skrining lapangan masih manual di posyandu, 1 indikator, dan kurang tenaga gizi — terutama di daerah 3T berinternet terbatas.</a:t>
+            </a:r>
+          </a:p>
+          <a:p>
+            <a:pPr>
+              <a:spcAft>
+                <a:spcPts val="1000"/>
+              </a:spcAft>
+            </a:pPr>
+            <a:r>
+              <a:rPr sz="1500" b="1">
+                <a:solidFill>
+                  <a:srgbClr val="039855"/>
+                </a:solidFill>
+              </a:rPr>
+              <a:t>▸  </a:t>
+            </a:r>
+            <a:r>
+              <a:rPr sz="1500" b="0">
                 <a:solidFill>
                   <a:srgbClr val="15241C"/>
                 </a:solidFill>
                 <a:latin typeface="Calibri"/>
               </a:rPr>
-              <a:t> menjadi satu prediksi.</a:t>
+              <a:t>Belum ada alat skrining yang </a:t>
+            </a:r>
+            <a:r>
+              <a:rPr sz="1500" b="1">
+                <a:solidFill>
+                  <a:srgbClr val="15241C"/>
+                </a:solidFill>
+                <a:latin typeface="Calibri"/>
+              </a:rPr>
+              <a:t>murah, cepat, luring, dan privat</a:t>
+            </a:r>
+            <a:r>
+              <a:rPr sz="1500" b="0">
+                <a:solidFill>
+                  <a:srgbClr val="15241C"/>
+                </a:solidFill>
+                <a:latin typeface="Calibri"/>
+              </a:rPr>
+              <a:t>.</a:t>
             </a:r>
           </a:p>
           <a:p>
@@ -7667,7 +8170,7 @@
               </a:spcAft>
             </a:pPr>
             <a:r>
-              <a:rPr sz="1700" b="1">
+              <a:rPr sz="1500" b="1">
                 <a:solidFill>
                   <a:srgbClr val="039855"/>
                 </a:solidFill>
@@ -7675,55 +8178,13 @@
               <a:t>▸  </a:t>
             </a:r>
             <a:r>
-              <a:rPr sz="1700" b="0">
+              <a:rPr sz="1500" b="1">
                 <a:solidFill>
                   <a:srgbClr val="15241C"/>
                 </a:solidFill>
                 <a:latin typeface="Calibri"/>
               </a:rPr>
-              <a:t>Mesin prediksi: </a:t>
-            </a:r>
-            <a:r>
-              <a:rPr sz="1700" b="1">
-                <a:solidFill>
-                  <a:srgbClr val="15241C"/>
-                </a:solidFill>
-                <a:latin typeface="Calibri"/>
-              </a:rPr>
-              <a:t>Random Forest</a:t>
-            </a:r>
-            <a:r>
-              <a:rPr sz="1700" b="0">
-                <a:solidFill>
-                  <a:srgbClr val="15241C"/>
-                </a:solidFill>
-                <a:latin typeface="Calibri"/>
-              </a:rPr>
-              <a:t> (akurasi 88,40%).</a:t>
-            </a:r>
-          </a:p>
-          <a:p>
-            <a:pPr>
-              <a:spcAft>
-                <a:spcPts val="1000"/>
-              </a:spcAft>
-            </a:pPr>
-            <a:r>
-              <a:rPr sz="1700" b="1">
-                <a:solidFill>
-                  <a:srgbClr val="039855"/>
-                </a:solidFill>
-              </a:rPr>
-              <a:t>▸  </a:t>
-            </a:r>
-            <a:r>
-              <a:rPr sz="1700" b="0">
-                <a:solidFill>
-                  <a:srgbClr val="15241C"/>
-                </a:solidFill>
-                <a:latin typeface="Calibri"/>
-              </a:rPr>
-              <a:t>Output: status gizi + tingkat keyakinan + rekomendasi tindak lanjut.</a:t>
+              <a:t>Kebutuhan ini nyata namun belum terpenuhi.</a:t>
             </a:r>
           </a:p>
         </p:txBody>
@@ -7736,8 +8197,8 @@
         </p:nvSpPr>
         <p:spPr>
           <a:xfrm>
-            <a:off x="594360" y="3703320"/>
-            <a:ext cx="5349240" cy="2514600"/>
+            <a:off x="6263640" y="1737360"/>
+            <a:ext cx="5212080" cy="4297680"/>
           </a:xfrm>
           <a:prstGeom prst="rect">
             <a:avLst/>
@@ -7780,8 +8241,8 @@
         </p:nvSpPr>
         <p:spPr>
           <a:xfrm>
-            <a:off x="594360" y="3703320"/>
-            <a:ext cx="82296" cy="2514600"/>
+            <a:off x="6263640" y="1737360"/>
+            <a:ext cx="82296" cy="4297680"/>
           </a:xfrm>
           <a:prstGeom prst="rect">
             <a:avLst/>
@@ -7824,8 +8285,8 @@
         </p:nvSpPr>
         <p:spPr>
           <a:xfrm>
-            <a:off x="795528" y="3813048"/>
-            <a:ext cx="4983480" cy="2313432"/>
+            <a:off x="6464808" y="1847088"/>
+            <a:ext cx="4846320" cy="4096512"/>
           </a:xfrm>
           <a:prstGeom prst="rect">
             <a:avLst/>
@@ -7850,7 +8311,7 @@
                 </a:solidFill>
                 <a:latin typeface="Calibri"/>
               </a:rPr>
-              <a:t>Apa itu "berjalan 100% di peramban"?</a:t>
+              <a:t>Siapa yang memakai (use case nyata)</a:t>
             </a:r>
           </a:p>
           <a:p>
@@ -7866,120 +8327,9 @@
                 </a:solidFill>
                 <a:latin typeface="Calibri"/>
               </a:rPr>
-              <a:t>Peramban = aplikasi browser (Chrome, Safari, dll). Artinya semua perhitungan AI terjadi di HP/laptop pengguna sendiri — BUKAN di komputer server kami. Keuntungan: gratis, cepat, bisa tanpa internet, dan data anak tidak dikirim ke mana pun.</a:t>
-            </a:r>
-          </a:p>
-        </p:txBody>
-      </p:sp>
-      <p:sp>
-        <p:nvSpPr>
-          <p:cNvPr id="11" name="Rectangle 10"/>
-          <p:cNvSpPr/>
-          <p:nvPr/>
-        </p:nvSpPr>
-        <p:spPr>
-          <a:xfrm>
-            <a:off x="6126480" y="3703320"/>
-            <a:ext cx="5349240" cy="2514600"/>
-          </a:xfrm>
-          <a:prstGeom prst="rect">
-            <a:avLst/>
-          </a:prstGeom>
-          <a:solidFill>
-            <a:srgbClr val="EAF7F0"/>
-          </a:solidFill>
-          <a:ln>
-            <a:noFill/>
-          </a:ln>
-          <a:effectLst/>
-        </p:spPr>
-        <p:style>
-          <a:lnRef idx="1">
-            <a:schemeClr val="accent1"/>
-          </a:lnRef>
-          <a:fillRef idx="3">
-            <a:schemeClr val="accent1"/>
-          </a:fillRef>
-          <a:effectRef idx="2">
-            <a:schemeClr val="accent1"/>
-          </a:effectRef>
-          <a:fontRef idx="minor">
-            <a:schemeClr val="lt1"/>
-          </a:fontRef>
-        </p:style>
-        <p:txBody>
-          <a:bodyPr rtlCol="0" anchor="ctr"/>
-          <a:lstStyle/>
-          <a:p>
-            <a:pPr algn="ctr"/>
-          </a:p>
-        </p:txBody>
-      </p:sp>
-      <p:sp>
-        <p:nvSpPr>
-          <p:cNvPr id="12" name="Rectangle 11"/>
-          <p:cNvSpPr/>
-          <p:nvPr/>
-        </p:nvSpPr>
-        <p:spPr>
-          <a:xfrm>
-            <a:off x="6126480" y="3703320"/>
-            <a:ext cx="82296" cy="2514600"/>
-          </a:xfrm>
-          <a:prstGeom prst="rect">
-            <a:avLst/>
-          </a:prstGeom>
-          <a:solidFill>
-            <a:srgbClr val="039855"/>
-          </a:solidFill>
-          <a:ln>
-            <a:noFill/>
-          </a:ln>
-          <a:effectLst/>
-        </p:spPr>
-        <p:style>
-          <a:lnRef idx="1">
-            <a:schemeClr val="accent1"/>
-          </a:lnRef>
-          <a:fillRef idx="3">
-            <a:schemeClr val="accent1"/>
-          </a:fillRef>
-          <a:effectRef idx="2">
-            <a:schemeClr val="accent1"/>
-          </a:effectRef>
-          <a:fontRef idx="minor">
-            <a:schemeClr val="lt1"/>
-          </a:fontRef>
-        </p:style>
-        <p:txBody>
-          <a:bodyPr rtlCol="0" anchor="ctr"/>
-          <a:lstStyle/>
-          <a:p>
-            <a:pPr algn="ctr"/>
-          </a:p>
-        </p:txBody>
-      </p:sp>
-      <p:sp>
-        <p:nvSpPr>
-          <p:cNvPr id="13" name="TextBox 12"/>
-          <p:cNvSpPr txBox="1"/>
-          <p:nvPr/>
-        </p:nvSpPr>
-        <p:spPr>
-          <a:xfrm>
-            <a:off x="6327648" y="3813048"/>
-            <a:ext cx="4983480" cy="2313432"/>
-          </a:xfrm>
-          <a:prstGeom prst="rect">
-            <a:avLst/>
-          </a:prstGeom>
-          <a:noFill/>
-        </p:spPr>
-        <p:txBody>
-          <a:bodyPr wrap="square" anchor="t">
-            <a:spAutoFit/>
-          </a:bodyPr>
-          <a:lstStyle/>
+              <a:t>• Orang tua balita — skrining mandiri di rumah, bahkan tanpa internet.</a:t>
+            </a:r>
+          </a:p>
           <a:p>
             <a:pPr algn="l">
               <a:spcAft>
@@ -7987,13 +8337,13 @@
               </a:spcAft>
             </a:pPr>
             <a:r>
-              <a:rPr sz="1300" b="1" i="0">
-                <a:solidFill>
-                  <a:srgbClr val="039855"/>
-                </a:solidFill>
-                <a:latin typeface="Calibri"/>
-              </a:rPr>
-              <a:t>Apa itu "Z-Score WHO (HAZ)"?</a:t>
+              <a:rPr sz="1150" b="0" i="0">
+                <a:solidFill>
+                  <a:srgbClr val="15241C"/>
+                </a:solidFill>
+                <a:latin typeface="Calibri"/>
+              </a:rPr>
+              <a:t>• Kader posyandu — skrining cepat &amp; prioritas rujukan.</a:t>
             </a:r>
           </a:p>
           <a:p>
@@ -8009,7 +8359,23 @@
                 </a:solidFill>
                 <a:latin typeface="Calibri"/>
               </a:rPr>
-              <a:t>Angka yang membandingkan tinggi anak dengan tinggi standar WHO untuk anak seumur &amp; sejenis kelamin. 0 = persis rata-rata; di bawah −2 SD = lebih pendek dari normal (indikasi stunting); di atas +2 = lebih tinggi dari rata-rata.</a:t>
+              <a:t>• Puskesmas / Dinas Kesehatan — deteksi dini &amp; penentuan sasaran intervensi.</a:t>
+            </a:r>
+          </a:p>
+          <a:p>
+            <a:pPr algn="l">
+              <a:spcAft>
+                <a:spcPts val="300"/>
+              </a:spcAft>
+            </a:pPr>
+            <a:r>
+              <a:rPr sz="1150" b="0" i="0">
+                <a:solidFill>
+                  <a:srgbClr val="15241C"/>
+                </a:solidFill>
+                <a:latin typeface="Calibri"/>
+              </a:rPr>
+              <a:t>• Edukasi keluarga — asisten tanya-jawab pencegahan stunting.</a:t>
             </a:r>
           </a:p>
         </p:txBody>
@@ -8198,7 +8564,7 @@
                 </a:solidFill>
                 <a:latin typeface="Calibri"/>
               </a:rPr>
-              <a:t>FITUR</a:t>
+              <a:t>GAGASAN</a:t>
             </a:r>
           </a:p>
         </p:txBody>
@@ -8231,13 +8597,13 @@
               </a:spcAft>
             </a:pPr>
             <a:r>
-              <a:rPr sz="2800" b="1" i="0">
+              <a:rPr sz="2700" b="1" i="0">
                 <a:solidFill>
                   <a:srgbClr val="05312A"/>
                 </a:solidFill>
                 <a:latin typeface="Calibri"/>
               </a:rPr>
-              <a:t>Tujuh faktor masukan model</a:t>
+              <a:t>Solusi: prediksi cepat, di perangkat</a:t>
             </a:r>
           </a:p>
         </p:txBody>
@@ -8250,8 +8616,8 @@
         </p:nvSpPr>
         <p:spPr>
           <a:xfrm>
-            <a:off x="594360" y="1783080"/>
-            <a:ext cx="5394960" cy="2743200"/>
+            <a:off x="594360" y="1828800"/>
+            <a:ext cx="10972800" cy="3200400"/>
           </a:xfrm>
           <a:prstGeom prst="rect">
             <a:avLst/>
@@ -8270,7 +8636,7 @@
               </a:spcAft>
             </a:pPr>
             <a:r>
-              <a:rPr sz="1600" b="1">
+              <a:rPr sz="1800" b="1">
                 <a:solidFill>
                   <a:srgbClr val="039855"/>
                 </a:solidFill>
@@ -8278,22 +8644,31 @@
               <a:t>▸  </a:t>
             </a:r>
             <a:r>
-              <a:rPr sz="1600" b="1">
+              <a:rPr sz="1800" b="0">
                 <a:solidFill>
                   <a:srgbClr val="15241C"/>
                 </a:solidFill>
                 <a:latin typeface="Calibri"/>
               </a:rPr>
-              <a:t>Tinggi badan</a:t>
-            </a:r>
-            <a:r>
-              <a:rPr sz="1600" b="0">
+              <a:t>Aplikasi web dengan mesin prediksi </a:t>
+            </a:r>
+            <a:r>
+              <a:rPr sz="1800" b="1">
                 <a:solidFill>
                   <a:srgbClr val="15241C"/>
                 </a:solidFill>
                 <a:latin typeface="Calibri"/>
               </a:rPr>
-              <a:t> (cm) — indikator utama</a:t>
+              <a:t>Random Forest</a:t>
+            </a:r>
+            <a:r>
+              <a:rPr sz="1800" b="0">
+                <a:solidFill>
+                  <a:srgbClr val="15241C"/>
+                </a:solidFill>
+                <a:latin typeface="Calibri"/>
+              </a:rPr>
+              <a:t>.</a:t>
             </a:r>
           </a:p>
           <a:p>
@@ -8303,7 +8678,7 @@
               </a:spcAft>
             </a:pPr>
             <a:r>
-              <a:rPr sz="1600" b="1">
+              <a:rPr sz="1800" b="1">
                 <a:solidFill>
                   <a:srgbClr val="039855"/>
                 </a:solidFill>
@@ -8311,22 +8686,22 @@
               <a:t>▸  </a:t>
             </a:r>
             <a:r>
-              <a:rPr sz="1600" b="1">
+              <a:rPr sz="1800" b="1">
                 <a:solidFill>
                   <a:srgbClr val="15241C"/>
                 </a:solidFill>
                 <a:latin typeface="Calibri"/>
               </a:rPr>
-              <a:t>Umur</a:t>
-            </a:r>
-            <a:r>
-              <a:rPr sz="1600" b="0">
+              <a:t>Divalidasi pada dataset stunting balita NYATA Indonesia</a:t>
+            </a:r>
+            <a:r>
+              <a:rPr sz="1800" b="0">
                 <a:solidFill>
                   <a:srgbClr val="15241C"/>
                 </a:solidFill>
                 <a:latin typeface="Calibri"/>
               </a:rPr>
-              <a:t> (bulan) — acuan standar WHO</a:t>
+              <a:t> (55.367 sampel).</a:t>
             </a:r>
           </a:p>
           <a:p>
@@ -8336,7 +8711,7 @@
               </a:spcAft>
             </a:pPr>
             <a:r>
-              <a:rPr sz="1600" b="1">
+              <a:rPr sz="1800" b="1">
                 <a:solidFill>
                   <a:srgbClr val="039855"/>
                 </a:solidFill>
@@ -8344,22 +8719,31 @@
               <a:t>▸  </a:t>
             </a:r>
             <a:r>
-              <a:rPr sz="1600" b="1">
+              <a:rPr sz="1800" b="0">
                 <a:solidFill>
                   <a:srgbClr val="15241C"/>
                 </a:solidFill>
                 <a:latin typeface="Calibri"/>
               </a:rPr>
-              <a:t>Berat badan</a:t>
-            </a:r>
-            <a:r>
-              <a:rPr sz="1600" b="0">
+              <a:t>Berjalan </a:t>
+            </a:r>
+            <a:r>
+              <a:rPr sz="1800" b="1">
                 <a:solidFill>
                   <a:srgbClr val="15241C"/>
                 </a:solidFill>
                 <a:latin typeface="Calibri"/>
               </a:rPr>
-              <a:t> (kg)</a:t>
+              <a:t>100% di peramban</a:t>
+            </a:r>
+            <a:r>
+              <a:rPr sz="1800" b="0">
+                <a:solidFill>
+                  <a:srgbClr val="15241C"/>
+                </a:solidFill>
+                <a:latin typeface="Calibri"/>
+              </a:rPr>
+              <a:t> — gratis, cepat, dapat luring, privat.</a:t>
             </a:r>
           </a:p>
           <a:p>
@@ -8369,7 +8753,7 @@
               </a:spcAft>
             </a:pPr>
             <a:r>
-              <a:rPr sz="1600" b="1">
+              <a:rPr sz="1800" b="1">
                 <a:solidFill>
                   <a:srgbClr val="039855"/>
                 </a:solidFill>
@@ -8377,287 +8761,13 @@
               <a:t>▸  </a:t>
             </a:r>
             <a:r>
-              <a:rPr sz="1600" b="1">
+              <a:rPr sz="1800" b="0">
                 <a:solidFill>
                   <a:srgbClr val="15241C"/>
                 </a:solidFill>
                 <a:latin typeface="Calibri"/>
               </a:rPr>
-              <a:t>Jenis kelamin</a:t>
-            </a:r>
-            <a:r>
-              <a:rPr sz="1600" b="0">
-                <a:solidFill>
-                  <a:srgbClr val="15241C"/>
-                </a:solidFill>
-                <a:latin typeface="Calibri"/>
-              </a:rPr>
-              <a:t> — standar L/P beda</a:t>
-            </a:r>
-          </a:p>
-        </p:txBody>
-      </p:sp>
-      <p:sp>
-        <p:nvSpPr>
-          <p:cNvPr id="8" name="TextBox 7"/>
-          <p:cNvSpPr txBox="1"/>
-          <p:nvPr/>
-        </p:nvSpPr>
-        <p:spPr>
-          <a:xfrm>
-            <a:off x="6126480" y="1783080"/>
-            <a:ext cx="5394960" cy="2743200"/>
-          </a:xfrm>
-          <a:prstGeom prst="rect">
-            <a:avLst/>
-          </a:prstGeom>
-          <a:noFill/>
-        </p:spPr>
-        <p:txBody>
-          <a:bodyPr wrap="square">
-            <a:spAutoFit/>
-          </a:bodyPr>
-          <a:lstStyle/>
-          <a:p>
-            <a:pPr>
-              <a:spcAft>
-                <a:spcPts val="1000"/>
-              </a:spcAft>
-            </a:pPr>
-            <a:r>
-              <a:rPr sz="1600" b="1">
-                <a:solidFill>
-                  <a:srgbClr val="039855"/>
-                </a:solidFill>
-              </a:rPr>
-              <a:t>▸  </a:t>
-            </a:r>
-            <a:r>
-              <a:rPr sz="1600" b="1">
-                <a:solidFill>
-                  <a:srgbClr val="15241C"/>
-                </a:solidFill>
-                <a:latin typeface="Calibri"/>
-              </a:rPr>
-              <a:t>Jarak kehamilan</a:t>
-            </a:r>
-            <a:r>
-              <a:rPr sz="1600" b="0">
-                <a:solidFill>
-                  <a:srgbClr val="15241C"/>
-                </a:solidFill>
-                <a:latin typeface="Calibri"/>
-              </a:rPr>
-              <a:t> (bulan)</a:t>
-            </a:r>
-          </a:p>
-          <a:p>
-            <a:pPr>
-              <a:spcAft>
-                <a:spcPts val="1000"/>
-              </a:spcAft>
-            </a:pPr>
-            <a:r>
-              <a:rPr sz="1600" b="1">
-                <a:solidFill>
-                  <a:srgbClr val="039855"/>
-                </a:solidFill>
-              </a:rPr>
-              <a:t>▸  </a:t>
-            </a:r>
-            <a:r>
-              <a:rPr sz="1600" b="1">
-                <a:solidFill>
-                  <a:srgbClr val="15241C"/>
-                </a:solidFill>
-                <a:latin typeface="Calibri"/>
-              </a:rPr>
-              <a:t>Usia ibu menikah</a:t>
-            </a:r>
-            <a:r>
-              <a:rPr sz="1600" b="0">
-                <a:solidFill>
-                  <a:srgbClr val="15241C"/>
-                </a:solidFill>
-                <a:latin typeface="Calibri"/>
-              </a:rPr>
-              <a:t> (tahun)</a:t>
-            </a:r>
-          </a:p>
-          <a:p>
-            <a:pPr>
-              <a:spcAft>
-                <a:spcPts val="1000"/>
-              </a:spcAft>
-            </a:pPr>
-            <a:r>
-              <a:rPr sz="1600" b="1">
-                <a:solidFill>
-                  <a:srgbClr val="039855"/>
-                </a:solidFill>
-              </a:rPr>
-              <a:t>▸  </a:t>
-            </a:r>
-            <a:r>
-              <a:rPr sz="1600" b="1">
-                <a:solidFill>
-                  <a:srgbClr val="15241C"/>
-                </a:solidFill>
-                <a:latin typeface="Calibri"/>
-              </a:rPr>
-              <a:t>Gizi ibu saat hamil</a:t>
-            </a:r>
-            <a:r>
-              <a:rPr sz="1600" b="0">
-                <a:solidFill>
-                  <a:srgbClr val="15241C"/>
-                </a:solidFill>
-                <a:latin typeface="Calibri"/>
-              </a:rPr>
-              <a:t> (Baik/Sedang/Buruk)</a:t>
-            </a:r>
-          </a:p>
-        </p:txBody>
-      </p:sp>
-      <p:sp>
-        <p:nvSpPr>
-          <p:cNvPr id="9" name="Rectangle 8"/>
-          <p:cNvSpPr/>
-          <p:nvPr/>
-        </p:nvSpPr>
-        <p:spPr>
-          <a:xfrm>
-            <a:off x="594360" y="4800600"/>
-            <a:ext cx="10881360" cy="1417320"/>
-          </a:xfrm>
-          <a:prstGeom prst="rect">
-            <a:avLst/>
-          </a:prstGeom>
-          <a:solidFill>
-            <a:srgbClr val="EAF7F0"/>
-          </a:solidFill>
-          <a:ln>
-            <a:noFill/>
-          </a:ln>
-          <a:effectLst/>
-        </p:spPr>
-        <p:style>
-          <a:lnRef idx="1">
-            <a:schemeClr val="accent1"/>
-          </a:lnRef>
-          <a:fillRef idx="3">
-            <a:schemeClr val="accent1"/>
-          </a:fillRef>
-          <a:effectRef idx="2">
-            <a:schemeClr val="accent1"/>
-          </a:effectRef>
-          <a:fontRef idx="minor">
-            <a:schemeClr val="lt1"/>
-          </a:fontRef>
-        </p:style>
-        <p:txBody>
-          <a:bodyPr rtlCol="0" anchor="ctr"/>
-          <a:lstStyle/>
-          <a:p>
-            <a:pPr algn="ctr"/>
-          </a:p>
-        </p:txBody>
-      </p:sp>
-      <p:sp>
-        <p:nvSpPr>
-          <p:cNvPr id="10" name="Rectangle 9"/>
-          <p:cNvSpPr/>
-          <p:nvPr/>
-        </p:nvSpPr>
-        <p:spPr>
-          <a:xfrm>
-            <a:off x="594360" y="4800600"/>
-            <a:ext cx="82296" cy="1417320"/>
-          </a:xfrm>
-          <a:prstGeom prst="rect">
-            <a:avLst/>
-          </a:prstGeom>
-          <a:solidFill>
-            <a:srgbClr val="039855"/>
-          </a:solidFill>
-          <a:ln>
-            <a:noFill/>
-          </a:ln>
-          <a:effectLst/>
-        </p:spPr>
-        <p:style>
-          <a:lnRef idx="1">
-            <a:schemeClr val="accent1"/>
-          </a:lnRef>
-          <a:fillRef idx="3">
-            <a:schemeClr val="accent1"/>
-          </a:fillRef>
-          <a:effectRef idx="2">
-            <a:schemeClr val="accent1"/>
-          </a:effectRef>
-          <a:fontRef idx="minor">
-            <a:schemeClr val="lt1"/>
-          </a:fontRef>
-        </p:style>
-        <p:txBody>
-          <a:bodyPr rtlCol="0" anchor="ctr"/>
-          <a:lstStyle/>
-          <a:p>
-            <a:pPr algn="ctr"/>
-          </a:p>
-        </p:txBody>
-      </p:sp>
-      <p:sp>
-        <p:nvSpPr>
-          <p:cNvPr id="11" name="TextBox 10"/>
-          <p:cNvSpPr txBox="1"/>
-          <p:nvPr/>
-        </p:nvSpPr>
-        <p:spPr>
-          <a:xfrm>
-            <a:off x="795528" y="4910328"/>
-            <a:ext cx="10515600" cy="1216152"/>
-          </a:xfrm>
-          <a:prstGeom prst="rect">
-            <a:avLst/>
-          </a:prstGeom>
-          <a:noFill/>
-        </p:spPr>
-        <p:txBody>
-          <a:bodyPr wrap="square" anchor="t">
-            <a:spAutoFit/>
-          </a:bodyPr>
-          <a:lstStyle/>
-          <a:p>
-            <a:pPr algn="l">
-              <a:spcAft>
-                <a:spcPts val="300"/>
-              </a:spcAft>
-            </a:pPr>
-            <a:r>
-              <a:rPr sz="1300" b="1" i="0">
-                <a:solidFill>
-                  <a:srgbClr val="039855"/>
-                </a:solidFill>
-                <a:latin typeface="Calibri"/>
-              </a:rPr>
-              <a:t>Apa itu "ideal &gt; 24 bulan (BKKBN 4T)"?</a:t>
-            </a:r>
-          </a:p>
-          <a:p>
-            <a:pPr algn="l">
-              <a:spcAft>
-                <a:spcPts val="300"/>
-              </a:spcAft>
-            </a:pPr>
-            <a:r>
-              <a:rPr sz="1150" b="0" i="0">
-                <a:solidFill>
-                  <a:srgbClr val="15241C"/>
-                </a:solidFill>
-                <a:latin typeface="Calibri"/>
-              </a:rPr>
-              <a:t>Program "4 Terlalu" BKKBN: Terlalu muda, Terlalu tua, Terlalu dekat, Terlalu banyak. Jarak kehamilan ideal &gt; 24 bulan agar tubuh ibu pulih dulu. Jarak terlalu dekat menaikkan risiko stunting pada anak berikutnya.</a:t>
+              <a:t>Output: status gizi + tingkat keyakinan + Z-Score WHO + rekomendasi.</a:t>
             </a:r>
           </a:p>
         </p:txBody>
@@ -8846,7 +8956,7 @@
                 </a:solidFill>
                 <a:latin typeface="Calibri"/>
               </a:rPr>
-              <a:t>INTI ALGORITMA</a:t>
+              <a:t>FITUR</a:t>
             </a:r>
           </a:p>
         </p:txBody>
@@ -8879,13 +8989,13 @@
               </a:spcAft>
             </a:pPr>
             <a:r>
-              <a:rPr sz="2800" b="1" i="0">
+              <a:rPr sz="2700" b="1" i="0">
                 <a:solidFill>
                   <a:srgbClr val="05312A"/>
                 </a:solidFill>
                 <a:latin typeface="Calibri"/>
               </a:rPr>
-              <a:t>Random Forest — bagaimana ia bekerja</a:t>
+              <a:t>Faktor masukan model</a:t>
             </a:r>
           </a:p>
         </p:txBody>
@@ -8898,8 +9008,8 @@
         </p:nvSpPr>
         <p:spPr>
           <a:xfrm>
-            <a:off x="594360" y="1737360"/>
-            <a:ext cx="6858000" cy="4206240"/>
+            <a:off x="594360" y="1783080"/>
+            <a:ext cx="5394960" cy="2743200"/>
           </a:xfrm>
           <a:prstGeom prst="rect">
             <a:avLst/>
@@ -8932,7 +9042,7 @@
                 </a:solidFill>
                 <a:latin typeface="Calibri"/>
               </a:rPr>
-              <a:t>Ensemble</a:t>
+              <a:t>Umur</a:t>
             </a:r>
             <a:r>
               <a:rPr sz="1600" b="0">
@@ -8941,16 +9051,55 @@
                 </a:solidFill>
                 <a:latin typeface="Calibri"/>
               </a:rPr>
-              <a:t> = gabungan </a:t>
-            </a:r>
+              <a:t> (bulan)</a:t>
+            </a:r>
+          </a:p>
+          <a:p>
+            <a:pPr>
+              <a:spcAft>
+                <a:spcPts val="1000"/>
+              </a:spcAft>
+            </a:pPr>
             <a:r>
               <a:rPr sz="1600" b="1">
                 <a:solidFill>
+                  <a:srgbClr val="039855"/>
+                </a:solidFill>
+              </a:rPr>
+              <a:t>▸  </a:t>
+            </a:r>
+            <a:r>
+              <a:rPr sz="1600" b="1">
+                <a:solidFill>
                   <a:srgbClr val="15241C"/>
                 </a:solidFill>
                 <a:latin typeface="Calibri"/>
               </a:rPr>
-              <a:t>120 pohon keputusan</a:t>
+              <a:t>Jenis kelamin</a:t>
+            </a:r>
+          </a:p>
+          <a:p>
+            <a:pPr>
+              <a:spcAft>
+                <a:spcPts val="1000"/>
+              </a:spcAft>
+            </a:pPr>
+            <a:r>
+              <a:rPr sz="1600" b="1">
+                <a:solidFill>
+                  <a:srgbClr val="039855"/>
+                </a:solidFill>
+              </a:rPr>
+              <a:t>▸  </a:t>
+            </a:r>
+            <a:r>
+              <a:rPr sz="1600" b="1">
+                <a:solidFill>
+                  <a:srgbClr val="15241C"/>
+                </a:solidFill>
+                <a:latin typeface="Calibri"/>
+              </a:rPr>
+              <a:t>Tinggi badan</a:t>
             </a:r>
             <a:r>
               <a:rPr sz="1600" b="0">
@@ -8959,7 +9108,7 @@
                 </a:solidFill>
                 <a:latin typeface="Calibri"/>
               </a:rPr>
-              <a:t> (decision tree).</a:t>
+              <a:t> (cm) — indikator utama</a:t>
             </a:r>
           </a:p>
           <a:p>
@@ -8977,22 +9126,69 @@
               <a:t>▸  </a:t>
             </a:r>
             <a:r>
+              <a:rPr sz="1600" b="1">
+                <a:solidFill>
+                  <a:srgbClr val="15241C"/>
+                </a:solidFill>
+                <a:latin typeface="Calibri"/>
+              </a:rPr>
+              <a:t>Berat badan</a:t>
+            </a:r>
+            <a:r>
               <a:rPr sz="1600" b="0">
                 <a:solidFill>
                   <a:srgbClr val="15241C"/>
                 </a:solidFill>
                 <a:latin typeface="Calibri"/>
               </a:rPr>
-              <a:t>Tiap pohon belajar dari </a:t>
-            </a:r>
+              <a:t> (kg)</a:t>
+            </a:r>
+          </a:p>
+        </p:txBody>
+      </p:sp>
+      <p:sp>
+        <p:nvSpPr>
+          <p:cNvPr id="8" name="TextBox 7"/>
+          <p:cNvSpPr txBox="1"/>
+          <p:nvPr/>
+        </p:nvSpPr>
+        <p:spPr>
+          <a:xfrm>
+            <a:off x="6126480" y="1783080"/>
+            <a:ext cx="5394960" cy="2743200"/>
+          </a:xfrm>
+          <a:prstGeom prst="rect">
+            <a:avLst/>
+          </a:prstGeom>
+          <a:noFill/>
+        </p:spPr>
+        <p:txBody>
+          <a:bodyPr wrap="square">
+            <a:spAutoFit/>
+          </a:bodyPr>
+          <a:lstStyle/>
+          <a:p>
+            <a:pPr>
+              <a:spcAft>
+                <a:spcPts val="1000"/>
+              </a:spcAft>
+            </a:pPr>
             <a:r>
               <a:rPr sz="1600" b="1">
                 <a:solidFill>
+                  <a:srgbClr val="039855"/>
+                </a:solidFill>
+              </a:rPr>
+              <a:t>▸  </a:t>
+            </a:r>
+            <a:r>
+              <a:rPr sz="1600" b="1">
+                <a:solidFill>
                   <a:srgbClr val="15241C"/>
                 </a:solidFill>
                 <a:latin typeface="Calibri"/>
               </a:rPr>
-              <a:t>sebagian data acak</a:t>
+              <a:t>Jarak kehamilan</a:t>
             </a:r>
             <a:r>
               <a:rPr sz="1600" b="0">
@@ -9001,7 +9197,7 @@
                 </a:solidFill>
                 <a:latin typeface="Calibri"/>
               </a:rPr>
-              <a:t> (teknik bagging).</a:t>
+              <a:t> (bulan)</a:t>
             </a:r>
           </a:p>
           <a:p>
@@ -9019,129 +9215,60 @@
               <a:t>▸  </a:t>
             </a:r>
             <a:r>
+              <a:rPr sz="1600" b="1">
+                <a:solidFill>
+                  <a:srgbClr val="15241C"/>
+                </a:solidFill>
+                <a:latin typeface="Calibri"/>
+              </a:rPr>
+              <a:t>Usia ibu menikah</a:t>
+            </a:r>
+            <a:r>
               <a:rPr sz="1600" b="0">
                 <a:solidFill>
                   <a:srgbClr val="15241C"/>
                 </a:solidFill>
                 <a:latin typeface="Calibri"/>
               </a:rPr>
-              <a:t>Tiap pohon memberi "suara" prediksi; hasil akhir = </a:t>
-            </a:r>
+              <a:t> (tahun)</a:t>
+            </a:r>
+          </a:p>
+          <a:p>
+            <a:pPr>
+              <a:spcAft>
+                <a:spcPts val="1000"/>
+              </a:spcAft>
+            </a:pPr>
             <a:r>
               <a:rPr sz="1600" b="1">
                 <a:solidFill>
+                  <a:srgbClr val="039855"/>
+                </a:solidFill>
+              </a:rPr>
+              <a:t>▸  </a:t>
+            </a:r>
+            <a:r>
+              <a:rPr sz="1600" b="1">
+                <a:solidFill>
                   <a:srgbClr val="15241C"/>
                 </a:solidFill>
                 <a:latin typeface="Calibri"/>
               </a:rPr>
-              <a:t>rata-rata</a:t>
-            </a:r>
-            <a:r>
-              <a:rPr sz="1600" b="0">
-                <a:solidFill>
-                  <a:srgbClr val="15241C"/>
-                </a:solidFill>
-                <a:latin typeface="Calibri"/>
-              </a:rPr>
-              <a:t> semua pohon.</a:t>
-            </a:r>
-          </a:p>
-          <a:p>
-            <a:pPr>
-              <a:spcAft>
-                <a:spcPts val="1000"/>
-              </a:spcAft>
-            </a:pPr>
-            <a:r>
-              <a:rPr sz="1600" b="1">
-                <a:solidFill>
-                  <a:srgbClr val="039855"/>
-                </a:solidFill>
-              </a:rPr>
-              <a:t>▸  </a:t>
-            </a:r>
-            <a:r>
-              <a:rPr sz="1600" b="0">
-                <a:solidFill>
-                  <a:srgbClr val="15241C"/>
-                </a:solidFill>
-                <a:latin typeface="Calibri"/>
-              </a:rPr>
-              <a:t>Banyak pohon → hasil </a:t>
-            </a:r>
-            <a:r>
-              <a:rPr sz="1600" b="1">
-                <a:solidFill>
-                  <a:srgbClr val="15241C"/>
-                </a:solidFill>
-                <a:latin typeface="Calibri"/>
-              </a:rPr>
-              <a:t>lebih akurat &amp; stabil</a:t>
-            </a:r>
-            <a:r>
-              <a:rPr sz="1600" b="0">
-                <a:solidFill>
-                  <a:srgbClr val="15241C"/>
-                </a:solidFill>
-                <a:latin typeface="Calibri"/>
-              </a:rPr>
-              <a:t> (tidak mudah salah/overfit).</a:t>
-            </a:r>
-          </a:p>
-          <a:p>
-            <a:pPr>
-              <a:spcAft>
-                <a:spcPts val="1000"/>
-              </a:spcAft>
-            </a:pPr>
-            <a:r>
-              <a:rPr sz="1600" b="1">
-                <a:solidFill>
-                  <a:srgbClr val="039855"/>
-                </a:solidFill>
-              </a:rPr>
-              <a:t>▸  </a:t>
-            </a:r>
-            <a:r>
-              <a:rPr sz="1600" b="0">
-                <a:solidFill>
-                  <a:srgbClr val="15241C"/>
-                </a:solidFill>
-                <a:latin typeface="Calibri"/>
-              </a:rPr>
-              <a:t>Bonus: bisa menunjukkan </a:t>
-            </a:r>
-            <a:r>
-              <a:rPr sz="1600" b="1">
-                <a:solidFill>
-                  <a:srgbClr val="15241C"/>
-                </a:solidFill>
-                <a:latin typeface="Calibri"/>
-              </a:rPr>
-              <a:t>faktor mana yang paling penting</a:t>
-            </a:r>
-            <a:r>
-              <a:rPr sz="1600" b="0">
-                <a:solidFill>
-                  <a:srgbClr val="15241C"/>
-                </a:solidFill>
-                <a:latin typeface="Calibri"/>
-              </a:rPr>
-              <a:t> (transparan).</a:t>
-            </a:r>
-          </a:p>
-        </p:txBody>
-      </p:sp>
-      <p:sp>
-        <p:nvSpPr>
-          <p:cNvPr id="8" name="Rectangle 7"/>
+              <a:t>Gizi ibu saat hamil</a:t>
+            </a:r>
+          </a:p>
+        </p:txBody>
+      </p:sp>
+      <p:sp>
+        <p:nvSpPr>
+          <p:cNvPr id="9" name="Rectangle 8"/>
           <p:cNvSpPr/>
           <p:nvPr/>
         </p:nvSpPr>
         <p:spPr>
           <a:xfrm>
-            <a:off x="7955279" y="2286000"/>
-            <a:ext cx="1005840" cy="2286000"/>
+            <a:off x="594360" y="4754880"/>
+            <a:ext cx="10881360" cy="1371600"/>
           </a:xfrm>
           <a:prstGeom prst="rect">
             <a:avLst/>
@@ -9178,14 +9305,14 @@
       </p:sp>
       <p:sp>
         <p:nvSpPr>
-          <p:cNvPr id="9" name="Rectangle 8"/>
+          <p:cNvPr id="10" name="Rectangle 9"/>
           <p:cNvSpPr/>
           <p:nvPr/>
         </p:nvSpPr>
         <p:spPr>
           <a:xfrm>
-            <a:off x="7955279" y="2286000"/>
-            <a:ext cx="1005840" cy="73152"/>
+            <a:off x="594360" y="4754880"/>
+            <a:ext cx="82296" cy="1371600"/>
           </a:xfrm>
           <a:prstGeom prst="rect">
             <a:avLst/>
@@ -9222,307 +9349,14 @@
       </p:sp>
       <p:sp>
         <p:nvSpPr>
-          <p:cNvPr id="10" name="TextBox 9"/>
+          <p:cNvPr id="11" name="TextBox 10"/>
           <p:cNvSpPr txBox="1"/>
           <p:nvPr/>
         </p:nvSpPr>
         <p:spPr>
           <a:xfrm>
-            <a:off x="7955279" y="3063240"/>
-            <a:ext cx="1005840" cy="548640"/>
-          </a:xfrm>
-          <a:prstGeom prst="rect">
-            <a:avLst/>
-          </a:prstGeom>
-          <a:noFill/>
-        </p:spPr>
-        <p:txBody>
-          <a:bodyPr wrap="square" anchor="ctr">
-            <a:spAutoFit/>
-          </a:bodyPr>
-          <a:lstStyle/>
-          <a:p>
-            <a:pPr algn="ctr">
-              <a:spcAft>
-                <a:spcPts val="600"/>
-              </a:spcAft>
-            </a:pPr>
-            <a:r>
-              <a:rPr sz="1400" b="1" i="0">
-                <a:solidFill>
-                  <a:srgbClr val="039855"/>
-                </a:solidFill>
-                <a:latin typeface="Calibri"/>
-              </a:rPr>
-              <a:t>Pohon 1</a:t>
-            </a:r>
-          </a:p>
-        </p:txBody>
-      </p:sp>
-      <p:sp>
-        <p:nvSpPr>
-          <p:cNvPr id="11" name="Rectangle 10"/>
-          <p:cNvSpPr/>
-          <p:nvPr/>
-        </p:nvSpPr>
-        <p:spPr>
-          <a:xfrm>
-            <a:off x="9235440" y="2286000"/>
-            <a:ext cx="1005840" cy="2286000"/>
-          </a:xfrm>
-          <a:prstGeom prst="rect">
-            <a:avLst/>
-          </a:prstGeom>
-          <a:solidFill>
-            <a:srgbClr val="EAF7F0"/>
-          </a:solidFill>
-          <a:ln>
-            <a:noFill/>
-          </a:ln>
-          <a:effectLst/>
-        </p:spPr>
-        <p:style>
-          <a:lnRef idx="1">
-            <a:schemeClr val="accent1"/>
-          </a:lnRef>
-          <a:fillRef idx="3">
-            <a:schemeClr val="accent1"/>
-          </a:fillRef>
-          <a:effectRef idx="2">
-            <a:schemeClr val="accent1"/>
-          </a:effectRef>
-          <a:fontRef idx="minor">
-            <a:schemeClr val="lt1"/>
-          </a:fontRef>
-        </p:style>
-        <p:txBody>
-          <a:bodyPr rtlCol="0" anchor="ctr"/>
-          <a:lstStyle/>
-          <a:p>
-            <a:pPr algn="ctr"/>
-          </a:p>
-        </p:txBody>
-      </p:sp>
-      <p:sp>
-        <p:nvSpPr>
-          <p:cNvPr id="12" name="Rectangle 11"/>
-          <p:cNvSpPr/>
-          <p:nvPr/>
-        </p:nvSpPr>
-        <p:spPr>
-          <a:xfrm>
-            <a:off x="9235440" y="2286000"/>
-            <a:ext cx="1005840" cy="73152"/>
-          </a:xfrm>
-          <a:prstGeom prst="rect">
-            <a:avLst/>
-          </a:prstGeom>
-          <a:solidFill>
-            <a:srgbClr val="039855"/>
-          </a:solidFill>
-          <a:ln>
-            <a:noFill/>
-          </a:ln>
-          <a:effectLst/>
-        </p:spPr>
-        <p:style>
-          <a:lnRef idx="1">
-            <a:schemeClr val="accent1"/>
-          </a:lnRef>
-          <a:fillRef idx="3">
-            <a:schemeClr val="accent1"/>
-          </a:fillRef>
-          <a:effectRef idx="2">
-            <a:schemeClr val="accent1"/>
-          </a:effectRef>
-          <a:fontRef idx="minor">
-            <a:schemeClr val="lt1"/>
-          </a:fontRef>
-        </p:style>
-        <p:txBody>
-          <a:bodyPr rtlCol="0" anchor="ctr"/>
-          <a:lstStyle/>
-          <a:p>
-            <a:pPr algn="ctr"/>
-          </a:p>
-        </p:txBody>
-      </p:sp>
-      <p:sp>
-        <p:nvSpPr>
-          <p:cNvPr id="13" name="TextBox 12"/>
-          <p:cNvSpPr txBox="1"/>
-          <p:nvPr/>
-        </p:nvSpPr>
-        <p:spPr>
-          <a:xfrm>
-            <a:off x="9235440" y="3063240"/>
-            <a:ext cx="1005840" cy="548640"/>
-          </a:xfrm>
-          <a:prstGeom prst="rect">
-            <a:avLst/>
-          </a:prstGeom>
-          <a:noFill/>
-        </p:spPr>
-        <p:txBody>
-          <a:bodyPr wrap="square" anchor="ctr">
-            <a:spAutoFit/>
-          </a:bodyPr>
-          <a:lstStyle/>
-          <a:p>
-            <a:pPr algn="ctr">
-              <a:spcAft>
-                <a:spcPts val="600"/>
-              </a:spcAft>
-            </a:pPr>
-            <a:r>
-              <a:rPr sz="1400" b="1" i="0">
-                <a:solidFill>
-                  <a:srgbClr val="039855"/>
-                </a:solidFill>
-                <a:latin typeface="Calibri"/>
-              </a:rPr>
-              <a:t>Pohon 2</a:t>
-            </a:r>
-          </a:p>
-        </p:txBody>
-      </p:sp>
-      <p:sp>
-        <p:nvSpPr>
-          <p:cNvPr id="14" name="Rectangle 13"/>
-          <p:cNvSpPr/>
-          <p:nvPr/>
-        </p:nvSpPr>
-        <p:spPr>
-          <a:xfrm>
-            <a:off x="10515600" y="2286000"/>
-            <a:ext cx="1005840" cy="2286000"/>
-          </a:xfrm>
-          <a:prstGeom prst="rect">
-            <a:avLst/>
-          </a:prstGeom>
-          <a:solidFill>
-            <a:srgbClr val="EAF7F0"/>
-          </a:solidFill>
-          <a:ln>
-            <a:noFill/>
-          </a:ln>
-          <a:effectLst/>
-        </p:spPr>
-        <p:style>
-          <a:lnRef idx="1">
-            <a:schemeClr val="accent1"/>
-          </a:lnRef>
-          <a:fillRef idx="3">
-            <a:schemeClr val="accent1"/>
-          </a:fillRef>
-          <a:effectRef idx="2">
-            <a:schemeClr val="accent1"/>
-          </a:effectRef>
-          <a:fontRef idx="minor">
-            <a:schemeClr val="lt1"/>
-          </a:fontRef>
-        </p:style>
-        <p:txBody>
-          <a:bodyPr rtlCol="0" anchor="ctr"/>
-          <a:lstStyle/>
-          <a:p>
-            <a:pPr algn="ctr"/>
-          </a:p>
-        </p:txBody>
-      </p:sp>
-      <p:sp>
-        <p:nvSpPr>
-          <p:cNvPr id="15" name="Rectangle 14"/>
-          <p:cNvSpPr/>
-          <p:nvPr/>
-        </p:nvSpPr>
-        <p:spPr>
-          <a:xfrm>
-            <a:off x="10515600" y="2286000"/>
-            <a:ext cx="1005840" cy="73152"/>
-          </a:xfrm>
-          <a:prstGeom prst="rect">
-            <a:avLst/>
-          </a:prstGeom>
-          <a:solidFill>
-            <a:srgbClr val="039855"/>
-          </a:solidFill>
-          <a:ln>
-            <a:noFill/>
-          </a:ln>
-          <a:effectLst/>
-        </p:spPr>
-        <p:style>
-          <a:lnRef idx="1">
-            <a:schemeClr val="accent1"/>
-          </a:lnRef>
-          <a:fillRef idx="3">
-            <a:schemeClr val="accent1"/>
-          </a:fillRef>
-          <a:effectRef idx="2">
-            <a:schemeClr val="accent1"/>
-          </a:effectRef>
-          <a:fontRef idx="minor">
-            <a:schemeClr val="lt1"/>
-          </a:fontRef>
-        </p:style>
-        <p:txBody>
-          <a:bodyPr rtlCol="0" anchor="ctr"/>
-          <a:lstStyle/>
-          <a:p>
-            <a:pPr algn="ctr"/>
-          </a:p>
-        </p:txBody>
-      </p:sp>
-      <p:sp>
-        <p:nvSpPr>
-          <p:cNvPr id="16" name="TextBox 15"/>
-          <p:cNvSpPr txBox="1"/>
-          <p:nvPr/>
-        </p:nvSpPr>
-        <p:spPr>
-          <a:xfrm>
-            <a:off x="10515600" y="3063240"/>
-            <a:ext cx="1005840" cy="548640"/>
-          </a:xfrm>
-          <a:prstGeom prst="rect">
-            <a:avLst/>
-          </a:prstGeom>
-          <a:noFill/>
-        </p:spPr>
-        <p:txBody>
-          <a:bodyPr wrap="square" anchor="ctr">
-            <a:spAutoFit/>
-          </a:bodyPr>
-          <a:lstStyle/>
-          <a:p>
-            <a:pPr algn="ctr">
-              <a:spcAft>
-                <a:spcPts val="600"/>
-              </a:spcAft>
-            </a:pPr>
-            <a:r>
-              <a:rPr sz="1400" b="1" i="0">
-                <a:solidFill>
-                  <a:srgbClr val="039855"/>
-                </a:solidFill>
-                <a:latin typeface="Calibri"/>
-              </a:rPr>
-              <a:t>Pohon 3</a:t>
-            </a:r>
-          </a:p>
-        </p:txBody>
-      </p:sp>
-      <p:sp>
-        <p:nvSpPr>
-          <p:cNvPr id="17" name="TextBox 16"/>
-          <p:cNvSpPr txBox="1"/>
-          <p:nvPr/>
-        </p:nvSpPr>
-        <p:spPr>
-          <a:xfrm>
-            <a:off x="7955279" y="4754880"/>
-            <a:ext cx="3657600" cy="548640"/>
+            <a:off x="795528" y="4864608"/>
+            <a:ext cx="10515600" cy="1170432"/>
           </a:xfrm>
           <a:prstGeom prst="rect">
             <a:avLst/>
@@ -9535,19 +9369,35 @@
           </a:bodyPr>
           <a:lstStyle/>
           <a:p>
-            <a:pPr algn="ctr">
-              <a:spcAft>
-                <a:spcPts val="600"/>
-              </a:spcAft>
-            </a:pPr>
-            <a:r>
-              <a:rPr sz="1300" b="0" i="1">
-                <a:solidFill>
-                  <a:srgbClr val="4B5563"/>
-                </a:solidFill>
-                <a:latin typeface="Calibri"/>
-              </a:rPr>
-              <a:t>120 pohon → voting → 1 prediksi</a:t>
+            <a:pPr algn="l">
+              <a:spcAft>
+                <a:spcPts val="300"/>
+              </a:spcAft>
+            </a:pPr>
+            <a:r>
+              <a:rPr sz="1300" b="1" i="0">
+                <a:solidFill>
+                  <a:srgbClr val="039855"/>
+                </a:solidFill>
+                <a:latin typeface="Calibri"/>
+              </a:rPr>
+              <a:t>Inti vs pengembangan</a:t>
+            </a:r>
+          </a:p>
+          <a:p>
+            <a:pPr algn="l">
+              <a:spcAft>
+                <a:spcPts val="300"/>
+              </a:spcAft>
+            </a:pPr>
+            <a:r>
+              <a:rPr sz="1150" b="0" i="0">
+                <a:solidFill>
+                  <a:srgbClr val="15241C"/>
+                </a:solidFill>
+                <a:latin typeface="Calibri"/>
+              </a:rPr>
+              <a:t>Model INTI (divalidasi data nyata) memakai 3 fitur: umur, jenis kelamin, tinggi badan. Prototipe PENGEMBANGAN menambah berat badan &amp; faktor maternal (dari literatur) = 7 fitur.</a:t>
             </a:r>
           </a:p>
         </p:txBody>
@@ -9769,13 +9619,13 @@
               </a:spcAft>
             </a:pPr>
             <a:r>
-              <a:rPr sz="2800" b="1" i="0">
+              <a:rPr sz="2700" b="1" i="0">
                 <a:solidFill>
                   <a:srgbClr val="05312A"/>
                 </a:solidFill>
                 <a:latin typeface="Calibri"/>
               </a:rPr>
-              <a:t>Bagaimana model dilatih — langkah demi langkah</a:t>
+              <a:t>Random Forest — cara kerja</a:t>
             </a:r>
           </a:p>
         </p:txBody>
@@ -9788,8 +9638,8 @@
         </p:nvSpPr>
         <p:spPr>
           <a:xfrm>
-            <a:off x="594360" y="1691640"/>
-            <a:ext cx="6675120" cy="4389120"/>
+            <a:off x="594360" y="1737360"/>
+            <a:ext cx="6949440" cy="4206240"/>
           </a:xfrm>
           <a:prstGeom prst="rect">
             <a:avLst/>
@@ -9822,7 +9672,7 @@
                 </a:solidFill>
                 <a:latin typeface="Calibri"/>
               </a:rPr>
-              <a:t>1. Kumpulkan data:</a:t>
+              <a:t>Ensemble</a:t>
             </a:r>
             <a:r>
               <a:rPr sz="1600" b="0">
@@ -9831,7 +9681,25 @@
                 </a:solidFill>
                 <a:latin typeface="Calibri"/>
               </a:rPr>
-              <a:t> 25.000 contoh (7 faktor + status gizinya).</a:t>
+              <a:t> 120 </a:t>
+            </a:r>
+            <a:r>
+              <a:rPr sz="1600" b="1">
+                <a:solidFill>
+                  <a:srgbClr val="15241C"/>
+                </a:solidFill>
+                <a:latin typeface="Calibri"/>
+              </a:rPr>
+              <a:t>pohon keputusan</a:t>
+            </a:r>
+            <a:r>
+              <a:rPr sz="1600" b="0">
+                <a:solidFill>
+                  <a:srgbClr val="15241C"/>
+                </a:solidFill>
+                <a:latin typeface="Calibri"/>
+              </a:rPr>
+              <a:t> (Breiman, 2001).</a:t>
             </a:r>
           </a:p>
           <a:p>
@@ -9849,13 +9717,22 @@
               <a:t>▸  </a:t>
             </a:r>
             <a:r>
+              <a:rPr sz="1600" b="0">
+                <a:solidFill>
+                  <a:srgbClr val="15241C"/>
+                </a:solidFill>
+                <a:latin typeface="Calibri"/>
+              </a:rPr>
+              <a:t>Tiap pohon belajar dari </a:t>
+            </a:r>
+            <a:r>
               <a:rPr sz="1600" b="1">
                 <a:solidFill>
                   <a:srgbClr val="15241C"/>
                 </a:solidFill>
                 <a:latin typeface="Calibri"/>
               </a:rPr>
-              <a:t>2. Encoding:</a:t>
+              <a:t>sampel acak</a:t>
             </a:r>
             <a:r>
               <a:rPr sz="1600" b="0">
@@ -9864,7 +9741,7 @@
                 </a:solidFill>
                 <a:latin typeface="Calibri"/>
               </a:rPr>
-              <a:t> ubah teks menjadi angka agar bisa dihitung komputer.</a:t>
+              <a:t> data (bagging) + subset fitur acak.</a:t>
             </a:r>
           </a:p>
           <a:p>
@@ -9882,13 +9759,22 @@
               <a:t>▸  </a:t>
             </a:r>
             <a:r>
+              <a:rPr sz="1600" b="0">
+                <a:solidFill>
+                  <a:srgbClr val="15241C"/>
+                </a:solidFill>
+                <a:latin typeface="Calibri"/>
+              </a:rPr>
+              <a:t>Hasil akhir = </a:t>
+            </a:r>
+            <a:r>
               <a:rPr sz="1600" b="1">
                 <a:solidFill>
                   <a:srgbClr val="15241C"/>
                 </a:solidFill>
                 <a:latin typeface="Calibri"/>
               </a:rPr>
-              <a:t>3. Bagi data:</a:t>
+              <a:t>rata-rata probabilitas</a:t>
             </a:r>
             <a:r>
               <a:rPr sz="1600" b="0">
@@ -9897,7 +9783,7 @@
                 </a:solidFill>
                 <a:latin typeface="Calibri"/>
               </a:rPr>
-              <a:t> 80% untuk belajar (latih), 20% untuk ujian (uji).</a:t>
+              <a:t> semua pohon (soft voting).</a:t>
             </a:r>
           </a:p>
           <a:p>
@@ -9915,13 +9801,22 @@
               <a:t>▸  </a:t>
             </a:r>
             <a:r>
+              <a:rPr sz="1600" b="0">
+                <a:solidFill>
+                  <a:srgbClr val="15241C"/>
+                </a:solidFill>
+                <a:latin typeface="Calibri"/>
+              </a:rPr>
+              <a:t>Banyak pohon → akurat &amp; </a:t>
+            </a:r>
+            <a:r>
               <a:rPr sz="1600" b="1">
                 <a:solidFill>
                   <a:srgbClr val="15241C"/>
                 </a:solidFill>
                 <a:latin typeface="Calibri"/>
               </a:rPr>
-              <a:t>4. Latih:</a:t>
+              <a:t>tahan overfitting</a:t>
             </a:r>
             <a:r>
               <a:rPr sz="1600" b="0">
@@ -9930,31 +9825,16 @@
                 </a:solidFill>
                 <a:latin typeface="Calibri"/>
               </a:rPr>
-              <a:t> 120 pohon belajar pola dari data latih.</a:t>
-            </a:r>
-          </a:p>
-          <a:p>
-            <a:pPr>
-              <a:spcAft>
-                <a:spcPts val="1000"/>
-              </a:spcAft>
-            </a:pPr>
+              <a:t>; memberi </a:t>
+            </a:r>
             <a:r>
               <a:rPr sz="1600" b="1">
                 <a:solidFill>
-                  <a:srgbClr val="039855"/>
-                </a:solidFill>
-              </a:rPr>
-              <a:t>▸  </a:t>
-            </a:r>
-            <a:r>
-              <a:rPr sz="1600" b="1">
-                <a:solidFill>
                   <a:srgbClr val="15241C"/>
                 </a:solidFill>
                 <a:latin typeface="Calibri"/>
               </a:rPr>
-              <a:t>5. Uji:</a:t>
+              <a:t>feature importance</a:t>
             </a:r>
             <a:r>
               <a:rPr sz="1600" b="0">
@@ -9963,7 +9843,7 @@
                 </a:solidFill>
                 <a:latin typeface="Calibri"/>
               </a:rPr>
-              <a:t> model diuji pada 20% data yang belum pernah dilihat.</a:t>
+              <a:t>.</a:t>
             </a:r>
           </a:p>
         </p:txBody>
@@ -9976,8 +9856,8 @@
         </p:nvSpPr>
         <p:spPr>
           <a:xfrm>
-            <a:off x="7498079" y="1691640"/>
-            <a:ext cx="4023360" cy="2240280"/>
+            <a:off x="8046720" y="2377440"/>
+            <a:ext cx="960120" cy="2194560"/>
           </a:xfrm>
           <a:prstGeom prst="rect">
             <a:avLst/>
@@ -10020,8 +9900,8 @@
         </p:nvSpPr>
         <p:spPr>
           <a:xfrm>
-            <a:off x="7498079" y="1691640"/>
-            <a:ext cx="82296" cy="2240280"/>
+            <a:off x="8046720" y="2377440"/>
+            <a:ext cx="960120" cy="73152"/>
           </a:xfrm>
           <a:prstGeom prst="rect">
             <a:avLst/>
@@ -10064,8 +9944,8 @@
         </p:nvSpPr>
         <p:spPr>
           <a:xfrm>
-            <a:off x="7699247" y="1801368"/>
-            <a:ext cx="3657600" cy="2039112"/>
+            <a:off x="8046720" y="3154680"/>
+            <a:ext cx="960120" cy="548640"/>
           </a:xfrm>
           <a:prstGeom prst="rect">
             <a:avLst/>
@@ -10073,14 +9953,14 @@
           <a:noFill/>
         </p:spPr>
         <p:txBody>
-          <a:bodyPr wrap="square" anchor="t">
+          <a:bodyPr wrap="square" anchor="ctr">
             <a:spAutoFit/>
           </a:bodyPr>
           <a:lstStyle/>
           <a:p>
-            <a:pPr algn="l">
-              <a:spcAft>
-                <a:spcPts val="300"/>
+            <a:pPr algn="ctr">
+              <a:spcAft>
+                <a:spcPts val="600"/>
               </a:spcAft>
             </a:pPr>
             <a:r>
@@ -10090,23 +9970,7 @@
                 </a:solidFill>
                 <a:latin typeface="Calibri"/>
               </a:rPr>
-              <a:t>Apa itu "Encoding"?</a:t>
-            </a:r>
-          </a:p>
-          <a:p>
-            <a:pPr algn="l">
-              <a:spcAft>
-                <a:spcPts val="300"/>
-              </a:spcAft>
-            </a:pPr>
-            <a:r>
-              <a:rPr sz="1150" b="0" i="0">
-                <a:solidFill>
-                  <a:srgbClr val="15241C"/>
-                </a:solidFill>
-                <a:latin typeface="Calibri"/>
-              </a:rPr>
-              <a:t>Komputer hanya mengerti angka, bukan teks. Encoding = mengubah teks jadi angka. Contoh: Laki-laki→0, Perempuan→1; gizi Baik→0, Buruk→1, Sedang→2. Ini disebut Label Encoding.</a:t>
+              <a:t>Pohon 1</a:t>
             </a:r>
           </a:p>
         </p:txBody>
@@ -10119,14 +9983,14 @@
         </p:nvSpPr>
         <p:spPr>
           <a:xfrm>
-            <a:off x="7498079" y="4114800"/>
-            <a:ext cx="4023360" cy="1828800"/>
+            <a:off x="9281160" y="2377440"/>
+            <a:ext cx="960120" cy="2194560"/>
           </a:xfrm>
           <a:prstGeom prst="rect">
             <a:avLst/>
           </a:prstGeom>
           <a:solidFill>
-            <a:srgbClr val="05312A"/>
+            <a:srgbClr val="EAF7F0"/>
           </a:solidFill>
           <a:ln>
             <a:noFill/>
@@ -10157,14 +10021,224 @@
       </p:sp>
       <p:sp>
         <p:nvSpPr>
-          <p:cNvPr id="12" name="TextBox 11"/>
+          <p:cNvPr id="12" name="Rectangle 11"/>
+          <p:cNvSpPr/>
+          <p:nvPr/>
+        </p:nvSpPr>
+        <p:spPr>
+          <a:xfrm>
+            <a:off x="9281160" y="2377440"/>
+            <a:ext cx="960120" cy="73152"/>
+          </a:xfrm>
+          <a:prstGeom prst="rect">
+            <a:avLst/>
+          </a:prstGeom>
+          <a:solidFill>
+            <a:srgbClr val="039855"/>
+          </a:solidFill>
+          <a:ln>
+            <a:noFill/>
+          </a:ln>
+          <a:effectLst/>
+        </p:spPr>
+        <p:style>
+          <a:lnRef idx="1">
+            <a:schemeClr val="accent1"/>
+          </a:lnRef>
+          <a:fillRef idx="3">
+            <a:schemeClr val="accent1"/>
+          </a:fillRef>
+          <a:effectRef idx="2">
+            <a:schemeClr val="accent1"/>
+          </a:effectRef>
+          <a:fontRef idx="minor">
+            <a:schemeClr val="lt1"/>
+          </a:fontRef>
+        </p:style>
+        <p:txBody>
+          <a:bodyPr rtlCol="0" anchor="ctr"/>
+          <a:lstStyle/>
+          <a:p>
+            <a:pPr algn="ctr"/>
+          </a:p>
+        </p:txBody>
+      </p:sp>
+      <p:sp>
+        <p:nvSpPr>
+          <p:cNvPr id="13" name="TextBox 12"/>
           <p:cNvSpPr txBox="1"/>
           <p:nvPr/>
         </p:nvSpPr>
         <p:spPr>
           <a:xfrm>
-            <a:off x="7680960" y="4261104"/>
-            <a:ext cx="3703320" cy="1554480"/>
+            <a:off x="9281160" y="3154680"/>
+            <a:ext cx="960120" cy="548640"/>
+          </a:xfrm>
+          <a:prstGeom prst="rect">
+            <a:avLst/>
+          </a:prstGeom>
+          <a:noFill/>
+        </p:spPr>
+        <p:txBody>
+          <a:bodyPr wrap="square" anchor="ctr">
+            <a:spAutoFit/>
+          </a:bodyPr>
+          <a:lstStyle/>
+          <a:p>
+            <a:pPr algn="ctr">
+              <a:spcAft>
+                <a:spcPts val="600"/>
+              </a:spcAft>
+            </a:pPr>
+            <a:r>
+              <a:rPr sz="1300" b="1" i="0">
+                <a:solidFill>
+                  <a:srgbClr val="039855"/>
+                </a:solidFill>
+                <a:latin typeface="Calibri"/>
+              </a:rPr>
+              <a:t>Pohon 2</a:t>
+            </a:r>
+          </a:p>
+        </p:txBody>
+      </p:sp>
+      <p:sp>
+        <p:nvSpPr>
+          <p:cNvPr id="14" name="Rectangle 13"/>
+          <p:cNvSpPr/>
+          <p:nvPr/>
+        </p:nvSpPr>
+        <p:spPr>
+          <a:xfrm>
+            <a:off x="10515600" y="2377440"/>
+            <a:ext cx="960120" cy="2194560"/>
+          </a:xfrm>
+          <a:prstGeom prst="rect">
+            <a:avLst/>
+          </a:prstGeom>
+          <a:solidFill>
+            <a:srgbClr val="EAF7F0"/>
+          </a:solidFill>
+          <a:ln>
+            <a:noFill/>
+          </a:ln>
+          <a:effectLst/>
+        </p:spPr>
+        <p:style>
+          <a:lnRef idx="1">
+            <a:schemeClr val="accent1"/>
+          </a:lnRef>
+          <a:fillRef idx="3">
+            <a:schemeClr val="accent1"/>
+          </a:fillRef>
+          <a:effectRef idx="2">
+            <a:schemeClr val="accent1"/>
+          </a:effectRef>
+          <a:fontRef idx="minor">
+            <a:schemeClr val="lt1"/>
+          </a:fontRef>
+        </p:style>
+        <p:txBody>
+          <a:bodyPr rtlCol="0" anchor="ctr"/>
+          <a:lstStyle/>
+          <a:p>
+            <a:pPr algn="ctr"/>
+          </a:p>
+        </p:txBody>
+      </p:sp>
+      <p:sp>
+        <p:nvSpPr>
+          <p:cNvPr id="15" name="Rectangle 14"/>
+          <p:cNvSpPr/>
+          <p:nvPr/>
+        </p:nvSpPr>
+        <p:spPr>
+          <a:xfrm>
+            <a:off x="10515600" y="2377440"/>
+            <a:ext cx="960120" cy="73152"/>
+          </a:xfrm>
+          <a:prstGeom prst="rect">
+            <a:avLst/>
+          </a:prstGeom>
+          <a:solidFill>
+            <a:srgbClr val="039855"/>
+          </a:solidFill>
+          <a:ln>
+            <a:noFill/>
+          </a:ln>
+          <a:effectLst/>
+        </p:spPr>
+        <p:style>
+          <a:lnRef idx="1">
+            <a:schemeClr val="accent1"/>
+          </a:lnRef>
+          <a:fillRef idx="3">
+            <a:schemeClr val="accent1"/>
+          </a:fillRef>
+          <a:effectRef idx="2">
+            <a:schemeClr val="accent1"/>
+          </a:effectRef>
+          <a:fontRef idx="minor">
+            <a:schemeClr val="lt1"/>
+          </a:fontRef>
+        </p:style>
+        <p:txBody>
+          <a:bodyPr rtlCol="0" anchor="ctr"/>
+          <a:lstStyle/>
+          <a:p>
+            <a:pPr algn="ctr"/>
+          </a:p>
+        </p:txBody>
+      </p:sp>
+      <p:sp>
+        <p:nvSpPr>
+          <p:cNvPr id="16" name="TextBox 15"/>
+          <p:cNvSpPr txBox="1"/>
+          <p:nvPr/>
+        </p:nvSpPr>
+        <p:spPr>
+          <a:xfrm>
+            <a:off x="10515600" y="3154680"/>
+            <a:ext cx="960120" cy="548640"/>
+          </a:xfrm>
+          <a:prstGeom prst="rect">
+            <a:avLst/>
+          </a:prstGeom>
+          <a:noFill/>
+        </p:spPr>
+        <p:txBody>
+          <a:bodyPr wrap="square" anchor="ctr">
+            <a:spAutoFit/>
+          </a:bodyPr>
+          <a:lstStyle/>
+          <a:p>
+            <a:pPr algn="ctr">
+              <a:spcAft>
+                <a:spcPts val="600"/>
+              </a:spcAft>
+            </a:pPr>
+            <a:r>
+              <a:rPr sz="1300" b="1" i="0">
+                <a:solidFill>
+                  <a:srgbClr val="039855"/>
+                </a:solidFill>
+                <a:latin typeface="Calibri"/>
+              </a:rPr>
+              <a:t>Pohon 3</a:t>
+            </a:r>
+          </a:p>
+        </p:txBody>
+      </p:sp>
+      <p:sp>
+        <p:nvSpPr>
+          <p:cNvPr id="17" name="TextBox 16"/>
+          <p:cNvSpPr txBox="1"/>
+          <p:nvPr/>
+        </p:nvSpPr>
+        <p:spPr>
+          <a:xfrm>
+            <a:off x="8046720" y="4709160"/>
+            <a:ext cx="3657600" cy="457200"/>
           </a:xfrm>
           <a:prstGeom prst="rect">
             <a:avLst/>
@@ -10177,106 +10251,19 @@
           </a:bodyPr>
           <a:lstStyle/>
           <a:p>
-            <a:pPr algn="l">
-              <a:spcAft>
-                <a:spcPts val="200"/>
-              </a:spcAft>
-            </a:pPr>
-            <a:r>
-              <a:rPr sz="1200" b="0" i="0">
-                <a:solidFill>
-                  <a:srgbClr val="6CE9A6"/>
-                </a:solidFill>
-                <a:latin typeface="Calibri"/>
-              </a:rPr>
-              <a:t>rf = RandomForestClassifier(</a:t>
-            </a:r>
-          </a:p>
-          <a:p>
-            <a:pPr algn="l">
-              <a:spcAft>
-                <a:spcPts val="200"/>
-              </a:spcAft>
-            </a:pPr>
-            <a:r>
-              <a:rPr sz="1200" b="0" i="0">
-                <a:solidFill>
-                  <a:srgbClr val="FFFFFF"/>
-                </a:solidFill>
-                <a:latin typeface="Calibri"/>
-              </a:rPr>
-              <a:t>      n_estimators=120,</a:t>
-            </a:r>
-          </a:p>
-          <a:p>
-            <a:pPr algn="l">
-              <a:spcAft>
-                <a:spcPts val="200"/>
-              </a:spcAft>
-            </a:pPr>
-            <a:r>
-              <a:rPr sz="1200" b="0" i="0">
-                <a:solidFill>
-                  <a:srgbClr val="FFFFFF"/>
-                </a:solidFill>
-                <a:latin typeface="Calibri"/>
-              </a:rPr>
-              <a:t>      max_depth=14)</a:t>
-            </a:r>
-          </a:p>
-          <a:p>
-            <a:pPr algn="l">
-              <a:spcAft>
-                <a:spcPts val="200"/>
-              </a:spcAft>
-            </a:pPr>
-            <a:r>
-              <a:rPr sz="1200" b="0" i="0">
-                <a:solidFill>
-                  <a:srgbClr val="FFFFFF"/>
-                </a:solidFill>
-                <a:latin typeface="Calibri"/>
-              </a:rPr>
-              <a:t>rf.fit(X_train, y_train)</a:t>
-            </a:r>
-          </a:p>
-        </p:txBody>
-      </p:sp>
-      <p:sp>
-        <p:nvSpPr>
-          <p:cNvPr id="13" name="TextBox 12"/>
-          <p:cNvSpPr txBox="1"/>
-          <p:nvPr/>
-        </p:nvSpPr>
-        <p:spPr>
-          <a:xfrm>
-            <a:off x="7498079" y="5989320"/>
-            <a:ext cx="4023360" cy="365760"/>
-          </a:xfrm>
-          <a:prstGeom prst="rect">
-            <a:avLst/>
-          </a:prstGeom>
-          <a:noFill/>
-        </p:spPr>
-        <p:txBody>
-          <a:bodyPr wrap="square" anchor="t">
-            <a:spAutoFit/>
-          </a:bodyPr>
-          <a:lstStyle/>
-          <a:p>
-            <a:pPr algn="l">
+            <a:pPr algn="ctr">
               <a:spcAft>
                 <a:spcPts val="600"/>
               </a:spcAft>
             </a:pPr>
             <a:r>
-              <a:rPr sz="1100" b="0" i="1">
+              <a:rPr sz="1200" b="0" i="1">
                 <a:solidFill>
                   <a:srgbClr val="4B5563"/>
                 </a:solidFill>
                 <a:latin typeface="Calibri"/>
               </a:rPr>
-              <a:t>Kode inti pelatihan (scikit-learn)</a:t>
+              <a:t>120 pohon → voting → 1 prediksi</a:t>
             </a:r>
           </a:p>
         </p:txBody>
@@ -10465,7 +10452,7 @@
                 </a:solidFill>
                 <a:latin typeface="Calibri"/>
               </a:rPr>
-              <a:t>HASIL</a:t>
+              <a:t>INTI ALGORITMA</a:t>
             </a:r>
           </a:p>
         </p:txBody>
@@ -10498,176 +10485,27 @@
               </a:spcAft>
             </a:pPr>
             <a:r>
-              <a:rPr sz="2800" b="1" i="0">
+              <a:rPr sz="2700" b="1" i="0">
                 <a:solidFill>
                   <a:srgbClr val="05312A"/>
                 </a:solidFill>
                 <a:latin typeface="Calibri"/>
               </a:rPr>
-              <a:t>Bagaimana kami menguji akurasinya</a:t>
-            </a:r>
-          </a:p>
-        </p:txBody>
-      </p:sp>
-      <p:sp>
-        <p:nvSpPr>
-          <p:cNvPr id="7" name="TextBox 6"/>
-          <p:cNvSpPr txBox="1"/>
-          <p:nvPr/>
-        </p:nvSpPr>
-        <p:spPr>
-          <a:xfrm>
-            <a:off x="594360" y="1737360"/>
-            <a:ext cx="10972800" cy="2011680"/>
-          </a:xfrm>
-          <a:prstGeom prst="rect">
-            <a:avLst/>
-          </a:prstGeom>
-          <a:noFill/>
-        </p:spPr>
-        <p:txBody>
-          <a:bodyPr wrap="square">
-            <a:spAutoFit/>
-          </a:bodyPr>
-          <a:lstStyle/>
-          <a:p>
-            <a:pPr>
-              <a:spcAft>
-                <a:spcPts val="1000"/>
-              </a:spcAft>
-            </a:pPr>
-            <a:r>
-              <a:rPr sz="1500" b="1">
-                <a:solidFill>
-                  <a:srgbClr val="039855"/>
-                </a:solidFill>
-              </a:rPr>
-              <a:t>▸  </a:t>
-            </a:r>
-            <a:r>
-              <a:rPr sz="1500" b="0">
-                <a:solidFill>
-                  <a:srgbClr val="15241C"/>
-                </a:solidFill>
-                <a:latin typeface="Calibri"/>
-              </a:rPr>
-              <a:t>Model diuji pada </a:t>
-            </a:r>
-            <a:r>
-              <a:rPr sz="1500" b="1">
-                <a:solidFill>
-                  <a:srgbClr val="15241C"/>
-                </a:solidFill>
-                <a:latin typeface="Calibri"/>
-              </a:rPr>
-              <a:t>5.000 data ujian</a:t>
-            </a:r>
-            <a:r>
-              <a:rPr sz="1500" b="0">
-                <a:solidFill>
-                  <a:srgbClr val="15241C"/>
-                </a:solidFill>
-                <a:latin typeface="Calibri"/>
-              </a:rPr>
-              <a:t> yang TIDAK dipakai saat latihan — seperti soal ujian baru, supaya penilaian jujur.</a:t>
-            </a:r>
-          </a:p>
-          <a:p>
-            <a:pPr>
-              <a:spcAft>
-                <a:spcPts val="1000"/>
-              </a:spcAft>
-            </a:pPr>
-            <a:r>
-              <a:rPr sz="1500" b="1">
-                <a:solidFill>
-                  <a:srgbClr val="039855"/>
-                </a:solidFill>
-              </a:rPr>
-              <a:t>▸  </a:t>
-            </a:r>
-            <a:r>
-              <a:rPr sz="1500" b="1">
-                <a:solidFill>
-                  <a:srgbClr val="15241C"/>
-                </a:solidFill>
-                <a:latin typeface="Calibri"/>
-              </a:rPr>
-              <a:t>Akurasi 88,40%</a:t>
-            </a:r>
-            <a:r>
-              <a:rPr sz="1500" b="0">
-                <a:solidFill>
-                  <a:srgbClr val="15241C"/>
-                </a:solidFill>
-                <a:latin typeface="Calibri"/>
-              </a:rPr>
-              <a:t> artinya: dari 100 anak, sekitar </a:t>
-            </a:r>
-            <a:r>
-              <a:rPr sz="1500" b="1">
-                <a:solidFill>
-                  <a:srgbClr val="15241C"/>
-                </a:solidFill>
-                <a:latin typeface="Calibri"/>
-              </a:rPr>
-              <a:t>88 diprediksi benar</a:t>
-            </a:r>
-            <a:r>
-              <a:rPr sz="1500" b="0">
-                <a:solidFill>
-                  <a:srgbClr val="15241C"/>
-                </a:solidFill>
-                <a:latin typeface="Calibri"/>
-              </a:rPr>
-              <a:t>.</a:t>
-            </a:r>
-          </a:p>
-          <a:p>
-            <a:pPr>
-              <a:spcAft>
-                <a:spcPts val="1000"/>
-              </a:spcAft>
-            </a:pPr>
-            <a:r>
-              <a:rPr sz="1500" b="1">
-                <a:solidFill>
-                  <a:srgbClr val="039855"/>
-                </a:solidFill>
-              </a:rPr>
-              <a:t>▸  </a:t>
-            </a:r>
-            <a:r>
-              <a:rPr sz="1500" b="1">
-                <a:solidFill>
-                  <a:srgbClr val="15241C"/>
-                </a:solidFill>
-                <a:latin typeface="Calibri"/>
-              </a:rPr>
-              <a:t>Cross-validation:</a:t>
-            </a:r>
-            <a:r>
-              <a:rPr sz="1500" b="0">
-                <a:solidFill>
-                  <a:srgbClr val="15241C"/>
-                </a:solidFill>
-                <a:latin typeface="Calibri"/>
-              </a:rPr>
-              <a:t> uji berulang 5 kali dengan pembagian berbeda; hasil stabil (±0,42%) → model benar-benar belajar pola, bukan sekadar menghafal.</a:t>
-            </a:r>
-          </a:p>
-        </p:txBody>
-      </p:sp>
-      <p:sp>
-        <p:nvSpPr>
-          <p:cNvPr id="8" name="Rectangle 7"/>
+              <a:t>Penjelasan matematis algoritma</a:t>
+            </a:r>
+          </a:p>
+        </p:txBody>
+      </p:sp>
+      <p:sp>
+        <p:nvSpPr>
+          <p:cNvPr id="7" name="Rectangle 6"/>
           <p:cNvSpPr/>
           <p:nvPr/>
         </p:nvSpPr>
         <p:spPr>
           <a:xfrm>
-            <a:off x="594360" y="4160520"/>
-            <a:ext cx="3520440" cy="1463040"/>
+            <a:off x="594360" y="1645920"/>
+            <a:ext cx="5394960" cy="1280160"/>
           </a:xfrm>
           <a:prstGeom prst="rect">
             <a:avLst/>
@@ -10704,58 +10542,14 @@
       </p:sp>
       <p:sp>
         <p:nvSpPr>
-          <p:cNvPr id="9" name="Rectangle 8"/>
-          <p:cNvSpPr/>
-          <p:nvPr/>
-        </p:nvSpPr>
-        <p:spPr>
-          <a:xfrm>
-            <a:off x="594360" y="4160520"/>
-            <a:ext cx="3520440" cy="82296"/>
-          </a:xfrm>
-          <a:prstGeom prst="rect">
-            <a:avLst/>
-          </a:prstGeom>
-          <a:solidFill>
-            <a:srgbClr val="039855"/>
-          </a:solidFill>
-          <a:ln>
-            <a:noFill/>
-          </a:ln>
-          <a:effectLst/>
-        </p:spPr>
-        <p:style>
-          <a:lnRef idx="1">
-            <a:schemeClr val="accent1"/>
-          </a:lnRef>
-          <a:fillRef idx="3">
-            <a:schemeClr val="accent1"/>
-          </a:fillRef>
-          <a:effectRef idx="2">
-            <a:schemeClr val="accent1"/>
-          </a:effectRef>
-          <a:fontRef idx="minor">
-            <a:schemeClr val="lt1"/>
-          </a:fontRef>
-        </p:style>
-        <p:txBody>
-          <a:bodyPr rtlCol="0" anchor="ctr"/>
-          <a:lstStyle/>
-          <a:p>
-            <a:pPr algn="ctr"/>
-          </a:p>
-        </p:txBody>
-      </p:sp>
-      <p:sp>
-        <p:nvSpPr>
-          <p:cNvPr id="10" name="TextBox 9"/>
+          <p:cNvPr id="8" name="TextBox 7"/>
           <p:cNvSpPr txBox="1"/>
           <p:nvPr/>
         </p:nvSpPr>
         <p:spPr>
           <a:xfrm>
-            <a:off x="594360" y="4398264"/>
-            <a:ext cx="3520440" cy="731520"/>
+            <a:off x="777240" y="1755648"/>
+            <a:ext cx="5029200" cy="1097280"/>
           </a:xfrm>
           <a:prstGeom prst="rect">
             <a:avLst/>
@@ -10768,72 +10562,49 @@
           </a:bodyPr>
           <a:lstStyle/>
           <a:p>
-            <a:pPr algn="ctr">
-              <a:spcAft>
-                <a:spcPts val="600"/>
-              </a:spcAft>
-            </a:pPr>
-            <a:r>
-              <a:rPr sz="3200" b="1" i="0">
+            <a:pPr algn="l">
+              <a:spcAft>
+                <a:spcPts val="400"/>
+              </a:spcAft>
+            </a:pPr>
+            <a:r>
+              <a:rPr sz="1200" b="1" i="0">
                 <a:solidFill>
                   <a:srgbClr val="039855"/>
                 </a:solidFill>
                 <a:latin typeface="Calibri"/>
               </a:rPr>
-              <a:t>88,40%</a:t>
-            </a:r>
-          </a:p>
-        </p:txBody>
-      </p:sp>
-      <p:sp>
-        <p:nvSpPr>
-          <p:cNvPr id="11" name="TextBox 10"/>
-          <p:cNvSpPr txBox="1"/>
-          <p:nvPr/>
-        </p:nvSpPr>
-        <p:spPr>
-          <a:xfrm>
-            <a:off x="594360" y="5074920"/>
-            <a:ext cx="3520440" cy="457200"/>
-          </a:xfrm>
-          <a:prstGeom prst="rect">
-            <a:avLst/>
-          </a:prstGeom>
-          <a:noFill/>
-        </p:spPr>
-        <p:txBody>
-          <a:bodyPr wrap="square" anchor="t">
-            <a:spAutoFit/>
-          </a:bodyPr>
-          <a:lstStyle/>
-          <a:p>
-            <a:pPr algn="ctr">
-              <a:spcAft>
-                <a:spcPts val="600"/>
-              </a:spcAft>
-            </a:pPr>
-            <a:r>
-              <a:rPr sz="1200" b="0" i="0">
-                <a:solidFill>
-                  <a:srgbClr val="4B5563"/>
-                </a:solidFill>
-                <a:latin typeface="Calibri"/>
-              </a:rPr>
-              <a:t>Akurasi (Excellent ≥85%)</a:t>
-            </a:r>
-          </a:p>
-        </p:txBody>
-      </p:sp>
-      <p:sp>
-        <p:nvSpPr>
-          <p:cNvPr id="12" name="Rectangle 11"/>
+              <a:t>Ketidakmurnian Gini (pemilihan split)</a:t>
+            </a:r>
+          </a:p>
+          <a:p>
+            <a:pPr algn="l">
+              <a:spcAft>
+                <a:spcPts val="400"/>
+              </a:spcAft>
+            </a:pPr>
+            <a:r>
+              <a:rPr sz="1500" b="0" i="0">
+                <a:solidFill>
+                  <a:srgbClr val="05312A"/>
+                </a:solidFill>
+                <a:latin typeface="Calibri"/>
+              </a:rPr>
+              <a:t>Gini(t) = 1 − Σ pᵢ²</a:t>
+            </a:r>
+          </a:p>
+        </p:txBody>
+      </p:sp>
+      <p:sp>
+        <p:nvSpPr>
+          <p:cNvPr id="9" name="Rectangle 8"/>
           <p:cNvSpPr/>
           <p:nvPr/>
         </p:nvSpPr>
         <p:spPr>
           <a:xfrm>
-            <a:off x="4343400" y="4160520"/>
-            <a:ext cx="3520440" cy="1463040"/>
+            <a:off x="6172200" y="1645920"/>
+            <a:ext cx="5349240" cy="1280160"/>
           </a:xfrm>
           <a:prstGeom prst="rect">
             <a:avLst/>
@@ -10870,58 +10641,14 @@
       </p:sp>
       <p:sp>
         <p:nvSpPr>
-          <p:cNvPr id="13" name="Rectangle 12"/>
-          <p:cNvSpPr/>
-          <p:nvPr/>
-        </p:nvSpPr>
-        <p:spPr>
-          <a:xfrm>
-            <a:off x="4343400" y="4160520"/>
-            <a:ext cx="3520440" cy="82296"/>
-          </a:xfrm>
-          <a:prstGeom prst="rect">
-            <a:avLst/>
-          </a:prstGeom>
-          <a:solidFill>
-            <a:srgbClr val="039855"/>
-          </a:solidFill>
-          <a:ln>
-            <a:noFill/>
-          </a:ln>
-          <a:effectLst/>
-        </p:spPr>
-        <p:style>
-          <a:lnRef idx="1">
-            <a:schemeClr val="accent1"/>
-          </a:lnRef>
-          <a:fillRef idx="3">
-            <a:schemeClr val="accent1"/>
-          </a:fillRef>
-          <a:effectRef idx="2">
-            <a:schemeClr val="accent1"/>
-          </a:effectRef>
-          <a:fontRef idx="minor">
-            <a:schemeClr val="lt1"/>
-          </a:fontRef>
-        </p:style>
-        <p:txBody>
-          <a:bodyPr rtlCol="0" anchor="ctr"/>
-          <a:lstStyle/>
-          <a:p>
-            <a:pPr algn="ctr"/>
-          </a:p>
-        </p:txBody>
-      </p:sp>
-      <p:sp>
-        <p:nvSpPr>
-          <p:cNvPr id="14" name="TextBox 13"/>
+          <p:cNvPr id="10" name="TextBox 9"/>
           <p:cNvSpPr txBox="1"/>
           <p:nvPr/>
         </p:nvSpPr>
         <p:spPr>
           <a:xfrm>
-            <a:off x="4343400" y="4398264"/>
-            <a:ext cx="3520440" cy="731520"/>
+            <a:off x="6355080" y="1755648"/>
+            <a:ext cx="4983480" cy="1097280"/>
           </a:xfrm>
           <a:prstGeom prst="rect">
             <a:avLst/>
@@ -10934,72 +10661,49 @@
           </a:bodyPr>
           <a:lstStyle/>
           <a:p>
-            <a:pPr algn="ctr">
-              <a:spcAft>
-                <a:spcPts val="600"/>
-              </a:spcAft>
-            </a:pPr>
-            <a:r>
-              <a:rPr sz="3200" b="1" i="0">
+            <a:pPr algn="l">
+              <a:spcAft>
+                <a:spcPts val="400"/>
+              </a:spcAft>
+            </a:pPr>
+            <a:r>
+              <a:rPr sz="1200" b="1" i="0">
                 <a:solidFill>
                   <a:srgbClr val="039855"/>
                 </a:solidFill>
                 <a:latin typeface="Calibri"/>
               </a:rPr>
-              <a:t>83,56%</a:t>
-            </a:r>
-          </a:p>
-        </p:txBody>
-      </p:sp>
-      <p:sp>
-        <p:nvSpPr>
-          <p:cNvPr id="15" name="TextBox 14"/>
-          <p:cNvSpPr txBox="1"/>
-          <p:nvPr/>
-        </p:nvSpPr>
-        <p:spPr>
-          <a:xfrm>
-            <a:off x="4343400" y="5074920"/>
-            <a:ext cx="3520440" cy="457200"/>
-          </a:xfrm>
-          <a:prstGeom prst="rect">
-            <a:avLst/>
-          </a:prstGeom>
-          <a:noFill/>
-        </p:spPr>
-        <p:txBody>
-          <a:bodyPr wrap="square" anchor="t">
-            <a:spAutoFit/>
-          </a:bodyPr>
-          <a:lstStyle/>
-          <a:p>
-            <a:pPr algn="ctr">
-              <a:spcAft>
-                <a:spcPts val="600"/>
-              </a:spcAft>
-            </a:pPr>
-            <a:r>
-              <a:rPr sz="1200" b="0" i="0">
-                <a:solidFill>
-                  <a:srgbClr val="4B5563"/>
-                </a:solidFill>
-                <a:latin typeface="Calibri"/>
-              </a:rPr>
-              <a:t>F1-Score (lihat catatan)</a:t>
-            </a:r>
-          </a:p>
-        </p:txBody>
-      </p:sp>
-      <p:sp>
-        <p:nvSpPr>
-          <p:cNvPr id="16" name="Rectangle 15"/>
+              <a:t>Penurunan impurity saat split</a:t>
+            </a:r>
+          </a:p>
+          <a:p>
+            <a:pPr algn="l">
+              <a:spcAft>
+                <a:spcPts val="400"/>
+              </a:spcAft>
+            </a:pPr>
+            <a:r>
+              <a:rPr sz="1500" b="0" i="0">
+                <a:solidFill>
+                  <a:srgbClr val="05312A"/>
+                </a:solidFill>
+                <a:latin typeface="Calibri"/>
+              </a:rPr>
+              <a:t>ΔI = Gini(t) − Σ (Nₖ/Nₜ)·Gini(k)</a:t>
+            </a:r>
+          </a:p>
+        </p:txBody>
+      </p:sp>
+      <p:sp>
+        <p:nvSpPr>
+          <p:cNvPr id="11" name="Rectangle 10"/>
           <p:cNvSpPr/>
           <p:nvPr/>
         </p:nvSpPr>
         <p:spPr>
           <a:xfrm>
-            <a:off x="8092440" y="4160520"/>
-            <a:ext cx="3383280" cy="1463040"/>
+            <a:off x="594360" y="3108960"/>
+            <a:ext cx="5394960" cy="1280160"/>
           </a:xfrm>
           <a:prstGeom prst="rect">
             <a:avLst/>
@@ -11036,20 +10740,75 @@
       </p:sp>
       <p:sp>
         <p:nvSpPr>
-          <p:cNvPr id="17" name="Rectangle 16"/>
+          <p:cNvPr id="12" name="TextBox 11"/>
+          <p:cNvSpPr txBox="1"/>
+          <p:nvPr/>
+        </p:nvSpPr>
+        <p:spPr>
+          <a:xfrm>
+            <a:off x="777240" y="3218688"/>
+            <a:ext cx="5029200" cy="1097280"/>
+          </a:xfrm>
+          <a:prstGeom prst="rect">
+            <a:avLst/>
+          </a:prstGeom>
+          <a:noFill/>
+        </p:spPr>
+        <p:txBody>
+          <a:bodyPr wrap="square" anchor="t">
+            <a:spAutoFit/>
+          </a:bodyPr>
+          <a:lstStyle/>
+          <a:p>
+            <a:pPr algn="l">
+              <a:spcAft>
+                <a:spcPts val="400"/>
+              </a:spcAft>
+            </a:pPr>
+            <a:r>
+              <a:rPr sz="1200" b="1" i="0">
+                <a:solidFill>
+                  <a:srgbClr val="039855"/>
+                </a:solidFill>
+                <a:latin typeface="Calibri"/>
+              </a:rPr>
+              <a:t>Prediksi (soft voting)</a:t>
+            </a:r>
+          </a:p>
+          <a:p>
+            <a:pPr algn="l">
+              <a:spcAft>
+                <a:spcPts val="400"/>
+              </a:spcAft>
+            </a:pPr>
+            <a:r>
+              <a:rPr sz="1500" b="0" i="0">
+                <a:solidFill>
+                  <a:srgbClr val="05312A"/>
+                </a:solidFill>
+                <a:latin typeface="Calibri"/>
+              </a:rPr>
+              <a:t>P(c|x) = (1/T) Σ Pₜ(c|x) ; ŷ = argmax P(c|x)</a:t>
+            </a:r>
+          </a:p>
+        </p:txBody>
+      </p:sp>
+      <p:sp>
+        <p:nvSpPr>
+          <p:cNvPr id="13" name="Rectangle 12"/>
           <p:cNvSpPr/>
           <p:nvPr/>
         </p:nvSpPr>
         <p:spPr>
           <a:xfrm>
-            <a:off x="8092440" y="4160520"/>
-            <a:ext cx="3383280" cy="82296"/>
+            <a:off x="6172200" y="3108960"/>
+            <a:ext cx="5349240" cy="1280160"/>
           </a:xfrm>
           <a:prstGeom prst="rect">
             <a:avLst/>
           </a:prstGeom>
           <a:solidFill>
-            <a:srgbClr val="039855"/>
+            <a:srgbClr val="EAF7F0"/>
           </a:solidFill>
           <a:ln>
             <a:noFill/>
@@ -11080,14 +10839,14 @@
       </p:sp>
       <p:sp>
         <p:nvSpPr>
-          <p:cNvPr id="18" name="TextBox 17"/>
+          <p:cNvPr id="14" name="TextBox 13"/>
           <p:cNvSpPr txBox="1"/>
           <p:nvPr/>
         </p:nvSpPr>
         <p:spPr>
           <a:xfrm>
-            <a:off x="8092440" y="4398264"/>
-            <a:ext cx="3383280" cy="731520"/>
+            <a:off x="6355080" y="3218688"/>
+            <a:ext cx="4983480" cy="1097280"/>
           </a:xfrm>
           <a:prstGeom prst="rect">
             <a:avLst/>
@@ -11100,33 +10859,93 @@
           </a:bodyPr>
           <a:lstStyle/>
           <a:p>
-            <a:pPr algn="ctr">
-              <a:spcAft>
-                <a:spcPts val="600"/>
-              </a:spcAft>
-            </a:pPr>
-            <a:r>
-              <a:rPr sz="3200" b="1" i="0">
+            <a:pPr algn="l">
+              <a:spcAft>
+                <a:spcPts val="400"/>
+              </a:spcAft>
+            </a:pPr>
+            <a:r>
+              <a:rPr sz="1200" b="1" i="0">
                 <a:solidFill>
                   <a:srgbClr val="039855"/>
                 </a:solidFill>
                 <a:latin typeface="Calibri"/>
               </a:rPr>
-              <a:t>87,31%</a:t>
-            </a:r>
-          </a:p>
-        </p:txBody>
-      </p:sp>
-      <p:sp>
-        <p:nvSpPr>
-          <p:cNvPr id="19" name="TextBox 18"/>
+              <a:t>Kepentingan fitur (MDI)</a:t>
+            </a:r>
+          </a:p>
+          <a:p>
+            <a:pPr algn="l">
+              <a:spcAft>
+                <a:spcPts val="400"/>
+              </a:spcAft>
+            </a:pPr>
+            <a:r>
+              <a:rPr sz="1500" b="0" i="0">
+                <a:solidFill>
+                  <a:srgbClr val="05312A"/>
+                </a:solidFill>
+                <a:latin typeface="Calibri"/>
+              </a:rPr>
+              <a:t>Imp(f) = (1/T) Σ Σ (Nᵥ/N)·ΔIᵥ</a:t>
+            </a:r>
+          </a:p>
+        </p:txBody>
+      </p:sp>
+      <p:sp>
+        <p:nvSpPr>
+          <p:cNvPr id="15" name="Rectangle 14"/>
+          <p:cNvSpPr/>
+          <p:nvPr/>
+        </p:nvSpPr>
+        <p:spPr>
+          <a:xfrm>
+            <a:off x="594360" y="4572000"/>
+            <a:ext cx="5394960" cy="1280160"/>
+          </a:xfrm>
+          <a:prstGeom prst="rect">
+            <a:avLst/>
+          </a:prstGeom>
+          <a:solidFill>
+            <a:srgbClr val="EAF7F0"/>
+          </a:solidFill>
+          <a:ln>
+            <a:noFill/>
+          </a:ln>
+          <a:effectLst/>
+        </p:spPr>
+        <p:style>
+          <a:lnRef idx="1">
+            <a:schemeClr val="accent1"/>
+          </a:lnRef>
+          <a:fillRef idx="3">
+            <a:schemeClr val="accent1"/>
+          </a:fillRef>
+          <a:effectRef idx="2">
+            <a:schemeClr val="accent1"/>
+          </a:effectRef>
+          <a:fontRef idx="minor">
+            <a:schemeClr val="lt1"/>
+          </a:fontRef>
+        </p:style>
+        <p:txBody>
+          <a:bodyPr rtlCol="0" anchor="ctr"/>
+          <a:lstStyle/>
+          <a:p>
+            <a:pPr algn="ctr"/>
+          </a:p>
+        </p:txBody>
+      </p:sp>
+      <p:sp>
+        <p:nvSpPr>
+          <p:cNvPr id="16" name="TextBox 15"/>
           <p:cNvSpPr txBox="1"/>
           <p:nvPr/>
         </p:nvSpPr>
         <p:spPr>
           <a:xfrm>
-            <a:off x="8092440" y="5074920"/>
-            <a:ext cx="3383280" cy="457200"/>
+            <a:off x="777240" y="4681728"/>
+            <a:ext cx="5029200" cy="1097280"/>
           </a:xfrm>
           <a:prstGeom prst="rect">
             <a:avLst/>
@@ -11139,33 +10958,93 @@
           </a:bodyPr>
           <a:lstStyle/>
           <a:p>
-            <a:pPr algn="ctr">
-              <a:spcAft>
-                <a:spcPts val="600"/>
-              </a:spcAft>
-            </a:pPr>
-            <a:r>
-              <a:rPr sz="1200" b="0" i="0">
-                <a:solidFill>
-                  <a:srgbClr val="4B5563"/>
-                </a:solidFill>
-                <a:latin typeface="Calibri"/>
-              </a:rPr>
-              <a:t>Cross-Validation (5x)</a:t>
-            </a:r>
-          </a:p>
-        </p:txBody>
-      </p:sp>
-      <p:sp>
-        <p:nvSpPr>
-          <p:cNvPr id="20" name="TextBox 19"/>
+            <a:pPr algn="l">
+              <a:spcAft>
+                <a:spcPts val="400"/>
+              </a:spcAft>
+            </a:pPr>
+            <a:r>
+              <a:rPr sz="1200" b="1" i="0">
+                <a:solidFill>
+                  <a:srgbClr val="039855"/>
+                </a:solidFill>
+                <a:latin typeface="Calibri"/>
+              </a:rPr>
+              <a:t>Z-Score tinggi-untuk-umur (HAZ)</a:t>
+            </a:r>
+          </a:p>
+          <a:p>
+            <a:pPr algn="l">
+              <a:spcAft>
+                <a:spcPts val="400"/>
+              </a:spcAft>
+            </a:pPr>
+            <a:r>
+              <a:rPr sz="1500" b="0" i="0">
+                <a:solidFill>
+                  <a:srgbClr val="05312A"/>
+                </a:solidFill>
+                <a:latin typeface="Calibri"/>
+              </a:rPr>
+              <a:t>HAZ = (X − M) / S</a:t>
+            </a:r>
+          </a:p>
+        </p:txBody>
+      </p:sp>
+      <p:sp>
+        <p:nvSpPr>
+          <p:cNvPr id="17" name="Rectangle 16"/>
+          <p:cNvSpPr/>
+          <p:nvPr/>
+        </p:nvSpPr>
+        <p:spPr>
+          <a:xfrm>
+            <a:off x="6172200" y="4572000"/>
+            <a:ext cx="5349240" cy="1280160"/>
+          </a:xfrm>
+          <a:prstGeom prst="rect">
+            <a:avLst/>
+          </a:prstGeom>
+          <a:solidFill>
+            <a:srgbClr val="EAF7F0"/>
+          </a:solidFill>
+          <a:ln>
+            <a:noFill/>
+          </a:ln>
+          <a:effectLst/>
+        </p:spPr>
+        <p:style>
+          <a:lnRef idx="1">
+            <a:schemeClr val="accent1"/>
+          </a:lnRef>
+          <a:fillRef idx="3">
+            <a:schemeClr val="accent1"/>
+          </a:fillRef>
+          <a:effectRef idx="2">
+            <a:schemeClr val="accent1"/>
+          </a:effectRef>
+          <a:fontRef idx="minor">
+            <a:schemeClr val="lt1"/>
+          </a:fontRef>
+        </p:style>
+        <p:txBody>
+          <a:bodyPr rtlCol="0" anchor="ctr"/>
+          <a:lstStyle/>
+          <a:p>
+            <a:pPr algn="ctr"/>
+          </a:p>
+        </p:txBody>
+      </p:sp>
+      <p:sp>
+        <p:nvSpPr>
+          <p:cNvPr id="18" name="TextBox 17"/>
           <p:cNvSpPr txBox="1"/>
           <p:nvPr/>
         </p:nvSpPr>
         <p:spPr>
           <a:xfrm>
-            <a:off x="594360" y="5806440"/>
-            <a:ext cx="10972800" cy="548640"/>
+            <a:off x="6355080" y="4681728"/>
+            <a:ext cx="4983480" cy="1097280"/>
           </a:xfrm>
           <a:prstGeom prst="rect">
             <a:avLst/>
@@ -11180,17 +11059,33 @@
           <a:p>
             <a:pPr algn="l">
               <a:spcAft>
-                <a:spcPts val="600"/>
-              </a:spcAft>
-            </a:pPr>
-            <a:r>
-              <a:rPr sz="1300" b="0" i="1">
-                <a:solidFill>
-                  <a:srgbClr val="4B5563"/>
-                </a:solidFill>
-                <a:latin typeface="Calibri"/>
-              </a:rPr>
-              <a:t>F1-Score = ukuran yang adil saat jumlah tiap kelas tidak seimbang (kelas Normal jauh lebih banyak).</a:t>
+                <a:spcPts val="400"/>
+              </a:spcAft>
+            </a:pPr>
+            <a:r>
+              <a:rPr sz="1200" b="1" i="0">
+                <a:solidFill>
+                  <a:srgbClr val="039855"/>
+                </a:solidFill>
+                <a:latin typeface="Calibri"/>
+              </a:rPr>
+              <a:t>Metrik</a:t>
+            </a:r>
+          </a:p>
+          <a:p>
+            <a:pPr algn="l">
+              <a:spcAft>
+                <a:spcPts val="400"/>
+              </a:spcAft>
+            </a:pPr>
+            <a:r>
+              <a:rPr sz="1500" b="0" i="0">
+                <a:solidFill>
+                  <a:srgbClr val="05312A"/>
+                </a:solidFill>
+                <a:latin typeface="Calibri"/>
+              </a:rPr>
+              <a:t>F1 = 2·P·R/(P+R) ; P=TP/(TP+FP)</a:t>
             </a:r>
           </a:p>
         </p:txBody>
@@ -11379,7 +11274,7 @@
                 </a:solidFill>
                 <a:latin typeface="Calibri"/>
               </a:rPr>
-              <a:t>HASIL</a:t>
+              <a:t>DATA</a:t>
             </a:r>
           </a:p>
         </p:txBody>
@@ -11412,13 +11307,13 @@
               </a:spcAft>
             </a:pPr>
             <a:r>
-              <a:rPr sz="2800" b="1" i="0">
+              <a:rPr sz="2700" b="1" i="0">
                 <a:solidFill>
                   <a:srgbClr val="05312A"/>
                 </a:solidFill>
                 <a:latin typeface="Calibri"/>
               </a:rPr>
-              <a:t>Faktor paling berpengaruh — siapa yang menentukan?</a:t>
+              <a:t>Dataset nyata Indonesia</a:t>
             </a:r>
           </a:p>
         </p:txBody>
@@ -11431,8 +11326,8 @@
         </p:nvSpPr>
         <p:spPr>
           <a:xfrm>
-            <a:off x="594360" y="1783080"/>
-            <a:ext cx="2377440" cy="310896"/>
+            <a:off x="594360" y="1737360"/>
+            <a:ext cx="6583680" cy="4206240"/>
           </a:xfrm>
           <a:prstGeom prst="rect">
             <a:avLst/>
@@ -11440,24 +11335,167 @@
           <a:noFill/>
         </p:spPr>
         <p:txBody>
-          <a:bodyPr wrap="square" anchor="ctr">
+          <a:bodyPr wrap="square">
             <a:spAutoFit/>
           </a:bodyPr>
           <a:lstStyle/>
           <a:p>
-            <a:pPr algn="l">
-              <a:spcAft>
-                <a:spcPts val="600"/>
-              </a:spcAft>
-            </a:pPr>
-            <a:r>
-              <a:rPr sz="1300" b="0" i="0">
+            <a:pPr>
+              <a:spcAft>
+                <a:spcPts val="1000"/>
+              </a:spcAft>
+            </a:pPr>
+            <a:r>
+              <a:rPr sz="1500" b="1">
+                <a:solidFill>
+                  <a:srgbClr val="039855"/>
+                </a:solidFill>
+              </a:rPr>
+              <a:t>▸  </a:t>
+            </a:r>
+            <a:r>
+              <a:rPr sz="1500" b="0">
                 <a:solidFill>
                   <a:srgbClr val="15241C"/>
                 </a:solidFill>
                 <a:latin typeface="Calibri"/>
               </a:rPr>
-              <a:t>Tinggi badan</a:t>
+              <a:t>Sumber: </a:t>
+            </a:r>
+            <a:r>
+              <a:rPr sz="1500" b="1">
+                <a:solidFill>
+                  <a:srgbClr val="15241C"/>
+                </a:solidFill>
+                <a:latin typeface="Calibri"/>
+              </a:rPr>
+              <a:t>"Stunting Toddler (Balita) Detection"</a:t>
+            </a:r>
+            <a:r>
+              <a:rPr sz="1500" b="0">
+                <a:solidFill>
+                  <a:srgbClr val="15241C"/>
+                </a:solidFill>
+                <a:latin typeface="Calibri"/>
+              </a:rPr>
+              <a:t> (Kaggle/GitHub), basis </a:t>
+            </a:r>
+            <a:r>
+              <a:rPr sz="1500" b="1">
+                <a:solidFill>
+                  <a:srgbClr val="15241C"/>
+                </a:solidFill>
+                <a:latin typeface="Calibri"/>
+              </a:rPr>
+              <a:t>WHO</a:t>
+            </a:r>
+            <a:r>
+              <a:rPr sz="1500" b="0">
+                <a:solidFill>
+                  <a:srgbClr val="15241C"/>
+                </a:solidFill>
+                <a:latin typeface="Calibri"/>
+              </a:rPr>
+              <a:t>.</a:t>
+            </a:r>
+          </a:p>
+          <a:p>
+            <a:pPr>
+              <a:spcAft>
+                <a:spcPts val="1000"/>
+              </a:spcAft>
+            </a:pPr>
+            <a:r>
+              <a:rPr sz="1500" b="1">
+                <a:solidFill>
+                  <a:srgbClr val="039855"/>
+                </a:solidFill>
+              </a:rPr>
+              <a:t>▸  </a:t>
+            </a:r>
+            <a:r>
+              <a:rPr sz="1500" b="1">
+                <a:solidFill>
+                  <a:srgbClr val="15241C"/>
+                </a:solidFill>
+                <a:latin typeface="Calibri"/>
+              </a:rPr>
+              <a:t>55.367 sampel</a:t>
+            </a:r>
+            <a:r>
+              <a:rPr sz="1500" b="0">
+                <a:solidFill>
+                  <a:srgbClr val="15241C"/>
+                </a:solidFill>
+                <a:latin typeface="Calibri"/>
+              </a:rPr>
+              <a:t> balita Indonesia — kelas seimbang (≈ tiap kelas).</a:t>
+            </a:r>
+          </a:p>
+          <a:p>
+            <a:pPr>
+              <a:spcAft>
+                <a:spcPts val="1000"/>
+              </a:spcAft>
+            </a:pPr>
+            <a:r>
+              <a:rPr sz="1500" b="1">
+                <a:solidFill>
+                  <a:srgbClr val="039855"/>
+                </a:solidFill>
+              </a:rPr>
+              <a:t>▸  </a:t>
+            </a:r>
+            <a:r>
+              <a:rPr sz="1500" b="0">
+                <a:solidFill>
+                  <a:srgbClr val="15241C"/>
+                </a:solidFill>
+                <a:latin typeface="Calibri"/>
+              </a:rPr>
+              <a:t>Fitur: Umur, Jenis Kelamin, Tinggi Badan → Status Gizi (4 kelas).</a:t>
+            </a:r>
+          </a:p>
+          <a:p>
+            <a:pPr>
+              <a:spcAft>
+                <a:spcPts val="1000"/>
+              </a:spcAft>
+            </a:pPr>
+            <a:r>
+              <a:rPr sz="1500" b="1">
+                <a:solidFill>
+                  <a:srgbClr val="039855"/>
+                </a:solidFill>
+              </a:rPr>
+              <a:t>▸  </a:t>
+            </a:r>
+            <a:r>
+              <a:rPr sz="1500" b="0">
+                <a:solidFill>
+                  <a:srgbClr val="15241C"/>
+                </a:solidFill>
+                <a:latin typeface="Calibri"/>
+              </a:rPr>
+              <a:t>Dipakai untuk </a:t>
+            </a:r>
+            <a:r>
+              <a:rPr sz="1500" b="1">
+                <a:solidFill>
+                  <a:srgbClr val="15241C"/>
+                </a:solidFill>
+                <a:latin typeface="Calibri"/>
+              </a:rPr>
+              <a:t>melatih &amp; memvalidasi</a:t>
+            </a:r>
+            <a:r>
+              <a:rPr sz="1500" b="0">
+                <a:solidFill>
+                  <a:srgbClr val="15241C"/>
+                </a:solidFill>
+                <a:latin typeface="Calibri"/>
+              </a:rPr>
+              <a:t> model inti pada kondisi data riil.</a:t>
             </a:r>
           </a:p>
         </p:txBody>
@@ -11470,8 +11508,52 @@
         </p:nvSpPr>
         <p:spPr>
           <a:xfrm>
-            <a:off x="3063240" y="1819656"/>
-            <a:ext cx="4754880" cy="237744"/>
+            <a:off x="7406640" y="1737360"/>
+            <a:ext cx="4069080" cy="2743200"/>
+          </a:xfrm>
+          <a:prstGeom prst="rect">
+            <a:avLst/>
+          </a:prstGeom>
+          <a:solidFill>
+            <a:srgbClr val="EAF7F0"/>
+          </a:solidFill>
+          <a:ln>
+            <a:noFill/>
+          </a:ln>
+          <a:effectLst/>
+        </p:spPr>
+        <p:style>
+          <a:lnRef idx="1">
+            <a:schemeClr val="accent1"/>
+          </a:lnRef>
+          <a:fillRef idx="3">
+            <a:schemeClr val="accent1"/>
+          </a:fillRef>
+          <a:effectRef idx="2">
+            <a:schemeClr val="accent1"/>
+          </a:effectRef>
+          <a:fontRef idx="minor">
+            <a:schemeClr val="lt1"/>
+          </a:fontRef>
+        </p:style>
+        <p:txBody>
+          <a:bodyPr rtlCol="0" anchor="ctr"/>
+          <a:lstStyle/>
+          <a:p>
+            <a:pPr algn="ctr"/>
+          </a:p>
+        </p:txBody>
+      </p:sp>
+      <p:sp>
+        <p:nvSpPr>
+          <p:cNvPr id="9" name="Rectangle 8"/>
+          <p:cNvSpPr/>
+          <p:nvPr/>
+        </p:nvSpPr>
+        <p:spPr>
+          <a:xfrm>
+            <a:off x="7406640" y="1737360"/>
+            <a:ext cx="82296" cy="2743200"/>
           </a:xfrm>
           <a:prstGeom prst="rect">
             <a:avLst/>
@@ -11508,14 +11590,14 @@
       </p:sp>
       <p:sp>
         <p:nvSpPr>
-          <p:cNvPr id="9" name="TextBox 8"/>
+          <p:cNvPr id="10" name="TextBox 9"/>
           <p:cNvSpPr txBox="1"/>
           <p:nvPr/>
         </p:nvSpPr>
         <p:spPr>
           <a:xfrm>
-            <a:off x="7909560" y="1783080"/>
-            <a:ext cx="914400" cy="310896"/>
+            <a:off x="7607808" y="1847088"/>
+            <a:ext cx="3703320" cy="2542032"/>
           </a:xfrm>
           <a:prstGeom prst="rect">
             <a:avLst/>
@@ -11523,63 +11605,72 @@
           <a:noFill/>
         </p:spPr>
         <p:txBody>
-          <a:bodyPr wrap="square" anchor="ctr">
+          <a:bodyPr wrap="square" anchor="t">
             <a:spAutoFit/>
           </a:bodyPr>
           <a:lstStyle/>
           <a:p>
             <a:pPr algn="l">
               <a:spcAft>
-                <a:spcPts val="600"/>
-              </a:spcAft>
-            </a:pPr>
-            <a:r>
-              <a:rPr sz="1200" b="1" i="0">
-                <a:solidFill>
-                  <a:srgbClr val="4B5563"/>
-                </a:solidFill>
-                <a:latin typeface="Calibri"/>
-              </a:rPr>
-              <a:t>50.6%</a:t>
-            </a:r>
-          </a:p>
-        </p:txBody>
-      </p:sp>
-      <p:sp>
-        <p:nvSpPr>
-          <p:cNvPr id="10" name="TextBox 9"/>
-          <p:cNvSpPr txBox="1"/>
-          <p:nvPr/>
-        </p:nvSpPr>
-        <p:spPr>
-          <a:xfrm>
-            <a:off x="594360" y="2286000"/>
-            <a:ext cx="2377440" cy="310896"/>
-          </a:xfrm>
-          <a:prstGeom prst="rect">
-            <a:avLst/>
-          </a:prstGeom>
-          <a:noFill/>
-        </p:spPr>
-        <p:txBody>
-          <a:bodyPr wrap="square" anchor="ctr">
-            <a:spAutoFit/>
-          </a:bodyPr>
-          <a:lstStyle/>
+                <a:spcPts val="300"/>
+              </a:spcAft>
+            </a:pPr>
+            <a:r>
+              <a:rPr sz="1300" b="1" i="0">
+                <a:solidFill>
+                  <a:srgbClr val="039855"/>
+                </a:solidFill>
+                <a:latin typeface="Calibri"/>
+              </a:rPr>
+              <a:t>Pembagian data</a:t>
+            </a:r>
+          </a:p>
           <a:p>
             <a:pPr algn="l">
               <a:spcAft>
-                <a:spcPts val="600"/>
-              </a:spcAft>
-            </a:pPr>
-            <a:r>
-              <a:rPr sz="1300" b="0" i="0">
+                <a:spcPts val="300"/>
+              </a:spcAft>
+            </a:pPr>
+            <a:r>
+              <a:rPr sz="1150" b="0" i="0">
                 <a:solidFill>
                   <a:srgbClr val="15241C"/>
                 </a:solidFill>
                 <a:latin typeface="Calibri"/>
               </a:rPr>
-              <a:t>Umur</a:t>
+              <a:t>• Latih: 44.293 sampel (80%)</a:t>
+            </a:r>
+          </a:p>
+          <a:p>
+            <a:pPr algn="l">
+              <a:spcAft>
+                <a:spcPts val="300"/>
+              </a:spcAft>
+            </a:pPr>
+            <a:r>
+              <a:rPr sz="1150" b="0" i="0">
+                <a:solidFill>
+                  <a:srgbClr val="15241C"/>
+                </a:solidFill>
+                <a:latin typeface="Calibri"/>
+              </a:rPr>
+              <a:t>• Uji: 11.074 sampel (20%)</a:t>
+            </a:r>
+          </a:p>
+          <a:p>
+            <a:pPr algn="l">
+              <a:spcAft>
+                <a:spcPts val="300"/>
+              </a:spcAft>
+            </a:pPr>
+            <a:r>
+              <a:rPr sz="1150" b="0" i="0">
+                <a:solidFill>
+                  <a:srgbClr val="15241C"/>
+                </a:solidFill>
+                <a:latin typeface="Calibri"/>
+              </a:rPr>
+              <a:t>• Stratified + 5-fold CV</a:t>
             </a:r>
           </a:p>
         </p:txBody>
@@ -11592,8 +11683,52 @@
         </p:nvSpPr>
         <p:spPr>
           <a:xfrm>
-            <a:off x="3063240" y="2322576"/>
-            <a:ext cx="2696937" cy="237744"/>
+            <a:off x="7406640" y="4663440"/>
+            <a:ext cx="4069080" cy="1417320"/>
+          </a:xfrm>
+          <a:prstGeom prst="rect">
+            <a:avLst/>
+          </a:prstGeom>
+          <a:solidFill>
+            <a:srgbClr val="EAF7F0"/>
+          </a:solidFill>
+          <a:ln>
+            <a:noFill/>
+          </a:ln>
+          <a:effectLst/>
+        </p:spPr>
+        <p:style>
+          <a:lnRef idx="1">
+            <a:schemeClr val="accent1"/>
+          </a:lnRef>
+          <a:fillRef idx="3">
+            <a:schemeClr val="accent1"/>
+          </a:fillRef>
+          <a:effectRef idx="2">
+            <a:schemeClr val="accent1"/>
+          </a:effectRef>
+          <a:fontRef idx="minor">
+            <a:schemeClr val="lt1"/>
+          </a:fontRef>
+        </p:style>
+        <p:txBody>
+          <a:bodyPr rtlCol="0" anchor="ctr"/>
+          <a:lstStyle/>
+          <a:p>
+            <a:pPr algn="ctr"/>
+          </a:p>
+        </p:txBody>
+      </p:sp>
+      <p:sp>
+        <p:nvSpPr>
+          <p:cNvPr id="12" name="Rectangle 11"/>
+          <p:cNvSpPr/>
+          <p:nvPr/>
+        </p:nvSpPr>
+        <p:spPr>
+          <a:xfrm>
+            <a:off x="7406640" y="4663440"/>
+            <a:ext cx="4069080" cy="82296"/>
           </a:xfrm>
           <a:prstGeom prst="rect">
             <a:avLst/>
@@ -11630,751 +11765,14 @@
       </p:sp>
       <p:sp>
         <p:nvSpPr>
-          <p:cNvPr id="12" name="TextBox 11"/>
-          <p:cNvSpPr txBox="1"/>
-          <p:nvPr/>
-        </p:nvSpPr>
-        <p:spPr>
-          <a:xfrm>
-            <a:off x="5851617" y="2286000"/>
-            <a:ext cx="914400" cy="310896"/>
-          </a:xfrm>
-          <a:prstGeom prst="rect">
-            <a:avLst/>
-          </a:prstGeom>
-          <a:noFill/>
-        </p:spPr>
-        <p:txBody>
-          <a:bodyPr wrap="square" anchor="ctr">
-            <a:spAutoFit/>
-          </a:bodyPr>
-          <a:lstStyle/>
-          <a:p>
-            <a:pPr algn="l">
-              <a:spcAft>
-                <a:spcPts val="600"/>
-              </a:spcAft>
-            </a:pPr>
-            <a:r>
-              <a:rPr sz="1200" b="1" i="0">
-                <a:solidFill>
-                  <a:srgbClr val="4B5563"/>
-                </a:solidFill>
-                <a:latin typeface="Calibri"/>
-              </a:rPr>
-              <a:t>28.7%</a:t>
-            </a:r>
-          </a:p>
-        </p:txBody>
-      </p:sp>
-      <p:sp>
-        <p:nvSpPr>
           <p:cNvPr id="13" name="TextBox 12"/>
           <p:cNvSpPr txBox="1"/>
           <p:nvPr/>
         </p:nvSpPr>
         <p:spPr>
           <a:xfrm>
-            <a:off x="594360" y="2788920"/>
-            <a:ext cx="2377440" cy="310896"/>
-          </a:xfrm>
-          <a:prstGeom prst="rect">
-            <a:avLst/>
-          </a:prstGeom>
-          <a:noFill/>
-        </p:spPr>
-        <p:txBody>
-          <a:bodyPr wrap="square" anchor="ctr">
-            <a:spAutoFit/>
-          </a:bodyPr>
-          <a:lstStyle/>
-          <a:p>
-            <a:pPr algn="l">
-              <a:spcAft>
-                <a:spcPts val="600"/>
-              </a:spcAft>
-            </a:pPr>
-            <a:r>
-              <a:rPr sz="1300" b="0" i="0">
-                <a:solidFill>
-                  <a:srgbClr val="15241C"/>
-                </a:solidFill>
-                <a:latin typeface="Calibri"/>
-              </a:rPr>
-              <a:t>Berat badan</a:t>
-            </a:r>
-          </a:p>
-        </p:txBody>
-      </p:sp>
-      <p:sp>
-        <p:nvSpPr>
-          <p:cNvPr id="14" name="Rectangle 13"/>
-          <p:cNvSpPr/>
-          <p:nvPr/>
-        </p:nvSpPr>
-        <p:spPr>
-          <a:xfrm>
-            <a:off x="3063240" y="2825496"/>
-            <a:ext cx="892714" cy="237744"/>
-          </a:xfrm>
-          <a:prstGeom prst="rect">
-            <a:avLst/>
-          </a:prstGeom>
-          <a:solidFill>
-            <a:srgbClr val="039855"/>
-          </a:solidFill>
-          <a:ln>
-            <a:noFill/>
-          </a:ln>
-          <a:effectLst/>
-        </p:spPr>
-        <p:style>
-          <a:lnRef idx="1">
-            <a:schemeClr val="accent1"/>
-          </a:lnRef>
-          <a:fillRef idx="3">
-            <a:schemeClr val="accent1"/>
-          </a:fillRef>
-          <a:effectRef idx="2">
-            <a:schemeClr val="accent1"/>
-          </a:effectRef>
-          <a:fontRef idx="minor">
-            <a:schemeClr val="lt1"/>
-          </a:fontRef>
-        </p:style>
-        <p:txBody>
-          <a:bodyPr rtlCol="0" anchor="ctr"/>
-          <a:lstStyle/>
-          <a:p>
-            <a:pPr algn="ctr"/>
-          </a:p>
-        </p:txBody>
-      </p:sp>
-      <p:sp>
-        <p:nvSpPr>
-          <p:cNvPr id="15" name="TextBox 14"/>
-          <p:cNvSpPr txBox="1"/>
-          <p:nvPr/>
-        </p:nvSpPr>
-        <p:spPr>
-          <a:xfrm>
-            <a:off x="4047394" y="2788920"/>
-            <a:ext cx="914400" cy="310896"/>
-          </a:xfrm>
-          <a:prstGeom prst="rect">
-            <a:avLst/>
-          </a:prstGeom>
-          <a:noFill/>
-        </p:spPr>
-        <p:txBody>
-          <a:bodyPr wrap="square" anchor="ctr">
-            <a:spAutoFit/>
-          </a:bodyPr>
-          <a:lstStyle/>
-          <a:p>
-            <a:pPr algn="l">
-              <a:spcAft>
-                <a:spcPts val="600"/>
-              </a:spcAft>
-            </a:pPr>
-            <a:r>
-              <a:rPr sz="1200" b="1" i="0">
-                <a:solidFill>
-                  <a:srgbClr val="4B5563"/>
-                </a:solidFill>
-                <a:latin typeface="Calibri"/>
-              </a:rPr>
-              <a:t>9.5%</a:t>
-            </a:r>
-          </a:p>
-        </p:txBody>
-      </p:sp>
-      <p:sp>
-        <p:nvSpPr>
-          <p:cNvPr id="16" name="TextBox 15"/>
-          <p:cNvSpPr txBox="1"/>
-          <p:nvPr/>
-        </p:nvSpPr>
-        <p:spPr>
-          <a:xfrm>
-            <a:off x="594360" y="3291840"/>
-            <a:ext cx="2377440" cy="310896"/>
-          </a:xfrm>
-          <a:prstGeom prst="rect">
-            <a:avLst/>
-          </a:prstGeom>
-          <a:noFill/>
-        </p:spPr>
-        <p:txBody>
-          <a:bodyPr wrap="square" anchor="ctr">
-            <a:spAutoFit/>
-          </a:bodyPr>
-          <a:lstStyle/>
-          <a:p>
-            <a:pPr algn="l">
-              <a:spcAft>
-                <a:spcPts val="600"/>
-              </a:spcAft>
-            </a:pPr>
-            <a:r>
-              <a:rPr sz="1300" b="0" i="0">
-                <a:solidFill>
-                  <a:srgbClr val="15241C"/>
-                </a:solidFill>
-                <a:latin typeface="Calibri"/>
-              </a:rPr>
-              <a:t>Jarak kehamilan</a:t>
-            </a:r>
-          </a:p>
-        </p:txBody>
-      </p:sp>
-      <p:sp>
-        <p:nvSpPr>
-          <p:cNvPr id="17" name="Rectangle 16"/>
-          <p:cNvSpPr/>
-          <p:nvPr/>
-        </p:nvSpPr>
-        <p:spPr>
-          <a:xfrm>
-            <a:off x="3063240" y="3328416"/>
-            <a:ext cx="404070" cy="237744"/>
-          </a:xfrm>
-          <a:prstGeom prst="rect">
-            <a:avLst/>
-          </a:prstGeom>
-          <a:solidFill>
-            <a:srgbClr val="039855"/>
-          </a:solidFill>
-          <a:ln>
-            <a:noFill/>
-          </a:ln>
-          <a:effectLst/>
-        </p:spPr>
-        <p:style>
-          <a:lnRef idx="1">
-            <a:schemeClr val="accent1"/>
-          </a:lnRef>
-          <a:fillRef idx="3">
-            <a:schemeClr val="accent1"/>
-          </a:fillRef>
-          <a:effectRef idx="2">
-            <a:schemeClr val="accent1"/>
-          </a:effectRef>
-          <a:fontRef idx="minor">
-            <a:schemeClr val="lt1"/>
-          </a:fontRef>
-        </p:style>
-        <p:txBody>
-          <a:bodyPr rtlCol="0" anchor="ctr"/>
-          <a:lstStyle/>
-          <a:p>
-            <a:pPr algn="ctr"/>
-          </a:p>
-        </p:txBody>
-      </p:sp>
-      <p:sp>
-        <p:nvSpPr>
-          <p:cNvPr id="18" name="TextBox 17"/>
-          <p:cNvSpPr txBox="1"/>
-          <p:nvPr/>
-        </p:nvSpPr>
-        <p:spPr>
-          <a:xfrm>
-            <a:off x="3558750" y="3291840"/>
-            <a:ext cx="914400" cy="310896"/>
-          </a:xfrm>
-          <a:prstGeom prst="rect">
-            <a:avLst/>
-          </a:prstGeom>
-          <a:noFill/>
-        </p:spPr>
-        <p:txBody>
-          <a:bodyPr wrap="square" anchor="ctr">
-            <a:spAutoFit/>
-          </a:bodyPr>
-          <a:lstStyle/>
-          <a:p>
-            <a:pPr algn="l">
-              <a:spcAft>
-                <a:spcPts val="600"/>
-              </a:spcAft>
-            </a:pPr>
-            <a:r>
-              <a:rPr sz="1200" b="1" i="0">
-                <a:solidFill>
-                  <a:srgbClr val="4B5563"/>
-                </a:solidFill>
-                <a:latin typeface="Calibri"/>
-              </a:rPr>
-              <a:t>4.3%</a:t>
-            </a:r>
-          </a:p>
-        </p:txBody>
-      </p:sp>
-      <p:sp>
-        <p:nvSpPr>
-          <p:cNvPr id="19" name="TextBox 18"/>
-          <p:cNvSpPr txBox="1"/>
-          <p:nvPr/>
-        </p:nvSpPr>
-        <p:spPr>
-          <a:xfrm>
-            <a:off x="594360" y="3794760"/>
-            <a:ext cx="2377440" cy="310896"/>
-          </a:xfrm>
-          <a:prstGeom prst="rect">
-            <a:avLst/>
-          </a:prstGeom>
-          <a:noFill/>
-        </p:spPr>
-        <p:txBody>
-          <a:bodyPr wrap="square" anchor="ctr">
-            <a:spAutoFit/>
-          </a:bodyPr>
-          <a:lstStyle/>
-          <a:p>
-            <a:pPr algn="l">
-              <a:spcAft>
-                <a:spcPts val="600"/>
-              </a:spcAft>
-            </a:pPr>
-            <a:r>
-              <a:rPr sz="1300" b="0" i="0">
-                <a:solidFill>
-                  <a:srgbClr val="15241C"/>
-                </a:solidFill>
-                <a:latin typeface="Calibri"/>
-              </a:rPr>
-              <a:t>Usia ibu menikah</a:t>
-            </a:r>
-          </a:p>
-        </p:txBody>
-      </p:sp>
-      <p:sp>
-        <p:nvSpPr>
-          <p:cNvPr id="20" name="Rectangle 19"/>
-          <p:cNvSpPr/>
-          <p:nvPr/>
-        </p:nvSpPr>
-        <p:spPr>
-          <a:xfrm>
-            <a:off x="3063240" y="3831336"/>
-            <a:ext cx="394673" cy="237744"/>
-          </a:xfrm>
-          <a:prstGeom prst="rect">
-            <a:avLst/>
-          </a:prstGeom>
-          <a:solidFill>
-            <a:srgbClr val="039855"/>
-          </a:solidFill>
-          <a:ln>
-            <a:noFill/>
-          </a:ln>
-          <a:effectLst/>
-        </p:spPr>
-        <p:style>
-          <a:lnRef idx="1">
-            <a:schemeClr val="accent1"/>
-          </a:lnRef>
-          <a:fillRef idx="3">
-            <a:schemeClr val="accent1"/>
-          </a:fillRef>
-          <a:effectRef idx="2">
-            <a:schemeClr val="accent1"/>
-          </a:effectRef>
-          <a:fontRef idx="minor">
-            <a:schemeClr val="lt1"/>
-          </a:fontRef>
-        </p:style>
-        <p:txBody>
-          <a:bodyPr rtlCol="0" anchor="ctr"/>
-          <a:lstStyle/>
-          <a:p>
-            <a:pPr algn="ctr"/>
-          </a:p>
-        </p:txBody>
-      </p:sp>
-      <p:sp>
-        <p:nvSpPr>
-          <p:cNvPr id="21" name="TextBox 20"/>
-          <p:cNvSpPr txBox="1"/>
-          <p:nvPr/>
-        </p:nvSpPr>
-        <p:spPr>
-          <a:xfrm>
-            <a:off x="3549353" y="3794760"/>
-            <a:ext cx="914400" cy="310896"/>
-          </a:xfrm>
-          <a:prstGeom prst="rect">
-            <a:avLst/>
-          </a:prstGeom>
-          <a:noFill/>
-        </p:spPr>
-        <p:txBody>
-          <a:bodyPr wrap="square" anchor="ctr">
-            <a:spAutoFit/>
-          </a:bodyPr>
-          <a:lstStyle/>
-          <a:p>
-            <a:pPr algn="l">
-              <a:spcAft>
-                <a:spcPts val="600"/>
-              </a:spcAft>
-            </a:pPr>
-            <a:r>
-              <a:rPr sz="1200" b="1" i="0">
-                <a:solidFill>
-                  <a:srgbClr val="4B5563"/>
-                </a:solidFill>
-                <a:latin typeface="Calibri"/>
-              </a:rPr>
-              <a:t>4.2%</a:t>
-            </a:r>
-          </a:p>
-        </p:txBody>
-      </p:sp>
-      <p:sp>
-        <p:nvSpPr>
-          <p:cNvPr id="22" name="TextBox 21"/>
-          <p:cNvSpPr txBox="1"/>
-          <p:nvPr/>
-        </p:nvSpPr>
-        <p:spPr>
-          <a:xfrm>
-            <a:off x="594360" y="4297680"/>
-            <a:ext cx="2377440" cy="310896"/>
-          </a:xfrm>
-          <a:prstGeom prst="rect">
-            <a:avLst/>
-          </a:prstGeom>
-          <a:noFill/>
-        </p:spPr>
-        <p:txBody>
-          <a:bodyPr wrap="square" anchor="ctr">
-            <a:spAutoFit/>
-          </a:bodyPr>
-          <a:lstStyle/>
-          <a:p>
-            <a:pPr algn="l">
-              <a:spcAft>
-                <a:spcPts val="600"/>
-              </a:spcAft>
-            </a:pPr>
-            <a:r>
-              <a:rPr sz="1300" b="0" i="0">
-                <a:solidFill>
-                  <a:srgbClr val="15241C"/>
-                </a:solidFill>
-                <a:latin typeface="Calibri"/>
-              </a:rPr>
-              <a:t>Gizi ibu hamil</a:t>
-            </a:r>
-          </a:p>
-        </p:txBody>
-      </p:sp>
-      <p:sp>
-        <p:nvSpPr>
-          <p:cNvPr id="23" name="Rectangle 22"/>
-          <p:cNvSpPr/>
-          <p:nvPr/>
-        </p:nvSpPr>
-        <p:spPr>
-          <a:xfrm>
-            <a:off x="3063240" y="4334256"/>
-            <a:ext cx="140954" cy="237744"/>
-          </a:xfrm>
-          <a:prstGeom prst="rect">
-            <a:avLst/>
-          </a:prstGeom>
-          <a:solidFill>
-            <a:srgbClr val="039855"/>
-          </a:solidFill>
-          <a:ln>
-            <a:noFill/>
-          </a:ln>
-          <a:effectLst/>
-        </p:spPr>
-        <p:style>
-          <a:lnRef idx="1">
-            <a:schemeClr val="accent1"/>
-          </a:lnRef>
-          <a:fillRef idx="3">
-            <a:schemeClr val="accent1"/>
-          </a:fillRef>
-          <a:effectRef idx="2">
-            <a:schemeClr val="accent1"/>
-          </a:effectRef>
-          <a:fontRef idx="minor">
-            <a:schemeClr val="lt1"/>
-          </a:fontRef>
-        </p:style>
-        <p:txBody>
-          <a:bodyPr rtlCol="0" anchor="ctr"/>
-          <a:lstStyle/>
-          <a:p>
-            <a:pPr algn="ctr"/>
-          </a:p>
-        </p:txBody>
-      </p:sp>
-      <p:sp>
-        <p:nvSpPr>
-          <p:cNvPr id="24" name="TextBox 23"/>
-          <p:cNvSpPr txBox="1"/>
-          <p:nvPr/>
-        </p:nvSpPr>
-        <p:spPr>
-          <a:xfrm>
-            <a:off x="3295634" y="4297680"/>
-            <a:ext cx="914400" cy="310896"/>
-          </a:xfrm>
-          <a:prstGeom prst="rect">
-            <a:avLst/>
-          </a:prstGeom>
-          <a:noFill/>
-        </p:spPr>
-        <p:txBody>
-          <a:bodyPr wrap="square" anchor="ctr">
-            <a:spAutoFit/>
-          </a:bodyPr>
-          <a:lstStyle/>
-          <a:p>
-            <a:pPr algn="l">
-              <a:spcAft>
-                <a:spcPts val="600"/>
-              </a:spcAft>
-            </a:pPr>
-            <a:r>
-              <a:rPr sz="1200" b="1" i="0">
-                <a:solidFill>
-                  <a:srgbClr val="4B5563"/>
-                </a:solidFill>
-                <a:latin typeface="Calibri"/>
-              </a:rPr>
-              <a:t>1.5%</a:t>
-            </a:r>
-          </a:p>
-        </p:txBody>
-      </p:sp>
-      <p:sp>
-        <p:nvSpPr>
-          <p:cNvPr id="25" name="TextBox 24"/>
-          <p:cNvSpPr txBox="1"/>
-          <p:nvPr/>
-        </p:nvSpPr>
-        <p:spPr>
-          <a:xfrm>
-            <a:off x="594360" y="4800600"/>
-            <a:ext cx="2377440" cy="310896"/>
-          </a:xfrm>
-          <a:prstGeom prst="rect">
-            <a:avLst/>
-          </a:prstGeom>
-          <a:noFill/>
-        </p:spPr>
-        <p:txBody>
-          <a:bodyPr wrap="square" anchor="ctr">
-            <a:spAutoFit/>
-          </a:bodyPr>
-          <a:lstStyle/>
-          <a:p>
-            <a:pPr algn="l">
-              <a:spcAft>
-                <a:spcPts val="600"/>
-              </a:spcAft>
-            </a:pPr>
-            <a:r>
-              <a:rPr sz="1300" b="0" i="0">
-                <a:solidFill>
-                  <a:srgbClr val="15241C"/>
-                </a:solidFill>
-                <a:latin typeface="Calibri"/>
-              </a:rPr>
-              <a:t>Jenis kelamin</a:t>
-            </a:r>
-          </a:p>
-        </p:txBody>
-      </p:sp>
-      <p:sp>
-        <p:nvSpPr>
-          <p:cNvPr id="26" name="Rectangle 25"/>
-          <p:cNvSpPr/>
-          <p:nvPr/>
-        </p:nvSpPr>
-        <p:spPr>
-          <a:xfrm>
-            <a:off x="3063240" y="4837176"/>
-            <a:ext cx="122160" cy="237744"/>
-          </a:xfrm>
-          <a:prstGeom prst="rect">
-            <a:avLst/>
-          </a:prstGeom>
-          <a:solidFill>
-            <a:srgbClr val="039855"/>
-          </a:solidFill>
-          <a:ln>
-            <a:noFill/>
-          </a:ln>
-          <a:effectLst/>
-        </p:spPr>
-        <p:style>
-          <a:lnRef idx="1">
-            <a:schemeClr val="accent1"/>
-          </a:lnRef>
-          <a:fillRef idx="3">
-            <a:schemeClr val="accent1"/>
-          </a:fillRef>
-          <a:effectRef idx="2">
-            <a:schemeClr val="accent1"/>
-          </a:effectRef>
-          <a:fontRef idx="minor">
-            <a:schemeClr val="lt1"/>
-          </a:fontRef>
-        </p:style>
-        <p:txBody>
-          <a:bodyPr rtlCol="0" anchor="ctr"/>
-          <a:lstStyle/>
-          <a:p>
-            <a:pPr algn="ctr"/>
-          </a:p>
-        </p:txBody>
-      </p:sp>
-      <p:sp>
-        <p:nvSpPr>
-          <p:cNvPr id="27" name="TextBox 26"/>
-          <p:cNvSpPr txBox="1"/>
-          <p:nvPr/>
-        </p:nvSpPr>
-        <p:spPr>
-          <a:xfrm>
-            <a:off x="3276840" y="4800600"/>
-            <a:ext cx="914400" cy="310896"/>
-          </a:xfrm>
-          <a:prstGeom prst="rect">
-            <a:avLst/>
-          </a:prstGeom>
-          <a:noFill/>
-        </p:spPr>
-        <p:txBody>
-          <a:bodyPr wrap="square" anchor="ctr">
-            <a:spAutoFit/>
-          </a:bodyPr>
-          <a:lstStyle/>
-          <a:p>
-            <a:pPr algn="l">
-              <a:spcAft>
-                <a:spcPts val="600"/>
-              </a:spcAft>
-            </a:pPr>
-            <a:r>
-              <a:rPr sz="1200" b="1" i="0">
-                <a:solidFill>
-                  <a:srgbClr val="4B5563"/>
-                </a:solidFill>
-                <a:latin typeface="Calibri"/>
-              </a:rPr>
-              <a:t>1.3%</a:t>
-            </a:r>
-          </a:p>
-        </p:txBody>
-      </p:sp>
-      <p:sp>
-        <p:nvSpPr>
-          <p:cNvPr id="28" name="Rectangle 27"/>
-          <p:cNvSpPr/>
-          <p:nvPr/>
-        </p:nvSpPr>
-        <p:spPr>
-          <a:xfrm>
-            <a:off x="8229600" y="1783080"/>
-            <a:ext cx="3246120" cy="3703320"/>
-          </a:xfrm>
-          <a:prstGeom prst="rect">
-            <a:avLst/>
-          </a:prstGeom>
-          <a:solidFill>
-            <a:srgbClr val="EAF7F0"/>
-          </a:solidFill>
-          <a:ln>
-            <a:noFill/>
-          </a:ln>
-          <a:effectLst/>
-        </p:spPr>
-        <p:style>
-          <a:lnRef idx="1">
-            <a:schemeClr val="accent1"/>
-          </a:lnRef>
-          <a:fillRef idx="3">
-            <a:schemeClr val="accent1"/>
-          </a:fillRef>
-          <a:effectRef idx="2">
-            <a:schemeClr val="accent1"/>
-          </a:effectRef>
-          <a:fontRef idx="minor">
-            <a:schemeClr val="lt1"/>
-          </a:fontRef>
-        </p:style>
-        <p:txBody>
-          <a:bodyPr rtlCol="0" anchor="ctr"/>
-          <a:lstStyle/>
-          <a:p>
-            <a:pPr algn="ctr"/>
-          </a:p>
-        </p:txBody>
-      </p:sp>
-      <p:sp>
-        <p:nvSpPr>
-          <p:cNvPr id="29" name="Rectangle 28"/>
-          <p:cNvSpPr/>
-          <p:nvPr/>
-        </p:nvSpPr>
-        <p:spPr>
-          <a:xfrm>
-            <a:off x="8229600" y="1783080"/>
-            <a:ext cx="82296" cy="3703320"/>
-          </a:xfrm>
-          <a:prstGeom prst="rect">
-            <a:avLst/>
-          </a:prstGeom>
-          <a:solidFill>
-            <a:srgbClr val="039855"/>
-          </a:solidFill>
-          <a:ln>
-            <a:noFill/>
-          </a:ln>
-          <a:effectLst/>
-        </p:spPr>
-        <p:style>
-          <a:lnRef idx="1">
-            <a:schemeClr val="accent1"/>
-          </a:lnRef>
-          <a:fillRef idx="3">
-            <a:schemeClr val="accent1"/>
-          </a:fillRef>
-          <a:effectRef idx="2">
-            <a:schemeClr val="accent1"/>
-          </a:effectRef>
-          <a:fontRef idx="minor">
-            <a:schemeClr val="lt1"/>
-          </a:fontRef>
-        </p:style>
-        <p:txBody>
-          <a:bodyPr rtlCol="0" anchor="ctr"/>
-          <a:lstStyle/>
-          <a:p>
-            <a:pPr algn="ctr"/>
-          </a:p>
-        </p:txBody>
-      </p:sp>
-      <p:sp>
-        <p:nvSpPr>
-          <p:cNvPr id="30" name="TextBox 29"/>
-          <p:cNvSpPr txBox="1"/>
-          <p:nvPr/>
-        </p:nvSpPr>
-        <p:spPr>
-          <a:xfrm>
-            <a:off x="8430768" y="1892808"/>
-            <a:ext cx="2880360" cy="3502152"/>
+            <a:off x="7406640" y="4882896"/>
+            <a:ext cx="4069080" cy="731520"/>
           </a:xfrm>
           <a:prstGeom prst="rect">
             <a:avLst/>
@@ -12387,35 +11785,58 @@
           </a:bodyPr>
           <a:lstStyle/>
           <a:p>
-            <a:pPr algn="l">
-              <a:spcAft>
-                <a:spcPts val="300"/>
-              </a:spcAft>
-            </a:pPr>
-            <a:r>
-              <a:rPr sz="1300" b="1" i="0">
+            <a:pPr algn="ctr">
+              <a:spcAft>
+                <a:spcPts val="600"/>
+              </a:spcAft>
+            </a:pPr>
+            <a:r>
+              <a:rPr sz="3000" b="1" i="0">
                 <a:solidFill>
                   <a:srgbClr val="039855"/>
                 </a:solidFill>
                 <a:latin typeface="Calibri"/>
               </a:rPr>
-              <a:t>Siapa yang menentukan?</a:t>
-            </a:r>
-          </a:p>
-          <a:p>
-            <a:pPr algn="l">
-              <a:spcAft>
-                <a:spcPts val="300"/>
-              </a:spcAft>
-            </a:pPr>
-            <a:r>
-              <a:rPr sz="1150" b="0" i="0">
-                <a:solidFill>
-                  <a:srgbClr val="15241C"/>
-                </a:solidFill>
-                <a:latin typeface="Calibri"/>
-              </a:rPr>
-              <a:t>BUKAN kami. Random Forest MENGHITUNG SENDIRI dari data: seberapa sering &amp; seberapa besar tiap faktor membantu menebak status gizi dengan benar. Hasilnya disebut "feature importance". Tinggi &amp; umur paling besar karena definisi stunting memang soal tinggi-menurut-umur.</a:t>
+              <a:t>55.367</a:t>
+            </a:r>
+          </a:p>
+        </p:txBody>
+      </p:sp>
+      <p:sp>
+        <p:nvSpPr>
+          <p:cNvPr id="14" name="TextBox 13"/>
+          <p:cNvSpPr txBox="1"/>
+          <p:nvPr/>
+        </p:nvSpPr>
+        <p:spPr>
+          <a:xfrm>
+            <a:off x="7406640" y="5559552"/>
+            <a:ext cx="4069080" cy="457200"/>
+          </a:xfrm>
+          <a:prstGeom prst="rect">
+            <a:avLst/>
+          </a:prstGeom>
+          <a:noFill/>
+        </p:spPr>
+        <p:txBody>
+          <a:bodyPr wrap="square" anchor="t">
+            <a:spAutoFit/>
+          </a:bodyPr>
+          <a:lstStyle/>
+          <a:p>
+            <a:pPr algn="ctr">
+              <a:spcAft>
+                <a:spcPts val="600"/>
+              </a:spcAft>
+            </a:pPr>
+            <a:r>
+              <a:rPr sz="1200" b="0" i="0">
+                <a:solidFill>
+                  <a:srgbClr val="4B5563"/>
+                </a:solidFill>
+                <a:latin typeface="Calibri"/>
+              </a:rPr>
+              <a:t>Sampel data nyata</a:t>
             </a:r>
           </a:p>
         </p:txBody>
@@ -12604,7 +12025,7 @@
                 </a:solidFill>
                 <a:latin typeface="Calibri"/>
               </a:rPr>
-              <a:t>REKAYASA PERANGKAT LUNAK</a:t>
+              <a:t>PROSES (STEP-BY-STEP)</a:t>
             </a:r>
           </a:p>
         </p:txBody>
@@ -12637,13 +12058,13 @@
               </a:spcAft>
             </a:pPr>
             <a:r>
-              <a:rPr sz="2800" b="1" i="0">
+              <a:rPr sz="2700" b="1" i="0">
                 <a:solidFill>
                   <a:srgbClr val="05312A"/>
                 </a:solidFill>
                 <a:latin typeface="Calibri"/>
               </a:rPr>
-              <a:t>Teknologi yang kami bangun</a:t>
+              <a:t>Langkah pembuatan &amp; pelatihan model</a:t>
             </a:r>
           </a:p>
         </p:txBody>
@@ -12656,8 +12077,8 @@
         </p:nvSpPr>
         <p:spPr>
           <a:xfrm>
-            <a:off x="594360" y="1783080"/>
-            <a:ext cx="10881360" cy="4206240"/>
+            <a:off x="594360" y="1645920"/>
+            <a:ext cx="5486400" cy="4572000"/>
           </a:xfrm>
           <a:prstGeom prst="rect">
             <a:avLst/>
@@ -12672,11 +12093,11 @@
           <a:p>
             <a:pPr>
               <a:spcAft>
-                <a:spcPts val="1000"/>
-              </a:spcAft>
-            </a:pPr>
-            <a:r>
-              <a:rPr sz="1700" b="1">
+                <a:spcPts val="700"/>
+              </a:spcAft>
+            </a:pPr>
+            <a:r>
+              <a:rPr sz="1400" b="1">
                 <a:solidFill>
                   <a:srgbClr val="039855"/>
                 </a:solidFill>
@@ -12684,32 +12105,32 @@
               <a:t>▸  </a:t>
             </a:r>
             <a:r>
-              <a:rPr sz="1700" b="1">
+              <a:rPr sz="1400" b="1">
                 <a:solidFill>
                   <a:srgbClr val="15241C"/>
                 </a:solidFill>
                 <a:latin typeface="Calibri"/>
               </a:rPr>
-              <a:t>React + Vite + Tailwind</a:t>
-            </a:r>
-            <a:r>
-              <a:rPr sz="1700" b="0">
+              <a:t>1.</a:t>
+            </a:r>
+            <a:r>
+              <a:rPr sz="1400" b="0">
                 <a:solidFill>
                   <a:srgbClr val="15241C"/>
                 </a:solidFill>
                 <a:latin typeface="Calibri"/>
               </a:rPr>
-              <a:t> — kerangka modern untuk membuat tampilan website yang cepat dan rapi.</a:t>
+              <a:t> Kumpulkan data (real 55.367 + multi-faktor 25.000).</a:t>
             </a:r>
           </a:p>
           <a:p>
             <a:pPr>
               <a:spcAft>
-                <a:spcPts val="1000"/>
-              </a:spcAft>
-            </a:pPr>
-            <a:r>
-              <a:rPr sz="1700" b="1">
+                <a:spcPts val="700"/>
+              </a:spcAft>
+            </a:pPr>
+            <a:r>
+              <a:rPr sz="1400" b="1">
                 <a:solidFill>
                   <a:srgbClr val="039855"/>
                 </a:solidFill>
@@ -12717,32 +12138,32 @@
               <a:t>▸  </a:t>
             </a:r>
             <a:r>
-              <a:rPr sz="1700" b="1">
+              <a:rPr sz="1400" b="1">
                 <a:solidFill>
                   <a:srgbClr val="15241C"/>
                 </a:solidFill>
                 <a:latin typeface="Calibri"/>
               </a:rPr>
-              <a:t>ONNX Runtime Web</a:t>
-            </a:r>
-            <a:r>
-              <a:rPr sz="1700" b="0">
+              <a:t>2.</a:t>
+            </a:r>
+            <a:r>
+              <a:rPr sz="1400" b="0">
                 <a:solidFill>
                   <a:srgbClr val="15241C"/>
                 </a:solidFill>
                 <a:latin typeface="Calibri"/>
               </a:rPr>
-              <a:t> — pustaka yang bisa menjalankan model machine learning langsung di dalam peramban (browser), tanpa server.</a:t>
+              <a:t> Bersihkan &amp; seragamkan label (4 kelas).</a:t>
             </a:r>
           </a:p>
           <a:p>
             <a:pPr>
               <a:spcAft>
-                <a:spcPts val="1000"/>
-              </a:spcAft>
-            </a:pPr>
-            <a:r>
-              <a:rPr sz="1700" b="1">
+                <a:spcPts val="700"/>
+              </a:spcAft>
+            </a:pPr>
+            <a:r>
+              <a:rPr sz="1400" b="1">
                 <a:solidFill>
                   <a:srgbClr val="039855"/>
                 </a:solidFill>
@@ -12750,32 +12171,32 @@
               <a:t>▸  </a:t>
             </a:r>
             <a:r>
-              <a:rPr sz="1700" b="1">
+              <a:rPr sz="1400" b="1">
                 <a:solidFill>
                   <a:srgbClr val="15241C"/>
                 </a:solidFill>
                 <a:latin typeface="Calibri"/>
               </a:rPr>
-              <a:t>Web Worker</a:t>
-            </a:r>
-            <a:r>
-              <a:rPr sz="1700" b="0">
+              <a:t>3.</a:t>
+            </a:r>
+            <a:r>
+              <a:rPr sz="1400" b="0">
                 <a:solidFill>
                   <a:srgbClr val="15241C"/>
                 </a:solidFill>
                 <a:latin typeface="Calibri"/>
               </a:rPr>
-              <a:t> — "pekerja latar belakang"; proses menebak dijalankan terpisah agar tampilan tidak macet/hang saat menghitung.</a:t>
+              <a:t> Encoding teks→angka (Label Encoding).</a:t>
             </a:r>
           </a:p>
           <a:p>
             <a:pPr>
               <a:spcAft>
-                <a:spcPts val="1000"/>
-              </a:spcAft>
-            </a:pPr>
-            <a:r>
-              <a:rPr sz="1700" b="1">
+                <a:spcPts val="700"/>
+              </a:spcAft>
+            </a:pPr>
+            <a:r>
+              <a:rPr sz="1400" b="1">
                 <a:solidFill>
                   <a:srgbClr val="039855"/>
                 </a:solidFill>
@@ -12783,22 +12204,294 @@
               <a:t>▸  </a:t>
             </a:r>
             <a:r>
-              <a:rPr sz="1700" b="1">
+              <a:rPr sz="1400" b="1">
                 <a:solidFill>
                   <a:srgbClr val="15241C"/>
                 </a:solidFill>
                 <a:latin typeface="Calibri"/>
               </a:rPr>
-              <a:t>Hasil:</a:t>
-            </a:r>
-            <a:r>
-              <a:rPr sz="1700" b="0">
+              <a:t>4.</a:t>
+            </a:r>
+            <a:r>
+              <a:rPr sz="1400" b="0">
                 <a:solidFill>
                   <a:srgbClr val="15241C"/>
                 </a:solidFill>
                 <a:latin typeface="Calibri"/>
               </a:rPr>
-              <a:t> aplikasi gratis, cepat, bisa offline, dan data anak tidak keluar dari perangkat.</a:t>
+              <a:t> Bagi data 80% latih : 20% uji (stratified).</a:t>
+            </a:r>
+          </a:p>
+          <a:p>
+            <a:pPr>
+              <a:spcAft>
+                <a:spcPts val="700"/>
+              </a:spcAft>
+            </a:pPr>
+            <a:r>
+              <a:rPr sz="1400" b="1">
+                <a:solidFill>
+                  <a:srgbClr val="039855"/>
+                </a:solidFill>
+              </a:rPr>
+              <a:t>▸  </a:t>
+            </a:r>
+            <a:r>
+              <a:rPr sz="1400" b="1">
+                <a:solidFill>
+                  <a:srgbClr val="15241C"/>
+                </a:solidFill>
+                <a:latin typeface="Calibri"/>
+              </a:rPr>
+              <a:t>5.</a:t>
+            </a:r>
+            <a:r>
+              <a:rPr sz="1400" b="0">
+                <a:solidFill>
+                  <a:srgbClr val="15241C"/>
+                </a:solidFill>
+                <a:latin typeface="Calibri"/>
+              </a:rPr>
+              <a:t> Inisialisasi Random Forest (120 pohon, depth 14).</a:t>
+            </a:r>
+          </a:p>
+          <a:p>
+            <a:pPr>
+              <a:spcAft>
+                <a:spcPts val="700"/>
+              </a:spcAft>
+            </a:pPr>
+            <a:r>
+              <a:rPr sz="1400" b="1">
+                <a:solidFill>
+                  <a:srgbClr val="039855"/>
+                </a:solidFill>
+              </a:rPr>
+              <a:t>▸  </a:t>
+            </a:r>
+            <a:r>
+              <a:rPr sz="1400" b="1">
+                <a:solidFill>
+                  <a:srgbClr val="15241C"/>
+                </a:solidFill>
+                <a:latin typeface="Calibri"/>
+              </a:rPr>
+              <a:t>6.</a:t>
+            </a:r>
+            <a:r>
+              <a:rPr sz="1400" b="0">
+                <a:solidFill>
+                  <a:srgbClr val="15241C"/>
+                </a:solidFill>
+                <a:latin typeface="Calibri"/>
+              </a:rPr>
+              <a:t> Latih: tiap pohon bootstrap + fitur acak.</a:t>
+            </a:r>
+          </a:p>
+        </p:txBody>
+      </p:sp>
+      <p:sp>
+        <p:nvSpPr>
+          <p:cNvPr id="8" name="TextBox 7"/>
+          <p:cNvSpPr txBox="1"/>
+          <p:nvPr/>
+        </p:nvSpPr>
+        <p:spPr>
+          <a:xfrm>
+            <a:off x="6263640" y="1645920"/>
+            <a:ext cx="5212080" cy="4572000"/>
+          </a:xfrm>
+          <a:prstGeom prst="rect">
+            <a:avLst/>
+          </a:prstGeom>
+          <a:noFill/>
+        </p:spPr>
+        <p:txBody>
+          <a:bodyPr wrap="square">
+            <a:spAutoFit/>
+          </a:bodyPr>
+          <a:lstStyle/>
+          <a:p>
+            <a:pPr>
+              <a:spcAft>
+                <a:spcPts val="700"/>
+              </a:spcAft>
+            </a:pPr>
+            <a:r>
+              <a:rPr sz="1400" b="1">
+                <a:solidFill>
+                  <a:srgbClr val="039855"/>
+                </a:solidFill>
+              </a:rPr>
+              <a:t>▸  </a:t>
+            </a:r>
+            <a:r>
+              <a:rPr sz="1400" b="1">
+                <a:solidFill>
+                  <a:srgbClr val="15241C"/>
+                </a:solidFill>
+                <a:latin typeface="Calibri"/>
+              </a:rPr>
+              <a:t>7.</a:t>
+            </a:r>
+            <a:r>
+              <a:rPr sz="1400" b="0">
+                <a:solidFill>
+                  <a:srgbClr val="15241C"/>
+                </a:solidFill>
+                <a:latin typeface="Calibri"/>
+              </a:rPr>
+              <a:t> Validasi silang 5-fold.</a:t>
+            </a:r>
+          </a:p>
+          <a:p>
+            <a:pPr>
+              <a:spcAft>
+                <a:spcPts val="700"/>
+              </a:spcAft>
+            </a:pPr>
+            <a:r>
+              <a:rPr sz="1400" b="1">
+                <a:solidFill>
+                  <a:srgbClr val="039855"/>
+                </a:solidFill>
+              </a:rPr>
+              <a:t>▸  </a:t>
+            </a:r>
+            <a:r>
+              <a:rPr sz="1400" b="1">
+                <a:solidFill>
+                  <a:srgbClr val="15241C"/>
+                </a:solidFill>
+                <a:latin typeface="Calibri"/>
+              </a:rPr>
+              <a:t>8.</a:t>
+            </a:r>
+            <a:r>
+              <a:rPr sz="1400" b="0">
+                <a:solidFill>
+                  <a:srgbClr val="15241C"/>
+                </a:solidFill>
+                <a:latin typeface="Calibri"/>
+              </a:rPr>
+              <a:t> Evaluasi di data uji (akurasi, F1, confusion matrix).</a:t>
+            </a:r>
+          </a:p>
+          <a:p>
+            <a:pPr>
+              <a:spcAft>
+                <a:spcPts val="700"/>
+              </a:spcAft>
+            </a:pPr>
+            <a:r>
+              <a:rPr sz="1400" b="1">
+                <a:solidFill>
+                  <a:srgbClr val="039855"/>
+                </a:solidFill>
+              </a:rPr>
+              <a:t>▸  </a:t>
+            </a:r>
+            <a:r>
+              <a:rPr sz="1400" b="1">
+                <a:solidFill>
+                  <a:srgbClr val="15241C"/>
+                </a:solidFill>
+                <a:latin typeface="Calibri"/>
+              </a:rPr>
+              <a:t>9.</a:t>
+            </a:r>
+            <a:r>
+              <a:rPr sz="1400" b="0">
+                <a:solidFill>
+                  <a:srgbClr val="15241C"/>
+                </a:solidFill>
+                <a:latin typeface="Calibri"/>
+              </a:rPr>
+              <a:t> Analisis kepentingan fitur.</a:t>
+            </a:r>
+          </a:p>
+          <a:p>
+            <a:pPr>
+              <a:spcAft>
+                <a:spcPts val="700"/>
+              </a:spcAft>
+            </a:pPr>
+            <a:r>
+              <a:rPr sz="1400" b="1">
+                <a:solidFill>
+                  <a:srgbClr val="039855"/>
+                </a:solidFill>
+              </a:rPr>
+              <a:t>▸  </a:t>
+            </a:r>
+            <a:r>
+              <a:rPr sz="1400" b="1">
+                <a:solidFill>
+                  <a:srgbClr val="15241C"/>
+                </a:solidFill>
+                <a:latin typeface="Calibri"/>
+              </a:rPr>
+              <a:t>10.</a:t>
+            </a:r>
+            <a:r>
+              <a:rPr sz="1400" b="0">
+                <a:solidFill>
+                  <a:srgbClr val="15241C"/>
+                </a:solidFill>
+                <a:latin typeface="Calibri"/>
+              </a:rPr>
+              <a:t> Konversi model ke </a:t>
+            </a:r>
+            <a:r>
+              <a:rPr sz="1400" b="1">
+                <a:solidFill>
+                  <a:srgbClr val="15241C"/>
+                </a:solidFill>
+                <a:latin typeface="Calibri"/>
+              </a:rPr>
+              <a:t>ONNX</a:t>
+            </a:r>
+            <a:r>
+              <a:rPr sz="1400" b="0">
+                <a:solidFill>
+                  <a:srgbClr val="15241C"/>
+                </a:solidFill>
+                <a:latin typeface="Calibri"/>
+              </a:rPr>
+              <a:t>.</a:t>
+            </a:r>
+          </a:p>
+          <a:p>
+            <a:pPr>
+              <a:spcAft>
+                <a:spcPts val="700"/>
+              </a:spcAft>
+            </a:pPr>
+            <a:r>
+              <a:rPr sz="1400" b="1">
+                <a:solidFill>
+                  <a:srgbClr val="039855"/>
+                </a:solidFill>
+              </a:rPr>
+              <a:t>▸  </a:t>
+            </a:r>
+            <a:r>
+              <a:rPr sz="1400" b="1">
+                <a:solidFill>
+                  <a:srgbClr val="15241C"/>
+                </a:solidFill>
+                <a:latin typeface="Calibri"/>
+              </a:rPr>
+              <a:t>11.</a:t>
+            </a:r>
+            <a:r>
+              <a:rPr sz="1400" b="0">
+                <a:solidFill>
+                  <a:srgbClr val="15241C"/>
+                </a:solidFill>
+                <a:latin typeface="Calibri"/>
+              </a:rPr>
+              <a:t> Integrasi ke web React (Web Worker).</a:t>
             </a:r>
           </a:p>
         </p:txBody>
